--- a/assets/结构图/转化漏斗-001/example.pptx
+++ b/assets/结构图/转化漏斗-001/example.pptx
@@ -2,13 +2,16 @@
 <file path=ppt/presentation.xml><?xml version="1.0" encoding="utf-8"?>
 <p:presentation xmlns:p="http://schemas.openxmlformats.org/presentationml/2006/main">
   <p:sldMasterIdLst>
-    <p:sldMasterId xmlns:r="http://schemas.openxmlformats.org/officeDocument/2006/relationships" id="2147483648" r:id="R33f5fa6dee9a4a0e"/>
+    <p:sldMasterId xmlns:r="http://schemas.openxmlformats.org/officeDocument/2006/relationships" id="2147483648" r:id="R79aab0b1519c4f8c"/>
   </p:sldMasterIdLst>
   <p:notesMasterIdLst>
-    <p:notesMasterId xmlns:r="http://schemas.openxmlformats.org/officeDocument/2006/relationships" r:id="R9c099d3b832f428c"/>
+    <p:notesMasterId xmlns:r="http://schemas.openxmlformats.org/officeDocument/2006/relationships" r:id="R4e38f34a5fb142bf"/>
   </p:notesMasterIdLst>
   <p:sldIdLst>
-    <p:sldId xmlns:r="http://schemas.openxmlformats.org/officeDocument/2006/relationships" id="256" r:id="Rdb468069582c4f59"/>
+    <p:sldId xmlns:r="http://schemas.openxmlformats.org/officeDocument/2006/relationships" id="256" r:id="R1358f683946048cf"/>
+    <p:sldId xmlns:r="http://schemas.openxmlformats.org/officeDocument/2006/relationships" id="257" r:id="R7395ecc2d6034cf9"/>
+    <p:sldId xmlns:r="http://schemas.openxmlformats.org/officeDocument/2006/relationships" id="258" r:id="Rfb3cd35d5b744de4"/>
+    <p:sldId xmlns:r="http://schemas.openxmlformats.org/officeDocument/2006/relationships" id="259" r:id="Rf93e9138f9d74040"/>
   </p:sldIdLst>
   <p:sldSz cx="12192000" cy="6858000"/>
   <p:notesSz cx="6858000" cy="9144000"/>
@@ -468,6 +471,204 @@
 </p:notes>
 </file>
 
+<file path=ppt/notesSlides/notesSlide2.xml><?xml version="1.0" encoding="utf-8"?>
+<p:notes xmlns:p="http://schemas.openxmlformats.org/presentationml/2006/main">
+  <p:cSld>
+    <p:spTree>
+      <p:nvGrpSpPr>
+        <p:cNvPr id="1" name=""/>
+        <p:cNvGrpSpPr/>
+        <p:nvPr/>
+      </p:nvGrpSpPr>
+      <p:grpSpPr>
+        <a:xfrm xmlns:a="http://schemas.openxmlformats.org/drawingml/2006/main"/>
+      </p:grpSpPr>
+      <p:sp>
+        <p:nvSpPr>
+          <p:cNvPr id="2" name="Slide Image Placeholder 1"/>
+          <p:cNvSpPr>
+            <a:spLocks xmlns:a="http://schemas.openxmlformats.org/drawingml/2006/main" noGrp="1"/>
+          </p:cNvSpPr>
+          <p:nvPr>
+            <p:ph type="sldImg" idx="0"/>
+          </p:nvPr>
+        </p:nvSpPr>
+        <p:spPr/>
+      </p:sp>
+      <p:sp>
+        <p:nvSpPr>
+          <p:cNvPr id="3" name="Notes Placeholder 2"/>
+          <p:cNvSpPr>
+            <a:spLocks xmlns:a="http://schemas.openxmlformats.org/drawingml/2006/main" noGrp="1"/>
+          </p:cNvSpPr>
+          <p:nvPr>
+            <p:ph type="body" idx="1"/>
+          </p:nvPr>
+        </p:nvSpPr>
+        <p:spPr/>
+        <p:txBody>
+          <a:bodyPr xmlns:a="http://schemas.openxmlformats.org/drawingml/2006/main"/>
+          <a:lstStyle xmlns:a="http://schemas.openxmlformats.org/drawingml/2006/main"/>
+          <a:p xmlns:a="http://schemas.openxmlformats.org/drawingml/2006/main"/>
+        </p:txBody>
+      </p:sp>
+      <p:sp>
+        <p:nvSpPr>
+          <p:cNvPr id="4" name="Slide Number Placeholder 3"/>
+          <p:cNvSpPr>
+            <a:spLocks xmlns:a="http://schemas.openxmlformats.org/drawingml/2006/main" noGrp="1"/>
+          </p:cNvSpPr>
+          <p:nvPr>
+            <p:ph type="sldNum" idx="5"/>
+          </p:nvPr>
+        </p:nvSpPr>
+        <p:spPr/>
+        <p:txBody>
+          <a:bodyPr xmlns:a="http://schemas.openxmlformats.org/drawingml/2006/main"/>
+          <a:lstStyle xmlns:a="http://schemas.openxmlformats.org/drawingml/2006/main"/>
+          <a:p xmlns:a="http://schemas.openxmlformats.org/drawingml/2006/main"/>
+        </p:txBody>
+      </p:sp>
+    </p:spTree>
+  </p:cSld>
+  <p:clrMapOvr>
+    <a:masterClrMapping xmlns:a="http://schemas.openxmlformats.org/drawingml/2006/main"/>
+  </p:clrMapOvr>
+</p:notes>
+</file>
+
+<file path=ppt/notesSlides/notesSlide3.xml><?xml version="1.0" encoding="utf-8"?>
+<p:notes xmlns:p="http://schemas.openxmlformats.org/presentationml/2006/main">
+  <p:cSld>
+    <p:spTree>
+      <p:nvGrpSpPr>
+        <p:cNvPr id="1" name=""/>
+        <p:cNvGrpSpPr/>
+        <p:nvPr/>
+      </p:nvGrpSpPr>
+      <p:grpSpPr>
+        <a:xfrm xmlns:a="http://schemas.openxmlformats.org/drawingml/2006/main"/>
+      </p:grpSpPr>
+      <p:sp>
+        <p:nvSpPr>
+          <p:cNvPr id="2" name="Slide Image Placeholder 1"/>
+          <p:cNvSpPr>
+            <a:spLocks xmlns:a="http://schemas.openxmlformats.org/drawingml/2006/main" noGrp="1"/>
+          </p:cNvSpPr>
+          <p:nvPr>
+            <p:ph type="sldImg" idx="0"/>
+          </p:nvPr>
+        </p:nvSpPr>
+        <p:spPr/>
+      </p:sp>
+      <p:sp>
+        <p:nvSpPr>
+          <p:cNvPr id="3" name="Notes Placeholder 2"/>
+          <p:cNvSpPr>
+            <a:spLocks xmlns:a="http://schemas.openxmlformats.org/drawingml/2006/main" noGrp="1"/>
+          </p:cNvSpPr>
+          <p:nvPr>
+            <p:ph type="body" idx="1"/>
+          </p:nvPr>
+        </p:nvSpPr>
+        <p:spPr/>
+        <p:txBody>
+          <a:bodyPr xmlns:a="http://schemas.openxmlformats.org/drawingml/2006/main"/>
+          <a:lstStyle xmlns:a="http://schemas.openxmlformats.org/drawingml/2006/main"/>
+          <a:p xmlns:a="http://schemas.openxmlformats.org/drawingml/2006/main"/>
+        </p:txBody>
+      </p:sp>
+      <p:sp>
+        <p:nvSpPr>
+          <p:cNvPr id="4" name="Slide Number Placeholder 3"/>
+          <p:cNvSpPr>
+            <a:spLocks xmlns:a="http://schemas.openxmlformats.org/drawingml/2006/main" noGrp="1"/>
+          </p:cNvSpPr>
+          <p:nvPr>
+            <p:ph type="sldNum" idx="5"/>
+          </p:nvPr>
+        </p:nvSpPr>
+        <p:spPr/>
+        <p:txBody>
+          <a:bodyPr xmlns:a="http://schemas.openxmlformats.org/drawingml/2006/main"/>
+          <a:lstStyle xmlns:a="http://schemas.openxmlformats.org/drawingml/2006/main"/>
+          <a:p xmlns:a="http://schemas.openxmlformats.org/drawingml/2006/main"/>
+        </p:txBody>
+      </p:sp>
+    </p:spTree>
+  </p:cSld>
+  <p:clrMapOvr>
+    <a:masterClrMapping xmlns:a="http://schemas.openxmlformats.org/drawingml/2006/main"/>
+  </p:clrMapOvr>
+</p:notes>
+</file>
+
+<file path=ppt/notesSlides/notesSlide4.xml><?xml version="1.0" encoding="utf-8"?>
+<p:notes xmlns:p="http://schemas.openxmlformats.org/presentationml/2006/main">
+  <p:cSld>
+    <p:spTree>
+      <p:nvGrpSpPr>
+        <p:cNvPr id="1" name=""/>
+        <p:cNvGrpSpPr/>
+        <p:nvPr/>
+      </p:nvGrpSpPr>
+      <p:grpSpPr>
+        <a:xfrm xmlns:a="http://schemas.openxmlformats.org/drawingml/2006/main"/>
+      </p:grpSpPr>
+      <p:sp>
+        <p:nvSpPr>
+          <p:cNvPr id="2" name="Slide Image Placeholder 1"/>
+          <p:cNvSpPr>
+            <a:spLocks xmlns:a="http://schemas.openxmlformats.org/drawingml/2006/main" noGrp="1"/>
+          </p:cNvSpPr>
+          <p:nvPr>
+            <p:ph type="sldImg" idx="0"/>
+          </p:nvPr>
+        </p:nvSpPr>
+        <p:spPr/>
+      </p:sp>
+      <p:sp>
+        <p:nvSpPr>
+          <p:cNvPr id="3" name="Notes Placeholder 2"/>
+          <p:cNvSpPr>
+            <a:spLocks xmlns:a="http://schemas.openxmlformats.org/drawingml/2006/main" noGrp="1"/>
+          </p:cNvSpPr>
+          <p:nvPr>
+            <p:ph type="body" idx="1"/>
+          </p:nvPr>
+        </p:nvSpPr>
+        <p:spPr/>
+        <p:txBody>
+          <a:bodyPr xmlns:a="http://schemas.openxmlformats.org/drawingml/2006/main"/>
+          <a:lstStyle xmlns:a="http://schemas.openxmlformats.org/drawingml/2006/main"/>
+          <a:p xmlns:a="http://schemas.openxmlformats.org/drawingml/2006/main"/>
+        </p:txBody>
+      </p:sp>
+      <p:sp>
+        <p:nvSpPr>
+          <p:cNvPr id="4" name="Slide Number Placeholder 3"/>
+          <p:cNvSpPr>
+            <a:spLocks xmlns:a="http://schemas.openxmlformats.org/drawingml/2006/main" noGrp="1"/>
+          </p:cNvSpPr>
+          <p:nvPr>
+            <p:ph type="sldNum" idx="5"/>
+          </p:nvPr>
+        </p:nvSpPr>
+        <p:spPr/>
+        <p:txBody>
+          <a:bodyPr xmlns:a="http://schemas.openxmlformats.org/drawingml/2006/main"/>
+          <a:lstStyle xmlns:a="http://schemas.openxmlformats.org/drawingml/2006/main"/>
+          <a:p xmlns:a="http://schemas.openxmlformats.org/drawingml/2006/main"/>
+        </p:txBody>
+      </p:sp>
+    </p:spTree>
+  </p:cSld>
+  <p:clrMapOvr>
+    <a:masterClrMapping xmlns:a="http://schemas.openxmlformats.org/drawingml/2006/main"/>
+  </p:clrMapOvr>
+</p:notes>
+</file>
+
 <file path=ppt/slideLayouts/slideLayout1.xml><?xml version="1.0" encoding="utf-8"?>
 <p:sldLayout xmlns:p="http://schemas.openxmlformats.org/presentationml/2006/main" type="title">
   <p:cSld name="Title Slide">
@@ -506,7 +707,7 @@
   </p:cSld>
   <p:clrMap bg1="lt1" tx1="dk1" bg2="lt2" tx2="dk2" accent1="accent1" accent2="accent2" accent3="accent3" accent4="accent4" accent5="accent5" accent6="accent6" hlink="hlink" folHlink="folHlink"/>
   <p:sldLayoutIdLst>
-    <p:sldLayoutId xmlns:r="http://schemas.openxmlformats.org/officeDocument/2006/relationships" id="2147483649" r:id="R7bcf02751a9e42ec"/>
+    <p:sldLayoutId xmlns:r="http://schemas.openxmlformats.org/officeDocument/2006/relationships" id="2147483649" r:id="R9b232ba322e04b30"/>
   </p:sldLayoutIdLst>
   <p:txStyles>
     <p:titleStyle>
@@ -1054,10 +1255,10 @@
       </p:grpSpPr>
       <p:sp>
         <p:nvSpPr>
-          <p:cNvPr id="39" name="">
-            <a:extLst xmlns:a="http://schemas.openxmlformats.org/drawingml/2006/main">
-              <a:ext uri="{FF2B5EF4-FFF2-40B4-BE49-F238E27FC236}">
-                <a16:creationId xmlns:a16="http://schemas.microsoft.com/office/drawing/2014/main" id="{5A69280B-5179-4A88-910B-C671BB0F812E}"/>
+          <p:cNvPr id="30" name="">
+            <a:extLst xmlns:a="http://schemas.openxmlformats.org/drawingml/2006/main">
+              <a:ext uri="{FF2B5EF4-FFF2-40B4-BE49-F238E27FC236}">
+                <a16:creationId xmlns:a16="http://schemas.microsoft.com/office/drawing/2014/main" id="{A130C149-7041-43D1-9535-5B4B84575FE2}"/>
               </a:ext>
             </a:extLst>
           </p:cNvPr>
@@ -1115,7 +1316,7 @@
           <p:cNvPr id="2" name="">
             <a:extLst xmlns:a="http://schemas.openxmlformats.org/drawingml/2006/main">
               <a:ext uri="{FF2B5EF4-FFF2-40B4-BE49-F238E27FC236}">
-                <a16:creationId xmlns:a16="http://schemas.microsoft.com/office/drawing/2014/main" id="{9231A195-F80A-43B9-A9A6-C2AB1E016192}"/>
+                <a16:creationId xmlns:a16="http://schemas.microsoft.com/office/drawing/2014/main" id="{9848F911-6E65-4DBA-835E-E14E9AF5276E}"/>
               </a:ext>
             </a:extLst>
           </p:cNvPr>
@@ -1173,7 +1374,7 @@
           <p:cNvPr id="3" name="PPAGENT_QA|parent=funnel-stage-0|domains=funnel-shape,funnel-content">
             <a:extLst xmlns:a="http://schemas.openxmlformats.org/drawingml/2006/main">
               <a:ext uri="{FF2B5EF4-FFF2-40B4-BE49-F238E27FC236}">
-                <a16:creationId xmlns:a16="http://schemas.microsoft.com/office/drawing/2014/main" id="{36BF889E-75F6-4965-9FA5-D659360DD472}"/>
+                <a16:creationId xmlns:a16="http://schemas.microsoft.com/office/drawing/2014/main" id="{7A2F3617-C296-49EA-9989-007261F3D841}"/>
               </a:ext>
             </a:extLst>
           </p:cNvPr>
@@ -1185,7 +1386,7 @@
         <p:spPr>
           <a:xfrm xmlns:a="http://schemas.openxmlformats.org/drawingml/2006/main" flipV="1">
             <a:off x="685800" y="1524000"/>
-            <a:ext cx="5334000" cy="1000125"/>
+            <a:ext cx="5334000" cy="1358900"/>
           </a:xfrm>
           <a:prstGeom xmlns:a="http://schemas.openxmlformats.org/drawingml/2006/main" prst="trapezoid">
             <a:avLst/>
@@ -1212,7 +1413,7 @@
           <p:cNvPr id="4" name="PPAGENT_QA|parent=funnel-face-0|domains=funnel-face">
             <a:extLst xmlns:a="http://schemas.openxmlformats.org/drawingml/2006/main">
               <a:ext uri="{FF2B5EF4-FFF2-40B4-BE49-F238E27FC236}">
-                <a16:creationId xmlns:a16="http://schemas.microsoft.com/office/drawing/2014/main" id="{EEA82F59-CB1B-456E-A403-6774D648A6F6}"/>
+                <a16:creationId xmlns:a16="http://schemas.microsoft.com/office/drawing/2014/main" id="{3764A00C-9705-448E-90B8-FD3D6D390D45}"/>
               </a:ext>
             </a:extLst>
           </p:cNvPr>
@@ -1245,7 +1446,7 @@
           <p:cNvPr id="5" name="PPAGENT_QA|within=funnel-stage-0|role=rate">
             <a:extLst xmlns:a="http://schemas.openxmlformats.org/drawingml/2006/main">
               <a:ext uri="{FF2B5EF4-FFF2-40B4-BE49-F238E27FC236}">
-                <a16:creationId xmlns:a16="http://schemas.microsoft.com/office/drawing/2014/main" id="{90246FD9-7A3B-4FA4-BF90-DEFEBA0DDDC1}"/>
+                <a16:creationId xmlns:a16="http://schemas.microsoft.com/office/drawing/2014/main" id="{F5255F6D-4511-4317-A00E-CF0D39F13C94}"/>
               </a:ext>
             </a:extLst>
           </p:cNvPr>
@@ -1303,7 +1504,7 @@
           <p:cNvPr id="6" name="PPAGENT_QA|parent=funnel-label-0|domains=funnel-label">
             <a:extLst xmlns:a="http://schemas.openxmlformats.org/drawingml/2006/main">
               <a:ext uri="{FF2B5EF4-FFF2-40B4-BE49-F238E27FC236}">
-                <a16:creationId xmlns:a16="http://schemas.microsoft.com/office/drawing/2014/main" id="{6392D2B4-2F03-40BE-B4D4-3EC87BEBCD62}"/>
+                <a16:creationId xmlns:a16="http://schemas.microsoft.com/office/drawing/2014/main" id="{4018BF11-AD78-4513-AFC1-B8DF59524B8A}"/>
               </a:ext>
             </a:extLst>
           </p:cNvPr>
@@ -1361,7 +1562,7 @@
           <p:cNvPr id="7" name="PPAGENT_QA|parent=funnel-note-0|domains=funnel-note,funnel-content">
             <a:extLst xmlns:a="http://schemas.openxmlformats.org/drawingml/2006/main">
               <a:ext uri="{FF2B5EF4-FFF2-40B4-BE49-F238E27FC236}">
-                <a16:creationId xmlns:a16="http://schemas.microsoft.com/office/drawing/2014/main" id="{50DD52D6-FB1D-4ECF-81F5-7C6A24823CA2}"/>
+                <a16:creationId xmlns:a16="http://schemas.microsoft.com/office/drawing/2014/main" id="{6D76EB3D-C11F-4146-883F-AC5848A8E4F2}"/>
               </a:ext>
             </a:extLst>
           </p:cNvPr>
@@ -1373,11 +1574,11 @@
         <p:spPr>
           <a:xfrm xmlns:a="http://schemas.openxmlformats.org/drawingml/2006/main">
             <a:off x="6915150" y="1533525"/>
-            <a:ext cx="4552950" cy="981075"/>
+            <a:ext cx="4552950" cy="1339850"/>
           </a:xfrm>
           <a:prstGeom xmlns:a="http://schemas.openxmlformats.org/drawingml/2006/main" prst="roundRect">
             <a:avLst>
-              <a:gd name="adj" fmla="val 11650"/>
+              <a:gd name="adj" fmla="val 8531"/>
             </a:avLst>
           </a:prstGeom>
           <a:solidFill xmlns:a="http://schemas.openxmlformats.org/drawingml/2006/main">
@@ -1396,7 +1597,7 @@
           <p:cNvPr id="8" name="">
             <a:extLst xmlns:a="http://schemas.openxmlformats.org/drawingml/2006/main">
               <a:ext uri="{FF2B5EF4-FFF2-40B4-BE49-F238E27FC236}">
-                <a16:creationId xmlns:a16="http://schemas.microsoft.com/office/drawing/2014/main" id="{840BEFA2-AB9A-475D-BA80-2FC963D0732F}"/>
+                <a16:creationId xmlns:a16="http://schemas.microsoft.com/office/drawing/2014/main" id="{3F8DE4DA-B83F-4572-BF1A-4CEB40B380FA}"/>
               </a:ext>
             </a:extLst>
           </p:cNvPr>
@@ -1408,7 +1609,7 @@
         <p:spPr>
           <a:xfrm xmlns:a="http://schemas.openxmlformats.org/drawingml/2006/main">
             <a:off x="6915150" y="1533525"/>
-            <a:ext cx="57150" cy="981075"/>
+            <a:ext cx="57150" cy="1339850"/>
           </a:xfrm>
           <a:prstGeom xmlns:a="http://schemas.openxmlformats.org/drawingml/2006/main" prst="roundRect">
             <a:avLst>
@@ -1429,7 +1630,7 @@
           <p:cNvPr id="9" name="PPAGENT_QA|within=funnel-note-0|role=title">
             <a:extLst xmlns:a="http://schemas.openxmlformats.org/drawingml/2006/main">
               <a:ext uri="{FF2B5EF4-FFF2-40B4-BE49-F238E27FC236}">
-                <a16:creationId xmlns:a16="http://schemas.microsoft.com/office/drawing/2014/main" id="{9E498609-53AA-4EEA-9762-CFD84EC29AEE}"/>
+                <a16:creationId xmlns:a16="http://schemas.microsoft.com/office/drawing/2014/main" id="{4948DDC5-417F-479E-A8D5-9B3B9ABD48A2}"/>
               </a:ext>
             </a:extLst>
           </p:cNvPr>
@@ -1487,7 +1688,7 @@
           <p:cNvPr id="10" name="PPAGENT_QA|within=funnel-note-0|role=body">
             <a:extLst xmlns:a="http://schemas.openxmlformats.org/drawingml/2006/main">
               <a:ext uri="{FF2B5EF4-FFF2-40B4-BE49-F238E27FC236}">
-                <a16:creationId xmlns:a16="http://schemas.microsoft.com/office/drawing/2014/main" id="{DC08DCDD-B23F-4CBC-A969-7194B7F883DA}"/>
+                <a16:creationId xmlns:a16="http://schemas.microsoft.com/office/drawing/2014/main" id="{41FB842A-C19B-42E3-AE69-D097CBE69A95}"/>
               </a:ext>
             </a:extLst>
           </p:cNvPr>
@@ -1499,7 +1700,7 @@
         <p:spPr>
           <a:xfrm xmlns:a="http://schemas.openxmlformats.org/drawingml/2006/main">
             <a:off x="7162800" y="1895475"/>
-            <a:ext cx="4000500" cy="581025"/>
+            <a:ext cx="4000500" cy="939800"/>
           </a:xfrm>
           <a:prstGeom xmlns:a="http://schemas.openxmlformats.org/drawingml/2006/main" prst="rect">
             <a:avLst/>
@@ -1535,7 +1736,7 @@
                 <a:ea typeface="Microsoft YaHei"/>
                 <a:cs typeface="Microsoft YaHei"/>
               </a:rPr>
-              <a:t>原始信息完整进入处理流程，保留来源锚点</a:t>
+              <a:t>原始信息完整进入流程</a:t>
             </a:r>
           </a:p>
         </p:txBody>
@@ -1545,7 +1746,7 @@
           <p:cNvPr id="11" name="PPAGENT_CONNECTOR|from=funnel-stage-0|fromSide=right|to=funnel-note-0|toSide=left">
             <a:extLst xmlns:a="http://schemas.openxmlformats.org/drawingml/2006/main">
               <a:ext uri="{FF2B5EF4-FFF2-40B4-BE49-F238E27FC236}">
-                <a16:creationId xmlns:a16="http://schemas.microsoft.com/office/drawing/2014/main" id="{A0F18862-EA45-421D-920E-2A208894BDC8}"/>
+                <a16:creationId xmlns:a16="http://schemas.microsoft.com/office/drawing/2014/main" id="{C4E51D74-1307-40C6-B97A-24666323B76B}"/>
               </a:ext>
             </a:extLst>
           </p:cNvPr>
@@ -1556,7 +1757,7 @@
         </p:nvSpPr>
         <p:spPr>
           <a:xfrm xmlns:a="http://schemas.openxmlformats.org/drawingml/2006/main" flipH="0" flipV="0">
-            <a:off x="6019800" y="2024063"/>
+            <a:off x="6019800" y="2203450"/>
             <a:ext cx="895350" cy="0"/>
           </a:xfrm>
           <a:prstGeom xmlns:a="http://schemas.openxmlformats.org/drawingml/2006/main" prst="line">
@@ -1576,7 +1777,7 @@
           <p:cNvPr id="12" name="PPAGENT_QA|parent=funnel-stage-1|domains=funnel-shape,funnel-content">
             <a:extLst xmlns:a="http://schemas.openxmlformats.org/drawingml/2006/main">
               <a:ext uri="{FF2B5EF4-FFF2-40B4-BE49-F238E27FC236}">
-                <a16:creationId xmlns:a16="http://schemas.microsoft.com/office/drawing/2014/main" id="{4E21BC14-40D4-4924-99E9-EFC33898F2CB}"/>
+                <a16:creationId xmlns:a16="http://schemas.microsoft.com/office/drawing/2014/main" id="{1DB9A164-2CD1-4D00-8549-47A1ECDE5D3E}"/>
               </a:ext>
             </a:extLst>
           </p:cNvPr>
@@ -1587,8 +1788,8 @@
         </p:nvSpPr>
         <p:spPr>
           <a:xfrm xmlns:a="http://schemas.openxmlformats.org/drawingml/2006/main" flipV="1">
-            <a:off x="1209675" y="2600325"/>
-            <a:ext cx="4286250" cy="1000125"/>
+            <a:off x="1471613" y="2959100"/>
+            <a:ext cx="3762375" cy="1358900"/>
           </a:xfrm>
           <a:prstGeom xmlns:a="http://schemas.openxmlformats.org/drawingml/2006/main" prst="trapezoid">
             <a:avLst/>
@@ -1615,19 +1816,19 @@
           <p:cNvPr id="13" name="PPAGENT_QA|parent=funnel-face-1|domains=funnel-face">
             <a:extLst xmlns:a="http://schemas.openxmlformats.org/drawingml/2006/main">
               <a:ext uri="{FF2B5EF4-FFF2-40B4-BE49-F238E27FC236}">
-                <a16:creationId xmlns:a16="http://schemas.microsoft.com/office/drawing/2014/main" id="{783D9F70-BACA-4E77-91F7-F940FC2B9C89}"/>
-              </a:ext>
-            </a:extLst>
-          </p:cNvPr>
-          <p:cNvSpPr>
-            <a:spLocks xmlns:a="http://schemas.openxmlformats.org/drawingml/2006/main" noGrp="1"/>
-          </p:cNvSpPr>
-          <p:nvPr/>
-        </p:nvSpPr>
-        <p:spPr>
-          <a:xfrm xmlns:a="http://schemas.openxmlformats.org/drawingml/2006/main">
-            <a:off x="1209675" y="2533650"/>
-            <a:ext cx="4286250" cy="228600"/>
+                <a16:creationId xmlns:a16="http://schemas.microsoft.com/office/drawing/2014/main" id="{2BDC55A4-E2C7-4ED6-8229-FBC37997FD0E}"/>
+              </a:ext>
+            </a:extLst>
+          </p:cNvPr>
+          <p:cNvSpPr>
+            <a:spLocks xmlns:a="http://schemas.openxmlformats.org/drawingml/2006/main" noGrp="1"/>
+          </p:cNvSpPr>
+          <p:nvPr/>
+        </p:nvSpPr>
+        <p:spPr>
+          <a:xfrm xmlns:a="http://schemas.openxmlformats.org/drawingml/2006/main">
+            <a:off x="1471613" y="2892425"/>
+            <a:ext cx="3762375" cy="228600"/>
           </a:xfrm>
           <a:prstGeom xmlns:a="http://schemas.openxmlformats.org/drawingml/2006/main" prst="ellipse">
             <a:avLst/>
@@ -1648,19 +1849,19 @@
           <p:cNvPr id="14" name="PPAGENT_QA|within=funnel-stage-1|role=rate">
             <a:extLst xmlns:a="http://schemas.openxmlformats.org/drawingml/2006/main">
               <a:ext uri="{FF2B5EF4-FFF2-40B4-BE49-F238E27FC236}">
-                <a16:creationId xmlns:a16="http://schemas.microsoft.com/office/drawing/2014/main" id="{5AAA7B94-1A80-403F-86D4-90D26452172B}"/>
-              </a:ext>
-            </a:extLst>
-          </p:cNvPr>
-          <p:cNvSpPr>
-            <a:spLocks xmlns:a="http://schemas.openxmlformats.org/drawingml/2006/main" noGrp="1"/>
-          </p:cNvSpPr>
-          <p:nvPr/>
-        </p:nvSpPr>
-        <p:spPr>
-          <a:xfrm xmlns:a="http://schemas.openxmlformats.org/drawingml/2006/main">
-            <a:off x="1362075" y="2695575"/>
-            <a:ext cx="3981450" cy="276225"/>
+                <a16:creationId xmlns:a16="http://schemas.microsoft.com/office/drawing/2014/main" id="{97CE1EF6-105F-4D10-B95E-D2A2816335FC}"/>
+              </a:ext>
+            </a:extLst>
+          </p:cNvPr>
+          <p:cNvSpPr>
+            <a:spLocks xmlns:a="http://schemas.openxmlformats.org/drawingml/2006/main" noGrp="1"/>
+          </p:cNvSpPr>
+          <p:nvPr/>
+        </p:nvSpPr>
+        <p:spPr>
+          <a:xfrm xmlns:a="http://schemas.openxmlformats.org/drawingml/2006/main">
+            <a:off x="1624013" y="3054350"/>
+            <a:ext cx="3457575" cy="276225"/>
           </a:xfrm>
           <a:prstGeom xmlns:a="http://schemas.openxmlformats.org/drawingml/2006/main" prst="rect">
             <a:avLst/>
@@ -1696,7 +1897,7 @@
                 <a:ea typeface="Microsoft YaHei"/>
                 <a:cs typeface="Microsoft YaHei"/>
               </a:rPr>
-              <a:t>78%</a:t>
+              <a:t>82%</a:t>
             </a:r>
           </a:p>
         </p:txBody>
@@ -1706,19 +1907,19 @@
           <p:cNvPr id="15" name="PPAGENT_QA|parent=funnel-label-1|domains=funnel-label">
             <a:extLst xmlns:a="http://schemas.openxmlformats.org/drawingml/2006/main">
               <a:ext uri="{FF2B5EF4-FFF2-40B4-BE49-F238E27FC236}">
-                <a16:creationId xmlns:a16="http://schemas.microsoft.com/office/drawing/2014/main" id="{96E04D7C-5114-4D71-A143-2835E326DE99}"/>
-              </a:ext>
-            </a:extLst>
-          </p:cNvPr>
-          <p:cNvSpPr>
-            <a:spLocks xmlns:a="http://schemas.openxmlformats.org/drawingml/2006/main" noGrp="1"/>
-          </p:cNvSpPr>
-          <p:nvPr/>
-        </p:nvSpPr>
-        <p:spPr>
-          <a:xfrm xmlns:a="http://schemas.openxmlformats.org/drawingml/2006/main">
-            <a:off x="1362075" y="2962275"/>
-            <a:ext cx="3981450" cy="295275"/>
+                <a16:creationId xmlns:a16="http://schemas.microsoft.com/office/drawing/2014/main" id="{1D133618-F660-4EFF-9F84-510829CDC68C}"/>
+              </a:ext>
+            </a:extLst>
+          </p:cNvPr>
+          <p:cNvSpPr>
+            <a:spLocks xmlns:a="http://schemas.openxmlformats.org/drawingml/2006/main" noGrp="1"/>
+          </p:cNvSpPr>
+          <p:nvPr/>
+        </p:nvSpPr>
+        <p:spPr>
+          <a:xfrm xmlns:a="http://schemas.openxmlformats.org/drawingml/2006/main">
+            <a:off x="1624013" y="3321050"/>
+            <a:ext cx="3457575" cy="295275"/>
           </a:xfrm>
           <a:prstGeom xmlns:a="http://schemas.openxmlformats.org/drawingml/2006/main" prst="rect">
             <a:avLst/>
@@ -1764,23 +1965,23 @@
           <p:cNvPr id="16" name="PPAGENT_QA|parent=funnel-note-1|domains=funnel-note,funnel-content">
             <a:extLst xmlns:a="http://schemas.openxmlformats.org/drawingml/2006/main">
               <a:ext uri="{FF2B5EF4-FFF2-40B4-BE49-F238E27FC236}">
-                <a16:creationId xmlns:a16="http://schemas.microsoft.com/office/drawing/2014/main" id="{9AFC4282-B232-46BD-A965-57039437F6F0}"/>
-              </a:ext>
-            </a:extLst>
-          </p:cNvPr>
-          <p:cNvSpPr>
-            <a:spLocks xmlns:a="http://schemas.openxmlformats.org/drawingml/2006/main" noGrp="1"/>
-          </p:cNvSpPr>
-          <p:nvPr/>
-        </p:nvSpPr>
-        <p:spPr>
-          <a:xfrm xmlns:a="http://schemas.openxmlformats.org/drawingml/2006/main">
-            <a:off x="6915150" y="2609850"/>
-            <a:ext cx="4552950" cy="981075"/>
+                <a16:creationId xmlns:a16="http://schemas.microsoft.com/office/drawing/2014/main" id="{E182A030-D092-4259-A434-60F30EC34E31}"/>
+              </a:ext>
+            </a:extLst>
+          </p:cNvPr>
+          <p:cNvSpPr>
+            <a:spLocks xmlns:a="http://schemas.openxmlformats.org/drawingml/2006/main" noGrp="1"/>
+          </p:cNvSpPr>
+          <p:nvPr/>
+        </p:nvSpPr>
+        <p:spPr>
+          <a:xfrm xmlns:a="http://schemas.openxmlformats.org/drawingml/2006/main">
+            <a:off x="6915150" y="2968625"/>
+            <a:ext cx="4552950" cy="1339850"/>
           </a:xfrm>
           <a:prstGeom xmlns:a="http://schemas.openxmlformats.org/drawingml/2006/main" prst="roundRect">
             <a:avLst>
-              <a:gd name="adj" fmla="val 11650"/>
+              <a:gd name="adj" fmla="val 8531"/>
             </a:avLst>
           </a:prstGeom>
           <a:solidFill xmlns:a="http://schemas.openxmlformats.org/drawingml/2006/main">
@@ -1799,19 +2000,19 @@
           <p:cNvPr id="17" name="">
             <a:extLst xmlns:a="http://schemas.openxmlformats.org/drawingml/2006/main">
               <a:ext uri="{FF2B5EF4-FFF2-40B4-BE49-F238E27FC236}">
-                <a16:creationId xmlns:a16="http://schemas.microsoft.com/office/drawing/2014/main" id="{10DDE492-FFCD-46F1-AC8D-17C179C69213}"/>
-              </a:ext>
-            </a:extLst>
-          </p:cNvPr>
-          <p:cNvSpPr>
-            <a:spLocks xmlns:a="http://schemas.openxmlformats.org/drawingml/2006/main" noGrp="1"/>
-          </p:cNvSpPr>
-          <p:nvPr/>
-        </p:nvSpPr>
-        <p:spPr>
-          <a:xfrm xmlns:a="http://schemas.openxmlformats.org/drawingml/2006/main">
-            <a:off x="6915150" y="2609850"/>
-            <a:ext cx="57150" cy="981075"/>
+                <a16:creationId xmlns:a16="http://schemas.microsoft.com/office/drawing/2014/main" id="{4F8421A8-03B9-4336-9DA1-894C788CB29E}"/>
+              </a:ext>
+            </a:extLst>
+          </p:cNvPr>
+          <p:cNvSpPr>
+            <a:spLocks xmlns:a="http://schemas.openxmlformats.org/drawingml/2006/main" noGrp="1"/>
+          </p:cNvSpPr>
+          <p:nvPr/>
+        </p:nvSpPr>
+        <p:spPr>
+          <a:xfrm xmlns:a="http://schemas.openxmlformats.org/drawingml/2006/main">
+            <a:off x="6915150" y="2968625"/>
+            <a:ext cx="57150" cy="1339850"/>
           </a:xfrm>
           <a:prstGeom xmlns:a="http://schemas.openxmlformats.org/drawingml/2006/main" prst="roundRect">
             <a:avLst>
@@ -1832,18 +2033,18 @@
           <p:cNvPr id="18" name="PPAGENT_QA|within=funnel-note-1|role=title">
             <a:extLst xmlns:a="http://schemas.openxmlformats.org/drawingml/2006/main">
               <a:ext uri="{FF2B5EF4-FFF2-40B4-BE49-F238E27FC236}">
-                <a16:creationId xmlns:a16="http://schemas.microsoft.com/office/drawing/2014/main" id="{41715796-1655-42EF-9172-740AA7F296DD}"/>
-              </a:ext>
-            </a:extLst>
-          </p:cNvPr>
-          <p:cNvSpPr>
-            <a:spLocks xmlns:a="http://schemas.openxmlformats.org/drawingml/2006/main" noGrp="1"/>
-          </p:cNvSpPr>
-          <p:nvPr/>
-        </p:nvSpPr>
-        <p:spPr>
-          <a:xfrm xmlns:a="http://schemas.openxmlformats.org/drawingml/2006/main">
-            <a:off x="7162800" y="2705100"/>
+                <a16:creationId xmlns:a16="http://schemas.microsoft.com/office/drawing/2014/main" id="{2BA59C7D-559C-4A50-B3BA-C8C41E9BFFE3}"/>
+              </a:ext>
+            </a:extLst>
+          </p:cNvPr>
+          <p:cNvSpPr>
+            <a:spLocks xmlns:a="http://schemas.openxmlformats.org/drawingml/2006/main" noGrp="1"/>
+          </p:cNvSpPr>
+          <p:nvPr/>
+        </p:nvSpPr>
+        <p:spPr>
+          <a:xfrm xmlns:a="http://schemas.openxmlformats.org/drawingml/2006/main">
+            <a:off x="7162800" y="3063875"/>
             <a:ext cx="4000500" cy="257175"/>
           </a:xfrm>
           <a:prstGeom xmlns:a="http://schemas.openxmlformats.org/drawingml/2006/main" prst="rect">
@@ -1890,19 +2091,19 @@
           <p:cNvPr id="19" name="PPAGENT_QA|within=funnel-note-1|role=body">
             <a:extLst xmlns:a="http://schemas.openxmlformats.org/drawingml/2006/main">
               <a:ext uri="{FF2B5EF4-FFF2-40B4-BE49-F238E27FC236}">
-                <a16:creationId xmlns:a16="http://schemas.microsoft.com/office/drawing/2014/main" id="{9CFB7CB3-D77D-4424-A68E-10980A1E23EB}"/>
-              </a:ext>
-            </a:extLst>
-          </p:cNvPr>
-          <p:cNvSpPr>
-            <a:spLocks xmlns:a="http://schemas.openxmlformats.org/drawingml/2006/main" noGrp="1"/>
-          </p:cNvSpPr>
-          <p:nvPr/>
-        </p:nvSpPr>
-        <p:spPr>
-          <a:xfrm xmlns:a="http://schemas.openxmlformats.org/drawingml/2006/main">
-            <a:off x="7162800" y="2971800"/>
-            <a:ext cx="4000500" cy="581025"/>
+                <a16:creationId xmlns:a16="http://schemas.microsoft.com/office/drawing/2014/main" id="{4381C2CB-022B-4C16-83EB-8B77AA4ABC34}"/>
+              </a:ext>
+            </a:extLst>
+          </p:cNvPr>
+          <p:cNvSpPr>
+            <a:spLocks xmlns:a="http://schemas.openxmlformats.org/drawingml/2006/main" noGrp="1"/>
+          </p:cNvSpPr>
+          <p:nvPr/>
+        </p:nvSpPr>
+        <p:spPr>
+          <a:xfrm xmlns:a="http://schemas.openxmlformats.org/drawingml/2006/main">
+            <a:off x="7162800" y="3330575"/>
+            <a:ext cx="4000500" cy="939800"/>
           </a:xfrm>
           <a:prstGeom xmlns:a="http://schemas.openxmlformats.org/drawingml/2006/main" prst="rect">
             <a:avLst/>
@@ -1938,7 +2139,7 @@
                 <a:ea typeface="Microsoft YaHei"/>
                 <a:cs typeface="Microsoft YaHei"/>
               </a:rPr>
-              <a:t>内容导演完成叙事拆页和页面职责判断</a:t>
+              <a:t>完成叙事拆页与职责判断</a:t>
             </a:r>
           </a:p>
         </p:txBody>
@@ -1948,7 +2149,7 @@
           <p:cNvPr id="20" name="PPAGENT_CONNECTOR|from=funnel-stage-1|fromSide=right|to=funnel-note-1|toSide=left">
             <a:extLst xmlns:a="http://schemas.openxmlformats.org/drawingml/2006/main">
               <a:ext uri="{FF2B5EF4-FFF2-40B4-BE49-F238E27FC236}">
-                <a16:creationId xmlns:a16="http://schemas.microsoft.com/office/drawing/2014/main" id="{CF1CAA01-C400-4D64-A914-56F1961E8EC9}"/>
+                <a16:creationId xmlns:a16="http://schemas.microsoft.com/office/drawing/2014/main" id="{FEBC7CAD-F94E-4225-AED2-1DDB9490C638}"/>
               </a:ext>
             </a:extLst>
           </p:cNvPr>
@@ -1959,8 +2160,8 @@
         </p:nvSpPr>
         <p:spPr>
           <a:xfrm xmlns:a="http://schemas.openxmlformats.org/drawingml/2006/main" flipH="0" flipV="0">
-            <a:off x="5495925" y="3100388"/>
-            <a:ext cx="1419225" cy="0"/>
+            <a:off x="5233988" y="3638550"/>
+            <a:ext cx="1681163" cy="0"/>
           </a:xfrm>
           <a:prstGeom xmlns:a="http://schemas.openxmlformats.org/drawingml/2006/main" prst="line">
             <a:avLst/>
@@ -1979,7 +2180,7 @@
           <p:cNvPr id="21" name="PPAGENT_QA|parent=funnel-stage-2|domains=funnel-shape,funnel-content">
             <a:extLst xmlns:a="http://schemas.openxmlformats.org/drawingml/2006/main">
               <a:ext uri="{FF2B5EF4-FFF2-40B4-BE49-F238E27FC236}">
-                <a16:creationId xmlns:a16="http://schemas.microsoft.com/office/drawing/2014/main" id="{9E7DADD8-1AC9-4FE9-8622-515AFD1859C8}"/>
+                <a16:creationId xmlns:a16="http://schemas.microsoft.com/office/drawing/2014/main" id="{E3FB4AF7-CFB5-4E80-8BA3-75CA3A96A27C}"/>
               </a:ext>
             </a:extLst>
           </p:cNvPr>
@@ -1990,8 +2191,8 @@
         </p:nvSpPr>
         <p:spPr>
           <a:xfrm xmlns:a="http://schemas.openxmlformats.org/drawingml/2006/main" flipV="1">
-            <a:off x="1733550" y="3676650"/>
-            <a:ext cx="3238500" cy="1000125"/>
+            <a:off x="2257425" y="4394200"/>
+            <a:ext cx="2190750" cy="1358900"/>
           </a:xfrm>
           <a:prstGeom xmlns:a="http://schemas.openxmlformats.org/drawingml/2006/main" prst="trapezoid">
             <a:avLst/>
@@ -2018,19 +2219,19 @@
           <p:cNvPr id="22" name="PPAGENT_QA|parent=funnel-face-2|domains=funnel-face">
             <a:extLst xmlns:a="http://schemas.openxmlformats.org/drawingml/2006/main">
               <a:ext uri="{FF2B5EF4-FFF2-40B4-BE49-F238E27FC236}">
-                <a16:creationId xmlns:a16="http://schemas.microsoft.com/office/drawing/2014/main" id="{EC827DC0-5886-4FAE-8BE8-25302162EA84}"/>
-              </a:ext>
-            </a:extLst>
-          </p:cNvPr>
-          <p:cNvSpPr>
-            <a:spLocks xmlns:a="http://schemas.openxmlformats.org/drawingml/2006/main" noGrp="1"/>
-          </p:cNvSpPr>
-          <p:nvPr/>
-        </p:nvSpPr>
-        <p:spPr>
-          <a:xfrm xmlns:a="http://schemas.openxmlformats.org/drawingml/2006/main">
-            <a:off x="1733550" y="3609975"/>
-            <a:ext cx="3238500" cy="228600"/>
+                <a16:creationId xmlns:a16="http://schemas.microsoft.com/office/drawing/2014/main" id="{86EE1886-7E51-46B7-BC15-F4359DC175B0}"/>
+              </a:ext>
+            </a:extLst>
+          </p:cNvPr>
+          <p:cNvSpPr>
+            <a:spLocks xmlns:a="http://schemas.openxmlformats.org/drawingml/2006/main" noGrp="1"/>
+          </p:cNvSpPr>
+          <p:nvPr/>
+        </p:nvSpPr>
+        <p:spPr>
+          <a:xfrm xmlns:a="http://schemas.openxmlformats.org/drawingml/2006/main">
+            <a:off x="2257425" y="4327525"/>
+            <a:ext cx="2190750" cy="228600"/>
           </a:xfrm>
           <a:prstGeom xmlns:a="http://schemas.openxmlformats.org/drawingml/2006/main" prst="ellipse">
             <a:avLst/>
@@ -2051,19 +2252,19 @@
           <p:cNvPr id="23" name="PPAGENT_QA|within=funnel-stage-2|role=rate">
             <a:extLst xmlns:a="http://schemas.openxmlformats.org/drawingml/2006/main">
               <a:ext uri="{FF2B5EF4-FFF2-40B4-BE49-F238E27FC236}">
-                <a16:creationId xmlns:a16="http://schemas.microsoft.com/office/drawing/2014/main" id="{8248CE4F-F206-4C81-A69F-32B3B20DAB9F}"/>
-              </a:ext>
-            </a:extLst>
-          </p:cNvPr>
-          <p:cNvSpPr>
-            <a:spLocks xmlns:a="http://schemas.openxmlformats.org/drawingml/2006/main" noGrp="1"/>
-          </p:cNvSpPr>
-          <p:nvPr/>
-        </p:nvSpPr>
-        <p:spPr>
-          <a:xfrm xmlns:a="http://schemas.openxmlformats.org/drawingml/2006/main">
-            <a:off x="1885950" y="3771900"/>
-            <a:ext cx="2933700" cy="276225"/>
+                <a16:creationId xmlns:a16="http://schemas.microsoft.com/office/drawing/2014/main" id="{53F69F4C-64CB-455F-A5CE-31D8A7155A3A}"/>
+              </a:ext>
+            </a:extLst>
+          </p:cNvPr>
+          <p:cNvSpPr>
+            <a:spLocks xmlns:a="http://schemas.openxmlformats.org/drawingml/2006/main" noGrp="1"/>
+          </p:cNvSpPr>
+          <p:nvPr/>
+        </p:nvSpPr>
+        <p:spPr>
+          <a:xfrm xmlns:a="http://schemas.openxmlformats.org/drawingml/2006/main">
+            <a:off x="2409825" y="4489450"/>
+            <a:ext cx="1885950" cy="276225"/>
           </a:xfrm>
           <a:prstGeom xmlns:a="http://schemas.openxmlformats.org/drawingml/2006/main" prst="rect">
             <a:avLst/>
@@ -2099,7 +2300,7 @@
                 <a:ea typeface="Microsoft YaHei"/>
                 <a:cs typeface="Microsoft YaHei"/>
               </a:rPr>
-              <a:t>52%</a:t>
+              <a:t>68%</a:t>
             </a:r>
           </a:p>
         </p:txBody>
@@ -2109,19 +2310,19 @@
           <p:cNvPr id="24" name="PPAGENT_QA|parent=funnel-label-2|domains=funnel-label">
             <a:extLst xmlns:a="http://schemas.openxmlformats.org/drawingml/2006/main">
               <a:ext uri="{FF2B5EF4-FFF2-40B4-BE49-F238E27FC236}">
-                <a16:creationId xmlns:a16="http://schemas.microsoft.com/office/drawing/2014/main" id="{67F515FD-1C7F-4FBE-B650-E6FE0B2CCD1A}"/>
-              </a:ext>
-            </a:extLst>
-          </p:cNvPr>
-          <p:cNvSpPr>
-            <a:spLocks xmlns:a="http://schemas.openxmlformats.org/drawingml/2006/main" noGrp="1"/>
-          </p:cNvSpPr>
-          <p:nvPr/>
-        </p:nvSpPr>
-        <p:spPr>
-          <a:xfrm xmlns:a="http://schemas.openxmlformats.org/drawingml/2006/main">
-            <a:off x="1885950" y="4038600"/>
-            <a:ext cx="2933700" cy="295275"/>
+                <a16:creationId xmlns:a16="http://schemas.microsoft.com/office/drawing/2014/main" id="{D0FEFB17-7F46-4DC6-88B3-FE65FDC9960C}"/>
+              </a:ext>
+            </a:extLst>
+          </p:cNvPr>
+          <p:cNvSpPr>
+            <a:spLocks xmlns:a="http://schemas.openxmlformats.org/drawingml/2006/main" noGrp="1"/>
+          </p:cNvSpPr>
+          <p:nvPr/>
+        </p:nvSpPr>
+        <p:spPr>
+          <a:xfrm xmlns:a="http://schemas.openxmlformats.org/drawingml/2006/main">
+            <a:off x="2409825" y="4756150"/>
+            <a:ext cx="1885950" cy="295275"/>
           </a:xfrm>
           <a:prstGeom xmlns:a="http://schemas.openxmlformats.org/drawingml/2006/main" prst="rect">
             <a:avLst/>
@@ -2167,23 +2368,23 @@
           <p:cNvPr id="25" name="PPAGENT_QA|parent=funnel-note-2|domains=funnel-note,funnel-content">
             <a:extLst xmlns:a="http://schemas.openxmlformats.org/drawingml/2006/main">
               <a:ext uri="{FF2B5EF4-FFF2-40B4-BE49-F238E27FC236}">
-                <a16:creationId xmlns:a16="http://schemas.microsoft.com/office/drawing/2014/main" id="{AB58B417-08FD-4F7E-9CC2-7A7E75C7C840}"/>
-              </a:ext>
-            </a:extLst>
-          </p:cNvPr>
-          <p:cNvSpPr>
-            <a:spLocks xmlns:a="http://schemas.openxmlformats.org/drawingml/2006/main" noGrp="1"/>
-          </p:cNvSpPr>
-          <p:nvPr/>
-        </p:nvSpPr>
-        <p:spPr>
-          <a:xfrm xmlns:a="http://schemas.openxmlformats.org/drawingml/2006/main">
-            <a:off x="6915150" y="3686175"/>
-            <a:ext cx="4552950" cy="981075"/>
+                <a16:creationId xmlns:a16="http://schemas.microsoft.com/office/drawing/2014/main" id="{F4B92560-EEE6-4049-9913-3A2D899763B0}"/>
+              </a:ext>
+            </a:extLst>
+          </p:cNvPr>
+          <p:cNvSpPr>
+            <a:spLocks xmlns:a="http://schemas.openxmlformats.org/drawingml/2006/main" noGrp="1"/>
+          </p:cNvSpPr>
+          <p:nvPr/>
+        </p:nvSpPr>
+        <p:spPr>
+          <a:xfrm xmlns:a="http://schemas.openxmlformats.org/drawingml/2006/main">
+            <a:off x="6915150" y="4403725"/>
+            <a:ext cx="4552950" cy="1339850"/>
           </a:xfrm>
           <a:prstGeom xmlns:a="http://schemas.openxmlformats.org/drawingml/2006/main" prst="roundRect">
             <a:avLst>
-              <a:gd name="adj" fmla="val 11650"/>
+              <a:gd name="adj" fmla="val 8531"/>
             </a:avLst>
           </a:prstGeom>
           <a:solidFill xmlns:a="http://schemas.openxmlformats.org/drawingml/2006/main">
@@ -2202,19 +2403,19 @@
           <p:cNvPr id="26" name="">
             <a:extLst xmlns:a="http://schemas.openxmlformats.org/drawingml/2006/main">
               <a:ext uri="{FF2B5EF4-FFF2-40B4-BE49-F238E27FC236}">
-                <a16:creationId xmlns:a16="http://schemas.microsoft.com/office/drawing/2014/main" id="{879E84D3-BDF9-4453-8483-E6FF7BE9D946}"/>
-              </a:ext>
-            </a:extLst>
-          </p:cNvPr>
-          <p:cNvSpPr>
-            <a:spLocks xmlns:a="http://schemas.openxmlformats.org/drawingml/2006/main" noGrp="1"/>
-          </p:cNvSpPr>
-          <p:nvPr/>
-        </p:nvSpPr>
-        <p:spPr>
-          <a:xfrm xmlns:a="http://schemas.openxmlformats.org/drawingml/2006/main">
-            <a:off x="6915150" y="3686175"/>
-            <a:ext cx="57150" cy="981075"/>
+                <a16:creationId xmlns:a16="http://schemas.microsoft.com/office/drawing/2014/main" id="{ECC7A3F0-89CC-46BC-B646-CED050BB0CC9}"/>
+              </a:ext>
+            </a:extLst>
+          </p:cNvPr>
+          <p:cNvSpPr>
+            <a:spLocks xmlns:a="http://schemas.openxmlformats.org/drawingml/2006/main" noGrp="1"/>
+          </p:cNvSpPr>
+          <p:nvPr/>
+        </p:nvSpPr>
+        <p:spPr>
+          <a:xfrm xmlns:a="http://schemas.openxmlformats.org/drawingml/2006/main">
+            <a:off x="6915150" y="4403725"/>
+            <a:ext cx="57150" cy="1339850"/>
           </a:xfrm>
           <a:prstGeom xmlns:a="http://schemas.openxmlformats.org/drawingml/2006/main" prst="roundRect">
             <a:avLst>
@@ -2235,18 +2436,18 @@
           <p:cNvPr id="27" name="PPAGENT_QA|within=funnel-note-2|role=title">
             <a:extLst xmlns:a="http://schemas.openxmlformats.org/drawingml/2006/main">
               <a:ext uri="{FF2B5EF4-FFF2-40B4-BE49-F238E27FC236}">
-                <a16:creationId xmlns:a16="http://schemas.microsoft.com/office/drawing/2014/main" id="{065C5FF0-849D-41AB-9091-15A1B3BC817E}"/>
-              </a:ext>
-            </a:extLst>
-          </p:cNvPr>
-          <p:cNvSpPr>
-            <a:spLocks xmlns:a="http://schemas.openxmlformats.org/drawingml/2006/main" noGrp="1"/>
-          </p:cNvSpPr>
-          <p:nvPr/>
-        </p:nvSpPr>
-        <p:spPr>
-          <a:xfrm xmlns:a="http://schemas.openxmlformats.org/drawingml/2006/main">
-            <a:off x="7162800" y="3781425"/>
+                <a16:creationId xmlns:a16="http://schemas.microsoft.com/office/drawing/2014/main" id="{E851B2F1-95D0-4D26-9F8D-EF08C90E9764}"/>
+              </a:ext>
+            </a:extLst>
+          </p:cNvPr>
+          <p:cNvSpPr>
+            <a:spLocks xmlns:a="http://schemas.openxmlformats.org/drawingml/2006/main" noGrp="1"/>
+          </p:cNvSpPr>
+          <p:nvPr/>
+        </p:nvSpPr>
+        <p:spPr>
+          <a:xfrm xmlns:a="http://schemas.openxmlformats.org/drawingml/2006/main">
+            <a:off x="7162800" y="4498975"/>
             <a:ext cx="4000500" cy="257175"/>
           </a:xfrm>
           <a:prstGeom xmlns:a="http://schemas.openxmlformats.org/drawingml/2006/main" prst="rect">
@@ -2293,19 +2494,19 @@
           <p:cNvPr id="28" name="PPAGENT_QA|within=funnel-note-2|role=body">
             <a:extLst xmlns:a="http://schemas.openxmlformats.org/drawingml/2006/main">
               <a:ext uri="{FF2B5EF4-FFF2-40B4-BE49-F238E27FC236}">
-                <a16:creationId xmlns:a16="http://schemas.microsoft.com/office/drawing/2014/main" id="{A91944DC-9087-4403-AF3B-080AB03F7AC7}"/>
-              </a:ext>
-            </a:extLst>
-          </p:cNvPr>
-          <p:cNvSpPr>
-            <a:spLocks xmlns:a="http://schemas.openxmlformats.org/drawingml/2006/main" noGrp="1"/>
-          </p:cNvSpPr>
-          <p:nvPr/>
-        </p:nvSpPr>
-        <p:spPr>
-          <a:xfrm xmlns:a="http://schemas.openxmlformats.org/drawingml/2006/main">
-            <a:off x="7162800" y="4048125"/>
-            <a:ext cx="4000500" cy="581025"/>
+                <a16:creationId xmlns:a16="http://schemas.microsoft.com/office/drawing/2014/main" id="{E8567DBD-48EF-40FF-BD43-1E4A13EFCA69}"/>
+              </a:ext>
+            </a:extLst>
+          </p:cNvPr>
+          <p:cNvSpPr>
+            <a:spLocks xmlns:a="http://schemas.openxmlformats.org/drawingml/2006/main" noGrp="1"/>
+          </p:cNvSpPr>
+          <p:nvPr/>
+        </p:nvSpPr>
+        <p:spPr>
+          <a:xfrm xmlns:a="http://schemas.openxmlformats.org/drawingml/2006/main">
+            <a:off x="7162800" y="4765675"/>
+            <a:ext cx="4000500" cy="939800"/>
           </a:xfrm>
           <a:prstGeom xmlns:a="http://schemas.openxmlformats.org/drawingml/2006/main" prst="rect">
             <a:avLst/>
@@ -2341,7 +2542,7 @@
                 <a:ea typeface="Microsoft YaHei"/>
                 <a:cs typeface="Microsoft YaHei"/>
               </a:rPr>
-              <a:t>视觉导演只从合法候选中选择适配结构</a:t>
+              <a:t>选择合法结构与样式组</a:t>
             </a:r>
           </a:p>
         </p:txBody>
@@ -2351,7 +2552,7 @@
           <p:cNvPr id="29" name="PPAGENT_CONNECTOR|from=funnel-stage-2|fromSide=right|to=funnel-note-2|toSide=left">
             <a:extLst xmlns:a="http://schemas.openxmlformats.org/drawingml/2006/main">
               <a:ext uri="{FF2B5EF4-FFF2-40B4-BE49-F238E27FC236}">
-                <a16:creationId xmlns:a16="http://schemas.microsoft.com/office/drawing/2014/main" id="{7327B1AF-7C3A-4C2E-B054-D844C50684E7}"/>
+                <a16:creationId xmlns:a16="http://schemas.microsoft.com/office/drawing/2014/main" id="{0F9E99A8-2CF1-4392-B398-1BC23F325FC4}"/>
               </a:ext>
             </a:extLst>
           </p:cNvPr>
@@ -2362,8 +2563,8 @@
         </p:nvSpPr>
         <p:spPr>
           <a:xfrm xmlns:a="http://schemas.openxmlformats.org/drawingml/2006/main" flipH="0" flipV="0">
-            <a:off x="4972050" y="4176713"/>
-            <a:ext cx="1943100" cy="0"/>
+            <a:off x="4448175" y="5073650"/>
+            <a:ext cx="2466975" cy="0"/>
           </a:xfrm>
           <a:prstGeom xmlns:a="http://schemas.openxmlformats.org/drawingml/2006/main" prst="line">
             <a:avLst/>
@@ -2377,12 +2578,157 @@
           </a:ln>
         </p:spPr>
       </p:sp>
-      <p:sp>
-        <p:nvSpPr>
-          <p:cNvPr id="30" name="PPAGENT_QA|parent=funnel-stage-3|domains=funnel-shape,funnel-content">
-            <a:extLst xmlns:a="http://schemas.openxmlformats.org/drawingml/2006/main">
-              <a:ext uri="{FF2B5EF4-FFF2-40B4-BE49-F238E27FC236}">
-                <a16:creationId xmlns:a16="http://schemas.microsoft.com/office/drawing/2014/main" id="{D9C4B74D-7DF3-44EF-A01D-1274A60729E7}"/>
+    </p:spTree>
+    <p:extLst>
+      <p:ext uri="{BB962C8B-B14F-4D97-AF65-F5344CB8AC3E}">
+        <p14:creationId xmlns:p14="http://schemas.microsoft.com/office/powerpoint/2010/main" val="724409362"/>
+      </p:ext>
+    </p:extLst>
+  </p:cSld>
+</p:sld>
+</file>
+
+<file path=ppt/slides/slide2.xml><?xml version="1.0" encoding="utf-8"?>
+<p:sld xmlns:p="http://schemas.openxmlformats.org/presentationml/2006/main">
+  <p:cSld>
+    <p:bg>
+      <p:bgPr>
+        <a:solidFill xmlns:a="http://schemas.openxmlformats.org/drawingml/2006/main">
+          <a:srgbClr val="F7FAFC"/>
+        </a:solidFill>
+      </p:bgPr>
+    </p:bg>
+    <p:spTree>
+      <p:nvGrpSpPr>
+        <p:cNvPr id="1" name=""/>
+        <p:cNvGrpSpPr/>
+        <p:nvPr/>
+      </p:nvGrpSpPr>
+      <p:grpSpPr>
+        <a:xfrm xmlns:a="http://schemas.openxmlformats.org/drawingml/2006/main"/>
+      </p:grpSpPr>
+      <p:sp>
+        <p:nvSpPr>
+          <p:cNvPr id="39" name="">
+            <a:extLst xmlns:a="http://schemas.openxmlformats.org/drawingml/2006/main">
+              <a:ext uri="{FF2B5EF4-FFF2-40B4-BE49-F238E27FC236}">
+                <a16:creationId xmlns:a16="http://schemas.microsoft.com/office/drawing/2014/main" id="{58F391A6-5E3D-4FFC-8884-6D8D45FF7ED8}"/>
+              </a:ext>
+            </a:extLst>
+          </p:cNvPr>
+          <p:cNvSpPr>
+            <a:spLocks xmlns:a="http://schemas.openxmlformats.org/drawingml/2006/main" noGrp="1"/>
+          </p:cNvSpPr>
+          <p:nvPr/>
+        </p:nvSpPr>
+        <p:spPr>
+          <a:xfrm xmlns:a="http://schemas.openxmlformats.org/drawingml/2006/main">
+            <a:off x="685800" y="400050"/>
+            <a:ext cx="8382000" cy="457200"/>
+          </a:xfrm>
+          <a:prstGeom xmlns:a="http://schemas.openxmlformats.org/drawingml/2006/main" prst="rect">
+            <a:avLst/>
+          </a:prstGeom>
+          <a:noFill xmlns:a="http://schemas.openxmlformats.org/drawingml/2006/main"/>
+          <a:ln xmlns:a="http://schemas.openxmlformats.org/drawingml/2006/main" w="0">
+            <a:noFill/>
+            <a:prstDash val="solid"/>
+          </a:ln>
+        </p:spPr>
+        <p:txBody>
+          <a:bodyPr xmlns:a="http://schemas.openxmlformats.org/drawingml/2006/main" lIns="0" tIns="0" rIns="0" bIns="0" anchor="ctr">
+            <a:normAutofit fontScale="100000"/>
+          </a:bodyPr>
+          <a:lstStyle xmlns:a="http://schemas.openxmlformats.org/drawingml/2006/main"/>
+          <a:p xmlns:a="http://schemas.openxmlformats.org/drawingml/2006/main">
+            <a:pPr algn="l">
+              <a:defRPr sz="2700" b="1">
+                <a:solidFill>
+                  <a:srgbClr val="1677C8"/>
+                </a:solidFill>
+                <a:latin typeface="Microsoft YaHei"/>
+                <a:ea typeface="Microsoft YaHei"/>
+                <a:cs typeface="Microsoft YaHei"/>
+              </a:defRPr>
+            </a:pPr>
+            <a:r>
+              <a:rPr sz="2700" b="1">
+                <a:solidFill>
+                  <a:srgbClr val="1677C8"/>
+                </a:solidFill>
+                <a:latin typeface="Microsoft YaHei"/>
+                <a:ea typeface="Microsoft YaHei"/>
+                <a:cs typeface="Microsoft YaHei"/>
+              </a:rPr>
+              <a:t>转化漏斗</a:t>
+            </a:r>
+          </a:p>
+        </p:txBody>
+      </p:sp>
+      <p:sp>
+        <p:nvSpPr>
+          <p:cNvPr id="2" name="">
+            <a:extLst xmlns:a="http://schemas.openxmlformats.org/drawingml/2006/main">
+              <a:ext uri="{FF2B5EF4-FFF2-40B4-BE49-F238E27FC236}">
+                <a16:creationId xmlns:a16="http://schemas.microsoft.com/office/drawing/2014/main" id="{5723DF88-50B8-407B-99E4-1B62C0EBEF51}"/>
+              </a:ext>
+            </a:extLst>
+          </p:cNvPr>
+          <p:cNvSpPr>
+            <a:spLocks xmlns:a="http://schemas.openxmlformats.org/drawingml/2006/main" noGrp="1"/>
+          </p:cNvSpPr>
+          <p:nvPr/>
+        </p:nvSpPr>
+        <p:spPr>
+          <a:xfrm xmlns:a="http://schemas.openxmlformats.org/drawingml/2006/main">
+            <a:off x="704850" y="876300"/>
+            <a:ext cx="4953000" cy="247650"/>
+          </a:xfrm>
+          <a:prstGeom xmlns:a="http://schemas.openxmlformats.org/drawingml/2006/main" prst="rect">
+            <a:avLst/>
+          </a:prstGeom>
+          <a:noFill xmlns:a="http://schemas.openxmlformats.org/drawingml/2006/main"/>
+          <a:ln xmlns:a="http://schemas.openxmlformats.org/drawingml/2006/main" w="0">
+            <a:noFill/>
+            <a:prstDash val="solid"/>
+          </a:ln>
+        </p:spPr>
+        <p:txBody>
+          <a:bodyPr xmlns:a="http://schemas.openxmlformats.org/drawingml/2006/main" lIns="0" tIns="0" rIns="0" bIns="0" anchor="ctr">
+            <a:normAutofit fontScale="100000"/>
+          </a:bodyPr>
+          <a:lstStyle xmlns:a="http://schemas.openxmlformats.org/drawingml/2006/main"/>
+          <a:p xmlns:a="http://schemas.openxmlformats.org/drawingml/2006/main">
+            <a:pPr algn="l">
+              <a:defRPr sz="1200" b="0">
+                <a:solidFill>
+                  <a:srgbClr val="7C8A9A"/>
+                </a:solidFill>
+                <a:latin typeface="Microsoft YaHei"/>
+                <a:ea typeface="Microsoft YaHei"/>
+                <a:cs typeface="Microsoft YaHei"/>
+              </a:defRPr>
+            </a:pPr>
+            <a:r>
+              <a:rPr sz="1200" b="0">
+                <a:solidFill>
+                  <a:srgbClr val="7C8A9A"/>
+                </a:solidFill>
+                <a:latin typeface="Microsoft YaHei"/>
+                <a:ea typeface="Microsoft YaHei"/>
+                <a:cs typeface="Microsoft YaHei"/>
+              </a:rPr>
+              <a:t>递减转化 · 阶段拆解</a:t>
+            </a:r>
+          </a:p>
+        </p:txBody>
+      </p:sp>
+      <p:sp>
+        <p:nvSpPr>
+          <p:cNvPr id="3" name="PPAGENT_QA|parent=funnel-stage-0|domains=funnel-shape,funnel-content">
+            <a:extLst xmlns:a="http://schemas.openxmlformats.org/drawingml/2006/main">
+              <a:ext uri="{FF2B5EF4-FFF2-40B4-BE49-F238E27FC236}">
+                <a16:creationId xmlns:a16="http://schemas.microsoft.com/office/drawing/2014/main" id="{FCB21B80-C0CF-4A99-B742-5A88B70303AC}"/>
               </a:ext>
             </a:extLst>
           </p:cNvPr>
@@ -2393,14 +2739,14 @@
         </p:nvSpPr>
         <p:spPr>
           <a:xfrm xmlns:a="http://schemas.openxmlformats.org/drawingml/2006/main" flipV="1">
-            <a:off x="2257425" y="4752975"/>
-            <a:ext cx="2190750" cy="1000125"/>
+            <a:off x="685800" y="1524000"/>
+            <a:ext cx="5334000" cy="1000125"/>
           </a:xfrm>
           <a:prstGeom xmlns:a="http://schemas.openxmlformats.org/drawingml/2006/main" prst="trapezoid">
             <a:avLst/>
           </a:prstGeom>
           <a:solidFill xmlns:a="http://schemas.openxmlformats.org/drawingml/2006/main">
-            <a:srgbClr val="16A0C4"/>
+            <a:srgbClr val="174B82"/>
           </a:solidFill>
           <a:ln xmlns:a="http://schemas.openxmlformats.org/drawingml/2006/main" w="19050">
             <a:solidFill>
@@ -2418,28 +2764,28 @@
       </p:sp>
       <p:sp>
         <p:nvSpPr>
-          <p:cNvPr id="31" name="PPAGENT_QA|parent=funnel-face-3|domains=funnel-face">
-            <a:extLst xmlns:a="http://schemas.openxmlformats.org/drawingml/2006/main">
-              <a:ext uri="{FF2B5EF4-FFF2-40B4-BE49-F238E27FC236}">
-                <a16:creationId xmlns:a16="http://schemas.microsoft.com/office/drawing/2014/main" id="{DF25BAD5-A1B5-4B2C-9599-A281C3E746DD}"/>
-              </a:ext>
-            </a:extLst>
-          </p:cNvPr>
-          <p:cNvSpPr>
-            <a:spLocks xmlns:a="http://schemas.openxmlformats.org/drawingml/2006/main" noGrp="1"/>
-          </p:cNvSpPr>
-          <p:nvPr/>
-        </p:nvSpPr>
-        <p:spPr>
-          <a:xfrm xmlns:a="http://schemas.openxmlformats.org/drawingml/2006/main">
-            <a:off x="2257425" y="4686300"/>
-            <a:ext cx="2190750" cy="228600"/>
+          <p:cNvPr id="4" name="PPAGENT_QA|parent=funnel-face-0|domains=funnel-face">
+            <a:extLst xmlns:a="http://schemas.openxmlformats.org/drawingml/2006/main">
+              <a:ext uri="{FF2B5EF4-FFF2-40B4-BE49-F238E27FC236}">
+                <a16:creationId xmlns:a16="http://schemas.microsoft.com/office/drawing/2014/main" id="{30A55EAA-48FB-4EB3-A0DB-699D8057D283}"/>
+              </a:ext>
+            </a:extLst>
+          </p:cNvPr>
+          <p:cNvSpPr>
+            <a:spLocks xmlns:a="http://schemas.openxmlformats.org/drawingml/2006/main" noGrp="1"/>
+          </p:cNvSpPr>
+          <p:nvPr/>
+        </p:nvSpPr>
+        <p:spPr>
+          <a:xfrm xmlns:a="http://schemas.openxmlformats.org/drawingml/2006/main">
+            <a:off x="685800" y="1457325"/>
+            <a:ext cx="5334000" cy="228600"/>
           </a:xfrm>
           <a:prstGeom xmlns:a="http://schemas.openxmlformats.org/drawingml/2006/main" prst="ellipse">
             <a:avLst/>
           </a:prstGeom>
           <a:solidFill xmlns:a="http://schemas.openxmlformats.org/drawingml/2006/main">
-            <a:srgbClr val="16A0C4"/>
+            <a:srgbClr val="174B82"/>
           </a:solidFill>
           <a:ln xmlns:a="http://schemas.openxmlformats.org/drawingml/2006/main" w="11430">
             <a:solidFill>
@@ -2451,22 +2797,22 @@
       </p:sp>
       <p:sp>
         <p:nvSpPr>
-          <p:cNvPr id="32" name="PPAGENT_QA|within=funnel-stage-3|role=rate">
-            <a:extLst xmlns:a="http://schemas.openxmlformats.org/drawingml/2006/main">
-              <a:ext uri="{FF2B5EF4-FFF2-40B4-BE49-F238E27FC236}">
-                <a16:creationId xmlns:a16="http://schemas.microsoft.com/office/drawing/2014/main" id="{B311229B-D965-4EAE-B42B-EDF6DCBA9DE7}"/>
-              </a:ext>
-            </a:extLst>
-          </p:cNvPr>
-          <p:cNvSpPr>
-            <a:spLocks xmlns:a="http://schemas.openxmlformats.org/drawingml/2006/main" noGrp="1"/>
-          </p:cNvSpPr>
-          <p:nvPr/>
-        </p:nvSpPr>
-        <p:spPr>
-          <a:xfrm xmlns:a="http://schemas.openxmlformats.org/drawingml/2006/main">
-            <a:off x="2409825" y="4848225"/>
-            <a:ext cx="1885950" cy="276225"/>
+          <p:cNvPr id="5" name="PPAGENT_QA|within=funnel-stage-0|role=rate">
+            <a:extLst xmlns:a="http://schemas.openxmlformats.org/drawingml/2006/main">
+              <a:ext uri="{FF2B5EF4-FFF2-40B4-BE49-F238E27FC236}">
+                <a16:creationId xmlns:a16="http://schemas.microsoft.com/office/drawing/2014/main" id="{DB62EEDF-EA88-4948-B895-CB911FABA568}"/>
+              </a:ext>
+            </a:extLst>
+          </p:cNvPr>
+          <p:cNvSpPr>
+            <a:spLocks xmlns:a="http://schemas.openxmlformats.org/drawingml/2006/main" noGrp="1"/>
+          </p:cNvSpPr>
+          <p:nvPr/>
+        </p:nvSpPr>
+        <p:spPr>
+          <a:xfrm xmlns:a="http://schemas.openxmlformats.org/drawingml/2006/main">
+            <a:off x="838200" y="1619250"/>
+            <a:ext cx="5029200" cy="276225"/>
           </a:xfrm>
           <a:prstGeom xmlns:a="http://schemas.openxmlformats.org/drawingml/2006/main" prst="rect">
             <a:avLst/>
@@ -2502,29 +2848,29 @@
                 <a:ea typeface="Microsoft YaHei"/>
                 <a:cs typeface="Microsoft YaHei"/>
               </a:rPr>
-              <a:t>36%</a:t>
+              <a:t>100%</a:t>
             </a:r>
           </a:p>
         </p:txBody>
       </p:sp>
       <p:sp>
         <p:nvSpPr>
-          <p:cNvPr id="33" name="PPAGENT_QA|parent=funnel-label-3|domains=funnel-label">
-            <a:extLst xmlns:a="http://schemas.openxmlformats.org/drawingml/2006/main">
-              <a:ext uri="{FF2B5EF4-FFF2-40B4-BE49-F238E27FC236}">
-                <a16:creationId xmlns:a16="http://schemas.microsoft.com/office/drawing/2014/main" id="{A661BFD7-F7CD-4694-9A39-020061CCF3DF}"/>
-              </a:ext>
-            </a:extLst>
-          </p:cNvPr>
-          <p:cNvSpPr>
-            <a:spLocks xmlns:a="http://schemas.openxmlformats.org/drawingml/2006/main" noGrp="1"/>
-          </p:cNvSpPr>
-          <p:nvPr/>
-        </p:nvSpPr>
-        <p:spPr>
-          <a:xfrm xmlns:a="http://schemas.openxmlformats.org/drawingml/2006/main">
-            <a:off x="2409825" y="5114925"/>
-            <a:ext cx="1885950" cy="295275"/>
+          <p:cNvPr id="6" name="PPAGENT_QA|parent=funnel-label-0|domains=funnel-label">
+            <a:extLst xmlns:a="http://schemas.openxmlformats.org/drawingml/2006/main">
+              <a:ext uri="{FF2B5EF4-FFF2-40B4-BE49-F238E27FC236}">
+                <a16:creationId xmlns:a16="http://schemas.microsoft.com/office/drawing/2014/main" id="{4901D1F2-1C1C-4998-BE7F-C000E2DE0C26}"/>
+              </a:ext>
+            </a:extLst>
+          </p:cNvPr>
+          <p:cNvSpPr>
+            <a:spLocks xmlns:a="http://schemas.openxmlformats.org/drawingml/2006/main" noGrp="1"/>
+          </p:cNvSpPr>
+          <p:nvPr/>
+        </p:nvSpPr>
+        <p:spPr>
+          <a:xfrm xmlns:a="http://schemas.openxmlformats.org/drawingml/2006/main">
+            <a:off x="838200" y="1885950"/>
+            <a:ext cx="5029200" cy="295275"/>
           </a:xfrm>
           <a:prstGeom xmlns:a="http://schemas.openxmlformats.org/drawingml/2006/main" prst="rect">
             <a:avLst/>
@@ -2560,28 +2906,28 @@
                 <a:ea typeface="Microsoft YaHei"/>
                 <a:cs typeface="Microsoft YaHei"/>
               </a:rPr>
-              <a:t>可靠交付</a:t>
+              <a:t>收到稿件</a:t>
             </a:r>
           </a:p>
         </p:txBody>
       </p:sp>
       <p:sp>
         <p:nvSpPr>
-          <p:cNvPr id="34" name="PPAGENT_QA|parent=funnel-note-3|domains=funnel-note,funnel-content">
-            <a:extLst xmlns:a="http://schemas.openxmlformats.org/drawingml/2006/main">
-              <a:ext uri="{FF2B5EF4-FFF2-40B4-BE49-F238E27FC236}">
-                <a16:creationId xmlns:a16="http://schemas.microsoft.com/office/drawing/2014/main" id="{B88DFB34-2111-44DA-8543-34B798CD6998}"/>
-              </a:ext>
-            </a:extLst>
-          </p:cNvPr>
-          <p:cNvSpPr>
-            <a:spLocks xmlns:a="http://schemas.openxmlformats.org/drawingml/2006/main" noGrp="1"/>
-          </p:cNvSpPr>
-          <p:nvPr/>
-        </p:nvSpPr>
-        <p:spPr>
-          <a:xfrm xmlns:a="http://schemas.openxmlformats.org/drawingml/2006/main">
-            <a:off x="6915150" y="4762500"/>
+          <p:cNvPr id="7" name="PPAGENT_QA|parent=funnel-note-0|domains=funnel-note,funnel-content">
+            <a:extLst xmlns:a="http://schemas.openxmlformats.org/drawingml/2006/main">
+              <a:ext uri="{FF2B5EF4-FFF2-40B4-BE49-F238E27FC236}">
+                <a16:creationId xmlns:a16="http://schemas.microsoft.com/office/drawing/2014/main" id="{979565B5-96BA-4B2A-9CBB-2E22DF89F6AC}"/>
+              </a:ext>
+            </a:extLst>
+          </p:cNvPr>
+          <p:cNvSpPr>
+            <a:spLocks xmlns:a="http://schemas.openxmlformats.org/drawingml/2006/main" noGrp="1"/>
+          </p:cNvSpPr>
+          <p:nvPr/>
+        </p:nvSpPr>
+        <p:spPr>
+          <a:xfrm xmlns:a="http://schemas.openxmlformats.org/drawingml/2006/main">
+            <a:off x="6915150" y="1533525"/>
             <a:ext cx="4552950" cy="981075"/>
           </a:xfrm>
           <a:prstGeom xmlns:a="http://schemas.openxmlformats.org/drawingml/2006/main" prst="roundRect">
@@ -2590,7 +2936,7 @@
             </a:avLst>
           </a:prstGeom>
           <a:solidFill xmlns:a="http://schemas.openxmlformats.org/drawingml/2006/main">
-            <a:srgbClr val="F7FAFC"/>
+            <a:srgbClr val="FFFFFF"/>
           </a:solidFill>
           <a:ln xmlns:a="http://schemas.openxmlformats.org/drawingml/2006/main" w="9525">
             <a:solidFill>
@@ -2602,21 +2948,21 @@
       </p:sp>
       <p:sp>
         <p:nvSpPr>
-          <p:cNvPr id="35" name="">
-            <a:extLst xmlns:a="http://schemas.openxmlformats.org/drawingml/2006/main">
-              <a:ext uri="{FF2B5EF4-FFF2-40B4-BE49-F238E27FC236}">
-                <a16:creationId xmlns:a16="http://schemas.microsoft.com/office/drawing/2014/main" id="{554CC2A4-9470-4735-B508-590DFAB09881}"/>
-              </a:ext>
-            </a:extLst>
-          </p:cNvPr>
-          <p:cNvSpPr>
-            <a:spLocks xmlns:a="http://schemas.openxmlformats.org/drawingml/2006/main" noGrp="1"/>
-          </p:cNvSpPr>
-          <p:nvPr/>
-        </p:nvSpPr>
-        <p:spPr>
-          <a:xfrm xmlns:a="http://schemas.openxmlformats.org/drawingml/2006/main">
-            <a:off x="6915150" y="4762500"/>
+          <p:cNvPr id="8" name="">
+            <a:extLst xmlns:a="http://schemas.openxmlformats.org/drawingml/2006/main">
+              <a:ext uri="{FF2B5EF4-FFF2-40B4-BE49-F238E27FC236}">
+                <a16:creationId xmlns:a16="http://schemas.microsoft.com/office/drawing/2014/main" id="{E6312602-3BB2-42F5-A30F-F02B23398941}"/>
+              </a:ext>
+            </a:extLst>
+          </p:cNvPr>
+          <p:cNvSpPr>
+            <a:spLocks xmlns:a="http://schemas.openxmlformats.org/drawingml/2006/main" noGrp="1"/>
+          </p:cNvSpPr>
+          <p:nvPr/>
+        </p:nvSpPr>
+        <p:spPr>
+          <a:xfrm xmlns:a="http://schemas.openxmlformats.org/drawingml/2006/main">
+            <a:off x="6915150" y="1533525"/>
             <a:ext cx="57150" cy="981075"/>
           </a:xfrm>
           <a:prstGeom xmlns:a="http://schemas.openxmlformats.org/drawingml/2006/main" prst="roundRect">
@@ -2625,31 +2971,31 @@
             </a:avLst>
           </a:prstGeom>
           <a:solidFill xmlns:a="http://schemas.openxmlformats.org/drawingml/2006/main">
-            <a:srgbClr val="16A0C4"/>
-          </a:solidFill>
-          <a:ln xmlns:a="http://schemas.openxmlformats.org/drawingml/2006/main" w="0">
-            <a:noFill/>
-            <a:prstDash val="solid"/>
-          </a:ln>
-        </p:spPr>
-      </p:sp>
-      <p:sp>
-        <p:nvSpPr>
-          <p:cNvPr id="36" name="PPAGENT_QA|within=funnel-note-3|role=title">
-            <a:extLst xmlns:a="http://schemas.openxmlformats.org/drawingml/2006/main">
-              <a:ext uri="{FF2B5EF4-FFF2-40B4-BE49-F238E27FC236}">
-                <a16:creationId xmlns:a16="http://schemas.microsoft.com/office/drawing/2014/main" id="{3590EA79-81D9-42A1-A8AD-2ADC09DC2CED}"/>
-              </a:ext>
-            </a:extLst>
-          </p:cNvPr>
-          <p:cNvSpPr>
-            <a:spLocks xmlns:a="http://schemas.openxmlformats.org/drawingml/2006/main" noGrp="1"/>
-          </p:cNvSpPr>
-          <p:nvPr/>
-        </p:nvSpPr>
-        <p:spPr>
-          <a:xfrm xmlns:a="http://schemas.openxmlformats.org/drawingml/2006/main">
-            <a:off x="7162800" y="4857750"/>
+            <a:srgbClr val="174B82"/>
+          </a:solidFill>
+          <a:ln xmlns:a="http://schemas.openxmlformats.org/drawingml/2006/main" w="0">
+            <a:noFill/>
+            <a:prstDash val="solid"/>
+          </a:ln>
+        </p:spPr>
+      </p:sp>
+      <p:sp>
+        <p:nvSpPr>
+          <p:cNvPr id="9" name="PPAGENT_QA|within=funnel-note-0|role=title">
+            <a:extLst xmlns:a="http://schemas.openxmlformats.org/drawingml/2006/main">
+              <a:ext uri="{FF2B5EF4-FFF2-40B4-BE49-F238E27FC236}">
+                <a16:creationId xmlns:a16="http://schemas.microsoft.com/office/drawing/2014/main" id="{F6653EBA-F055-4E2E-BFF1-E0B7010DB1F2}"/>
+              </a:ext>
+            </a:extLst>
+          </p:cNvPr>
+          <p:cNvSpPr>
+            <a:spLocks xmlns:a="http://schemas.openxmlformats.org/drawingml/2006/main" noGrp="1"/>
+          </p:cNvSpPr>
+          <p:nvPr/>
+        </p:nvSpPr>
+        <p:spPr>
+          <a:xfrm xmlns:a="http://schemas.openxmlformats.org/drawingml/2006/main">
+            <a:off x="7162800" y="1628775"/>
             <a:ext cx="4000500" cy="257175"/>
           </a:xfrm>
           <a:prstGeom xmlns:a="http://schemas.openxmlformats.org/drawingml/2006/main" prst="rect">
@@ -2686,28 +3032,28 @@
                 <a:ea typeface="Microsoft YaHei"/>
                 <a:cs typeface="Microsoft YaHei"/>
               </a:rPr>
-              <a:t>04  可靠交付</a:t>
+              <a:t>01  收到稿件</a:t>
             </a:r>
           </a:p>
         </p:txBody>
       </p:sp>
       <p:sp>
         <p:nvSpPr>
-          <p:cNvPr id="37" name="PPAGENT_QA|within=funnel-note-3|role=body">
-            <a:extLst xmlns:a="http://schemas.openxmlformats.org/drawingml/2006/main">
-              <a:ext uri="{FF2B5EF4-FFF2-40B4-BE49-F238E27FC236}">
-                <a16:creationId xmlns:a16="http://schemas.microsoft.com/office/drawing/2014/main" id="{371DA015-4739-4CE1-85AC-F5628861E93A}"/>
-              </a:ext>
-            </a:extLst>
-          </p:cNvPr>
-          <p:cNvSpPr>
-            <a:spLocks xmlns:a="http://schemas.openxmlformats.org/drawingml/2006/main" noGrp="1"/>
-          </p:cNvSpPr>
-          <p:nvPr/>
-        </p:nvSpPr>
-        <p:spPr>
-          <a:xfrm xmlns:a="http://schemas.openxmlformats.org/drawingml/2006/main">
-            <a:off x="7162800" y="5124450"/>
+          <p:cNvPr id="10" name="PPAGENT_QA|within=funnel-note-0|role=body">
+            <a:extLst xmlns:a="http://schemas.openxmlformats.org/drawingml/2006/main">
+              <a:ext uri="{FF2B5EF4-FFF2-40B4-BE49-F238E27FC236}">
+                <a16:creationId xmlns:a16="http://schemas.microsoft.com/office/drawing/2014/main" id="{F9F5C3AD-0DE8-4D92-BFE6-DA62FD34F742}"/>
+              </a:ext>
+            </a:extLst>
+          </p:cNvPr>
+          <p:cNvSpPr>
+            <a:spLocks xmlns:a="http://schemas.openxmlformats.org/drawingml/2006/main" noGrp="1"/>
+          </p:cNvSpPr>
+          <p:nvPr/>
+        </p:nvSpPr>
+        <p:spPr>
+          <a:xfrm xmlns:a="http://schemas.openxmlformats.org/drawingml/2006/main">
+            <a:off x="7162800" y="1895475"/>
             <a:ext cx="4000500" cy="581025"/>
           </a:xfrm>
           <a:prstGeom xmlns:a="http://schemas.openxmlformats.org/drawingml/2006/main" prst="rect">
@@ -2744,17 +3090,17 @@
                 <a:ea typeface="Microsoft YaHei"/>
                 <a:cs typeface="Microsoft YaHei"/>
               </a:rPr>
-              <a:t>容量、几何和渲染检查通过后输出可编辑文件</a:t>
+              <a:t>原始信息完整进入流程</a:t>
             </a:r>
           </a:p>
         </p:txBody>
       </p:sp>
       <p:sp>
         <p:nvSpPr>
-          <p:cNvPr id="38" name="PPAGENT_CONNECTOR|from=funnel-stage-3|fromSide=right|to=funnel-note-3|toSide=left">
-            <a:extLst xmlns:a="http://schemas.openxmlformats.org/drawingml/2006/main">
-              <a:ext uri="{FF2B5EF4-FFF2-40B4-BE49-F238E27FC236}">
-                <a16:creationId xmlns:a16="http://schemas.microsoft.com/office/drawing/2014/main" id="{77B1D5B2-E0C2-41DD-B44D-9642F804EE01}"/>
+          <p:cNvPr id="11" name="PPAGENT_CONNECTOR|from=funnel-stage-0|fromSide=right|to=funnel-note-0|toSide=left">
+            <a:extLst xmlns:a="http://schemas.openxmlformats.org/drawingml/2006/main">
+              <a:ext uri="{FF2B5EF4-FFF2-40B4-BE49-F238E27FC236}">
+                <a16:creationId xmlns:a16="http://schemas.microsoft.com/office/drawing/2014/main" id="{0011B193-3187-4577-A8DF-C1A80BEDDDFC}"/>
               </a:ext>
             </a:extLst>
           </p:cNvPr>
@@ -2765,8 +3111,8 @@
         </p:nvSpPr>
         <p:spPr>
           <a:xfrm xmlns:a="http://schemas.openxmlformats.org/drawingml/2006/main" flipH="0" flipV="0">
-            <a:off x="4448175" y="5253038"/>
-            <a:ext cx="2466975" cy="0"/>
+            <a:off x="6019800" y="2024063"/>
+            <a:ext cx="895350" cy="0"/>
           </a:xfrm>
           <a:prstGeom xmlns:a="http://schemas.openxmlformats.org/drawingml/2006/main" prst="line">
             <a:avLst/>
@@ -2780,10 +3126,5942 @@
           </a:ln>
         </p:spPr>
       </p:sp>
+      <p:sp>
+        <p:nvSpPr>
+          <p:cNvPr id="12" name="PPAGENT_QA|parent=funnel-stage-1|domains=funnel-shape,funnel-content">
+            <a:extLst xmlns:a="http://schemas.openxmlformats.org/drawingml/2006/main">
+              <a:ext uri="{FF2B5EF4-FFF2-40B4-BE49-F238E27FC236}">
+                <a16:creationId xmlns:a16="http://schemas.microsoft.com/office/drawing/2014/main" id="{609D355D-0E3A-4DAA-ADB4-2008B105A1B5}"/>
+              </a:ext>
+            </a:extLst>
+          </p:cNvPr>
+          <p:cNvSpPr>
+            <a:spLocks xmlns:a="http://schemas.openxmlformats.org/drawingml/2006/main" noGrp="1"/>
+          </p:cNvSpPr>
+          <p:nvPr/>
+        </p:nvSpPr>
+        <p:spPr>
+          <a:xfrm xmlns:a="http://schemas.openxmlformats.org/drawingml/2006/main" flipV="1">
+            <a:off x="1209675" y="2600325"/>
+            <a:ext cx="4286250" cy="1000125"/>
+          </a:xfrm>
+          <a:prstGeom xmlns:a="http://schemas.openxmlformats.org/drawingml/2006/main" prst="trapezoid">
+            <a:avLst/>
+          </a:prstGeom>
+          <a:solidFill xmlns:a="http://schemas.openxmlformats.org/drawingml/2006/main">
+            <a:srgbClr val="1767A5"/>
+          </a:solidFill>
+          <a:ln xmlns:a="http://schemas.openxmlformats.org/drawingml/2006/main" w="19050">
+            <a:solidFill>
+              <a:srgbClr val="FFFFFF"/>
+            </a:solidFill>
+            <a:prstDash val="solid"/>
+          </a:ln>
+        </p:spPr>
+        <p:style>
+          <a:lnRef xmlns:a="http://schemas.openxmlformats.org/drawingml/2006/main" idx="0"/>
+          <a:fillRef xmlns:a="http://schemas.openxmlformats.org/drawingml/2006/main" idx="0"/>
+          <a:effectRef xmlns:a="http://schemas.openxmlformats.org/drawingml/2006/main" idx="4"/>
+          <a:fontRef xmlns:a="http://schemas.openxmlformats.org/drawingml/2006/main" idx="major"/>
+        </p:style>
+      </p:sp>
+      <p:sp>
+        <p:nvSpPr>
+          <p:cNvPr id="13" name="PPAGENT_QA|parent=funnel-face-1|domains=funnel-face">
+            <a:extLst xmlns:a="http://schemas.openxmlformats.org/drawingml/2006/main">
+              <a:ext uri="{FF2B5EF4-FFF2-40B4-BE49-F238E27FC236}">
+                <a16:creationId xmlns:a16="http://schemas.microsoft.com/office/drawing/2014/main" id="{ABDA358C-D7EE-44A6-A628-7571F6B2E675}"/>
+              </a:ext>
+            </a:extLst>
+          </p:cNvPr>
+          <p:cNvSpPr>
+            <a:spLocks xmlns:a="http://schemas.openxmlformats.org/drawingml/2006/main" noGrp="1"/>
+          </p:cNvSpPr>
+          <p:nvPr/>
+        </p:nvSpPr>
+        <p:spPr>
+          <a:xfrm xmlns:a="http://schemas.openxmlformats.org/drawingml/2006/main">
+            <a:off x="1209675" y="2533650"/>
+            <a:ext cx="4286250" cy="228600"/>
+          </a:xfrm>
+          <a:prstGeom xmlns:a="http://schemas.openxmlformats.org/drawingml/2006/main" prst="ellipse">
+            <a:avLst/>
+          </a:prstGeom>
+          <a:solidFill xmlns:a="http://schemas.openxmlformats.org/drawingml/2006/main">
+            <a:srgbClr val="1767A5"/>
+          </a:solidFill>
+          <a:ln xmlns:a="http://schemas.openxmlformats.org/drawingml/2006/main" w="11430">
+            <a:solidFill>
+              <a:srgbClr val="D9F1FA"/>
+            </a:solidFill>
+            <a:prstDash val="solid"/>
+          </a:ln>
+        </p:spPr>
+      </p:sp>
+      <p:sp>
+        <p:nvSpPr>
+          <p:cNvPr id="14" name="PPAGENT_QA|within=funnel-stage-1|role=rate">
+            <a:extLst xmlns:a="http://schemas.openxmlformats.org/drawingml/2006/main">
+              <a:ext uri="{FF2B5EF4-FFF2-40B4-BE49-F238E27FC236}">
+                <a16:creationId xmlns:a16="http://schemas.microsoft.com/office/drawing/2014/main" id="{5A46D502-69D8-4EF9-A725-C3F6BAC08AF9}"/>
+              </a:ext>
+            </a:extLst>
+          </p:cNvPr>
+          <p:cNvSpPr>
+            <a:spLocks xmlns:a="http://schemas.openxmlformats.org/drawingml/2006/main" noGrp="1"/>
+          </p:cNvSpPr>
+          <p:nvPr/>
+        </p:nvSpPr>
+        <p:spPr>
+          <a:xfrm xmlns:a="http://schemas.openxmlformats.org/drawingml/2006/main">
+            <a:off x="1362075" y="2695575"/>
+            <a:ext cx="3981450" cy="276225"/>
+          </a:xfrm>
+          <a:prstGeom xmlns:a="http://schemas.openxmlformats.org/drawingml/2006/main" prst="rect">
+            <a:avLst/>
+          </a:prstGeom>
+          <a:noFill xmlns:a="http://schemas.openxmlformats.org/drawingml/2006/main"/>
+          <a:ln xmlns:a="http://schemas.openxmlformats.org/drawingml/2006/main" w="0">
+            <a:noFill/>
+            <a:prstDash val="solid"/>
+          </a:ln>
+        </p:spPr>
+        <p:txBody>
+          <a:bodyPr xmlns:a="http://schemas.openxmlformats.org/drawingml/2006/main" lIns="0" tIns="0" rIns="0" bIns="0" anchor="ctr">
+            <a:normAutofit fontScale="100000"/>
+          </a:bodyPr>
+          <a:lstStyle xmlns:a="http://schemas.openxmlformats.org/drawingml/2006/main"/>
+          <a:p xmlns:a="http://schemas.openxmlformats.org/drawingml/2006/main">
+            <a:pPr algn="ctr">
+              <a:defRPr sz="1800" b="1">
+                <a:solidFill>
+                  <a:srgbClr val="F6C96A"/>
+                </a:solidFill>
+                <a:latin typeface="Microsoft YaHei"/>
+                <a:ea typeface="Microsoft YaHei"/>
+                <a:cs typeface="Microsoft YaHei"/>
+              </a:defRPr>
+            </a:pPr>
+            <a:r>
+              <a:rPr sz="1800" b="1">
+                <a:solidFill>
+                  <a:srgbClr val="F6C96A"/>
+                </a:solidFill>
+                <a:latin typeface="Microsoft YaHei"/>
+                <a:ea typeface="Microsoft YaHei"/>
+                <a:cs typeface="Microsoft YaHei"/>
+              </a:rPr>
+              <a:t>82%</a:t>
+            </a:r>
+          </a:p>
+        </p:txBody>
+      </p:sp>
+      <p:sp>
+        <p:nvSpPr>
+          <p:cNvPr id="15" name="PPAGENT_QA|parent=funnel-label-1|domains=funnel-label">
+            <a:extLst xmlns:a="http://schemas.openxmlformats.org/drawingml/2006/main">
+              <a:ext uri="{FF2B5EF4-FFF2-40B4-BE49-F238E27FC236}">
+                <a16:creationId xmlns:a16="http://schemas.microsoft.com/office/drawing/2014/main" id="{9FA656EE-8042-4906-B4C0-57197E0BD72B}"/>
+              </a:ext>
+            </a:extLst>
+          </p:cNvPr>
+          <p:cNvSpPr>
+            <a:spLocks xmlns:a="http://schemas.openxmlformats.org/drawingml/2006/main" noGrp="1"/>
+          </p:cNvSpPr>
+          <p:nvPr/>
+        </p:nvSpPr>
+        <p:spPr>
+          <a:xfrm xmlns:a="http://schemas.openxmlformats.org/drawingml/2006/main">
+            <a:off x="1362075" y="2962275"/>
+            <a:ext cx="3981450" cy="295275"/>
+          </a:xfrm>
+          <a:prstGeom xmlns:a="http://schemas.openxmlformats.org/drawingml/2006/main" prst="rect">
+            <a:avLst/>
+          </a:prstGeom>
+          <a:noFill xmlns:a="http://schemas.openxmlformats.org/drawingml/2006/main"/>
+          <a:ln xmlns:a="http://schemas.openxmlformats.org/drawingml/2006/main" w="0">
+            <a:noFill/>
+            <a:prstDash val="solid"/>
+          </a:ln>
+        </p:spPr>
+        <p:txBody>
+          <a:bodyPr xmlns:a="http://schemas.openxmlformats.org/drawingml/2006/main" lIns="0" tIns="0" rIns="0" bIns="0" anchor="ctr">
+            <a:normAutofit fontScale="100000"/>
+          </a:bodyPr>
+          <a:lstStyle xmlns:a="http://schemas.openxmlformats.org/drawingml/2006/main"/>
+          <a:p xmlns:a="http://schemas.openxmlformats.org/drawingml/2006/main">
+            <a:pPr algn="ctr">
+              <a:defRPr sz="1500" b="1">
+                <a:solidFill>
+                  <a:srgbClr val="FFFFFF"/>
+                </a:solidFill>
+                <a:latin typeface="Microsoft YaHei"/>
+                <a:ea typeface="Microsoft YaHei"/>
+                <a:cs typeface="Microsoft YaHei"/>
+              </a:defRPr>
+            </a:pPr>
+            <a:r>
+              <a:rPr sz="1500" b="1">
+                <a:solidFill>
+                  <a:srgbClr val="FFFFFF"/>
+                </a:solidFill>
+                <a:latin typeface="Microsoft YaHei"/>
+                <a:ea typeface="Microsoft YaHei"/>
+                <a:cs typeface="Microsoft YaHei"/>
+              </a:rPr>
+              <a:t>形成页面</a:t>
+            </a:r>
+          </a:p>
+        </p:txBody>
+      </p:sp>
+      <p:sp>
+        <p:nvSpPr>
+          <p:cNvPr id="16" name="PPAGENT_QA|parent=funnel-note-1|domains=funnel-note,funnel-content">
+            <a:extLst xmlns:a="http://schemas.openxmlformats.org/drawingml/2006/main">
+              <a:ext uri="{FF2B5EF4-FFF2-40B4-BE49-F238E27FC236}">
+                <a16:creationId xmlns:a16="http://schemas.microsoft.com/office/drawing/2014/main" id="{698384C2-F68F-4DA3-8543-60DF8ED101A4}"/>
+              </a:ext>
+            </a:extLst>
+          </p:cNvPr>
+          <p:cNvSpPr>
+            <a:spLocks xmlns:a="http://schemas.openxmlformats.org/drawingml/2006/main" noGrp="1"/>
+          </p:cNvSpPr>
+          <p:nvPr/>
+        </p:nvSpPr>
+        <p:spPr>
+          <a:xfrm xmlns:a="http://schemas.openxmlformats.org/drawingml/2006/main">
+            <a:off x="6915150" y="2609850"/>
+            <a:ext cx="4552950" cy="981075"/>
+          </a:xfrm>
+          <a:prstGeom xmlns:a="http://schemas.openxmlformats.org/drawingml/2006/main" prst="roundRect">
+            <a:avLst>
+              <a:gd name="adj" fmla="val 11650"/>
+            </a:avLst>
+          </a:prstGeom>
+          <a:solidFill xmlns:a="http://schemas.openxmlformats.org/drawingml/2006/main">
+            <a:srgbClr val="F7FAFC"/>
+          </a:solidFill>
+          <a:ln xmlns:a="http://schemas.openxmlformats.org/drawingml/2006/main" w="9525">
+            <a:solidFill>
+              <a:srgbClr val="D8E5EF"/>
+            </a:solidFill>
+            <a:prstDash val="solid"/>
+          </a:ln>
+        </p:spPr>
+      </p:sp>
+      <p:sp>
+        <p:nvSpPr>
+          <p:cNvPr id="17" name="">
+            <a:extLst xmlns:a="http://schemas.openxmlformats.org/drawingml/2006/main">
+              <a:ext uri="{FF2B5EF4-FFF2-40B4-BE49-F238E27FC236}">
+                <a16:creationId xmlns:a16="http://schemas.microsoft.com/office/drawing/2014/main" id="{BD1E43ED-0196-49F1-B8F7-BC14A2353F42}"/>
+              </a:ext>
+            </a:extLst>
+          </p:cNvPr>
+          <p:cNvSpPr>
+            <a:spLocks xmlns:a="http://schemas.openxmlformats.org/drawingml/2006/main" noGrp="1"/>
+          </p:cNvSpPr>
+          <p:nvPr/>
+        </p:nvSpPr>
+        <p:spPr>
+          <a:xfrm xmlns:a="http://schemas.openxmlformats.org/drawingml/2006/main">
+            <a:off x="6915150" y="2609850"/>
+            <a:ext cx="57150" cy="981075"/>
+          </a:xfrm>
+          <a:prstGeom xmlns:a="http://schemas.openxmlformats.org/drawingml/2006/main" prst="roundRect">
+            <a:avLst>
+              <a:gd name="adj" fmla="val 33333"/>
+            </a:avLst>
+          </a:prstGeom>
+          <a:solidFill xmlns:a="http://schemas.openxmlformats.org/drawingml/2006/main">
+            <a:srgbClr val="1767A5"/>
+          </a:solidFill>
+          <a:ln xmlns:a="http://schemas.openxmlformats.org/drawingml/2006/main" w="0">
+            <a:noFill/>
+            <a:prstDash val="solid"/>
+          </a:ln>
+        </p:spPr>
+      </p:sp>
+      <p:sp>
+        <p:nvSpPr>
+          <p:cNvPr id="18" name="PPAGENT_QA|within=funnel-note-1|role=title">
+            <a:extLst xmlns:a="http://schemas.openxmlformats.org/drawingml/2006/main">
+              <a:ext uri="{FF2B5EF4-FFF2-40B4-BE49-F238E27FC236}">
+                <a16:creationId xmlns:a16="http://schemas.microsoft.com/office/drawing/2014/main" id="{9F323DA0-09CF-410D-A810-4DA402934EDB}"/>
+              </a:ext>
+            </a:extLst>
+          </p:cNvPr>
+          <p:cNvSpPr>
+            <a:spLocks xmlns:a="http://schemas.openxmlformats.org/drawingml/2006/main" noGrp="1"/>
+          </p:cNvSpPr>
+          <p:nvPr/>
+        </p:nvSpPr>
+        <p:spPr>
+          <a:xfrm xmlns:a="http://schemas.openxmlformats.org/drawingml/2006/main">
+            <a:off x="7162800" y="2705100"/>
+            <a:ext cx="4000500" cy="257175"/>
+          </a:xfrm>
+          <a:prstGeom xmlns:a="http://schemas.openxmlformats.org/drawingml/2006/main" prst="rect">
+            <a:avLst/>
+          </a:prstGeom>
+          <a:noFill xmlns:a="http://schemas.openxmlformats.org/drawingml/2006/main"/>
+          <a:ln xmlns:a="http://schemas.openxmlformats.org/drawingml/2006/main" w="0">
+            <a:noFill/>
+            <a:prstDash val="solid"/>
+          </a:ln>
+        </p:spPr>
+        <p:txBody>
+          <a:bodyPr xmlns:a="http://schemas.openxmlformats.org/drawingml/2006/main" lIns="0" tIns="0" rIns="0" bIns="0" anchor="ctr">
+            <a:normAutofit fontScale="100000"/>
+          </a:bodyPr>
+          <a:lstStyle xmlns:a="http://schemas.openxmlformats.org/drawingml/2006/main"/>
+          <a:p xmlns:a="http://schemas.openxmlformats.org/drawingml/2006/main">
+            <a:pPr algn="l">
+              <a:defRPr sz="1350" b="1">
+                <a:solidFill>
+                  <a:srgbClr val="1677C8"/>
+                </a:solidFill>
+                <a:latin typeface="Microsoft YaHei"/>
+                <a:ea typeface="Microsoft YaHei"/>
+                <a:cs typeface="Microsoft YaHei"/>
+              </a:defRPr>
+            </a:pPr>
+            <a:r>
+              <a:rPr sz="1350" b="1">
+                <a:solidFill>
+                  <a:srgbClr val="1677C8"/>
+                </a:solidFill>
+                <a:latin typeface="Microsoft YaHei"/>
+                <a:ea typeface="Microsoft YaHei"/>
+                <a:cs typeface="Microsoft YaHei"/>
+              </a:rPr>
+              <a:t>02  形成页面</a:t>
+            </a:r>
+          </a:p>
+        </p:txBody>
+      </p:sp>
+      <p:sp>
+        <p:nvSpPr>
+          <p:cNvPr id="19" name="PPAGENT_QA|within=funnel-note-1|role=body">
+            <a:extLst xmlns:a="http://schemas.openxmlformats.org/drawingml/2006/main">
+              <a:ext uri="{FF2B5EF4-FFF2-40B4-BE49-F238E27FC236}">
+                <a16:creationId xmlns:a16="http://schemas.microsoft.com/office/drawing/2014/main" id="{DFB25C47-F003-42E4-892E-1B66FBD051FE}"/>
+              </a:ext>
+            </a:extLst>
+          </p:cNvPr>
+          <p:cNvSpPr>
+            <a:spLocks xmlns:a="http://schemas.openxmlformats.org/drawingml/2006/main" noGrp="1"/>
+          </p:cNvSpPr>
+          <p:nvPr/>
+        </p:nvSpPr>
+        <p:spPr>
+          <a:xfrm xmlns:a="http://schemas.openxmlformats.org/drawingml/2006/main">
+            <a:off x="7162800" y="2971800"/>
+            <a:ext cx="4000500" cy="581025"/>
+          </a:xfrm>
+          <a:prstGeom xmlns:a="http://schemas.openxmlformats.org/drawingml/2006/main" prst="rect">
+            <a:avLst/>
+          </a:prstGeom>
+          <a:noFill xmlns:a="http://schemas.openxmlformats.org/drawingml/2006/main"/>
+          <a:ln xmlns:a="http://schemas.openxmlformats.org/drawingml/2006/main" w="0">
+            <a:noFill/>
+            <a:prstDash val="solid"/>
+          </a:ln>
+        </p:spPr>
+        <p:txBody>
+          <a:bodyPr xmlns:a="http://schemas.openxmlformats.org/drawingml/2006/main" lIns="0" tIns="0" rIns="0" bIns="0" anchor="t">
+            <a:normAutofit fontScale="100000"/>
+          </a:bodyPr>
+          <a:lstStyle xmlns:a="http://schemas.openxmlformats.org/drawingml/2006/main"/>
+          <a:p xmlns:a="http://schemas.openxmlformats.org/drawingml/2006/main">
+            <a:pPr algn="l">
+              <a:defRPr sz="1500" b="0">
+                <a:solidFill>
+                  <a:srgbClr val="475569"/>
+                </a:solidFill>
+                <a:latin typeface="Microsoft YaHei"/>
+                <a:ea typeface="Microsoft YaHei"/>
+                <a:cs typeface="Microsoft YaHei"/>
+              </a:defRPr>
+            </a:pPr>
+            <a:r>
+              <a:rPr sz="1500" b="0">
+                <a:solidFill>
+                  <a:srgbClr val="475569"/>
+                </a:solidFill>
+                <a:latin typeface="Microsoft YaHei"/>
+                <a:ea typeface="Microsoft YaHei"/>
+                <a:cs typeface="Microsoft YaHei"/>
+              </a:rPr>
+              <a:t>完成叙事拆页与职责判断</a:t>
+            </a:r>
+          </a:p>
+        </p:txBody>
+      </p:sp>
+      <p:sp>
+        <p:nvSpPr>
+          <p:cNvPr id="20" name="PPAGENT_CONNECTOR|from=funnel-stage-1|fromSide=right|to=funnel-note-1|toSide=left">
+            <a:extLst xmlns:a="http://schemas.openxmlformats.org/drawingml/2006/main">
+              <a:ext uri="{FF2B5EF4-FFF2-40B4-BE49-F238E27FC236}">
+                <a16:creationId xmlns:a16="http://schemas.microsoft.com/office/drawing/2014/main" id="{80A1A620-B379-48E3-8932-DEABD7415AE7}"/>
+              </a:ext>
+            </a:extLst>
+          </p:cNvPr>
+          <p:cNvSpPr>
+            <a:spLocks xmlns:a="http://schemas.openxmlformats.org/drawingml/2006/main" noGrp="1"/>
+          </p:cNvSpPr>
+          <p:nvPr/>
+        </p:nvSpPr>
+        <p:spPr>
+          <a:xfrm xmlns:a="http://schemas.openxmlformats.org/drawingml/2006/main" flipH="0" flipV="0">
+            <a:off x="5495925" y="3100388"/>
+            <a:ext cx="1419225" cy="0"/>
+          </a:xfrm>
+          <a:prstGeom xmlns:a="http://schemas.openxmlformats.org/drawingml/2006/main" prst="line">
+            <a:avLst/>
+          </a:prstGeom>
+          <a:noFill xmlns:a="http://schemas.openxmlformats.org/drawingml/2006/main"/>
+          <a:ln xmlns:a="http://schemas.openxmlformats.org/drawingml/2006/main" w="12383">
+            <a:solidFill>
+              <a:srgbClr val="91B8D7"/>
+            </a:solidFill>
+            <a:prstDash val="solid"/>
+          </a:ln>
+        </p:spPr>
+      </p:sp>
+      <p:sp>
+        <p:nvSpPr>
+          <p:cNvPr id="21" name="PPAGENT_QA|parent=funnel-stage-2|domains=funnel-shape,funnel-content">
+            <a:extLst xmlns:a="http://schemas.openxmlformats.org/drawingml/2006/main">
+              <a:ext uri="{FF2B5EF4-FFF2-40B4-BE49-F238E27FC236}">
+                <a16:creationId xmlns:a16="http://schemas.microsoft.com/office/drawing/2014/main" id="{43E459CB-4831-453D-8041-B5F54C9CE842}"/>
+              </a:ext>
+            </a:extLst>
+          </p:cNvPr>
+          <p:cNvSpPr>
+            <a:spLocks xmlns:a="http://schemas.openxmlformats.org/drawingml/2006/main" noGrp="1"/>
+          </p:cNvSpPr>
+          <p:nvPr/>
+        </p:nvSpPr>
+        <p:spPr>
+          <a:xfrm xmlns:a="http://schemas.openxmlformats.org/drawingml/2006/main" flipV="1">
+            <a:off x="1733550" y="3676650"/>
+            <a:ext cx="3238500" cy="1000125"/>
+          </a:xfrm>
+          <a:prstGeom xmlns:a="http://schemas.openxmlformats.org/drawingml/2006/main" prst="trapezoid">
+            <a:avLst/>
+          </a:prstGeom>
+          <a:solidFill xmlns:a="http://schemas.openxmlformats.org/drawingml/2006/main">
+            <a:srgbClr val="167FC1"/>
+          </a:solidFill>
+          <a:ln xmlns:a="http://schemas.openxmlformats.org/drawingml/2006/main" w="19050">
+            <a:solidFill>
+              <a:srgbClr val="FFFFFF"/>
+            </a:solidFill>
+            <a:prstDash val="solid"/>
+          </a:ln>
+        </p:spPr>
+        <p:style>
+          <a:lnRef xmlns:a="http://schemas.openxmlformats.org/drawingml/2006/main" idx="0"/>
+          <a:fillRef xmlns:a="http://schemas.openxmlformats.org/drawingml/2006/main" idx="0"/>
+          <a:effectRef xmlns:a="http://schemas.openxmlformats.org/drawingml/2006/main" idx="4"/>
+          <a:fontRef xmlns:a="http://schemas.openxmlformats.org/drawingml/2006/main" idx="major"/>
+        </p:style>
+      </p:sp>
+      <p:sp>
+        <p:nvSpPr>
+          <p:cNvPr id="22" name="PPAGENT_QA|parent=funnel-face-2|domains=funnel-face">
+            <a:extLst xmlns:a="http://schemas.openxmlformats.org/drawingml/2006/main">
+              <a:ext uri="{FF2B5EF4-FFF2-40B4-BE49-F238E27FC236}">
+                <a16:creationId xmlns:a16="http://schemas.microsoft.com/office/drawing/2014/main" id="{F423A3E1-3F43-48A2-8865-3A1EF979F6D5}"/>
+              </a:ext>
+            </a:extLst>
+          </p:cNvPr>
+          <p:cNvSpPr>
+            <a:spLocks xmlns:a="http://schemas.openxmlformats.org/drawingml/2006/main" noGrp="1"/>
+          </p:cNvSpPr>
+          <p:nvPr/>
+        </p:nvSpPr>
+        <p:spPr>
+          <a:xfrm xmlns:a="http://schemas.openxmlformats.org/drawingml/2006/main">
+            <a:off x="1733550" y="3609975"/>
+            <a:ext cx="3238500" cy="228600"/>
+          </a:xfrm>
+          <a:prstGeom xmlns:a="http://schemas.openxmlformats.org/drawingml/2006/main" prst="ellipse">
+            <a:avLst/>
+          </a:prstGeom>
+          <a:solidFill xmlns:a="http://schemas.openxmlformats.org/drawingml/2006/main">
+            <a:srgbClr val="167FC1"/>
+          </a:solidFill>
+          <a:ln xmlns:a="http://schemas.openxmlformats.org/drawingml/2006/main" w="11430">
+            <a:solidFill>
+              <a:srgbClr val="D9F1FA"/>
+            </a:solidFill>
+            <a:prstDash val="solid"/>
+          </a:ln>
+        </p:spPr>
+      </p:sp>
+      <p:sp>
+        <p:nvSpPr>
+          <p:cNvPr id="23" name="PPAGENT_QA|within=funnel-stage-2|role=rate">
+            <a:extLst xmlns:a="http://schemas.openxmlformats.org/drawingml/2006/main">
+              <a:ext uri="{FF2B5EF4-FFF2-40B4-BE49-F238E27FC236}">
+                <a16:creationId xmlns:a16="http://schemas.microsoft.com/office/drawing/2014/main" id="{D79DBF14-644E-447C-AA1B-9AF2F224B9CD}"/>
+              </a:ext>
+            </a:extLst>
+          </p:cNvPr>
+          <p:cNvSpPr>
+            <a:spLocks xmlns:a="http://schemas.openxmlformats.org/drawingml/2006/main" noGrp="1"/>
+          </p:cNvSpPr>
+          <p:nvPr/>
+        </p:nvSpPr>
+        <p:spPr>
+          <a:xfrm xmlns:a="http://schemas.openxmlformats.org/drawingml/2006/main">
+            <a:off x="1885950" y="3771900"/>
+            <a:ext cx="2933700" cy="276225"/>
+          </a:xfrm>
+          <a:prstGeom xmlns:a="http://schemas.openxmlformats.org/drawingml/2006/main" prst="rect">
+            <a:avLst/>
+          </a:prstGeom>
+          <a:noFill xmlns:a="http://schemas.openxmlformats.org/drawingml/2006/main"/>
+          <a:ln xmlns:a="http://schemas.openxmlformats.org/drawingml/2006/main" w="0">
+            <a:noFill/>
+            <a:prstDash val="solid"/>
+          </a:ln>
+        </p:spPr>
+        <p:txBody>
+          <a:bodyPr xmlns:a="http://schemas.openxmlformats.org/drawingml/2006/main" lIns="0" tIns="0" rIns="0" bIns="0" anchor="ctr">
+            <a:normAutofit fontScale="100000"/>
+          </a:bodyPr>
+          <a:lstStyle xmlns:a="http://schemas.openxmlformats.org/drawingml/2006/main"/>
+          <a:p xmlns:a="http://schemas.openxmlformats.org/drawingml/2006/main">
+            <a:pPr algn="ctr">
+              <a:defRPr sz="1800" b="1">
+                <a:solidFill>
+                  <a:srgbClr val="F6C96A"/>
+                </a:solidFill>
+                <a:latin typeface="Microsoft YaHei"/>
+                <a:ea typeface="Microsoft YaHei"/>
+                <a:cs typeface="Microsoft YaHei"/>
+              </a:defRPr>
+            </a:pPr>
+            <a:r>
+              <a:rPr sz="1800" b="1">
+                <a:solidFill>
+                  <a:srgbClr val="F6C96A"/>
+                </a:solidFill>
+                <a:latin typeface="Microsoft YaHei"/>
+                <a:ea typeface="Microsoft YaHei"/>
+                <a:cs typeface="Microsoft YaHei"/>
+              </a:rPr>
+              <a:t>68%</a:t>
+            </a:r>
+          </a:p>
+        </p:txBody>
+      </p:sp>
+      <p:sp>
+        <p:nvSpPr>
+          <p:cNvPr id="24" name="PPAGENT_QA|parent=funnel-label-2|domains=funnel-label">
+            <a:extLst xmlns:a="http://schemas.openxmlformats.org/drawingml/2006/main">
+              <a:ext uri="{FF2B5EF4-FFF2-40B4-BE49-F238E27FC236}">
+                <a16:creationId xmlns:a16="http://schemas.microsoft.com/office/drawing/2014/main" id="{DC161EA7-CE09-4C22-9240-B921C86DD657}"/>
+              </a:ext>
+            </a:extLst>
+          </p:cNvPr>
+          <p:cNvSpPr>
+            <a:spLocks xmlns:a="http://schemas.openxmlformats.org/drawingml/2006/main" noGrp="1"/>
+          </p:cNvSpPr>
+          <p:nvPr/>
+        </p:nvSpPr>
+        <p:spPr>
+          <a:xfrm xmlns:a="http://schemas.openxmlformats.org/drawingml/2006/main">
+            <a:off x="1885950" y="4038600"/>
+            <a:ext cx="2933700" cy="295275"/>
+          </a:xfrm>
+          <a:prstGeom xmlns:a="http://schemas.openxmlformats.org/drawingml/2006/main" prst="rect">
+            <a:avLst/>
+          </a:prstGeom>
+          <a:noFill xmlns:a="http://schemas.openxmlformats.org/drawingml/2006/main"/>
+          <a:ln xmlns:a="http://schemas.openxmlformats.org/drawingml/2006/main" w="0">
+            <a:noFill/>
+            <a:prstDash val="solid"/>
+          </a:ln>
+        </p:spPr>
+        <p:txBody>
+          <a:bodyPr xmlns:a="http://schemas.openxmlformats.org/drawingml/2006/main" lIns="0" tIns="0" rIns="0" bIns="0" anchor="ctr">
+            <a:normAutofit fontScale="100000"/>
+          </a:bodyPr>
+          <a:lstStyle xmlns:a="http://schemas.openxmlformats.org/drawingml/2006/main"/>
+          <a:p xmlns:a="http://schemas.openxmlformats.org/drawingml/2006/main">
+            <a:pPr algn="ctr">
+              <a:defRPr sz="1500" b="1">
+                <a:solidFill>
+                  <a:srgbClr val="FFFFFF"/>
+                </a:solidFill>
+                <a:latin typeface="Microsoft YaHei"/>
+                <a:ea typeface="Microsoft YaHei"/>
+                <a:cs typeface="Microsoft YaHei"/>
+              </a:defRPr>
+            </a:pPr>
+            <a:r>
+              <a:rPr sz="1500" b="1">
+                <a:solidFill>
+                  <a:srgbClr val="FFFFFF"/>
+                </a:solidFill>
+                <a:latin typeface="Microsoft YaHei"/>
+                <a:ea typeface="Microsoft YaHei"/>
+                <a:cs typeface="Microsoft YaHei"/>
+              </a:rPr>
+              <a:t>匹配资产</a:t>
+            </a:r>
+          </a:p>
+        </p:txBody>
+      </p:sp>
+      <p:sp>
+        <p:nvSpPr>
+          <p:cNvPr id="25" name="PPAGENT_QA|parent=funnel-note-2|domains=funnel-note,funnel-content">
+            <a:extLst xmlns:a="http://schemas.openxmlformats.org/drawingml/2006/main">
+              <a:ext uri="{FF2B5EF4-FFF2-40B4-BE49-F238E27FC236}">
+                <a16:creationId xmlns:a16="http://schemas.microsoft.com/office/drawing/2014/main" id="{790DDAF0-E510-460A-BE85-D5CCB31BB623}"/>
+              </a:ext>
+            </a:extLst>
+          </p:cNvPr>
+          <p:cNvSpPr>
+            <a:spLocks xmlns:a="http://schemas.openxmlformats.org/drawingml/2006/main" noGrp="1"/>
+          </p:cNvSpPr>
+          <p:nvPr/>
+        </p:nvSpPr>
+        <p:spPr>
+          <a:xfrm xmlns:a="http://schemas.openxmlformats.org/drawingml/2006/main">
+            <a:off x="6915150" y="3686175"/>
+            <a:ext cx="4552950" cy="981075"/>
+          </a:xfrm>
+          <a:prstGeom xmlns:a="http://schemas.openxmlformats.org/drawingml/2006/main" prst="roundRect">
+            <a:avLst>
+              <a:gd name="adj" fmla="val 11650"/>
+            </a:avLst>
+          </a:prstGeom>
+          <a:solidFill xmlns:a="http://schemas.openxmlformats.org/drawingml/2006/main">
+            <a:srgbClr val="FFFFFF"/>
+          </a:solidFill>
+          <a:ln xmlns:a="http://schemas.openxmlformats.org/drawingml/2006/main" w="9525">
+            <a:solidFill>
+              <a:srgbClr val="D8E5EF"/>
+            </a:solidFill>
+            <a:prstDash val="solid"/>
+          </a:ln>
+        </p:spPr>
+      </p:sp>
+      <p:sp>
+        <p:nvSpPr>
+          <p:cNvPr id="26" name="">
+            <a:extLst xmlns:a="http://schemas.openxmlformats.org/drawingml/2006/main">
+              <a:ext uri="{FF2B5EF4-FFF2-40B4-BE49-F238E27FC236}">
+                <a16:creationId xmlns:a16="http://schemas.microsoft.com/office/drawing/2014/main" id="{6AB19B53-5326-4EAE-8F2A-CC2BB1C1290B}"/>
+              </a:ext>
+            </a:extLst>
+          </p:cNvPr>
+          <p:cNvSpPr>
+            <a:spLocks xmlns:a="http://schemas.openxmlformats.org/drawingml/2006/main" noGrp="1"/>
+          </p:cNvSpPr>
+          <p:nvPr/>
+        </p:nvSpPr>
+        <p:spPr>
+          <a:xfrm xmlns:a="http://schemas.openxmlformats.org/drawingml/2006/main">
+            <a:off x="6915150" y="3686175"/>
+            <a:ext cx="57150" cy="981075"/>
+          </a:xfrm>
+          <a:prstGeom xmlns:a="http://schemas.openxmlformats.org/drawingml/2006/main" prst="roundRect">
+            <a:avLst>
+              <a:gd name="adj" fmla="val 33333"/>
+            </a:avLst>
+          </a:prstGeom>
+          <a:solidFill xmlns:a="http://schemas.openxmlformats.org/drawingml/2006/main">
+            <a:srgbClr val="167FC1"/>
+          </a:solidFill>
+          <a:ln xmlns:a="http://schemas.openxmlformats.org/drawingml/2006/main" w="0">
+            <a:noFill/>
+            <a:prstDash val="solid"/>
+          </a:ln>
+        </p:spPr>
+      </p:sp>
+      <p:sp>
+        <p:nvSpPr>
+          <p:cNvPr id="27" name="PPAGENT_QA|within=funnel-note-2|role=title">
+            <a:extLst xmlns:a="http://schemas.openxmlformats.org/drawingml/2006/main">
+              <a:ext uri="{FF2B5EF4-FFF2-40B4-BE49-F238E27FC236}">
+                <a16:creationId xmlns:a16="http://schemas.microsoft.com/office/drawing/2014/main" id="{C7AE15A7-19C2-4FBB-B20B-95397539617C}"/>
+              </a:ext>
+            </a:extLst>
+          </p:cNvPr>
+          <p:cNvSpPr>
+            <a:spLocks xmlns:a="http://schemas.openxmlformats.org/drawingml/2006/main" noGrp="1"/>
+          </p:cNvSpPr>
+          <p:nvPr/>
+        </p:nvSpPr>
+        <p:spPr>
+          <a:xfrm xmlns:a="http://schemas.openxmlformats.org/drawingml/2006/main">
+            <a:off x="7162800" y="3781425"/>
+            <a:ext cx="4000500" cy="257175"/>
+          </a:xfrm>
+          <a:prstGeom xmlns:a="http://schemas.openxmlformats.org/drawingml/2006/main" prst="rect">
+            <a:avLst/>
+          </a:prstGeom>
+          <a:noFill xmlns:a="http://schemas.openxmlformats.org/drawingml/2006/main"/>
+          <a:ln xmlns:a="http://schemas.openxmlformats.org/drawingml/2006/main" w="0">
+            <a:noFill/>
+            <a:prstDash val="solid"/>
+          </a:ln>
+        </p:spPr>
+        <p:txBody>
+          <a:bodyPr xmlns:a="http://schemas.openxmlformats.org/drawingml/2006/main" lIns="0" tIns="0" rIns="0" bIns="0" anchor="ctr">
+            <a:normAutofit fontScale="100000"/>
+          </a:bodyPr>
+          <a:lstStyle xmlns:a="http://schemas.openxmlformats.org/drawingml/2006/main"/>
+          <a:p xmlns:a="http://schemas.openxmlformats.org/drawingml/2006/main">
+            <a:pPr algn="l">
+              <a:defRPr sz="1350" b="1">
+                <a:solidFill>
+                  <a:srgbClr val="1677C8"/>
+                </a:solidFill>
+                <a:latin typeface="Microsoft YaHei"/>
+                <a:ea typeface="Microsoft YaHei"/>
+                <a:cs typeface="Microsoft YaHei"/>
+              </a:defRPr>
+            </a:pPr>
+            <a:r>
+              <a:rPr sz="1350" b="1">
+                <a:solidFill>
+                  <a:srgbClr val="1677C8"/>
+                </a:solidFill>
+                <a:latin typeface="Microsoft YaHei"/>
+                <a:ea typeface="Microsoft YaHei"/>
+                <a:cs typeface="Microsoft YaHei"/>
+              </a:rPr>
+              <a:t>03  匹配资产</a:t>
+            </a:r>
+          </a:p>
+        </p:txBody>
+      </p:sp>
+      <p:sp>
+        <p:nvSpPr>
+          <p:cNvPr id="28" name="PPAGENT_QA|within=funnel-note-2|role=body">
+            <a:extLst xmlns:a="http://schemas.openxmlformats.org/drawingml/2006/main">
+              <a:ext uri="{FF2B5EF4-FFF2-40B4-BE49-F238E27FC236}">
+                <a16:creationId xmlns:a16="http://schemas.microsoft.com/office/drawing/2014/main" id="{81E1DD95-5747-40BD-A961-12D09A9027EB}"/>
+              </a:ext>
+            </a:extLst>
+          </p:cNvPr>
+          <p:cNvSpPr>
+            <a:spLocks xmlns:a="http://schemas.openxmlformats.org/drawingml/2006/main" noGrp="1"/>
+          </p:cNvSpPr>
+          <p:nvPr/>
+        </p:nvSpPr>
+        <p:spPr>
+          <a:xfrm xmlns:a="http://schemas.openxmlformats.org/drawingml/2006/main">
+            <a:off x="7162800" y="4048125"/>
+            <a:ext cx="4000500" cy="581025"/>
+          </a:xfrm>
+          <a:prstGeom xmlns:a="http://schemas.openxmlformats.org/drawingml/2006/main" prst="rect">
+            <a:avLst/>
+          </a:prstGeom>
+          <a:noFill xmlns:a="http://schemas.openxmlformats.org/drawingml/2006/main"/>
+          <a:ln xmlns:a="http://schemas.openxmlformats.org/drawingml/2006/main" w="0">
+            <a:noFill/>
+            <a:prstDash val="solid"/>
+          </a:ln>
+        </p:spPr>
+        <p:txBody>
+          <a:bodyPr xmlns:a="http://schemas.openxmlformats.org/drawingml/2006/main" lIns="0" tIns="0" rIns="0" bIns="0" anchor="t">
+            <a:normAutofit fontScale="100000"/>
+          </a:bodyPr>
+          <a:lstStyle xmlns:a="http://schemas.openxmlformats.org/drawingml/2006/main"/>
+          <a:p xmlns:a="http://schemas.openxmlformats.org/drawingml/2006/main">
+            <a:pPr algn="l">
+              <a:defRPr sz="1500" b="0">
+                <a:solidFill>
+                  <a:srgbClr val="475569"/>
+                </a:solidFill>
+                <a:latin typeface="Microsoft YaHei"/>
+                <a:ea typeface="Microsoft YaHei"/>
+                <a:cs typeface="Microsoft YaHei"/>
+              </a:defRPr>
+            </a:pPr>
+            <a:r>
+              <a:rPr sz="1500" b="0">
+                <a:solidFill>
+                  <a:srgbClr val="475569"/>
+                </a:solidFill>
+                <a:latin typeface="Microsoft YaHei"/>
+                <a:ea typeface="Microsoft YaHei"/>
+                <a:cs typeface="Microsoft YaHei"/>
+              </a:rPr>
+              <a:t>选择合法结构与样式组</a:t>
+            </a:r>
+          </a:p>
+        </p:txBody>
+      </p:sp>
+      <p:sp>
+        <p:nvSpPr>
+          <p:cNvPr id="29" name="PPAGENT_CONNECTOR|from=funnel-stage-2|fromSide=right|to=funnel-note-2|toSide=left">
+            <a:extLst xmlns:a="http://schemas.openxmlformats.org/drawingml/2006/main">
+              <a:ext uri="{FF2B5EF4-FFF2-40B4-BE49-F238E27FC236}">
+                <a16:creationId xmlns:a16="http://schemas.microsoft.com/office/drawing/2014/main" id="{48D25F70-E488-4832-969E-81831D1800A4}"/>
+              </a:ext>
+            </a:extLst>
+          </p:cNvPr>
+          <p:cNvSpPr>
+            <a:spLocks xmlns:a="http://schemas.openxmlformats.org/drawingml/2006/main" noGrp="1"/>
+          </p:cNvSpPr>
+          <p:nvPr/>
+        </p:nvSpPr>
+        <p:spPr>
+          <a:xfrm xmlns:a="http://schemas.openxmlformats.org/drawingml/2006/main" flipH="0" flipV="0">
+            <a:off x="4972050" y="4176713"/>
+            <a:ext cx="1943100" cy="0"/>
+          </a:xfrm>
+          <a:prstGeom xmlns:a="http://schemas.openxmlformats.org/drawingml/2006/main" prst="line">
+            <a:avLst/>
+          </a:prstGeom>
+          <a:noFill xmlns:a="http://schemas.openxmlformats.org/drawingml/2006/main"/>
+          <a:ln xmlns:a="http://schemas.openxmlformats.org/drawingml/2006/main" w="12383">
+            <a:solidFill>
+              <a:srgbClr val="91B8D7"/>
+            </a:solidFill>
+            <a:prstDash val="solid"/>
+          </a:ln>
+        </p:spPr>
+      </p:sp>
+      <p:sp>
+        <p:nvSpPr>
+          <p:cNvPr id="30" name="PPAGENT_QA|parent=funnel-stage-3|domains=funnel-shape,funnel-content">
+            <a:extLst xmlns:a="http://schemas.openxmlformats.org/drawingml/2006/main">
+              <a:ext uri="{FF2B5EF4-FFF2-40B4-BE49-F238E27FC236}">
+                <a16:creationId xmlns:a16="http://schemas.microsoft.com/office/drawing/2014/main" id="{6EA80F86-3868-4AA5-8C15-C6504CBED52E}"/>
+              </a:ext>
+            </a:extLst>
+          </p:cNvPr>
+          <p:cNvSpPr>
+            <a:spLocks xmlns:a="http://schemas.openxmlformats.org/drawingml/2006/main" noGrp="1"/>
+          </p:cNvSpPr>
+          <p:nvPr/>
+        </p:nvSpPr>
+        <p:spPr>
+          <a:xfrm xmlns:a="http://schemas.openxmlformats.org/drawingml/2006/main" flipV="1">
+            <a:off x="2257425" y="4752975"/>
+            <a:ext cx="2190750" cy="1000125"/>
+          </a:xfrm>
+          <a:prstGeom xmlns:a="http://schemas.openxmlformats.org/drawingml/2006/main" prst="trapezoid">
+            <a:avLst/>
+          </a:prstGeom>
+          <a:solidFill xmlns:a="http://schemas.openxmlformats.org/drawingml/2006/main">
+            <a:srgbClr val="16A0C4"/>
+          </a:solidFill>
+          <a:ln xmlns:a="http://schemas.openxmlformats.org/drawingml/2006/main" w="19050">
+            <a:solidFill>
+              <a:srgbClr val="FFFFFF"/>
+            </a:solidFill>
+            <a:prstDash val="solid"/>
+          </a:ln>
+        </p:spPr>
+        <p:style>
+          <a:lnRef xmlns:a="http://schemas.openxmlformats.org/drawingml/2006/main" idx="0"/>
+          <a:fillRef xmlns:a="http://schemas.openxmlformats.org/drawingml/2006/main" idx="0"/>
+          <a:effectRef xmlns:a="http://schemas.openxmlformats.org/drawingml/2006/main" idx="4"/>
+          <a:fontRef xmlns:a="http://schemas.openxmlformats.org/drawingml/2006/main" idx="major"/>
+        </p:style>
+      </p:sp>
+      <p:sp>
+        <p:nvSpPr>
+          <p:cNvPr id="31" name="PPAGENT_QA|parent=funnel-face-3|domains=funnel-face">
+            <a:extLst xmlns:a="http://schemas.openxmlformats.org/drawingml/2006/main">
+              <a:ext uri="{FF2B5EF4-FFF2-40B4-BE49-F238E27FC236}">
+                <a16:creationId xmlns:a16="http://schemas.microsoft.com/office/drawing/2014/main" id="{A7E6F1A8-11D2-4C8D-A0EF-84002BABB142}"/>
+              </a:ext>
+            </a:extLst>
+          </p:cNvPr>
+          <p:cNvSpPr>
+            <a:spLocks xmlns:a="http://schemas.openxmlformats.org/drawingml/2006/main" noGrp="1"/>
+          </p:cNvSpPr>
+          <p:nvPr/>
+        </p:nvSpPr>
+        <p:spPr>
+          <a:xfrm xmlns:a="http://schemas.openxmlformats.org/drawingml/2006/main">
+            <a:off x="2257425" y="4686300"/>
+            <a:ext cx="2190750" cy="228600"/>
+          </a:xfrm>
+          <a:prstGeom xmlns:a="http://schemas.openxmlformats.org/drawingml/2006/main" prst="ellipse">
+            <a:avLst/>
+          </a:prstGeom>
+          <a:solidFill xmlns:a="http://schemas.openxmlformats.org/drawingml/2006/main">
+            <a:srgbClr val="16A0C4"/>
+          </a:solidFill>
+          <a:ln xmlns:a="http://schemas.openxmlformats.org/drawingml/2006/main" w="11430">
+            <a:solidFill>
+              <a:srgbClr val="D9F1FA"/>
+            </a:solidFill>
+            <a:prstDash val="solid"/>
+          </a:ln>
+        </p:spPr>
+      </p:sp>
+      <p:sp>
+        <p:nvSpPr>
+          <p:cNvPr id="32" name="PPAGENT_QA|within=funnel-stage-3|role=rate">
+            <a:extLst xmlns:a="http://schemas.openxmlformats.org/drawingml/2006/main">
+              <a:ext uri="{FF2B5EF4-FFF2-40B4-BE49-F238E27FC236}">
+                <a16:creationId xmlns:a16="http://schemas.microsoft.com/office/drawing/2014/main" id="{E1ECB428-A9C9-4135-921A-585422AF149B}"/>
+              </a:ext>
+            </a:extLst>
+          </p:cNvPr>
+          <p:cNvSpPr>
+            <a:spLocks xmlns:a="http://schemas.openxmlformats.org/drawingml/2006/main" noGrp="1"/>
+          </p:cNvSpPr>
+          <p:nvPr/>
+        </p:nvSpPr>
+        <p:spPr>
+          <a:xfrm xmlns:a="http://schemas.openxmlformats.org/drawingml/2006/main">
+            <a:off x="2409825" y="4848225"/>
+            <a:ext cx="1885950" cy="276225"/>
+          </a:xfrm>
+          <a:prstGeom xmlns:a="http://schemas.openxmlformats.org/drawingml/2006/main" prst="rect">
+            <a:avLst/>
+          </a:prstGeom>
+          <a:noFill xmlns:a="http://schemas.openxmlformats.org/drawingml/2006/main"/>
+          <a:ln xmlns:a="http://schemas.openxmlformats.org/drawingml/2006/main" w="0">
+            <a:noFill/>
+            <a:prstDash val="solid"/>
+          </a:ln>
+        </p:spPr>
+        <p:txBody>
+          <a:bodyPr xmlns:a="http://schemas.openxmlformats.org/drawingml/2006/main" lIns="0" tIns="0" rIns="0" bIns="0" anchor="ctr">
+            <a:normAutofit fontScale="100000"/>
+          </a:bodyPr>
+          <a:lstStyle xmlns:a="http://schemas.openxmlformats.org/drawingml/2006/main"/>
+          <a:p xmlns:a="http://schemas.openxmlformats.org/drawingml/2006/main">
+            <a:pPr algn="ctr">
+              <a:defRPr sz="1800" b="1">
+                <a:solidFill>
+                  <a:srgbClr val="F6C96A"/>
+                </a:solidFill>
+                <a:latin typeface="Microsoft YaHei"/>
+                <a:ea typeface="Microsoft YaHei"/>
+                <a:cs typeface="Microsoft YaHei"/>
+              </a:defRPr>
+            </a:pPr>
+            <a:r>
+              <a:rPr sz="1800" b="1">
+                <a:solidFill>
+                  <a:srgbClr val="F6C96A"/>
+                </a:solidFill>
+                <a:latin typeface="Microsoft YaHei"/>
+                <a:ea typeface="Microsoft YaHei"/>
+                <a:cs typeface="Microsoft YaHei"/>
+              </a:rPr>
+              <a:t>54%</a:t>
+            </a:r>
+          </a:p>
+        </p:txBody>
+      </p:sp>
+      <p:sp>
+        <p:nvSpPr>
+          <p:cNvPr id="33" name="PPAGENT_QA|parent=funnel-label-3|domains=funnel-label">
+            <a:extLst xmlns:a="http://schemas.openxmlformats.org/drawingml/2006/main">
+              <a:ext uri="{FF2B5EF4-FFF2-40B4-BE49-F238E27FC236}">
+                <a16:creationId xmlns:a16="http://schemas.microsoft.com/office/drawing/2014/main" id="{33C21369-CDCB-4574-ABB1-9842731AE325}"/>
+              </a:ext>
+            </a:extLst>
+          </p:cNvPr>
+          <p:cNvSpPr>
+            <a:spLocks xmlns:a="http://schemas.openxmlformats.org/drawingml/2006/main" noGrp="1"/>
+          </p:cNvSpPr>
+          <p:nvPr/>
+        </p:nvSpPr>
+        <p:spPr>
+          <a:xfrm xmlns:a="http://schemas.openxmlformats.org/drawingml/2006/main">
+            <a:off x="2409825" y="5114925"/>
+            <a:ext cx="1885950" cy="295275"/>
+          </a:xfrm>
+          <a:prstGeom xmlns:a="http://schemas.openxmlformats.org/drawingml/2006/main" prst="rect">
+            <a:avLst/>
+          </a:prstGeom>
+          <a:noFill xmlns:a="http://schemas.openxmlformats.org/drawingml/2006/main"/>
+          <a:ln xmlns:a="http://schemas.openxmlformats.org/drawingml/2006/main" w="0">
+            <a:noFill/>
+            <a:prstDash val="solid"/>
+          </a:ln>
+        </p:spPr>
+        <p:txBody>
+          <a:bodyPr xmlns:a="http://schemas.openxmlformats.org/drawingml/2006/main" lIns="0" tIns="0" rIns="0" bIns="0" anchor="ctr">
+            <a:normAutofit fontScale="100000"/>
+          </a:bodyPr>
+          <a:lstStyle xmlns:a="http://schemas.openxmlformats.org/drawingml/2006/main"/>
+          <a:p xmlns:a="http://schemas.openxmlformats.org/drawingml/2006/main">
+            <a:pPr algn="ctr">
+              <a:defRPr sz="1500" b="1">
+                <a:solidFill>
+                  <a:srgbClr val="FFFFFF"/>
+                </a:solidFill>
+                <a:latin typeface="Microsoft YaHei"/>
+                <a:ea typeface="Microsoft YaHei"/>
+                <a:cs typeface="Microsoft YaHei"/>
+              </a:defRPr>
+            </a:pPr>
+            <a:r>
+              <a:rPr sz="1500" b="1">
+                <a:solidFill>
+                  <a:srgbClr val="FFFFFF"/>
+                </a:solidFill>
+                <a:latin typeface="Microsoft YaHei"/>
+                <a:ea typeface="Microsoft YaHei"/>
+                <a:cs typeface="Microsoft YaHei"/>
+              </a:rPr>
+              <a:t>完成生成</a:t>
+            </a:r>
+          </a:p>
+        </p:txBody>
+      </p:sp>
+      <p:sp>
+        <p:nvSpPr>
+          <p:cNvPr id="34" name="PPAGENT_QA|parent=funnel-note-3|domains=funnel-note,funnel-content">
+            <a:extLst xmlns:a="http://schemas.openxmlformats.org/drawingml/2006/main">
+              <a:ext uri="{FF2B5EF4-FFF2-40B4-BE49-F238E27FC236}">
+                <a16:creationId xmlns:a16="http://schemas.microsoft.com/office/drawing/2014/main" id="{020925C1-B403-43C8-9AAD-70C103674CC6}"/>
+              </a:ext>
+            </a:extLst>
+          </p:cNvPr>
+          <p:cNvSpPr>
+            <a:spLocks xmlns:a="http://schemas.openxmlformats.org/drawingml/2006/main" noGrp="1"/>
+          </p:cNvSpPr>
+          <p:nvPr/>
+        </p:nvSpPr>
+        <p:spPr>
+          <a:xfrm xmlns:a="http://schemas.openxmlformats.org/drawingml/2006/main">
+            <a:off x="6915150" y="4762500"/>
+            <a:ext cx="4552950" cy="981075"/>
+          </a:xfrm>
+          <a:prstGeom xmlns:a="http://schemas.openxmlformats.org/drawingml/2006/main" prst="roundRect">
+            <a:avLst>
+              <a:gd name="adj" fmla="val 11650"/>
+            </a:avLst>
+          </a:prstGeom>
+          <a:solidFill xmlns:a="http://schemas.openxmlformats.org/drawingml/2006/main">
+            <a:srgbClr val="F7FAFC"/>
+          </a:solidFill>
+          <a:ln xmlns:a="http://schemas.openxmlformats.org/drawingml/2006/main" w="9525">
+            <a:solidFill>
+              <a:srgbClr val="D8E5EF"/>
+            </a:solidFill>
+            <a:prstDash val="solid"/>
+          </a:ln>
+        </p:spPr>
+      </p:sp>
+      <p:sp>
+        <p:nvSpPr>
+          <p:cNvPr id="35" name="">
+            <a:extLst xmlns:a="http://schemas.openxmlformats.org/drawingml/2006/main">
+              <a:ext uri="{FF2B5EF4-FFF2-40B4-BE49-F238E27FC236}">
+                <a16:creationId xmlns:a16="http://schemas.microsoft.com/office/drawing/2014/main" id="{37F62223-D0EF-4A7C-A2A9-AB5314FD4A26}"/>
+              </a:ext>
+            </a:extLst>
+          </p:cNvPr>
+          <p:cNvSpPr>
+            <a:spLocks xmlns:a="http://schemas.openxmlformats.org/drawingml/2006/main" noGrp="1"/>
+          </p:cNvSpPr>
+          <p:nvPr/>
+        </p:nvSpPr>
+        <p:spPr>
+          <a:xfrm xmlns:a="http://schemas.openxmlformats.org/drawingml/2006/main">
+            <a:off x="6915150" y="4762500"/>
+            <a:ext cx="57150" cy="981075"/>
+          </a:xfrm>
+          <a:prstGeom xmlns:a="http://schemas.openxmlformats.org/drawingml/2006/main" prst="roundRect">
+            <a:avLst>
+              <a:gd name="adj" fmla="val 33333"/>
+            </a:avLst>
+          </a:prstGeom>
+          <a:solidFill xmlns:a="http://schemas.openxmlformats.org/drawingml/2006/main">
+            <a:srgbClr val="16A0C4"/>
+          </a:solidFill>
+          <a:ln xmlns:a="http://schemas.openxmlformats.org/drawingml/2006/main" w="0">
+            <a:noFill/>
+            <a:prstDash val="solid"/>
+          </a:ln>
+        </p:spPr>
+      </p:sp>
+      <p:sp>
+        <p:nvSpPr>
+          <p:cNvPr id="36" name="PPAGENT_QA|within=funnel-note-3|role=title">
+            <a:extLst xmlns:a="http://schemas.openxmlformats.org/drawingml/2006/main">
+              <a:ext uri="{FF2B5EF4-FFF2-40B4-BE49-F238E27FC236}">
+                <a16:creationId xmlns:a16="http://schemas.microsoft.com/office/drawing/2014/main" id="{5B5F7A43-E60C-464E-81B7-000826DB3D00}"/>
+              </a:ext>
+            </a:extLst>
+          </p:cNvPr>
+          <p:cNvSpPr>
+            <a:spLocks xmlns:a="http://schemas.openxmlformats.org/drawingml/2006/main" noGrp="1"/>
+          </p:cNvSpPr>
+          <p:nvPr/>
+        </p:nvSpPr>
+        <p:spPr>
+          <a:xfrm xmlns:a="http://schemas.openxmlformats.org/drawingml/2006/main">
+            <a:off x="7162800" y="4857750"/>
+            <a:ext cx="4000500" cy="257175"/>
+          </a:xfrm>
+          <a:prstGeom xmlns:a="http://schemas.openxmlformats.org/drawingml/2006/main" prst="rect">
+            <a:avLst/>
+          </a:prstGeom>
+          <a:noFill xmlns:a="http://schemas.openxmlformats.org/drawingml/2006/main"/>
+          <a:ln xmlns:a="http://schemas.openxmlformats.org/drawingml/2006/main" w="0">
+            <a:noFill/>
+            <a:prstDash val="solid"/>
+          </a:ln>
+        </p:spPr>
+        <p:txBody>
+          <a:bodyPr xmlns:a="http://schemas.openxmlformats.org/drawingml/2006/main" lIns="0" tIns="0" rIns="0" bIns="0" anchor="ctr">
+            <a:normAutofit fontScale="100000"/>
+          </a:bodyPr>
+          <a:lstStyle xmlns:a="http://schemas.openxmlformats.org/drawingml/2006/main"/>
+          <a:p xmlns:a="http://schemas.openxmlformats.org/drawingml/2006/main">
+            <a:pPr algn="l">
+              <a:defRPr sz="1350" b="1">
+                <a:solidFill>
+                  <a:srgbClr val="1677C8"/>
+                </a:solidFill>
+                <a:latin typeface="Microsoft YaHei"/>
+                <a:ea typeface="Microsoft YaHei"/>
+                <a:cs typeface="Microsoft YaHei"/>
+              </a:defRPr>
+            </a:pPr>
+            <a:r>
+              <a:rPr sz="1350" b="1">
+                <a:solidFill>
+                  <a:srgbClr val="1677C8"/>
+                </a:solidFill>
+                <a:latin typeface="Microsoft YaHei"/>
+                <a:ea typeface="Microsoft YaHei"/>
+                <a:cs typeface="Microsoft YaHei"/>
+              </a:rPr>
+              <a:t>04  完成生成</a:t>
+            </a:r>
+          </a:p>
+        </p:txBody>
+      </p:sp>
+      <p:sp>
+        <p:nvSpPr>
+          <p:cNvPr id="37" name="PPAGENT_QA|within=funnel-note-3|role=body">
+            <a:extLst xmlns:a="http://schemas.openxmlformats.org/drawingml/2006/main">
+              <a:ext uri="{FF2B5EF4-FFF2-40B4-BE49-F238E27FC236}">
+                <a16:creationId xmlns:a16="http://schemas.microsoft.com/office/drawing/2014/main" id="{52725E46-B8BD-43CD-8098-DA3006E9D305}"/>
+              </a:ext>
+            </a:extLst>
+          </p:cNvPr>
+          <p:cNvSpPr>
+            <a:spLocks xmlns:a="http://schemas.openxmlformats.org/drawingml/2006/main" noGrp="1"/>
+          </p:cNvSpPr>
+          <p:nvPr/>
+        </p:nvSpPr>
+        <p:spPr>
+          <a:xfrm xmlns:a="http://schemas.openxmlformats.org/drawingml/2006/main">
+            <a:off x="7162800" y="5124450"/>
+            <a:ext cx="4000500" cy="581025"/>
+          </a:xfrm>
+          <a:prstGeom xmlns:a="http://schemas.openxmlformats.org/drawingml/2006/main" prst="rect">
+            <a:avLst/>
+          </a:prstGeom>
+          <a:noFill xmlns:a="http://schemas.openxmlformats.org/drawingml/2006/main"/>
+          <a:ln xmlns:a="http://schemas.openxmlformats.org/drawingml/2006/main" w="0">
+            <a:noFill/>
+            <a:prstDash val="solid"/>
+          </a:ln>
+        </p:spPr>
+        <p:txBody>
+          <a:bodyPr xmlns:a="http://schemas.openxmlformats.org/drawingml/2006/main" lIns="0" tIns="0" rIns="0" bIns="0" anchor="t">
+            <a:normAutofit fontScale="100000"/>
+          </a:bodyPr>
+          <a:lstStyle xmlns:a="http://schemas.openxmlformats.org/drawingml/2006/main"/>
+          <a:p xmlns:a="http://schemas.openxmlformats.org/drawingml/2006/main">
+            <a:pPr algn="l">
+              <a:defRPr sz="1500" b="0">
+                <a:solidFill>
+                  <a:srgbClr val="475569"/>
+                </a:solidFill>
+                <a:latin typeface="Microsoft YaHei"/>
+                <a:ea typeface="Microsoft YaHei"/>
+                <a:cs typeface="Microsoft YaHei"/>
+              </a:defRPr>
+            </a:pPr>
+            <a:r>
+              <a:rPr sz="1500" b="0">
+                <a:solidFill>
+                  <a:srgbClr val="475569"/>
+                </a:solidFill>
+                <a:latin typeface="Microsoft YaHei"/>
+                <a:ea typeface="Microsoft YaHei"/>
+                <a:cs typeface="Microsoft YaHei"/>
+              </a:rPr>
+              <a:t>输出原生可编辑页面</a:t>
+            </a:r>
+          </a:p>
+        </p:txBody>
+      </p:sp>
+      <p:sp>
+        <p:nvSpPr>
+          <p:cNvPr id="38" name="PPAGENT_CONNECTOR|from=funnel-stage-3|fromSide=right|to=funnel-note-3|toSide=left">
+            <a:extLst xmlns:a="http://schemas.openxmlformats.org/drawingml/2006/main">
+              <a:ext uri="{FF2B5EF4-FFF2-40B4-BE49-F238E27FC236}">
+                <a16:creationId xmlns:a16="http://schemas.microsoft.com/office/drawing/2014/main" id="{9EF9F1E7-ABA7-4D1B-95C8-27110DD5FA21}"/>
+              </a:ext>
+            </a:extLst>
+          </p:cNvPr>
+          <p:cNvSpPr>
+            <a:spLocks xmlns:a="http://schemas.openxmlformats.org/drawingml/2006/main" noGrp="1"/>
+          </p:cNvSpPr>
+          <p:nvPr/>
+        </p:nvSpPr>
+        <p:spPr>
+          <a:xfrm xmlns:a="http://schemas.openxmlformats.org/drawingml/2006/main" flipH="0" flipV="0">
+            <a:off x="4448175" y="5253038"/>
+            <a:ext cx="2466975" cy="0"/>
+          </a:xfrm>
+          <a:prstGeom xmlns:a="http://schemas.openxmlformats.org/drawingml/2006/main" prst="line">
+            <a:avLst/>
+          </a:prstGeom>
+          <a:noFill xmlns:a="http://schemas.openxmlformats.org/drawingml/2006/main"/>
+          <a:ln xmlns:a="http://schemas.openxmlformats.org/drawingml/2006/main" w="12383">
+            <a:solidFill>
+              <a:srgbClr val="91B8D7"/>
+            </a:solidFill>
+            <a:prstDash val="solid"/>
+          </a:ln>
+        </p:spPr>
+      </p:sp>
     </p:spTree>
     <p:extLst>
       <p:ext uri="{BB962C8B-B14F-4D97-AF65-F5344CB8AC3E}">
-        <p14:creationId xmlns:p14="http://schemas.microsoft.com/office/powerpoint/2010/main" val="1001000944"/>
+        <p14:creationId xmlns:p14="http://schemas.microsoft.com/office/powerpoint/2010/main" val="836450585"/>
+      </p:ext>
+    </p:extLst>
+  </p:cSld>
+</p:sld>
+</file>
+
+<file path=ppt/slides/slide3.xml><?xml version="1.0" encoding="utf-8"?>
+<p:sld xmlns:p="http://schemas.openxmlformats.org/presentationml/2006/main">
+  <p:cSld>
+    <p:bg>
+      <p:bgPr>
+        <a:solidFill xmlns:a="http://schemas.openxmlformats.org/drawingml/2006/main">
+          <a:srgbClr val="F7FAFC"/>
+        </a:solidFill>
+      </p:bgPr>
+    </p:bg>
+    <p:spTree>
+      <p:nvGrpSpPr>
+        <p:cNvPr id="1" name=""/>
+        <p:cNvGrpSpPr/>
+        <p:nvPr/>
+      </p:nvGrpSpPr>
+      <p:grpSpPr>
+        <a:xfrm xmlns:a="http://schemas.openxmlformats.org/drawingml/2006/main"/>
+      </p:grpSpPr>
+      <p:sp>
+        <p:nvSpPr>
+          <p:cNvPr id="48" name="">
+            <a:extLst xmlns:a="http://schemas.openxmlformats.org/drawingml/2006/main">
+              <a:ext uri="{FF2B5EF4-FFF2-40B4-BE49-F238E27FC236}">
+                <a16:creationId xmlns:a16="http://schemas.microsoft.com/office/drawing/2014/main" id="{CEC902E8-49D0-44D6-9381-D55A5C41166E}"/>
+              </a:ext>
+            </a:extLst>
+          </p:cNvPr>
+          <p:cNvSpPr>
+            <a:spLocks xmlns:a="http://schemas.openxmlformats.org/drawingml/2006/main" noGrp="1"/>
+          </p:cNvSpPr>
+          <p:nvPr/>
+        </p:nvSpPr>
+        <p:spPr>
+          <a:xfrm xmlns:a="http://schemas.openxmlformats.org/drawingml/2006/main">
+            <a:off x="685800" y="400050"/>
+            <a:ext cx="8382000" cy="457200"/>
+          </a:xfrm>
+          <a:prstGeom xmlns:a="http://schemas.openxmlformats.org/drawingml/2006/main" prst="rect">
+            <a:avLst/>
+          </a:prstGeom>
+          <a:noFill xmlns:a="http://schemas.openxmlformats.org/drawingml/2006/main"/>
+          <a:ln xmlns:a="http://schemas.openxmlformats.org/drawingml/2006/main" w="0">
+            <a:noFill/>
+            <a:prstDash val="solid"/>
+          </a:ln>
+        </p:spPr>
+        <p:txBody>
+          <a:bodyPr xmlns:a="http://schemas.openxmlformats.org/drawingml/2006/main" lIns="0" tIns="0" rIns="0" bIns="0" anchor="ctr">
+            <a:normAutofit fontScale="100000"/>
+          </a:bodyPr>
+          <a:lstStyle xmlns:a="http://schemas.openxmlformats.org/drawingml/2006/main"/>
+          <a:p xmlns:a="http://schemas.openxmlformats.org/drawingml/2006/main">
+            <a:pPr algn="l">
+              <a:defRPr sz="2700" b="1">
+                <a:solidFill>
+                  <a:srgbClr val="1677C8"/>
+                </a:solidFill>
+                <a:latin typeface="Microsoft YaHei"/>
+                <a:ea typeface="Microsoft YaHei"/>
+                <a:cs typeface="Microsoft YaHei"/>
+              </a:defRPr>
+            </a:pPr>
+            <a:r>
+              <a:rPr sz="2700" b="1">
+                <a:solidFill>
+                  <a:srgbClr val="1677C8"/>
+                </a:solidFill>
+                <a:latin typeface="Microsoft YaHei"/>
+                <a:ea typeface="Microsoft YaHei"/>
+                <a:cs typeface="Microsoft YaHei"/>
+              </a:rPr>
+              <a:t>转化漏斗</a:t>
+            </a:r>
+          </a:p>
+        </p:txBody>
+      </p:sp>
+      <p:sp>
+        <p:nvSpPr>
+          <p:cNvPr id="2" name="">
+            <a:extLst xmlns:a="http://schemas.openxmlformats.org/drawingml/2006/main">
+              <a:ext uri="{FF2B5EF4-FFF2-40B4-BE49-F238E27FC236}">
+                <a16:creationId xmlns:a16="http://schemas.microsoft.com/office/drawing/2014/main" id="{69E1F837-6E4D-4EA2-A8B3-24C0FDF1EEAA}"/>
+              </a:ext>
+            </a:extLst>
+          </p:cNvPr>
+          <p:cNvSpPr>
+            <a:spLocks xmlns:a="http://schemas.openxmlformats.org/drawingml/2006/main" noGrp="1"/>
+          </p:cNvSpPr>
+          <p:nvPr/>
+        </p:nvSpPr>
+        <p:spPr>
+          <a:xfrm xmlns:a="http://schemas.openxmlformats.org/drawingml/2006/main">
+            <a:off x="704850" y="876300"/>
+            <a:ext cx="4953000" cy="247650"/>
+          </a:xfrm>
+          <a:prstGeom xmlns:a="http://schemas.openxmlformats.org/drawingml/2006/main" prst="rect">
+            <a:avLst/>
+          </a:prstGeom>
+          <a:noFill xmlns:a="http://schemas.openxmlformats.org/drawingml/2006/main"/>
+          <a:ln xmlns:a="http://schemas.openxmlformats.org/drawingml/2006/main" w="0">
+            <a:noFill/>
+            <a:prstDash val="solid"/>
+          </a:ln>
+        </p:spPr>
+        <p:txBody>
+          <a:bodyPr xmlns:a="http://schemas.openxmlformats.org/drawingml/2006/main" lIns="0" tIns="0" rIns="0" bIns="0" anchor="ctr">
+            <a:normAutofit fontScale="100000"/>
+          </a:bodyPr>
+          <a:lstStyle xmlns:a="http://schemas.openxmlformats.org/drawingml/2006/main"/>
+          <a:p xmlns:a="http://schemas.openxmlformats.org/drawingml/2006/main">
+            <a:pPr algn="l">
+              <a:defRPr sz="1200" b="0">
+                <a:solidFill>
+                  <a:srgbClr val="7C8A9A"/>
+                </a:solidFill>
+                <a:latin typeface="Microsoft YaHei"/>
+                <a:ea typeface="Microsoft YaHei"/>
+                <a:cs typeface="Microsoft YaHei"/>
+              </a:defRPr>
+            </a:pPr>
+            <a:r>
+              <a:rPr sz="1200" b="0">
+                <a:solidFill>
+                  <a:srgbClr val="7C8A9A"/>
+                </a:solidFill>
+                <a:latin typeface="Microsoft YaHei"/>
+                <a:ea typeface="Microsoft YaHei"/>
+                <a:cs typeface="Microsoft YaHei"/>
+              </a:rPr>
+              <a:t>递减转化 · 阶段拆解</a:t>
+            </a:r>
+          </a:p>
+        </p:txBody>
+      </p:sp>
+      <p:sp>
+        <p:nvSpPr>
+          <p:cNvPr id="3" name="PPAGENT_QA|parent=funnel-stage-0|domains=funnel-shape,funnel-content">
+            <a:extLst xmlns:a="http://schemas.openxmlformats.org/drawingml/2006/main">
+              <a:ext uri="{FF2B5EF4-FFF2-40B4-BE49-F238E27FC236}">
+                <a16:creationId xmlns:a16="http://schemas.microsoft.com/office/drawing/2014/main" id="{3A35E64C-88A4-4CED-85CB-E9CC8D0B10BA}"/>
+              </a:ext>
+            </a:extLst>
+          </p:cNvPr>
+          <p:cNvSpPr>
+            <a:spLocks xmlns:a="http://schemas.openxmlformats.org/drawingml/2006/main" noGrp="1"/>
+          </p:cNvSpPr>
+          <p:nvPr/>
+        </p:nvSpPr>
+        <p:spPr>
+          <a:xfrm xmlns:a="http://schemas.openxmlformats.org/drawingml/2006/main" flipV="1">
+            <a:off x="685800" y="1524000"/>
+            <a:ext cx="5334000" cy="784860"/>
+          </a:xfrm>
+          <a:prstGeom xmlns:a="http://schemas.openxmlformats.org/drawingml/2006/main" prst="trapezoid">
+            <a:avLst/>
+          </a:prstGeom>
+          <a:solidFill xmlns:a="http://schemas.openxmlformats.org/drawingml/2006/main">
+            <a:srgbClr val="174B82"/>
+          </a:solidFill>
+          <a:ln xmlns:a="http://schemas.openxmlformats.org/drawingml/2006/main" w="19050">
+            <a:solidFill>
+              <a:srgbClr val="FFFFFF"/>
+            </a:solidFill>
+            <a:prstDash val="solid"/>
+          </a:ln>
+        </p:spPr>
+        <p:style>
+          <a:lnRef xmlns:a="http://schemas.openxmlformats.org/drawingml/2006/main" idx="0"/>
+          <a:fillRef xmlns:a="http://schemas.openxmlformats.org/drawingml/2006/main" idx="0"/>
+          <a:effectRef xmlns:a="http://schemas.openxmlformats.org/drawingml/2006/main" idx="4"/>
+          <a:fontRef xmlns:a="http://schemas.openxmlformats.org/drawingml/2006/main" idx="major"/>
+        </p:style>
+      </p:sp>
+      <p:sp>
+        <p:nvSpPr>
+          <p:cNvPr id="4" name="PPAGENT_QA|parent=funnel-face-0|domains=funnel-face">
+            <a:extLst xmlns:a="http://schemas.openxmlformats.org/drawingml/2006/main">
+              <a:ext uri="{FF2B5EF4-FFF2-40B4-BE49-F238E27FC236}">
+                <a16:creationId xmlns:a16="http://schemas.microsoft.com/office/drawing/2014/main" id="{5E8EFD04-7621-416A-973C-1CE1DBB53356}"/>
+              </a:ext>
+            </a:extLst>
+          </p:cNvPr>
+          <p:cNvSpPr>
+            <a:spLocks xmlns:a="http://schemas.openxmlformats.org/drawingml/2006/main" noGrp="1"/>
+          </p:cNvSpPr>
+          <p:nvPr/>
+        </p:nvSpPr>
+        <p:spPr>
+          <a:xfrm xmlns:a="http://schemas.openxmlformats.org/drawingml/2006/main">
+            <a:off x="685800" y="1457325"/>
+            <a:ext cx="5334000" cy="228600"/>
+          </a:xfrm>
+          <a:prstGeom xmlns:a="http://schemas.openxmlformats.org/drawingml/2006/main" prst="ellipse">
+            <a:avLst/>
+          </a:prstGeom>
+          <a:solidFill xmlns:a="http://schemas.openxmlformats.org/drawingml/2006/main">
+            <a:srgbClr val="174B82"/>
+          </a:solidFill>
+          <a:ln xmlns:a="http://schemas.openxmlformats.org/drawingml/2006/main" w="11430">
+            <a:solidFill>
+              <a:srgbClr val="D9F1FA"/>
+            </a:solidFill>
+            <a:prstDash val="solid"/>
+          </a:ln>
+        </p:spPr>
+      </p:sp>
+      <p:sp>
+        <p:nvSpPr>
+          <p:cNvPr id="5" name="PPAGENT_QA|within=funnel-stage-0|role=rate">
+            <a:extLst xmlns:a="http://schemas.openxmlformats.org/drawingml/2006/main">
+              <a:ext uri="{FF2B5EF4-FFF2-40B4-BE49-F238E27FC236}">
+                <a16:creationId xmlns:a16="http://schemas.microsoft.com/office/drawing/2014/main" id="{78FDD79C-2457-44A6-AE05-E1E861D39023}"/>
+              </a:ext>
+            </a:extLst>
+          </p:cNvPr>
+          <p:cNvSpPr>
+            <a:spLocks xmlns:a="http://schemas.openxmlformats.org/drawingml/2006/main" noGrp="1"/>
+          </p:cNvSpPr>
+          <p:nvPr/>
+        </p:nvSpPr>
+        <p:spPr>
+          <a:xfrm xmlns:a="http://schemas.openxmlformats.org/drawingml/2006/main">
+            <a:off x="838200" y="1619250"/>
+            <a:ext cx="5029200" cy="276225"/>
+          </a:xfrm>
+          <a:prstGeom xmlns:a="http://schemas.openxmlformats.org/drawingml/2006/main" prst="rect">
+            <a:avLst/>
+          </a:prstGeom>
+          <a:noFill xmlns:a="http://schemas.openxmlformats.org/drawingml/2006/main"/>
+          <a:ln xmlns:a="http://schemas.openxmlformats.org/drawingml/2006/main" w="0">
+            <a:noFill/>
+            <a:prstDash val="solid"/>
+          </a:ln>
+        </p:spPr>
+        <p:txBody>
+          <a:bodyPr xmlns:a="http://schemas.openxmlformats.org/drawingml/2006/main" lIns="0" tIns="0" rIns="0" bIns="0" anchor="ctr">
+            <a:normAutofit fontScale="100000"/>
+          </a:bodyPr>
+          <a:lstStyle xmlns:a="http://schemas.openxmlformats.org/drawingml/2006/main"/>
+          <a:p xmlns:a="http://schemas.openxmlformats.org/drawingml/2006/main">
+            <a:pPr algn="ctr">
+              <a:defRPr sz="1500" b="1">
+                <a:solidFill>
+                  <a:srgbClr val="F6C96A"/>
+                </a:solidFill>
+                <a:latin typeface="Microsoft YaHei"/>
+                <a:ea typeface="Microsoft YaHei"/>
+                <a:cs typeface="Microsoft YaHei"/>
+              </a:defRPr>
+            </a:pPr>
+            <a:r>
+              <a:rPr sz="1500" b="1">
+                <a:solidFill>
+                  <a:srgbClr val="F6C96A"/>
+                </a:solidFill>
+                <a:latin typeface="Microsoft YaHei"/>
+                <a:ea typeface="Microsoft YaHei"/>
+                <a:cs typeface="Microsoft YaHei"/>
+              </a:rPr>
+              <a:t>100%</a:t>
+            </a:r>
+          </a:p>
+        </p:txBody>
+      </p:sp>
+      <p:sp>
+        <p:nvSpPr>
+          <p:cNvPr id="6" name="PPAGENT_QA|parent=funnel-label-0|domains=funnel-label">
+            <a:extLst xmlns:a="http://schemas.openxmlformats.org/drawingml/2006/main">
+              <a:ext uri="{FF2B5EF4-FFF2-40B4-BE49-F238E27FC236}">
+                <a16:creationId xmlns:a16="http://schemas.microsoft.com/office/drawing/2014/main" id="{7DF930C5-E520-4C89-95B8-9F39F12D1F1F}"/>
+              </a:ext>
+            </a:extLst>
+          </p:cNvPr>
+          <p:cNvSpPr>
+            <a:spLocks xmlns:a="http://schemas.openxmlformats.org/drawingml/2006/main" noGrp="1"/>
+          </p:cNvSpPr>
+          <p:nvPr/>
+        </p:nvSpPr>
+        <p:spPr>
+          <a:xfrm xmlns:a="http://schemas.openxmlformats.org/drawingml/2006/main">
+            <a:off x="838200" y="1885950"/>
+            <a:ext cx="5029200" cy="295275"/>
+          </a:xfrm>
+          <a:prstGeom xmlns:a="http://schemas.openxmlformats.org/drawingml/2006/main" prst="rect">
+            <a:avLst/>
+          </a:prstGeom>
+          <a:noFill xmlns:a="http://schemas.openxmlformats.org/drawingml/2006/main"/>
+          <a:ln xmlns:a="http://schemas.openxmlformats.org/drawingml/2006/main" w="0">
+            <a:noFill/>
+            <a:prstDash val="solid"/>
+          </a:ln>
+        </p:spPr>
+        <p:txBody>
+          <a:bodyPr xmlns:a="http://schemas.openxmlformats.org/drawingml/2006/main" lIns="0" tIns="0" rIns="0" bIns="0" anchor="ctr">
+            <a:normAutofit fontScale="100000"/>
+          </a:bodyPr>
+          <a:lstStyle xmlns:a="http://schemas.openxmlformats.org/drawingml/2006/main"/>
+          <a:p xmlns:a="http://schemas.openxmlformats.org/drawingml/2006/main">
+            <a:pPr algn="ctr">
+              <a:defRPr sz="1275" b="1">
+                <a:solidFill>
+                  <a:srgbClr val="FFFFFF"/>
+                </a:solidFill>
+                <a:latin typeface="Microsoft YaHei"/>
+                <a:ea typeface="Microsoft YaHei"/>
+                <a:cs typeface="Microsoft YaHei"/>
+              </a:defRPr>
+            </a:pPr>
+            <a:r>
+              <a:rPr sz="1275" b="1">
+                <a:solidFill>
+                  <a:srgbClr val="FFFFFF"/>
+                </a:solidFill>
+                <a:latin typeface="Microsoft YaHei"/>
+                <a:ea typeface="Microsoft YaHei"/>
+                <a:cs typeface="Microsoft YaHei"/>
+              </a:rPr>
+              <a:t>收到稿件</a:t>
+            </a:r>
+          </a:p>
+        </p:txBody>
+      </p:sp>
+      <p:sp>
+        <p:nvSpPr>
+          <p:cNvPr id="7" name="PPAGENT_QA|parent=funnel-note-0|domains=funnel-note,funnel-content">
+            <a:extLst xmlns:a="http://schemas.openxmlformats.org/drawingml/2006/main">
+              <a:ext uri="{FF2B5EF4-FFF2-40B4-BE49-F238E27FC236}">
+                <a16:creationId xmlns:a16="http://schemas.microsoft.com/office/drawing/2014/main" id="{5450880A-A3AA-4EDB-A023-F190B24A2EA5}"/>
+              </a:ext>
+            </a:extLst>
+          </p:cNvPr>
+          <p:cNvSpPr>
+            <a:spLocks xmlns:a="http://schemas.openxmlformats.org/drawingml/2006/main" noGrp="1"/>
+          </p:cNvSpPr>
+          <p:nvPr/>
+        </p:nvSpPr>
+        <p:spPr>
+          <a:xfrm xmlns:a="http://schemas.openxmlformats.org/drawingml/2006/main">
+            <a:off x="6915150" y="1533525"/>
+            <a:ext cx="4552950" cy="765810"/>
+          </a:xfrm>
+          <a:prstGeom xmlns:a="http://schemas.openxmlformats.org/drawingml/2006/main" prst="roundRect">
+            <a:avLst>
+              <a:gd name="adj" fmla="val 14925"/>
+            </a:avLst>
+          </a:prstGeom>
+          <a:solidFill xmlns:a="http://schemas.openxmlformats.org/drawingml/2006/main">
+            <a:srgbClr val="FFFFFF"/>
+          </a:solidFill>
+          <a:ln xmlns:a="http://schemas.openxmlformats.org/drawingml/2006/main" w="9525">
+            <a:solidFill>
+              <a:srgbClr val="D8E5EF"/>
+            </a:solidFill>
+            <a:prstDash val="solid"/>
+          </a:ln>
+        </p:spPr>
+      </p:sp>
+      <p:sp>
+        <p:nvSpPr>
+          <p:cNvPr id="8" name="">
+            <a:extLst xmlns:a="http://schemas.openxmlformats.org/drawingml/2006/main">
+              <a:ext uri="{FF2B5EF4-FFF2-40B4-BE49-F238E27FC236}">
+                <a16:creationId xmlns:a16="http://schemas.microsoft.com/office/drawing/2014/main" id="{DBB05766-E831-44FF-A9DC-E40D30882997}"/>
+              </a:ext>
+            </a:extLst>
+          </p:cNvPr>
+          <p:cNvSpPr>
+            <a:spLocks xmlns:a="http://schemas.openxmlformats.org/drawingml/2006/main" noGrp="1"/>
+          </p:cNvSpPr>
+          <p:nvPr/>
+        </p:nvSpPr>
+        <p:spPr>
+          <a:xfrm xmlns:a="http://schemas.openxmlformats.org/drawingml/2006/main">
+            <a:off x="6915150" y="1533525"/>
+            <a:ext cx="57150" cy="765810"/>
+          </a:xfrm>
+          <a:prstGeom xmlns:a="http://schemas.openxmlformats.org/drawingml/2006/main" prst="roundRect">
+            <a:avLst>
+              <a:gd name="adj" fmla="val 33333"/>
+            </a:avLst>
+          </a:prstGeom>
+          <a:solidFill xmlns:a="http://schemas.openxmlformats.org/drawingml/2006/main">
+            <a:srgbClr val="174B82"/>
+          </a:solidFill>
+          <a:ln xmlns:a="http://schemas.openxmlformats.org/drawingml/2006/main" w="0">
+            <a:noFill/>
+            <a:prstDash val="solid"/>
+          </a:ln>
+        </p:spPr>
+      </p:sp>
+      <p:sp>
+        <p:nvSpPr>
+          <p:cNvPr id="9" name="PPAGENT_QA|within=funnel-note-0|role=title">
+            <a:extLst xmlns:a="http://schemas.openxmlformats.org/drawingml/2006/main">
+              <a:ext uri="{FF2B5EF4-FFF2-40B4-BE49-F238E27FC236}">
+                <a16:creationId xmlns:a16="http://schemas.microsoft.com/office/drawing/2014/main" id="{BB2555E3-8AA9-4F42-B749-8D4D9BBD48E4}"/>
+              </a:ext>
+            </a:extLst>
+          </p:cNvPr>
+          <p:cNvSpPr>
+            <a:spLocks xmlns:a="http://schemas.openxmlformats.org/drawingml/2006/main" noGrp="1"/>
+          </p:cNvSpPr>
+          <p:nvPr/>
+        </p:nvSpPr>
+        <p:spPr>
+          <a:xfrm xmlns:a="http://schemas.openxmlformats.org/drawingml/2006/main">
+            <a:off x="7162800" y="1590675"/>
+            <a:ext cx="4000500" cy="219075"/>
+          </a:xfrm>
+          <a:prstGeom xmlns:a="http://schemas.openxmlformats.org/drawingml/2006/main" prst="rect">
+            <a:avLst/>
+          </a:prstGeom>
+          <a:noFill xmlns:a="http://schemas.openxmlformats.org/drawingml/2006/main"/>
+          <a:ln xmlns:a="http://schemas.openxmlformats.org/drawingml/2006/main" w="0">
+            <a:noFill/>
+            <a:prstDash val="solid"/>
+          </a:ln>
+        </p:spPr>
+        <p:txBody>
+          <a:bodyPr xmlns:a="http://schemas.openxmlformats.org/drawingml/2006/main" lIns="0" tIns="0" rIns="0" bIns="0" anchor="ctr">
+            <a:normAutofit fontScale="100000"/>
+          </a:bodyPr>
+          <a:lstStyle xmlns:a="http://schemas.openxmlformats.org/drawingml/2006/main"/>
+          <a:p xmlns:a="http://schemas.openxmlformats.org/drawingml/2006/main">
+            <a:pPr algn="l">
+              <a:defRPr sz="1350" b="1">
+                <a:solidFill>
+                  <a:srgbClr val="1677C8"/>
+                </a:solidFill>
+                <a:latin typeface="Microsoft YaHei"/>
+                <a:ea typeface="Microsoft YaHei"/>
+                <a:cs typeface="Microsoft YaHei"/>
+              </a:defRPr>
+            </a:pPr>
+            <a:r>
+              <a:rPr sz="1350" b="1">
+                <a:solidFill>
+                  <a:srgbClr val="1677C8"/>
+                </a:solidFill>
+                <a:latin typeface="Microsoft YaHei"/>
+                <a:ea typeface="Microsoft YaHei"/>
+                <a:cs typeface="Microsoft YaHei"/>
+              </a:rPr>
+              <a:t>01  收到稿件</a:t>
+            </a:r>
+          </a:p>
+        </p:txBody>
+      </p:sp>
+      <p:sp>
+        <p:nvSpPr>
+          <p:cNvPr id="10" name="PPAGENT_QA|within=funnel-note-0|role=body">
+            <a:extLst xmlns:a="http://schemas.openxmlformats.org/drawingml/2006/main">
+              <a:ext uri="{FF2B5EF4-FFF2-40B4-BE49-F238E27FC236}">
+                <a16:creationId xmlns:a16="http://schemas.microsoft.com/office/drawing/2014/main" id="{295D0BC2-C961-420A-B2D8-238C80CE8223}"/>
+              </a:ext>
+            </a:extLst>
+          </p:cNvPr>
+          <p:cNvSpPr>
+            <a:spLocks xmlns:a="http://schemas.openxmlformats.org/drawingml/2006/main" noGrp="1"/>
+          </p:cNvSpPr>
+          <p:nvPr/>
+        </p:nvSpPr>
+        <p:spPr>
+          <a:xfrm xmlns:a="http://schemas.openxmlformats.org/drawingml/2006/main">
+            <a:off x="7162800" y="1743075"/>
+            <a:ext cx="4000500" cy="556260"/>
+          </a:xfrm>
+          <a:prstGeom xmlns:a="http://schemas.openxmlformats.org/drawingml/2006/main" prst="rect">
+            <a:avLst/>
+          </a:prstGeom>
+          <a:noFill xmlns:a="http://schemas.openxmlformats.org/drawingml/2006/main"/>
+          <a:ln xmlns:a="http://schemas.openxmlformats.org/drawingml/2006/main" w="0">
+            <a:noFill/>
+            <a:prstDash val="solid"/>
+          </a:ln>
+        </p:spPr>
+        <p:txBody>
+          <a:bodyPr xmlns:a="http://schemas.openxmlformats.org/drawingml/2006/main" lIns="0" tIns="0" rIns="0" bIns="0" anchor="t">
+            <a:normAutofit fontScale="100000"/>
+          </a:bodyPr>
+          <a:lstStyle xmlns:a="http://schemas.openxmlformats.org/drawingml/2006/main"/>
+          <a:p xmlns:a="http://schemas.openxmlformats.org/drawingml/2006/main">
+            <a:pPr algn="l">
+              <a:defRPr sz="1500" b="0">
+                <a:solidFill>
+                  <a:srgbClr val="475569"/>
+                </a:solidFill>
+                <a:latin typeface="Microsoft YaHei"/>
+                <a:ea typeface="Microsoft YaHei"/>
+                <a:cs typeface="Microsoft YaHei"/>
+              </a:defRPr>
+            </a:pPr>
+            <a:r>
+              <a:rPr sz="1500" b="0">
+                <a:solidFill>
+                  <a:srgbClr val="475569"/>
+                </a:solidFill>
+                <a:latin typeface="Microsoft YaHei"/>
+                <a:ea typeface="Microsoft YaHei"/>
+                <a:cs typeface="Microsoft YaHei"/>
+              </a:rPr>
+              <a:t>原始信息完整进入流程</a:t>
+            </a:r>
+          </a:p>
+        </p:txBody>
+      </p:sp>
+      <p:sp>
+        <p:nvSpPr>
+          <p:cNvPr id="11" name="PPAGENT_CONNECTOR|from=funnel-stage-0|fromSide=right|to=funnel-note-0|toSide=left">
+            <a:extLst xmlns:a="http://schemas.openxmlformats.org/drawingml/2006/main">
+              <a:ext uri="{FF2B5EF4-FFF2-40B4-BE49-F238E27FC236}">
+                <a16:creationId xmlns:a16="http://schemas.microsoft.com/office/drawing/2014/main" id="{B75A2770-113A-41F3-B902-B84BC2EA30ED}"/>
+              </a:ext>
+            </a:extLst>
+          </p:cNvPr>
+          <p:cNvSpPr>
+            <a:spLocks xmlns:a="http://schemas.openxmlformats.org/drawingml/2006/main" noGrp="1"/>
+          </p:cNvSpPr>
+          <p:nvPr/>
+        </p:nvSpPr>
+        <p:spPr>
+          <a:xfrm xmlns:a="http://schemas.openxmlformats.org/drawingml/2006/main" flipH="0" flipV="0">
+            <a:off x="6019800" y="1916430"/>
+            <a:ext cx="895350" cy="0"/>
+          </a:xfrm>
+          <a:prstGeom xmlns:a="http://schemas.openxmlformats.org/drawingml/2006/main" prst="line">
+            <a:avLst/>
+          </a:prstGeom>
+          <a:noFill xmlns:a="http://schemas.openxmlformats.org/drawingml/2006/main"/>
+          <a:ln xmlns:a="http://schemas.openxmlformats.org/drawingml/2006/main" w="12383">
+            <a:solidFill>
+              <a:srgbClr val="91B8D7"/>
+            </a:solidFill>
+            <a:prstDash val="solid"/>
+          </a:ln>
+        </p:spPr>
+      </p:sp>
+      <p:sp>
+        <p:nvSpPr>
+          <p:cNvPr id="12" name="PPAGENT_QA|parent=funnel-stage-1|domains=funnel-shape,funnel-content">
+            <a:extLst xmlns:a="http://schemas.openxmlformats.org/drawingml/2006/main">
+              <a:ext uri="{FF2B5EF4-FFF2-40B4-BE49-F238E27FC236}">
+                <a16:creationId xmlns:a16="http://schemas.microsoft.com/office/drawing/2014/main" id="{0A7F144E-8675-496D-9954-EE11B9354D93}"/>
+              </a:ext>
+            </a:extLst>
+          </p:cNvPr>
+          <p:cNvSpPr>
+            <a:spLocks xmlns:a="http://schemas.openxmlformats.org/drawingml/2006/main" noGrp="1"/>
+          </p:cNvSpPr>
+          <p:nvPr/>
+        </p:nvSpPr>
+        <p:spPr>
+          <a:xfrm xmlns:a="http://schemas.openxmlformats.org/drawingml/2006/main" flipV="1">
+            <a:off x="1108472" y="2385060"/>
+            <a:ext cx="4488656" cy="784860"/>
+          </a:xfrm>
+          <a:prstGeom xmlns:a="http://schemas.openxmlformats.org/drawingml/2006/main" prst="trapezoid">
+            <a:avLst/>
+          </a:prstGeom>
+          <a:solidFill xmlns:a="http://schemas.openxmlformats.org/drawingml/2006/main">
+            <a:srgbClr val="1767A5"/>
+          </a:solidFill>
+          <a:ln xmlns:a="http://schemas.openxmlformats.org/drawingml/2006/main" w="19050">
+            <a:solidFill>
+              <a:srgbClr val="FFFFFF"/>
+            </a:solidFill>
+            <a:prstDash val="solid"/>
+          </a:ln>
+        </p:spPr>
+        <p:style>
+          <a:lnRef xmlns:a="http://schemas.openxmlformats.org/drawingml/2006/main" idx="0"/>
+          <a:fillRef xmlns:a="http://schemas.openxmlformats.org/drawingml/2006/main" idx="0"/>
+          <a:effectRef xmlns:a="http://schemas.openxmlformats.org/drawingml/2006/main" idx="4"/>
+          <a:fontRef xmlns:a="http://schemas.openxmlformats.org/drawingml/2006/main" idx="major"/>
+        </p:style>
+      </p:sp>
+      <p:sp>
+        <p:nvSpPr>
+          <p:cNvPr id="13" name="PPAGENT_QA|parent=funnel-face-1|domains=funnel-face">
+            <a:extLst xmlns:a="http://schemas.openxmlformats.org/drawingml/2006/main">
+              <a:ext uri="{FF2B5EF4-FFF2-40B4-BE49-F238E27FC236}">
+                <a16:creationId xmlns:a16="http://schemas.microsoft.com/office/drawing/2014/main" id="{488B21C5-17B0-40C0-BEA3-D1C7B5E814E8}"/>
+              </a:ext>
+            </a:extLst>
+          </p:cNvPr>
+          <p:cNvSpPr>
+            <a:spLocks xmlns:a="http://schemas.openxmlformats.org/drawingml/2006/main" noGrp="1"/>
+          </p:cNvSpPr>
+          <p:nvPr/>
+        </p:nvSpPr>
+        <p:spPr>
+          <a:xfrm xmlns:a="http://schemas.openxmlformats.org/drawingml/2006/main">
+            <a:off x="1108472" y="2318385"/>
+            <a:ext cx="4488656" cy="228600"/>
+          </a:xfrm>
+          <a:prstGeom xmlns:a="http://schemas.openxmlformats.org/drawingml/2006/main" prst="ellipse">
+            <a:avLst/>
+          </a:prstGeom>
+          <a:solidFill xmlns:a="http://schemas.openxmlformats.org/drawingml/2006/main">
+            <a:srgbClr val="1767A5"/>
+          </a:solidFill>
+          <a:ln xmlns:a="http://schemas.openxmlformats.org/drawingml/2006/main" w="11430">
+            <a:solidFill>
+              <a:srgbClr val="D9F1FA"/>
+            </a:solidFill>
+            <a:prstDash val="solid"/>
+          </a:ln>
+        </p:spPr>
+      </p:sp>
+      <p:sp>
+        <p:nvSpPr>
+          <p:cNvPr id="14" name="PPAGENT_QA|within=funnel-stage-1|role=rate">
+            <a:extLst xmlns:a="http://schemas.openxmlformats.org/drawingml/2006/main">
+              <a:ext uri="{FF2B5EF4-FFF2-40B4-BE49-F238E27FC236}">
+                <a16:creationId xmlns:a16="http://schemas.microsoft.com/office/drawing/2014/main" id="{DBB0BD1C-615A-4661-973C-44948113546A}"/>
+              </a:ext>
+            </a:extLst>
+          </p:cNvPr>
+          <p:cNvSpPr>
+            <a:spLocks xmlns:a="http://schemas.openxmlformats.org/drawingml/2006/main" noGrp="1"/>
+          </p:cNvSpPr>
+          <p:nvPr/>
+        </p:nvSpPr>
+        <p:spPr>
+          <a:xfrm xmlns:a="http://schemas.openxmlformats.org/drawingml/2006/main">
+            <a:off x="1260872" y="2480310"/>
+            <a:ext cx="4183856" cy="276225"/>
+          </a:xfrm>
+          <a:prstGeom xmlns:a="http://schemas.openxmlformats.org/drawingml/2006/main" prst="rect">
+            <a:avLst/>
+          </a:prstGeom>
+          <a:noFill xmlns:a="http://schemas.openxmlformats.org/drawingml/2006/main"/>
+          <a:ln xmlns:a="http://schemas.openxmlformats.org/drawingml/2006/main" w="0">
+            <a:noFill/>
+            <a:prstDash val="solid"/>
+          </a:ln>
+        </p:spPr>
+        <p:txBody>
+          <a:bodyPr xmlns:a="http://schemas.openxmlformats.org/drawingml/2006/main" lIns="0" tIns="0" rIns="0" bIns="0" anchor="ctr">
+            <a:normAutofit fontScale="100000"/>
+          </a:bodyPr>
+          <a:lstStyle xmlns:a="http://schemas.openxmlformats.org/drawingml/2006/main"/>
+          <a:p xmlns:a="http://schemas.openxmlformats.org/drawingml/2006/main">
+            <a:pPr algn="ctr">
+              <a:defRPr sz="1500" b="1">
+                <a:solidFill>
+                  <a:srgbClr val="F6C96A"/>
+                </a:solidFill>
+                <a:latin typeface="Microsoft YaHei"/>
+                <a:ea typeface="Microsoft YaHei"/>
+                <a:cs typeface="Microsoft YaHei"/>
+              </a:defRPr>
+            </a:pPr>
+            <a:r>
+              <a:rPr sz="1500" b="1">
+                <a:solidFill>
+                  <a:srgbClr val="F6C96A"/>
+                </a:solidFill>
+                <a:latin typeface="Microsoft YaHei"/>
+                <a:ea typeface="Microsoft YaHei"/>
+                <a:cs typeface="Microsoft YaHei"/>
+              </a:rPr>
+              <a:t>82%</a:t>
+            </a:r>
+          </a:p>
+        </p:txBody>
+      </p:sp>
+      <p:sp>
+        <p:nvSpPr>
+          <p:cNvPr id="15" name="PPAGENT_QA|parent=funnel-label-1|domains=funnel-label">
+            <a:extLst xmlns:a="http://schemas.openxmlformats.org/drawingml/2006/main">
+              <a:ext uri="{FF2B5EF4-FFF2-40B4-BE49-F238E27FC236}">
+                <a16:creationId xmlns:a16="http://schemas.microsoft.com/office/drawing/2014/main" id="{26F9F0AB-BAF6-4B36-AC4B-C8B9C5B4A74D}"/>
+              </a:ext>
+            </a:extLst>
+          </p:cNvPr>
+          <p:cNvSpPr>
+            <a:spLocks xmlns:a="http://schemas.openxmlformats.org/drawingml/2006/main" noGrp="1"/>
+          </p:cNvSpPr>
+          <p:nvPr/>
+        </p:nvSpPr>
+        <p:spPr>
+          <a:xfrm xmlns:a="http://schemas.openxmlformats.org/drawingml/2006/main">
+            <a:off x="1260872" y="2747010"/>
+            <a:ext cx="4183856" cy="295275"/>
+          </a:xfrm>
+          <a:prstGeom xmlns:a="http://schemas.openxmlformats.org/drawingml/2006/main" prst="rect">
+            <a:avLst/>
+          </a:prstGeom>
+          <a:noFill xmlns:a="http://schemas.openxmlformats.org/drawingml/2006/main"/>
+          <a:ln xmlns:a="http://schemas.openxmlformats.org/drawingml/2006/main" w="0">
+            <a:noFill/>
+            <a:prstDash val="solid"/>
+          </a:ln>
+        </p:spPr>
+        <p:txBody>
+          <a:bodyPr xmlns:a="http://schemas.openxmlformats.org/drawingml/2006/main" lIns="0" tIns="0" rIns="0" bIns="0" anchor="ctr">
+            <a:normAutofit fontScale="100000"/>
+          </a:bodyPr>
+          <a:lstStyle xmlns:a="http://schemas.openxmlformats.org/drawingml/2006/main"/>
+          <a:p xmlns:a="http://schemas.openxmlformats.org/drawingml/2006/main">
+            <a:pPr algn="ctr">
+              <a:defRPr sz="1275" b="1">
+                <a:solidFill>
+                  <a:srgbClr val="FFFFFF"/>
+                </a:solidFill>
+                <a:latin typeface="Microsoft YaHei"/>
+                <a:ea typeface="Microsoft YaHei"/>
+                <a:cs typeface="Microsoft YaHei"/>
+              </a:defRPr>
+            </a:pPr>
+            <a:r>
+              <a:rPr sz="1275" b="1">
+                <a:solidFill>
+                  <a:srgbClr val="FFFFFF"/>
+                </a:solidFill>
+                <a:latin typeface="Microsoft YaHei"/>
+                <a:ea typeface="Microsoft YaHei"/>
+                <a:cs typeface="Microsoft YaHei"/>
+              </a:rPr>
+              <a:t>形成页面</a:t>
+            </a:r>
+          </a:p>
+        </p:txBody>
+      </p:sp>
+      <p:sp>
+        <p:nvSpPr>
+          <p:cNvPr id="16" name="PPAGENT_QA|parent=funnel-note-1|domains=funnel-note,funnel-content">
+            <a:extLst xmlns:a="http://schemas.openxmlformats.org/drawingml/2006/main">
+              <a:ext uri="{FF2B5EF4-FFF2-40B4-BE49-F238E27FC236}">
+                <a16:creationId xmlns:a16="http://schemas.microsoft.com/office/drawing/2014/main" id="{77A83535-D64D-46CA-AA58-287D43E7057C}"/>
+              </a:ext>
+            </a:extLst>
+          </p:cNvPr>
+          <p:cNvSpPr>
+            <a:spLocks xmlns:a="http://schemas.openxmlformats.org/drawingml/2006/main" noGrp="1"/>
+          </p:cNvSpPr>
+          <p:nvPr/>
+        </p:nvSpPr>
+        <p:spPr>
+          <a:xfrm xmlns:a="http://schemas.openxmlformats.org/drawingml/2006/main">
+            <a:off x="6915150" y="2394585"/>
+            <a:ext cx="4552950" cy="765810"/>
+          </a:xfrm>
+          <a:prstGeom xmlns:a="http://schemas.openxmlformats.org/drawingml/2006/main" prst="roundRect">
+            <a:avLst>
+              <a:gd name="adj" fmla="val 14925"/>
+            </a:avLst>
+          </a:prstGeom>
+          <a:solidFill xmlns:a="http://schemas.openxmlformats.org/drawingml/2006/main">
+            <a:srgbClr val="F7FAFC"/>
+          </a:solidFill>
+          <a:ln xmlns:a="http://schemas.openxmlformats.org/drawingml/2006/main" w="9525">
+            <a:solidFill>
+              <a:srgbClr val="D8E5EF"/>
+            </a:solidFill>
+            <a:prstDash val="solid"/>
+          </a:ln>
+        </p:spPr>
+      </p:sp>
+      <p:sp>
+        <p:nvSpPr>
+          <p:cNvPr id="17" name="">
+            <a:extLst xmlns:a="http://schemas.openxmlformats.org/drawingml/2006/main">
+              <a:ext uri="{FF2B5EF4-FFF2-40B4-BE49-F238E27FC236}">
+                <a16:creationId xmlns:a16="http://schemas.microsoft.com/office/drawing/2014/main" id="{7A78A756-CE40-477C-8721-8623CB3B458A}"/>
+              </a:ext>
+            </a:extLst>
+          </p:cNvPr>
+          <p:cNvSpPr>
+            <a:spLocks xmlns:a="http://schemas.openxmlformats.org/drawingml/2006/main" noGrp="1"/>
+          </p:cNvSpPr>
+          <p:nvPr/>
+        </p:nvSpPr>
+        <p:spPr>
+          <a:xfrm xmlns:a="http://schemas.openxmlformats.org/drawingml/2006/main">
+            <a:off x="6915150" y="2394585"/>
+            <a:ext cx="57150" cy="765810"/>
+          </a:xfrm>
+          <a:prstGeom xmlns:a="http://schemas.openxmlformats.org/drawingml/2006/main" prst="roundRect">
+            <a:avLst>
+              <a:gd name="adj" fmla="val 33333"/>
+            </a:avLst>
+          </a:prstGeom>
+          <a:solidFill xmlns:a="http://schemas.openxmlformats.org/drawingml/2006/main">
+            <a:srgbClr val="1767A5"/>
+          </a:solidFill>
+          <a:ln xmlns:a="http://schemas.openxmlformats.org/drawingml/2006/main" w="0">
+            <a:noFill/>
+            <a:prstDash val="solid"/>
+          </a:ln>
+        </p:spPr>
+      </p:sp>
+      <p:sp>
+        <p:nvSpPr>
+          <p:cNvPr id="18" name="PPAGENT_QA|within=funnel-note-1|role=title">
+            <a:extLst xmlns:a="http://schemas.openxmlformats.org/drawingml/2006/main">
+              <a:ext uri="{FF2B5EF4-FFF2-40B4-BE49-F238E27FC236}">
+                <a16:creationId xmlns:a16="http://schemas.microsoft.com/office/drawing/2014/main" id="{37C454DE-55D7-4F99-A8CA-784BB731092C}"/>
+              </a:ext>
+            </a:extLst>
+          </p:cNvPr>
+          <p:cNvSpPr>
+            <a:spLocks xmlns:a="http://schemas.openxmlformats.org/drawingml/2006/main" noGrp="1"/>
+          </p:cNvSpPr>
+          <p:nvPr/>
+        </p:nvSpPr>
+        <p:spPr>
+          <a:xfrm xmlns:a="http://schemas.openxmlformats.org/drawingml/2006/main">
+            <a:off x="7162800" y="2451735"/>
+            <a:ext cx="4000500" cy="219075"/>
+          </a:xfrm>
+          <a:prstGeom xmlns:a="http://schemas.openxmlformats.org/drawingml/2006/main" prst="rect">
+            <a:avLst/>
+          </a:prstGeom>
+          <a:noFill xmlns:a="http://schemas.openxmlformats.org/drawingml/2006/main"/>
+          <a:ln xmlns:a="http://schemas.openxmlformats.org/drawingml/2006/main" w="0">
+            <a:noFill/>
+            <a:prstDash val="solid"/>
+          </a:ln>
+        </p:spPr>
+        <p:txBody>
+          <a:bodyPr xmlns:a="http://schemas.openxmlformats.org/drawingml/2006/main" lIns="0" tIns="0" rIns="0" bIns="0" anchor="ctr">
+            <a:normAutofit fontScale="100000"/>
+          </a:bodyPr>
+          <a:lstStyle xmlns:a="http://schemas.openxmlformats.org/drawingml/2006/main"/>
+          <a:p xmlns:a="http://schemas.openxmlformats.org/drawingml/2006/main">
+            <a:pPr algn="l">
+              <a:defRPr sz="1350" b="1">
+                <a:solidFill>
+                  <a:srgbClr val="1677C8"/>
+                </a:solidFill>
+                <a:latin typeface="Microsoft YaHei"/>
+                <a:ea typeface="Microsoft YaHei"/>
+                <a:cs typeface="Microsoft YaHei"/>
+              </a:defRPr>
+            </a:pPr>
+            <a:r>
+              <a:rPr sz="1350" b="1">
+                <a:solidFill>
+                  <a:srgbClr val="1677C8"/>
+                </a:solidFill>
+                <a:latin typeface="Microsoft YaHei"/>
+                <a:ea typeface="Microsoft YaHei"/>
+                <a:cs typeface="Microsoft YaHei"/>
+              </a:rPr>
+              <a:t>02  形成页面</a:t>
+            </a:r>
+          </a:p>
+        </p:txBody>
+      </p:sp>
+      <p:sp>
+        <p:nvSpPr>
+          <p:cNvPr id="19" name="PPAGENT_QA|within=funnel-note-1|role=body">
+            <a:extLst xmlns:a="http://schemas.openxmlformats.org/drawingml/2006/main">
+              <a:ext uri="{FF2B5EF4-FFF2-40B4-BE49-F238E27FC236}">
+                <a16:creationId xmlns:a16="http://schemas.microsoft.com/office/drawing/2014/main" id="{F331DD24-4955-4179-B9FD-CEB5877190F5}"/>
+              </a:ext>
+            </a:extLst>
+          </p:cNvPr>
+          <p:cNvSpPr>
+            <a:spLocks xmlns:a="http://schemas.openxmlformats.org/drawingml/2006/main" noGrp="1"/>
+          </p:cNvSpPr>
+          <p:nvPr/>
+        </p:nvSpPr>
+        <p:spPr>
+          <a:xfrm xmlns:a="http://schemas.openxmlformats.org/drawingml/2006/main">
+            <a:off x="7162800" y="2604135"/>
+            <a:ext cx="4000500" cy="556260"/>
+          </a:xfrm>
+          <a:prstGeom xmlns:a="http://schemas.openxmlformats.org/drawingml/2006/main" prst="rect">
+            <a:avLst/>
+          </a:prstGeom>
+          <a:noFill xmlns:a="http://schemas.openxmlformats.org/drawingml/2006/main"/>
+          <a:ln xmlns:a="http://schemas.openxmlformats.org/drawingml/2006/main" w="0">
+            <a:noFill/>
+            <a:prstDash val="solid"/>
+          </a:ln>
+        </p:spPr>
+        <p:txBody>
+          <a:bodyPr xmlns:a="http://schemas.openxmlformats.org/drawingml/2006/main" lIns="0" tIns="0" rIns="0" bIns="0" anchor="t">
+            <a:normAutofit fontScale="100000"/>
+          </a:bodyPr>
+          <a:lstStyle xmlns:a="http://schemas.openxmlformats.org/drawingml/2006/main"/>
+          <a:p xmlns:a="http://schemas.openxmlformats.org/drawingml/2006/main">
+            <a:pPr algn="l">
+              <a:defRPr sz="1500" b="0">
+                <a:solidFill>
+                  <a:srgbClr val="475569"/>
+                </a:solidFill>
+                <a:latin typeface="Microsoft YaHei"/>
+                <a:ea typeface="Microsoft YaHei"/>
+                <a:cs typeface="Microsoft YaHei"/>
+              </a:defRPr>
+            </a:pPr>
+            <a:r>
+              <a:rPr sz="1500" b="0">
+                <a:solidFill>
+                  <a:srgbClr val="475569"/>
+                </a:solidFill>
+                <a:latin typeface="Microsoft YaHei"/>
+                <a:ea typeface="Microsoft YaHei"/>
+                <a:cs typeface="Microsoft YaHei"/>
+              </a:rPr>
+              <a:t>完成叙事拆页与职责判断</a:t>
+            </a:r>
+          </a:p>
+        </p:txBody>
+      </p:sp>
+      <p:sp>
+        <p:nvSpPr>
+          <p:cNvPr id="20" name="PPAGENT_CONNECTOR|from=funnel-stage-1|fromSide=right|to=funnel-note-1|toSide=left">
+            <a:extLst xmlns:a="http://schemas.openxmlformats.org/drawingml/2006/main">
+              <a:ext uri="{FF2B5EF4-FFF2-40B4-BE49-F238E27FC236}">
+                <a16:creationId xmlns:a16="http://schemas.microsoft.com/office/drawing/2014/main" id="{3DC544D7-C9A1-4DAB-AFF2-C0B854512351}"/>
+              </a:ext>
+            </a:extLst>
+          </p:cNvPr>
+          <p:cNvSpPr>
+            <a:spLocks xmlns:a="http://schemas.openxmlformats.org/drawingml/2006/main" noGrp="1"/>
+          </p:cNvSpPr>
+          <p:nvPr/>
+        </p:nvSpPr>
+        <p:spPr>
+          <a:xfrm xmlns:a="http://schemas.openxmlformats.org/drawingml/2006/main" flipH="0" flipV="0">
+            <a:off x="5597128" y="2777490"/>
+            <a:ext cx="1318022" cy="0"/>
+          </a:xfrm>
+          <a:prstGeom xmlns:a="http://schemas.openxmlformats.org/drawingml/2006/main" prst="line">
+            <a:avLst/>
+          </a:prstGeom>
+          <a:noFill xmlns:a="http://schemas.openxmlformats.org/drawingml/2006/main"/>
+          <a:ln xmlns:a="http://schemas.openxmlformats.org/drawingml/2006/main" w="12383">
+            <a:solidFill>
+              <a:srgbClr val="91B8D7"/>
+            </a:solidFill>
+            <a:prstDash val="solid"/>
+          </a:ln>
+        </p:spPr>
+      </p:sp>
+      <p:sp>
+        <p:nvSpPr>
+          <p:cNvPr id="21" name="PPAGENT_QA|parent=funnel-stage-2|domains=funnel-shape,funnel-content">
+            <a:extLst xmlns:a="http://schemas.openxmlformats.org/drawingml/2006/main">
+              <a:ext uri="{FF2B5EF4-FFF2-40B4-BE49-F238E27FC236}">
+                <a16:creationId xmlns:a16="http://schemas.microsoft.com/office/drawing/2014/main" id="{A68F2A0B-D90D-4F02-AD0B-CA0E28D21BEC}"/>
+              </a:ext>
+            </a:extLst>
+          </p:cNvPr>
+          <p:cNvSpPr>
+            <a:spLocks xmlns:a="http://schemas.openxmlformats.org/drawingml/2006/main" noGrp="1"/>
+          </p:cNvSpPr>
+          <p:nvPr/>
+        </p:nvSpPr>
+        <p:spPr>
+          <a:xfrm xmlns:a="http://schemas.openxmlformats.org/drawingml/2006/main" flipV="1">
+            <a:off x="1531144" y="3246120"/>
+            <a:ext cx="3643313" cy="784860"/>
+          </a:xfrm>
+          <a:prstGeom xmlns:a="http://schemas.openxmlformats.org/drawingml/2006/main" prst="trapezoid">
+            <a:avLst/>
+          </a:prstGeom>
+          <a:solidFill xmlns:a="http://schemas.openxmlformats.org/drawingml/2006/main">
+            <a:srgbClr val="167FC1"/>
+          </a:solidFill>
+          <a:ln xmlns:a="http://schemas.openxmlformats.org/drawingml/2006/main" w="19050">
+            <a:solidFill>
+              <a:srgbClr val="FFFFFF"/>
+            </a:solidFill>
+            <a:prstDash val="solid"/>
+          </a:ln>
+        </p:spPr>
+        <p:style>
+          <a:lnRef xmlns:a="http://schemas.openxmlformats.org/drawingml/2006/main" idx="0"/>
+          <a:fillRef xmlns:a="http://schemas.openxmlformats.org/drawingml/2006/main" idx="0"/>
+          <a:effectRef xmlns:a="http://schemas.openxmlformats.org/drawingml/2006/main" idx="4"/>
+          <a:fontRef xmlns:a="http://schemas.openxmlformats.org/drawingml/2006/main" idx="major"/>
+        </p:style>
+      </p:sp>
+      <p:sp>
+        <p:nvSpPr>
+          <p:cNvPr id="22" name="PPAGENT_QA|parent=funnel-face-2|domains=funnel-face">
+            <a:extLst xmlns:a="http://schemas.openxmlformats.org/drawingml/2006/main">
+              <a:ext uri="{FF2B5EF4-FFF2-40B4-BE49-F238E27FC236}">
+                <a16:creationId xmlns:a16="http://schemas.microsoft.com/office/drawing/2014/main" id="{D00D9C14-12F9-4FD6-8254-2BFD7F9BF6BD}"/>
+              </a:ext>
+            </a:extLst>
+          </p:cNvPr>
+          <p:cNvSpPr>
+            <a:spLocks xmlns:a="http://schemas.openxmlformats.org/drawingml/2006/main" noGrp="1"/>
+          </p:cNvSpPr>
+          <p:nvPr/>
+        </p:nvSpPr>
+        <p:spPr>
+          <a:xfrm xmlns:a="http://schemas.openxmlformats.org/drawingml/2006/main">
+            <a:off x="1531144" y="3179445"/>
+            <a:ext cx="3643313" cy="228600"/>
+          </a:xfrm>
+          <a:prstGeom xmlns:a="http://schemas.openxmlformats.org/drawingml/2006/main" prst="ellipse">
+            <a:avLst/>
+          </a:prstGeom>
+          <a:solidFill xmlns:a="http://schemas.openxmlformats.org/drawingml/2006/main">
+            <a:srgbClr val="167FC1"/>
+          </a:solidFill>
+          <a:ln xmlns:a="http://schemas.openxmlformats.org/drawingml/2006/main" w="11430">
+            <a:solidFill>
+              <a:srgbClr val="D9F1FA"/>
+            </a:solidFill>
+            <a:prstDash val="solid"/>
+          </a:ln>
+        </p:spPr>
+      </p:sp>
+      <p:sp>
+        <p:nvSpPr>
+          <p:cNvPr id="23" name="PPAGENT_QA|within=funnel-stage-2|role=rate">
+            <a:extLst xmlns:a="http://schemas.openxmlformats.org/drawingml/2006/main">
+              <a:ext uri="{FF2B5EF4-FFF2-40B4-BE49-F238E27FC236}">
+                <a16:creationId xmlns:a16="http://schemas.microsoft.com/office/drawing/2014/main" id="{002B65E1-5EEA-48A4-84D3-30DAB02AB928}"/>
+              </a:ext>
+            </a:extLst>
+          </p:cNvPr>
+          <p:cNvSpPr>
+            <a:spLocks xmlns:a="http://schemas.openxmlformats.org/drawingml/2006/main" noGrp="1"/>
+          </p:cNvSpPr>
+          <p:nvPr/>
+        </p:nvSpPr>
+        <p:spPr>
+          <a:xfrm xmlns:a="http://schemas.openxmlformats.org/drawingml/2006/main">
+            <a:off x="1683544" y="3341370"/>
+            <a:ext cx="3338513" cy="276225"/>
+          </a:xfrm>
+          <a:prstGeom xmlns:a="http://schemas.openxmlformats.org/drawingml/2006/main" prst="rect">
+            <a:avLst/>
+          </a:prstGeom>
+          <a:noFill xmlns:a="http://schemas.openxmlformats.org/drawingml/2006/main"/>
+          <a:ln xmlns:a="http://schemas.openxmlformats.org/drawingml/2006/main" w="0">
+            <a:noFill/>
+            <a:prstDash val="solid"/>
+          </a:ln>
+        </p:spPr>
+        <p:txBody>
+          <a:bodyPr xmlns:a="http://schemas.openxmlformats.org/drawingml/2006/main" lIns="0" tIns="0" rIns="0" bIns="0" anchor="ctr">
+            <a:normAutofit fontScale="100000"/>
+          </a:bodyPr>
+          <a:lstStyle xmlns:a="http://schemas.openxmlformats.org/drawingml/2006/main"/>
+          <a:p xmlns:a="http://schemas.openxmlformats.org/drawingml/2006/main">
+            <a:pPr algn="ctr">
+              <a:defRPr sz="1500" b="1">
+                <a:solidFill>
+                  <a:srgbClr val="F6C96A"/>
+                </a:solidFill>
+                <a:latin typeface="Microsoft YaHei"/>
+                <a:ea typeface="Microsoft YaHei"/>
+                <a:cs typeface="Microsoft YaHei"/>
+              </a:defRPr>
+            </a:pPr>
+            <a:r>
+              <a:rPr sz="1500" b="1">
+                <a:solidFill>
+                  <a:srgbClr val="F6C96A"/>
+                </a:solidFill>
+                <a:latin typeface="Microsoft YaHei"/>
+                <a:ea typeface="Microsoft YaHei"/>
+                <a:cs typeface="Microsoft YaHei"/>
+              </a:rPr>
+              <a:t>68%</a:t>
+            </a:r>
+          </a:p>
+        </p:txBody>
+      </p:sp>
+      <p:sp>
+        <p:nvSpPr>
+          <p:cNvPr id="24" name="PPAGENT_QA|parent=funnel-label-2|domains=funnel-label">
+            <a:extLst xmlns:a="http://schemas.openxmlformats.org/drawingml/2006/main">
+              <a:ext uri="{FF2B5EF4-FFF2-40B4-BE49-F238E27FC236}">
+                <a16:creationId xmlns:a16="http://schemas.microsoft.com/office/drawing/2014/main" id="{F27F213E-4A15-4DF1-B97C-93461CBA7CDD}"/>
+              </a:ext>
+            </a:extLst>
+          </p:cNvPr>
+          <p:cNvSpPr>
+            <a:spLocks xmlns:a="http://schemas.openxmlformats.org/drawingml/2006/main" noGrp="1"/>
+          </p:cNvSpPr>
+          <p:nvPr/>
+        </p:nvSpPr>
+        <p:spPr>
+          <a:xfrm xmlns:a="http://schemas.openxmlformats.org/drawingml/2006/main">
+            <a:off x="1683544" y="3608070"/>
+            <a:ext cx="3338513" cy="295275"/>
+          </a:xfrm>
+          <a:prstGeom xmlns:a="http://schemas.openxmlformats.org/drawingml/2006/main" prst="rect">
+            <a:avLst/>
+          </a:prstGeom>
+          <a:noFill xmlns:a="http://schemas.openxmlformats.org/drawingml/2006/main"/>
+          <a:ln xmlns:a="http://schemas.openxmlformats.org/drawingml/2006/main" w="0">
+            <a:noFill/>
+            <a:prstDash val="solid"/>
+          </a:ln>
+        </p:spPr>
+        <p:txBody>
+          <a:bodyPr xmlns:a="http://schemas.openxmlformats.org/drawingml/2006/main" lIns="0" tIns="0" rIns="0" bIns="0" anchor="ctr">
+            <a:normAutofit fontScale="100000"/>
+          </a:bodyPr>
+          <a:lstStyle xmlns:a="http://schemas.openxmlformats.org/drawingml/2006/main"/>
+          <a:p xmlns:a="http://schemas.openxmlformats.org/drawingml/2006/main">
+            <a:pPr algn="ctr">
+              <a:defRPr sz="1275" b="1">
+                <a:solidFill>
+                  <a:srgbClr val="FFFFFF"/>
+                </a:solidFill>
+                <a:latin typeface="Microsoft YaHei"/>
+                <a:ea typeface="Microsoft YaHei"/>
+                <a:cs typeface="Microsoft YaHei"/>
+              </a:defRPr>
+            </a:pPr>
+            <a:r>
+              <a:rPr sz="1275" b="1">
+                <a:solidFill>
+                  <a:srgbClr val="FFFFFF"/>
+                </a:solidFill>
+                <a:latin typeface="Microsoft YaHei"/>
+                <a:ea typeface="Microsoft YaHei"/>
+                <a:cs typeface="Microsoft YaHei"/>
+              </a:rPr>
+              <a:t>匹配资产</a:t>
+            </a:r>
+          </a:p>
+        </p:txBody>
+      </p:sp>
+      <p:sp>
+        <p:nvSpPr>
+          <p:cNvPr id="25" name="PPAGENT_QA|parent=funnel-note-2|domains=funnel-note,funnel-content">
+            <a:extLst xmlns:a="http://schemas.openxmlformats.org/drawingml/2006/main">
+              <a:ext uri="{FF2B5EF4-FFF2-40B4-BE49-F238E27FC236}">
+                <a16:creationId xmlns:a16="http://schemas.microsoft.com/office/drawing/2014/main" id="{F40E7C3D-C350-411D-9485-2EB8D9849E9B}"/>
+              </a:ext>
+            </a:extLst>
+          </p:cNvPr>
+          <p:cNvSpPr>
+            <a:spLocks xmlns:a="http://schemas.openxmlformats.org/drawingml/2006/main" noGrp="1"/>
+          </p:cNvSpPr>
+          <p:nvPr/>
+        </p:nvSpPr>
+        <p:spPr>
+          <a:xfrm xmlns:a="http://schemas.openxmlformats.org/drawingml/2006/main">
+            <a:off x="6915150" y="3255645"/>
+            <a:ext cx="4552950" cy="765810"/>
+          </a:xfrm>
+          <a:prstGeom xmlns:a="http://schemas.openxmlformats.org/drawingml/2006/main" prst="roundRect">
+            <a:avLst>
+              <a:gd name="adj" fmla="val 14925"/>
+            </a:avLst>
+          </a:prstGeom>
+          <a:solidFill xmlns:a="http://schemas.openxmlformats.org/drawingml/2006/main">
+            <a:srgbClr val="FFFFFF"/>
+          </a:solidFill>
+          <a:ln xmlns:a="http://schemas.openxmlformats.org/drawingml/2006/main" w="9525">
+            <a:solidFill>
+              <a:srgbClr val="D8E5EF"/>
+            </a:solidFill>
+            <a:prstDash val="solid"/>
+          </a:ln>
+        </p:spPr>
+      </p:sp>
+      <p:sp>
+        <p:nvSpPr>
+          <p:cNvPr id="26" name="">
+            <a:extLst xmlns:a="http://schemas.openxmlformats.org/drawingml/2006/main">
+              <a:ext uri="{FF2B5EF4-FFF2-40B4-BE49-F238E27FC236}">
+                <a16:creationId xmlns:a16="http://schemas.microsoft.com/office/drawing/2014/main" id="{FB6FED79-5435-49E2-A114-015B8079D1B5}"/>
+              </a:ext>
+            </a:extLst>
+          </p:cNvPr>
+          <p:cNvSpPr>
+            <a:spLocks xmlns:a="http://schemas.openxmlformats.org/drawingml/2006/main" noGrp="1"/>
+          </p:cNvSpPr>
+          <p:nvPr/>
+        </p:nvSpPr>
+        <p:spPr>
+          <a:xfrm xmlns:a="http://schemas.openxmlformats.org/drawingml/2006/main">
+            <a:off x="6915150" y="3255645"/>
+            <a:ext cx="57150" cy="765810"/>
+          </a:xfrm>
+          <a:prstGeom xmlns:a="http://schemas.openxmlformats.org/drawingml/2006/main" prst="roundRect">
+            <a:avLst>
+              <a:gd name="adj" fmla="val 33333"/>
+            </a:avLst>
+          </a:prstGeom>
+          <a:solidFill xmlns:a="http://schemas.openxmlformats.org/drawingml/2006/main">
+            <a:srgbClr val="167FC1"/>
+          </a:solidFill>
+          <a:ln xmlns:a="http://schemas.openxmlformats.org/drawingml/2006/main" w="0">
+            <a:noFill/>
+            <a:prstDash val="solid"/>
+          </a:ln>
+        </p:spPr>
+      </p:sp>
+      <p:sp>
+        <p:nvSpPr>
+          <p:cNvPr id="27" name="PPAGENT_QA|within=funnel-note-2|role=title">
+            <a:extLst xmlns:a="http://schemas.openxmlformats.org/drawingml/2006/main">
+              <a:ext uri="{FF2B5EF4-FFF2-40B4-BE49-F238E27FC236}">
+                <a16:creationId xmlns:a16="http://schemas.microsoft.com/office/drawing/2014/main" id="{9BB53E3A-8107-40C0-AE9C-771375C0DC16}"/>
+              </a:ext>
+            </a:extLst>
+          </p:cNvPr>
+          <p:cNvSpPr>
+            <a:spLocks xmlns:a="http://schemas.openxmlformats.org/drawingml/2006/main" noGrp="1"/>
+          </p:cNvSpPr>
+          <p:nvPr/>
+        </p:nvSpPr>
+        <p:spPr>
+          <a:xfrm xmlns:a="http://schemas.openxmlformats.org/drawingml/2006/main">
+            <a:off x="7162800" y="3312795"/>
+            <a:ext cx="4000500" cy="219075"/>
+          </a:xfrm>
+          <a:prstGeom xmlns:a="http://schemas.openxmlformats.org/drawingml/2006/main" prst="rect">
+            <a:avLst/>
+          </a:prstGeom>
+          <a:noFill xmlns:a="http://schemas.openxmlformats.org/drawingml/2006/main"/>
+          <a:ln xmlns:a="http://schemas.openxmlformats.org/drawingml/2006/main" w="0">
+            <a:noFill/>
+            <a:prstDash val="solid"/>
+          </a:ln>
+        </p:spPr>
+        <p:txBody>
+          <a:bodyPr xmlns:a="http://schemas.openxmlformats.org/drawingml/2006/main" lIns="0" tIns="0" rIns="0" bIns="0" anchor="ctr">
+            <a:normAutofit fontScale="100000"/>
+          </a:bodyPr>
+          <a:lstStyle xmlns:a="http://schemas.openxmlformats.org/drawingml/2006/main"/>
+          <a:p xmlns:a="http://schemas.openxmlformats.org/drawingml/2006/main">
+            <a:pPr algn="l">
+              <a:defRPr sz="1350" b="1">
+                <a:solidFill>
+                  <a:srgbClr val="1677C8"/>
+                </a:solidFill>
+                <a:latin typeface="Microsoft YaHei"/>
+                <a:ea typeface="Microsoft YaHei"/>
+                <a:cs typeface="Microsoft YaHei"/>
+              </a:defRPr>
+            </a:pPr>
+            <a:r>
+              <a:rPr sz="1350" b="1">
+                <a:solidFill>
+                  <a:srgbClr val="1677C8"/>
+                </a:solidFill>
+                <a:latin typeface="Microsoft YaHei"/>
+                <a:ea typeface="Microsoft YaHei"/>
+                <a:cs typeface="Microsoft YaHei"/>
+              </a:rPr>
+              <a:t>03  匹配资产</a:t>
+            </a:r>
+          </a:p>
+        </p:txBody>
+      </p:sp>
+      <p:sp>
+        <p:nvSpPr>
+          <p:cNvPr id="28" name="PPAGENT_QA|within=funnel-note-2|role=body">
+            <a:extLst xmlns:a="http://schemas.openxmlformats.org/drawingml/2006/main">
+              <a:ext uri="{FF2B5EF4-FFF2-40B4-BE49-F238E27FC236}">
+                <a16:creationId xmlns:a16="http://schemas.microsoft.com/office/drawing/2014/main" id="{AC5A2FF6-C604-40AD-849D-318D37E23562}"/>
+              </a:ext>
+            </a:extLst>
+          </p:cNvPr>
+          <p:cNvSpPr>
+            <a:spLocks xmlns:a="http://schemas.openxmlformats.org/drawingml/2006/main" noGrp="1"/>
+          </p:cNvSpPr>
+          <p:nvPr/>
+        </p:nvSpPr>
+        <p:spPr>
+          <a:xfrm xmlns:a="http://schemas.openxmlformats.org/drawingml/2006/main">
+            <a:off x="7162800" y="3465195"/>
+            <a:ext cx="4000500" cy="556260"/>
+          </a:xfrm>
+          <a:prstGeom xmlns:a="http://schemas.openxmlformats.org/drawingml/2006/main" prst="rect">
+            <a:avLst/>
+          </a:prstGeom>
+          <a:noFill xmlns:a="http://schemas.openxmlformats.org/drawingml/2006/main"/>
+          <a:ln xmlns:a="http://schemas.openxmlformats.org/drawingml/2006/main" w="0">
+            <a:noFill/>
+            <a:prstDash val="solid"/>
+          </a:ln>
+        </p:spPr>
+        <p:txBody>
+          <a:bodyPr xmlns:a="http://schemas.openxmlformats.org/drawingml/2006/main" lIns="0" tIns="0" rIns="0" bIns="0" anchor="t">
+            <a:normAutofit fontScale="100000"/>
+          </a:bodyPr>
+          <a:lstStyle xmlns:a="http://schemas.openxmlformats.org/drawingml/2006/main"/>
+          <a:p xmlns:a="http://schemas.openxmlformats.org/drawingml/2006/main">
+            <a:pPr algn="l">
+              <a:defRPr sz="1500" b="0">
+                <a:solidFill>
+                  <a:srgbClr val="475569"/>
+                </a:solidFill>
+                <a:latin typeface="Microsoft YaHei"/>
+                <a:ea typeface="Microsoft YaHei"/>
+                <a:cs typeface="Microsoft YaHei"/>
+              </a:defRPr>
+            </a:pPr>
+            <a:r>
+              <a:rPr sz="1500" b="0">
+                <a:solidFill>
+                  <a:srgbClr val="475569"/>
+                </a:solidFill>
+                <a:latin typeface="Microsoft YaHei"/>
+                <a:ea typeface="Microsoft YaHei"/>
+                <a:cs typeface="Microsoft YaHei"/>
+              </a:rPr>
+              <a:t>选择合法结构与样式组</a:t>
+            </a:r>
+          </a:p>
+        </p:txBody>
+      </p:sp>
+      <p:sp>
+        <p:nvSpPr>
+          <p:cNvPr id="29" name="PPAGENT_CONNECTOR|from=funnel-stage-2|fromSide=right|to=funnel-note-2|toSide=left">
+            <a:extLst xmlns:a="http://schemas.openxmlformats.org/drawingml/2006/main">
+              <a:ext uri="{FF2B5EF4-FFF2-40B4-BE49-F238E27FC236}">
+                <a16:creationId xmlns:a16="http://schemas.microsoft.com/office/drawing/2014/main" id="{0603A683-F696-485A-8080-E351CD9F0A9F}"/>
+              </a:ext>
+            </a:extLst>
+          </p:cNvPr>
+          <p:cNvSpPr>
+            <a:spLocks xmlns:a="http://schemas.openxmlformats.org/drawingml/2006/main" noGrp="1"/>
+          </p:cNvSpPr>
+          <p:nvPr/>
+        </p:nvSpPr>
+        <p:spPr>
+          <a:xfrm xmlns:a="http://schemas.openxmlformats.org/drawingml/2006/main" flipH="0" flipV="0">
+            <a:off x="5174456" y="3638550"/>
+            <a:ext cx="1740694" cy="0"/>
+          </a:xfrm>
+          <a:prstGeom xmlns:a="http://schemas.openxmlformats.org/drawingml/2006/main" prst="line">
+            <a:avLst/>
+          </a:prstGeom>
+          <a:noFill xmlns:a="http://schemas.openxmlformats.org/drawingml/2006/main"/>
+          <a:ln xmlns:a="http://schemas.openxmlformats.org/drawingml/2006/main" w="12383">
+            <a:solidFill>
+              <a:srgbClr val="91B8D7"/>
+            </a:solidFill>
+            <a:prstDash val="solid"/>
+          </a:ln>
+        </p:spPr>
+      </p:sp>
+      <p:sp>
+        <p:nvSpPr>
+          <p:cNvPr id="30" name="PPAGENT_QA|parent=funnel-stage-3|domains=funnel-shape,funnel-content">
+            <a:extLst xmlns:a="http://schemas.openxmlformats.org/drawingml/2006/main">
+              <a:ext uri="{FF2B5EF4-FFF2-40B4-BE49-F238E27FC236}">
+                <a16:creationId xmlns:a16="http://schemas.microsoft.com/office/drawing/2014/main" id="{EAFFBA1F-67E8-477E-B593-F3C0304132CE}"/>
+              </a:ext>
+            </a:extLst>
+          </p:cNvPr>
+          <p:cNvSpPr>
+            <a:spLocks xmlns:a="http://schemas.openxmlformats.org/drawingml/2006/main" noGrp="1"/>
+          </p:cNvSpPr>
+          <p:nvPr/>
+        </p:nvSpPr>
+        <p:spPr>
+          <a:xfrm xmlns:a="http://schemas.openxmlformats.org/drawingml/2006/main" flipV="1">
+            <a:off x="1953816" y="4107180"/>
+            <a:ext cx="2797969" cy="784860"/>
+          </a:xfrm>
+          <a:prstGeom xmlns:a="http://schemas.openxmlformats.org/drawingml/2006/main" prst="trapezoid">
+            <a:avLst/>
+          </a:prstGeom>
+          <a:solidFill xmlns:a="http://schemas.openxmlformats.org/drawingml/2006/main">
+            <a:srgbClr val="16A0C4"/>
+          </a:solidFill>
+          <a:ln xmlns:a="http://schemas.openxmlformats.org/drawingml/2006/main" w="19050">
+            <a:solidFill>
+              <a:srgbClr val="FFFFFF"/>
+            </a:solidFill>
+            <a:prstDash val="solid"/>
+          </a:ln>
+        </p:spPr>
+        <p:style>
+          <a:lnRef xmlns:a="http://schemas.openxmlformats.org/drawingml/2006/main" idx="0"/>
+          <a:fillRef xmlns:a="http://schemas.openxmlformats.org/drawingml/2006/main" idx="0"/>
+          <a:effectRef xmlns:a="http://schemas.openxmlformats.org/drawingml/2006/main" idx="4"/>
+          <a:fontRef xmlns:a="http://schemas.openxmlformats.org/drawingml/2006/main" idx="major"/>
+        </p:style>
+      </p:sp>
+      <p:sp>
+        <p:nvSpPr>
+          <p:cNvPr id="31" name="PPAGENT_QA|parent=funnel-face-3|domains=funnel-face">
+            <a:extLst xmlns:a="http://schemas.openxmlformats.org/drawingml/2006/main">
+              <a:ext uri="{FF2B5EF4-FFF2-40B4-BE49-F238E27FC236}">
+                <a16:creationId xmlns:a16="http://schemas.microsoft.com/office/drawing/2014/main" id="{7B637BF8-D9DA-476B-8EA5-950A594E829D}"/>
+              </a:ext>
+            </a:extLst>
+          </p:cNvPr>
+          <p:cNvSpPr>
+            <a:spLocks xmlns:a="http://schemas.openxmlformats.org/drawingml/2006/main" noGrp="1"/>
+          </p:cNvSpPr>
+          <p:nvPr/>
+        </p:nvSpPr>
+        <p:spPr>
+          <a:xfrm xmlns:a="http://schemas.openxmlformats.org/drawingml/2006/main">
+            <a:off x="1953816" y="4040505"/>
+            <a:ext cx="2797969" cy="228600"/>
+          </a:xfrm>
+          <a:prstGeom xmlns:a="http://schemas.openxmlformats.org/drawingml/2006/main" prst="ellipse">
+            <a:avLst/>
+          </a:prstGeom>
+          <a:solidFill xmlns:a="http://schemas.openxmlformats.org/drawingml/2006/main">
+            <a:srgbClr val="16A0C4"/>
+          </a:solidFill>
+          <a:ln xmlns:a="http://schemas.openxmlformats.org/drawingml/2006/main" w="11430">
+            <a:solidFill>
+              <a:srgbClr val="D9F1FA"/>
+            </a:solidFill>
+            <a:prstDash val="solid"/>
+          </a:ln>
+        </p:spPr>
+      </p:sp>
+      <p:sp>
+        <p:nvSpPr>
+          <p:cNvPr id="32" name="PPAGENT_QA|within=funnel-stage-3|role=rate">
+            <a:extLst xmlns:a="http://schemas.openxmlformats.org/drawingml/2006/main">
+              <a:ext uri="{FF2B5EF4-FFF2-40B4-BE49-F238E27FC236}">
+                <a16:creationId xmlns:a16="http://schemas.microsoft.com/office/drawing/2014/main" id="{A734FCEA-B1B2-4247-A378-42194CD820F4}"/>
+              </a:ext>
+            </a:extLst>
+          </p:cNvPr>
+          <p:cNvSpPr>
+            <a:spLocks xmlns:a="http://schemas.openxmlformats.org/drawingml/2006/main" noGrp="1"/>
+          </p:cNvSpPr>
+          <p:nvPr/>
+        </p:nvSpPr>
+        <p:spPr>
+          <a:xfrm xmlns:a="http://schemas.openxmlformats.org/drawingml/2006/main">
+            <a:off x="2106216" y="4202430"/>
+            <a:ext cx="2493169" cy="276225"/>
+          </a:xfrm>
+          <a:prstGeom xmlns:a="http://schemas.openxmlformats.org/drawingml/2006/main" prst="rect">
+            <a:avLst/>
+          </a:prstGeom>
+          <a:noFill xmlns:a="http://schemas.openxmlformats.org/drawingml/2006/main"/>
+          <a:ln xmlns:a="http://schemas.openxmlformats.org/drawingml/2006/main" w="0">
+            <a:noFill/>
+            <a:prstDash val="solid"/>
+          </a:ln>
+        </p:spPr>
+        <p:txBody>
+          <a:bodyPr xmlns:a="http://schemas.openxmlformats.org/drawingml/2006/main" lIns="0" tIns="0" rIns="0" bIns="0" anchor="ctr">
+            <a:normAutofit fontScale="100000"/>
+          </a:bodyPr>
+          <a:lstStyle xmlns:a="http://schemas.openxmlformats.org/drawingml/2006/main"/>
+          <a:p xmlns:a="http://schemas.openxmlformats.org/drawingml/2006/main">
+            <a:pPr algn="ctr">
+              <a:defRPr sz="1500" b="1">
+                <a:solidFill>
+                  <a:srgbClr val="F6C96A"/>
+                </a:solidFill>
+                <a:latin typeface="Microsoft YaHei"/>
+                <a:ea typeface="Microsoft YaHei"/>
+                <a:cs typeface="Microsoft YaHei"/>
+              </a:defRPr>
+            </a:pPr>
+            <a:r>
+              <a:rPr sz="1500" b="1">
+                <a:solidFill>
+                  <a:srgbClr val="F6C96A"/>
+                </a:solidFill>
+                <a:latin typeface="Microsoft YaHei"/>
+                <a:ea typeface="Microsoft YaHei"/>
+                <a:cs typeface="Microsoft YaHei"/>
+              </a:rPr>
+              <a:t>54%</a:t>
+            </a:r>
+          </a:p>
+        </p:txBody>
+      </p:sp>
+      <p:sp>
+        <p:nvSpPr>
+          <p:cNvPr id="33" name="PPAGENT_QA|parent=funnel-label-3|domains=funnel-label">
+            <a:extLst xmlns:a="http://schemas.openxmlformats.org/drawingml/2006/main">
+              <a:ext uri="{FF2B5EF4-FFF2-40B4-BE49-F238E27FC236}">
+                <a16:creationId xmlns:a16="http://schemas.microsoft.com/office/drawing/2014/main" id="{DBAE541B-7A11-459E-ACB3-3A9067CF0B3D}"/>
+              </a:ext>
+            </a:extLst>
+          </p:cNvPr>
+          <p:cNvSpPr>
+            <a:spLocks xmlns:a="http://schemas.openxmlformats.org/drawingml/2006/main" noGrp="1"/>
+          </p:cNvSpPr>
+          <p:nvPr/>
+        </p:nvSpPr>
+        <p:spPr>
+          <a:xfrm xmlns:a="http://schemas.openxmlformats.org/drawingml/2006/main">
+            <a:off x="2106216" y="4469130"/>
+            <a:ext cx="2493169" cy="295275"/>
+          </a:xfrm>
+          <a:prstGeom xmlns:a="http://schemas.openxmlformats.org/drawingml/2006/main" prst="rect">
+            <a:avLst/>
+          </a:prstGeom>
+          <a:noFill xmlns:a="http://schemas.openxmlformats.org/drawingml/2006/main"/>
+          <a:ln xmlns:a="http://schemas.openxmlformats.org/drawingml/2006/main" w="0">
+            <a:noFill/>
+            <a:prstDash val="solid"/>
+          </a:ln>
+        </p:spPr>
+        <p:txBody>
+          <a:bodyPr xmlns:a="http://schemas.openxmlformats.org/drawingml/2006/main" lIns="0" tIns="0" rIns="0" bIns="0" anchor="ctr">
+            <a:normAutofit fontScale="100000"/>
+          </a:bodyPr>
+          <a:lstStyle xmlns:a="http://schemas.openxmlformats.org/drawingml/2006/main"/>
+          <a:p xmlns:a="http://schemas.openxmlformats.org/drawingml/2006/main">
+            <a:pPr algn="ctr">
+              <a:defRPr sz="1275" b="1">
+                <a:solidFill>
+                  <a:srgbClr val="FFFFFF"/>
+                </a:solidFill>
+                <a:latin typeface="Microsoft YaHei"/>
+                <a:ea typeface="Microsoft YaHei"/>
+                <a:cs typeface="Microsoft YaHei"/>
+              </a:defRPr>
+            </a:pPr>
+            <a:r>
+              <a:rPr sz="1275" b="1">
+                <a:solidFill>
+                  <a:srgbClr val="FFFFFF"/>
+                </a:solidFill>
+                <a:latin typeface="Microsoft YaHei"/>
+                <a:ea typeface="Microsoft YaHei"/>
+                <a:cs typeface="Microsoft YaHei"/>
+              </a:rPr>
+              <a:t>完成生成</a:t>
+            </a:r>
+          </a:p>
+        </p:txBody>
+      </p:sp>
+      <p:sp>
+        <p:nvSpPr>
+          <p:cNvPr id="34" name="PPAGENT_QA|parent=funnel-note-3|domains=funnel-note,funnel-content">
+            <a:extLst xmlns:a="http://schemas.openxmlformats.org/drawingml/2006/main">
+              <a:ext uri="{FF2B5EF4-FFF2-40B4-BE49-F238E27FC236}">
+                <a16:creationId xmlns:a16="http://schemas.microsoft.com/office/drawing/2014/main" id="{7982CFA8-9F32-4A72-8DF7-6E8CC6BE7269}"/>
+              </a:ext>
+            </a:extLst>
+          </p:cNvPr>
+          <p:cNvSpPr>
+            <a:spLocks xmlns:a="http://schemas.openxmlformats.org/drawingml/2006/main" noGrp="1"/>
+          </p:cNvSpPr>
+          <p:nvPr/>
+        </p:nvSpPr>
+        <p:spPr>
+          <a:xfrm xmlns:a="http://schemas.openxmlformats.org/drawingml/2006/main">
+            <a:off x="6915150" y="4116705"/>
+            <a:ext cx="4552950" cy="765810"/>
+          </a:xfrm>
+          <a:prstGeom xmlns:a="http://schemas.openxmlformats.org/drawingml/2006/main" prst="roundRect">
+            <a:avLst>
+              <a:gd name="adj" fmla="val 14925"/>
+            </a:avLst>
+          </a:prstGeom>
+          <a:solidFill xmlns:a="http://schemas.openxmlformats.org/drawingml/2006/main">
+            <a:srgbClr val="F7FAFC"/>
+          </a:solidFill>
+          <a:ln xmlns:a="http://schemas.openxmlformats.org/drawingml/2006/main" w="9525">
+            <a:solidFill>
+              <a:srgbClr val="D8E5EF"/>
+            </a:solidFill>
+            <a:prstDash val="solid"/>
+          </a:ln>
+        </p:spPr>
+      </p:sp>
+      <p:sp>
+        <p:nvSpPr>
+          <p:cNvPr id="35" name="">
+            <a:extLst xmlns:a="http://schemas.openxmlformats.org/drawingml/2006/main">
+              <a:ext uri="{FF2B5EF4-FFF2-40B4-BE49-F238E27FC236}">
+                <a16:creationId xmlns:a16="http://schemas.microsoft.com/office/drawing/2014/main" id="{8A91D7A3-5C29-4138-AEE4-F62B27BA44DB}"/>
+              </a:ext>
+            </a:extLst>
+          </p:cNvPr>
+          <p:cNvSpPr>
+            <a:spLocks xmlns:a="http://schemas.openxmlformats.org/drawingml/2006/main" noGrp="1"/>
+          </p:cNvSpPr>
+          <p:nvPr/>
+        </p:nvSpPr>
+        <p:spPr>
+          <a:xfrm xmlns:a="http://schemas.openxmlformats.org/drawingml/2006/main">
+            <a:off x="6915150" y="4116705"/>
+            <a:ext cx="57150" cy="765810"/>
+          </a:xfrm>
+          <a:prstGeom xmlns:a="http://schemas.openxmlformats.org/drawingml/2006/main" prst="roundRect">
+            <a:avLst>
+              <a:gd name="adj" fmla="val 33333"/>
+            </a:avLst>
+          </a:prstGeom>
+          <a:solidFill xmlns:a="http://schemas.openxmlformats.org/drawingml/2006/main">
+            <a:srgbClr val="16A0C4"/>
+          </a:solidFill>
+          <a:ln xmlns:a="http://schemas.openxmlformats.org/drawingml/2006/main" w="0">
+            <a:noFill/>
+            <a:prstDash val="solid"/>
+          </a:ln>
+        </p:spPr>
+      </p:sp>
+      <p:sp>
+        <p:nvSpPr>
+          <p:cNvPr id="36" name="PPAGENT_QA|within=funnel-note-3|role=title">
+            <a:extLst xmlns:a="http://schemas.openxmlformats.org/drawingml/2006/main">
+              <a:ext uri="{FF2B5EF4-FFF2-40B4-BE49-F238E27FC236}">
+                <a16:creationId xmlns:a16="http://schemas.microsoft.com/office/drawing/2014/main" id="{2F48C262-5061-48A2-9352-EA9053590BBC}"/>
+              </a:ext>
+            </a:extLst>
+          </p:cNvPr>
+          <p:cNvSpPr>
+            <a:spLocks xmlns:a="http://schemas.openxmlformats.org/drawingml/2006/main" noGrp="1"/>
+          </p:cNvSpPr>
+          <p:nvPr/>
+        </p:nvSpPr>
+        <p:spPr>
+          <a:xfrm xmlns:a="http://schemas.openxmlformats.org/drawingml/2006/main">
+            <a:off x="7162800" y="4173855"/>
+            <a:ext cx="4000500" cy="219075"/>
+          </a:xfrm>
+          <a:prstGeom xmlns:a="http://schemas.openxmlformats.org/drawingml/2006/main" prst="rect">
+            <a:avLst/>
+          </a:prstGeom>
+          <a:noFill xmlns:a="http://schemas.openxmlformats.org/drawingml/2006/main"/>
+          <a:ln xmlns:a="http://schemas.openxmlformats.org/drawingml/2006/main" w="0">
+            <a:noFill/>
+            <a:prstDash val="solid"/>
+          </a:ln>
+        </p:spPr>
+        <p:txBody>
+          <a:bodyPr xmlns:a="http://schemas.openxmlformats.org/drawingml/2006/main" lIns="0" tIns="0" rIns="0" bIns="0" anchor="ctr">
+            <a:normAutofit fontScale="100000"/>
+          </a:bodyPr>
+          <a:lstStyle xmlns:a="http://schemas.openxmlformats.org/drawingml/2006/main"/>
+          <a:p xmlns:a="http://schemas.openxmlformats.org/drawingml/2006/main">
+            <a:pPr algn="l">
+              <a:defRPr sz="1350" b="1">
+                <a:solidFill>
+                  <a:srgbClr val="1677C8"/>
+                </a:solidFill>
+                <a:latin typeface="Microsoft YaHei"/>
+                <a:ea typeface="Microsoft YaHei"/>
+                <a:cs typeface="Microsoft YaHei"/>
+              </a:defRPr>
+            </a:pPr>
+            <a:r>
+              <a:rPr sz="1350" b="1">
+                <a:solidFill>
+                  <a:srgbClr val="1677C8"/>
+                </a:solidFill>
+                <a:latin typeface="Microsoft YaHei"/>
+                <a:ea typeface="Microsoft YaHei"/>
+                <a:cs typeface="Microsoft YaHei"/>
+              </a:rPr>
+              <a:t>04  完成生成</a:t>
+            </a:r>
+          </a:p>
+        </p:txBody>
+      </p:sp>
+      <p:sp>
+        <p:nvSpPr>
+          <p:cNvPr id="37" name="PPAGENT_QA|within=funnel-note-3|role=body">
+            <a:extLst xmlns:a="http://schemas.openxmlformats.org/drawingml/2006/main">
+              <a:ext uri="{FF2B5EF4-FFF2-40B4-BE49-F238E27FC236}">
+                <a16:creationId xmlns:a16="http://schemas.microsoft.com/office/drawing/2014/main" id="{42F152B7-B389-41DB-A5A8-EEE88314B42D}"/>
+              </a:ext>
+            </a:extLst>
+          </p:cNvPr>
+          <p:cNvSpPr>
+            <a:spLocks xmlns:a="http://schemas.openxmlformats.org/drawingml/2006/main" noGrp="1"/>
+          </p:cNvSpPr>
+          <p:nvPr/>
+        </p:nvSpPr>
+        <p:spPr>
+          <a:xfrm xmlns:a="http://schemas.openxmlformats.org/drawingml/2006/main">
+            <a:off x="7162800" y="4326255"/>
+            <a:ext cx="4000500" cy="556260"/>
+          </a:xfrm>
+          <a:prstGeom xmlns:a="http://schemas.openxmlformats.org/drawingml/2006/main" prst="rect">
+            <a:avLst/>
+          </a:prstGeom>
+          <a:noFill xmlns:a="http://schemas.openxmlformats.org/drawingml/2006/main"/>
+          <a:ln xmlns:a="http://schemas.openxmlformats.org/drawingml/2006/main" w="0">
+            <a:noFill/>
+            <a:prstDash val="solid"/>
+          </a:ln>
+        </p:spPr>
+        <p:txBody>
+          <a:bodyPr xmlns:a="http://schemas.openxmlformats.org/drawingml/2006/main" lIns="0" tIns="0" rIns="0" bIns="0" anchor="t">
+            <a:normAutofit fontScale="100000"/>
+          </a:bodyPr>
+          <a:lstStyle xmlns:a="http://schemas.openxmlformats.org/drawingml/2006/main"/>
+          <a:p xmlns:a="http://schemas.openxmlformats.org/drawingml/2006/main">
+            <a:pPr algn="l">
+              <a:defRPr sz="1500" b="0">
+                <a:solidFill>
+                  <a:srgbClr val="475569"/>
+                </a:solidFill>
+                <a:latin typeface="Microsoft YaHei"/>
+                <a:ea typeface="Microsoft YaHei"/>
+                <a:cs typeface="Microsoft YaHei"/>
+              </a:defRPr>
+            </a:pPr>
+            <a:r>
+              <a:rPr sz="1500" b="0">
+                <a:solidFill>
+                  <a:srgbClr val="475569"/>
+                </a:solidFill>
+                <a:latin typeface="Microsoft YaHei"/>
+                <a:ea typeface="Microsoft YaHei"/>
+                <a:cs typeface="Microsoft YaHei"/>
+              </a:rPr>
+              <a:t>输出原生可编辑页面</a:t>
+            </a:r>
+          </a:p>
+        </p:txBody>
+      </p:sp>
+      <p:sp>
+        <p:nvSpPr>
+          <p:cNvPr id="38" name="PPAGENT_CONNECTOR|from=funnel-stage-3|fromSide=right|to=funnel-note-3|toSide=left">
+            <a:extLst xmlns:a="http://schemas.openxmlformats.org/drawingml/2006/main">
+              <a:ext uri="{FF2B5EF4-FFF2-40B4-BE49-F238E27FC236}">
+                <a16:creationId xmlns:a16="http://schemas.microsoft.com/office/drawing/2014/main" id="{1BF6194C-D7D9-4788-A67E-AA0891E3637E}"/>
+              </a:ext>
+            </a:extLst>
+          </p:cNvPr>
+          <p:cNvSpPr>
+            <a:spLocks xmlns:a="http://schemas.openxmlformats.org/drawingml/2006/main" noGrp="1"/>
+          </p:cNvSpPr>
+          <p:nvPr/>
+        </p:nvSpPr>
+        <p:spPr>
+          <a:xfrm xmlns:a="http://schemas.openxmlformats.org/drawingml/2006/main" flipH="0" flipV="0">
+            <a:off x="4751784" y="4499610"/>
+            <a:ext cx="2163366" cy="0"/>
+          </a:xfrm>
+          <a:prstGeom xmlns:a="http://schemas.openxmlformats.org/drawingml/2006/main" prst="line">
+            <a:avLst/>
+          </a:prstGeom>
+          <a:noFill xmlns:a="http://schemas.openxmlformats.org/drawingml/2006/main"/>
+          <a:ln xmlns:a="http://schemas.openxmlformats.org/drawingml/2006/main" w="12383">
+            <a:solidFill>
+              <a:srgbClr val="91B8D7"/>
+            </a:solidFill>
+            <a:prstDash val="solid"/>
+          </a:ln>
+        </p:spPr>
+      </p:sp>
+      <p:sp>
+        <p:nvSpPr>
+          <p:cNvPr id="39" name="PPAGENT_QA|parent=funnel-stage-4|domains=funnel-shape,funnel-content">
+            <a:extLst xmlns:a="http://schemas.openxmlformats.org/drawingml/2006/main">
+              <a:ext uri="{FF2B5EF4-FFF2-40B4-BE49-F238E27FC236}">
+                <a16:creationId xmlns:a16="http://schemas.microsoft.com/office/drawing/2014/main" id="{6FD56EC4-0C80-4294-9B43-6403F1275D11}"/>
+              </a:ext>
+            </a:extLst>
+          </p:cNvPr>
+          <p:cNvSpPr>
+            <a:spLocks xmlns:a="http://schemas.openxmlformats.org/drawingml/2006/main" noGrp="1"/>
+          </p:cNvSpPr>
+          <p:nvPr/>
+        </p:nvSpPr>
+        <p:spPr>
+          <a:xfrm xmlns:a="http://schemas.openxmlformats.org/drawingml/2006/main" flipV="1">
+            <a:off x="2376488" y="4968240"/>
+            <a:ext cx="1952625" cy="784860"/>
+          </a:xfrm>
+          <a:prstGeom xmlns:a="http://schemas.openxmlformats.org/drawingml/2006/main" prst="trapezoid">
+            <a:avLst/>
+          </a:prstGeom>
+          <a:solidFill xmlns:a="http://schemas.openxmlformats.org/drawingml/2006/main">
+            <a:srgbClr val="19B7C4"/>
+          </a:solidFill>
+          <a:ln xmlns:a="http://schemas.openxmlformats.org/drawingml/2006/main" w="19050">
+            <a:solidFill>
+              <a:srgbClr val="FFFFFF"/>
+            </a:solidFill>
+            <a:prstDash val="solid"/>
+          </a:ln>
+        </p:spPr>
+        <p:style>
+          <a:lnRef xmlns:a="http://schemas.openxmlformats.org/drawingml/2006/main" idx="0"/>
+          <a:fillRef xmlns:a="http://schemas.openxmlformats.org/drawingml/2006/main" idx="0"/>
+          <a:effectRef xmlns:a="http://schemas.openxmlformats.org/drawingml/2006/main" idx="4"/>
+          <a:fontRef xmlns:a="http://schemas.openxmlformats.org/drawingml/2006/main" idx="major"/>
+        </p:style>
+      </p:sp>
+      <p:sp>
+        <p:nvSpPr>
+          <p:cNvPr id="40" name="PPAGENT_QA|parent=funnel-face-4|domains=funnel-face">
+            <a:extLst xmlns:a="http://schemas.openxmlformats.org/drawingml/2006/main">
+              <a:ext uri="{FF2B5EF4-FFF2-40B4-BE49-F238E27FC236}">
+                <a16:creationId xmlns:a16="http://schemas.microsoft.com/office/drawing/2014/main" id="{7BB3FA52-BDBF-4BD4-8CE7-066D3119C044}"/>
+              </a:ext>
+            </a:extLst>
+          </p:cNvPr>
+          <p:cNvSpPr>
+            <a:spLocks xmlns:a="http://schemas.openxmlformats.org/drawingml/2006/main" noGrp="1"/>
+          </p:cNvSpPr>
+          <p:nvPr/>
+        </p:nvSpPr>
+        <p:spPr>
+          <a:xfrm xmlns:a="http://schemas.openxmlformats.org/drawingml/2006/main">
+            <a:off x="2376488" y="4901565"/>
+            <a:ext cx="1952625" cy="228600"/>
+          </a:xfrm>
+          <a:prstGeom xmlns:a="http://schemas.openxmlformats.org/drawingml/2006/main" prst="ellipse">
+            <a:avLst/>
+          </a:prstGeom>
+          <a:solidFill xmlns:a="http://schemas.openxmlformats.org/drawingml/2006/main">
+            <a:srgbClr val="19B7C4"/>
+          </a:solidFill>
+          <a:ln xmlns:a="http://schemas.openxmlformats.org/drawingml/2006/main" w="11430">
+            <a:solidFill>
+              <a:srgbClr val="D9F1FA"/>
+            </a:solidFill>
+            <a:prstDash val="solid"/>
+          </a:ln>
+        </p:spPr>
+      </p:sp>
+      <p:sp>
+        <p:nvSpPr>
+          <p:cNvPr id="41" name="PPAGENT_QA|within=funnel-stage-4|role=rate">
+            <a:extLst xmlns:a="http://schemas.openxmlformats.org/drawingml/2006/main">
+              <a:ext uri="{FF2B5EF4-FFF2-40B4-BE49-F238E27FC236}">
+                <a16:creationId xmlns:a16="http://schemas.microsoft.com/office/drawing/2014/main" id="{D0350E82-9605-4DFD-AEF0-C137CFBA426E}"/>
+              </a:ext>
+            </a:extLst>
+          </p:cNvPr>
+          <p:cNvSpPr>
+            <a:spLocks xmlns:a="http://schemas.openxmlformats.org/drawingml/2006/main" noGrp="1"/>
+          </p:cNvSpPr>
+          <p:nvPr/>
+        </p:nvSpPr>
+        <p:spPr>
+          <a:xfrm xmlns:a="http://schemas.openxmlformats.org/drawingml/2006/main">
+            <a:off x="2528888" y="5063490"/>
+            <a:ext cx="1647825" cy="276225"/>
+          </a:xfrm>
+          <a:prstGeom xmlns:a="http://schemas.openxmlformats.org/drawingml/2006/main" prst="rect">
+            <a:avLst/>
+          </a:prstGeom>
+          <a:noFill xmlns:a="http://schemas.openxmlformats.org/drawingml/2006/main"/>
+          <a:ln xmlns:a="http://schemas.openxmlformats.org/drawingml/2006/main" w="0">
+            <a:noFill/>
+            <a:prstDash val="solid"/>
+          </a:ln>
+        </p:spPr>
+        <p:txBody>
+          <a:bodyPr xmlns:a="http://schemas.openxmlformats.org/drawingml/2006/main" lIns="0" tIns="0" rIns="0" bIns="0" anchor="ctr">
+            <a:normAutofit fontScale="100000"/>
+          </a:bodyPr>
+          <a:lstStyle xmlns:a="http://schemas.openxmlformats.org/drawingml/2006/main"/>
+          <a:p xmlns:a="http://schemas.openxmlformats.org/drawingml/2006/main">
+            <a:pPr algn="ctr">
+              <a:defRPr sz="1500" b="1">
+                <a:solidFill>
+                  <a:srgbClr val="F6C96A"/>
+                </a:solidFill>
+                <a:latin typeface="Microsoft YaHei"/>
+                <a:ea typeface="Microsoft YaHei"/>
+                <a:cs typeface="Microsoft YaHei"/>
+              </a:defRPr>
+            </a:pPr>
+            <a:r>
+              <a:rPr sz="1500" b="1">
+                <a:solidFill>
+                  <a:srgbClr val="F6C96A"/>
+                </a:solidFill>
+                <a:latin typeface="Microsoft YaHei"/>
+                <a:ea typeface="Microsoft YaHei"/>
+                <a:cs typeface="Microsoft YaHei"/>
+              </a:rPr>
+              <a:t>43%</a:t>
+            </a:r>
+          </a:p>
+        </p:txBody>
+      </p:sp>
+      <p:sp>
+        <p:nvSpPr>
+          <p:cNvPr id="42" name="PPAGENT_QA|parent=funnel-label-4|domains=funnel-label">
+            <a:extLst xmlns:a="http://schemas.openxmlformats.org/drawingml/2006/main">
+              <a:ext uri="{FF2B5EF4-FFF2-40B4-BE49-F238E27FC236}">
+                <a16:creationId xmlns:a16="http://schemas.microsoft.com/office/drawing/2014/main" id="{0D2C5A9A-A505-4B04-A74E-73A69BD9DC58}"/>
+              </a:ext>
+            </a:extLst>
+          </p:cNvPr>
+          <p:cNvSpPr>
+            <a:spLocks xmlns:a="http://schemas.openxmlformats.org/drawingml/2006/main" noGrp="1"/>
+          </p:cNvSpPr>
+          <p:nvPr/>
+        </p:nvSpPr>
+        <p:spPr>
+          <a:xfrm xmlns:a="http://schemas.openxmlformats.org/drawingml/2006/main">
+            <a:off x="2528888" y="5330190"/>
+            <a:ext cx="1647825" cy="295275"/>
+          </a:xfrm>
+          <a:prstGeom xmlns:a="http://schemas.openxmlformats.org/drawingml/2006/main" prst="rect">
+            <a:avLst/>
+          </a:prstGeom>
+          <a:noFill xmlns:a="http://schemas.openxmlformats.org/drawingml/2006/main"/>
+          <a:ln xmlns:a="http://schemas.openxmlformats.org/drawingml/2006/main" w="0">
+            <a:noFill/>
+            <a:prstDash val="solid"/>
+          </a:ln>
+        </p:spPr>
+        <p:txBody>
+          <a:bodyPr xmlns:a="http://schemas.openxmlformats.org/drawingml/2006/main" lIns="0" tIns="0" rIns="0" bIns="0" anchor="ctr">
+            <a:normAutofit fontScale="100000"/>
+          </a:bodyPr>
+          <a:lstStyle xmlns:a="http://schemas.openxmlformats.org/drawingml/2006/main"/>
+          <a:p xmlns:a="http://schemas.openxmlformats.org/drawingml/2006/main">
+            <a:pPr algn="ctr">
+              <a:defRPr sz="1275" b="1">
+                <a:solidFill>
+                  <a:srgbClr val="FFFFFF"/>
+                </a:solidFill>
+                <a:latin typeface="Microsoft YaHei"/>
+                <a:ea typeface="Microsoft YaHei"/>
+                <a:cs typeface="Microsoft YaHei"/>
+              </a:defRPr>
+            </a:pPr>
+            <a:r>
+              <a:rPr sz="1275" b="1">
+                <a:solidFill>
+                  <a:srgbClr val="FFFFFF"/>
+                </a:solidFill>
+                <a:latin typeface="Microsoft YaHei"/>
+                <a:ea typeface="Microsoft YaHei"/>
+                <a:cs typeface="Microsoft YaHei"/>
+              </a:rPr>
+              <a:t>质量通过</a:t>
+            </a:r>
+          </a:p>
+        </p:txBody>
+      </p:sp>
+      <p:sp>
+        <p:nvSpPr>
+          <p:cNvPr id="43" name="PPAGENT_QA|parent=funnel-note-4|domains=funnel-note,funnel-content">
+            <a:extLst xmlns:a="http://schemas.openxmlformats.org/drawingml/2006/main">
+              <a:ext uri="{FF2B5EF4-FFF2-40B4-BE49-F238E27FC236}">
+                <a16:creationId xmlns:a16="http://schemas.microsoft.com/office/drawing/2014/main" id="{2AAAC4B4-B579-4E46-98F0-49702ED00A58}"/>
+              </a:ext>
+            </a:extLst>
+          </p:cNvPr>
+          <p:cNvSpPr>
+            <a:spLocks xmlns:a="http://schemas.openxmlformats.org/drawingml/2006/main" noGrp="1"/>
+          </p:cNvSpPr>
+          <p:nvPr/>
+        </p:nvSpPr>
+        <p:spPr>
+          <a:xfrm xmlns:a="http://schemas.openxmlformats.org/drawingml/2006/main">
+            <a:off x="6915150" y="4977765"/>
+            <a:ext cx="4552950" cy="765810"/>
+          </a:xfrm>
+          <a:prstGeom xmlns:a="http://schemas.openxmlformats.org/drawingml/2006/main" prst="roundRect">
+            <a:avLst>
+              <a:gd name="adj" fmla="val 14925"/>
+            </a:avLst>
+          </a:prstGeom>
+          <a:solidFill xmlns:a="http://schemas.openxmlformats.org/drawingml/2006/main">
+            <a:srgbClr val="FFFFFF"/>
+          </a:solidFill>
+          <a:ln xmlns:a="http://schemas.openxmlformats.org/drawingml/2006/main" w="9525">
+            <a:solidFill>
+              <a:srgbClr val="D8E5EF"/>
+            </a:solidFill>
+            <a:prstDash val="solid"/>
+          </a:ln>
+        </p:spPr>
+      </p:sp>
+      <p:sp>
+        <p:nvSpPr>
+          <p:cNvPr id="44" name="">
+            <a:extLst xmlns:a="http://schemas.openxmlformats.org/drawingml/2006/main">
+              <a:ext uri="{FF2B5EF4-FFF2-40B4-BE49-F238E27FC236}">
+                <a16:creationId xmlns:a16="http://schemas.microsoft.com/office/drawing/2014/main" id="{D1423F3C-B663-4DF8-840E-4C16E56E9F11}"/>
+              </a:ext>
+            </a:extLst>
+          </p:cNvPr>
+          <p:cNvSpPr>
+            <a:spLocks xmlns:a="http://schemas.openxmlformats.org/drawingml/2006/main" noGrp="1"/>
+          </p:cNvSpPr>
+          <p:nvPr/>
+        </p:nvSpPr>
+        <p:spPr>
+          <a:xfrm xmlns:a="http://schemas.openxmlformats.org/drawingml/2006/main">
+            <a:off x="6915150" y="4977765"/>
+            <a:ext cx="57150" cy="765810"/>
+          </a:xfrm>
+          <a:prstGeom xmlns:a="http://schemas.openxmlformats.org/drawingml/2006/main" prst="roundRect">
+            <a:avLst>
+              <a:gd name="adj" fmla="val 33333"/>
+            </a:avLst>
+          </a:prstGeom>
+          <a:solidFill xmlns:a="http://schemas.openxmlformats.org/drawingml/2006/main">
+            <a:srgbClr val="19B7C4"/>
+          </a:solidFill>
+          <a:ln xmlns:a="http://schemas.openxmlformats.org/drawingml/2006/main" w="0">
+            <a:noFill/>
+            <a:prstDash val="solid"/>
+          </a:ln>
+        </p:spPr>
+      </p:sp>
+      <p:sp>
+        <p:nvSpPr>
+          <p:cNvPr id="45" name="PPAGENT_QA|within=funnel-note-4|role=title">
+            <a:extLst xmlns:a="http://schemas.openxmlformats.org/drawingml/2006/main">
+              <a:ext uri="{FF2B5EF4-FFF2-40B4-BE49-F238E27FC236}">
+                <a16:creationId xmlns:a16="http://schemas.microsoft.com/office/drawing/2014/main" id="{F6A9E621-0E4C-46C2-A38A-ECD73F2EA279}"/>
+              </a:ext>
+            </a:extLst>
+          </p:cNvPr>
+          <p:cNvSpPr>
+            <a:spLocks xmlns:a="http://schemas.openxmlformats.org/drawingml/2006/main" noGrp="1"/>
+          </p:cNvSpPr>
+          <p:nvPr/>
+        </p:nvSpPr>
+        <p:spPr>
+          <a:xfrm xmlns:a="http://schemas.openxmlformats.org/drawingml/2006/main">
+            <a:off x="7162800" y="5034915"/>
+            <a:ext cx="4000500" cy="219075"/>
+          </a:xfrm>
+          <a:prstGeom xmlns:a="http://schemas.openxmlformats.org/drawingml/2006/main" prst="rect">
+            <a:avLst/>
+          </a:prstGeom>
+          <a:noFill xmlns:a="http://schemas.openxmlformats.org/drawingml/2006/main"/>
+          <a:ln xmlns:a="http://schemas.openxmlformats.org/drawingml/2006/main" w="0">
+            <a:noFill/>
+            <a:prstDash val="solid"/>
+          </a:ln>
+        </p:spPr>
+        <p:txBody>
+          <a:bodyPr xmlns:a="http://schemas.openxmlformats.org/drawingml/2006/main" lIns="0" tIns="0" rIns="0" bIns="0" anchor="ctr">
+            <a:normAutofit fontScale="100000"/>
+          </a:bodyPr>
+          <a:lstStyle xmlns:a="http://schemas.openxmlformats.org/drawingml/2006/main"/>
+          <a:p xmlns:a="http://schemas.openxmlformats.org/drawingml/2006/main">
+            <a:pPr algn="l">
+              <a:defRPr sz="1350" b="1">
+                <a:solidFill>
+                  <a:srgbClr val="1677C8"/>
+                </a:solidFill>
+                <a:latin typeface="Microsoft YaHei"/>
+                <a:ea typeface="Microsoft YaHei"/>
+                <a:cs typeface="Microsoft YaHei"/>
+              </a:defRPr>
+            </a:pPr>
+            <a:r>
+              <a:rPr sz="1350" b="1">
+                <a:solidFill>
+                  <a:srgbClr val="1677C8"/>
+                </a:solidFill>
+                <a:latin typeface="Microsoft YaHei"/>
+                <a:ea typeface="Microsoft YaHei"/>
+                <a:cs typeface="Microsoft YaHei"/>
+              </a:rPr>
+              <a:t>05  质量通过</a:t>
+            </a:r>
+          </a:p>
+        </p:txBody>
+      </p:sp>
+      <p:sp>
+        <p:nvSpPr>
+          <p:cNvPr id="46" name="PPAGENT_QA|within=funnel-note-4|role=body">
+            <a:extLst xmlns:a="http://schemas.openxmlformats.org/drawingml/2006/main">
+              <a:ext uri="{FF2B5EF4-FFF2-40B4-BE49-F238E27FC236}">
+                <a16:creationId xmlns:a16="http://schemas.microsoft.com/office/drawing/2014/main" id="{D598D4FF-D652-4307-B4FF-5205E8FEEBFF}"/>
+              </a:ext>
+            </a:extLst>
+          </p:cNvPr>
+          <p:cNvSpPr>
+            <a:spLocks xmlns:a="http://schemas.openxmlformats.org/drawingml/2006/main" noGrp="1"/>
+          </p:cNvSpPr>
+          <p:nvPr/>
+        </p:nvSpPr>
+        <p:spPr>
+          <a:xfrm xmlns:a="http://schemas.openxmlformats.org/drawingml/2006/main">
+            <a:off x="7162800" y="5187315"/>
+            <a:ext cx="4000500" cy="556260"/>
+          </a:xfrm>
+          <a:prstGeom xmlns:a="http://schemas.openxmlformats.org/drawingml/2006/main" prst="rect">
+            <a:avLst/>
+          </a:prstGeom>
+          <a:noFill xmlns:a="http://schemas.openxmlformats.org/drawingml/2006/main"/>
+          <a:ln xmlns:a="http://schemas.openxmlformats.org/drawingml/2006/main" w="0">
+            <a:noFill/>
+            <a:prstDash val="solid"/>
+          </a:ln>
+        </p:spPr>
+        <p:txBody>
+          <a:bodyPr xmlns:a="http://schemas.openxmlformats.org/drawingml/2006/main" lIns="0" tIns="0" rIns="0" bIns="0" anchor="t">
+            <a:normAutofit fontScale="100000"/>
+          </a:bodyPr>
+          <a:lstStyle xmlns:a="http://schemas.openxmlformats.org/drawingml/2006/main"/>
+          <a:p xmlns:a="http://schemas.openxmlformats.org/drawingml/2006/main">
+            <a:pPr algn="l">
+              <a:defRPr sz="1500" b="0">
+                <a:solidFill>
+                  <a:srgbClr val="475569"/>
+                </a:solidFill>
+                <a:latin typeface="Microsoft YaHei"/>
+                <a:ea typeface="Microsoft YaHei"/>
+                <a:cs typeface="Microsoft YaHei"/>
+              </a:defRPr>
+            </a:pPr>
+            <a:r>
+              <a:rPr sz="1500" b="0">
+                <a:solidFill>
+                  <a:srgbClr val="475569"/>
+                </a:solidFill>
+                <a:latin typeface="Microsoft YaHei"/>
+                <a:ea typeface="Microsoft YaHei"/>
+                <a:cs typeface="Microsoft YaHei"/>
+              </a:rPr>
+              <a:t>容量与几何检查通过</a:t>
+            </a:r>
+          </a:p>
+        </p:txBody>
+      </p:sp>
+      <p:sp>
+        <p:nvSpPr>
+          <p:cNvPr id="47" name="PPAGENT_CONNECTOR|from=funnel-stage-4|fromSide=right|to=funnel-note-4|toSide=left">
+            <a:extLst xmlns:a="http://schemas.openxmlformats.org/drawingml/2006/main">
+              <a:ext uri="{FF2B5EF4-FFF2-40B4-BE49-F238E27FC236}">
+                <a16:creationId xmlns:a16="http://schemas.microsoft.com/office/drawing/2014/main" id="{F033AE6E-22E9-4286-BE67-0ABA9F04080F}"/>
+              </a:ext>
+            </a:extLst>
+          </p:cNvPr>
+          <p:cNvSpPr>
+            <a:spLocks xmlns:a="http://schemas.openxmlformats.org/drawingml/2006/main" noGrp="1"/>
+          </p:cNvSpPr>
+          <p:nvPr/>
+        </p:nvSpPr>
+        <p:spPr>
+          <a:xfrm xmlns:a="http://schemas.openxmlformats.org/drawingml/2006/main" flipH="0" flipV="0">
+            <a:off x="4329113" y="5360670"/>
+            <a:ext cx="2586038" cy="0"/>
+          </a:xfrm>
+          <a:prstGeom xmlns:a="http://schemas.openxmlformats.org/drawingml/2006/main" prst="line">
+            <a:avLst/>
+          </a:prstGeom>
+          <a:noFill xmlns:a="http://schemas.openxmlformats.org/drawingml/2006/main"/>
+          <a:ln xmlns:a="http://schemas.openxmlformats.org/drawingml/2006/main" w="12383">
+            <a:solidFill>
+              <a:srgbClr val="91B8D7"/>
+            </a:solidFill>
+            <a:prstDash val="solid"/>
+          </a:ln>
+        </p:spPr>
+      </p:sp>
+    </p:spTree>
+    <p:extLst>
+      <p:ext uri="{BB962C8B-B14F-4D97-AF65-F5344CB8AC3E}">
+        <p14:creationId xmlns:p14="http://schemas.microsoft.com/office/powerpoint/2010/main" val="1880128724"/>
+      </p:ext>
+    </p:extLst>
+  </p:cSld>
+</p:sld>
+</file>
+
+<file path=ppt/slides/slide4.xml><?xml version="1.0" encoding="utf-8"?>
+<p:sld xmlns:p="http://schemas.openxmlformats.org/presentationml/2006/main">
+  <p:cSld>
+    <p:bg>
+      <p:bgPr>
+        <a:solidFill xmlns:a="http://schemas.openxmlformats.org/drawingml/2006/main">
+          <a:srgbClr val="F7FAFC"/>
+        </a:solidFill>
+      </p:bgPr>
+    </p:bg>
+    <p:spTree>
+      <p:nvGrpSpPr>
+        <p:cNvPr id="1" name=""/>
+        <p:cNvGrpSpPr/>
+        <p:nvPr/>
+      </p:nvGrpSpPr>
+      <p:grpSpPr>
+        <a:xfrm xmlns:a="http://schemas.openxmlformats.org/drawingml/2006/main"/>
+      </p:grpSpPr>
+      <p:sp>
+        <p:nvSpPr>
+          <p:cNvPr id="57" name="">
+            <a:extLst xmlns:a="http://schemas.openxmlformats.org/drawingml/2006/main">
+              <a:ext uri="{FF2B5EF4-FFF2-40B4-BE49-F238E27FC236}">
+                <a16:creationId xmlns:a16="http://schemas.microsoft.com/office/drawing/2014/main" id="{349512E3-8613-4234-B526-117FD1CD1EE1}"/>
+              </a:ext>
+            </a:extLst>
+          </p:cNvPr>
+          <p:cNvSpPr>
+            <a:spLocks xmlns:a="http://schemas.openxmlformats.org/drawingml/2006/main" noGrp="1"/>
+          </p:cNvSpPr>
+          <p:nvPr/>
+        </p:nvSpPr>
+        <p:spPr>
+          <a:xfrm xmlns:a="http://schemas.openxmlformats.org/drawingml/2006/main">
+            <a:off x="685800" y="400050"/>
+            <a:ext cx="8382000" cy="457200"/>
+          </a:xfrm>
+          <a:prstGeom xmlns:a="http://schemas.openxmlformats.org/drawingml/2006/main" prst="rect">
+            <a:avLst/>
+          </a:prstGeom>
+          <a:noFill xmlns:a="http://schemas.openxmlformats.org/drawingml/2006/main"/>
+          <a:ln xmlns:a="http://schemas.openxmlformats.org/drawingml/2006/main" w="0">
+            <a:noFill/>
+            <a:prstDash val="solid"/>
+          </a:ln>
+        </p:spPr>
+        <p:txBody>
+          <a:bodyPr xmlns:a="http://schemas.openxmlformats.org/drawingml/2006/main" lIns="0" tIns="0" rIns="0" bIns="0" anchor="ctr">
+            <a:normAutofit fontScale="100000"/>
+          </a:bodyPr>
+          <a:lstStyle xmlns:a="http://schemas.openxmlformats.org/drawingml/2006/main"/>
+          <a:p xmlns:a="http://schemas.openxmlformats.org/drawingml/2006/main">
+            <a:pPr algn="l">
+              <a:defRPr sz="2700" b="1">
+                <a:solidFill>
+                  <a:srgbClr val="1677C8"/>
+                </a:solidFill>
+                <a:latin typeface="Microsoft YaHei"/>
+                <a:ea typeface="Microsoft YaHei"/>
+                <a:cs typeface="Microsoft YaHei"/>
+              </a:defRPr>
+            </a:pPr>
+            <a:r>
+              <a:rPr sz="2700" b="1">
+                <a:solidFill>
+                  <a:srgbClr val="1677C8"/>
+                </a:solidFill>
+                <a:latin typeface="Microsoft YaHei"/>
+                <a:ea typeface="Microsoft YaHei"/>
+                <a:cs typeface="Microsoft YaHei"/>
+              </a:rPr>
+              <a:t>转化漏斗</a:t>
+            </a:r>
+          </a:p>
+        </p:txBody>
+      </p:sp>
+      <p:sp>
+        <p:nvSpPr>
+          <p:cNvPr id="2" name="">
+            <a:extLst xmlns:a="http://schemas.openxmlformats.org/drawingml/2006/main">
+              <a:ext uri="{FF2B5EF4-FFF2-40B4-BE49-F238E27FC236}">
+                <a16:creationId xmlns:a16="http://schemas.microsoft.com/office/drawing/2014/main" id="{732DE1E9-A534-4BC9-9A0A-4457C7BBD4FC}"/>
+              </a:ext>
+            </a:extLst>
+          </p:cNvPr>
+          <p:cNvSpPr>
+            <a:spLocks xmlns:a="http://schemas.openxmlformats.org/drawingml/2006/main" noGrp="1"/>
+          </p:cNvSpPr>
+          <p:nvPr/>
+        </p:nvSpPr>
+        <p:spPr>
+          <a:xfrm xmlns:a="http://schemas.openxmlformats.org/drawingml/2006/main">
+            <a:off x="704850" y="876300"/>
+            <a:ext cx="4953000" cy="247650"/>
+          </a:xfrm>
+          <a:prstGeom xmlns:a="http://schemas.openxmlformats.org/drawingml/2006/main" prst="rect">
+            <a:avLst/>
+          </a:prstGeom>
+          <a:noFill xmlns:a="http://schemas.openxmlformats.org/drawingml/2006/main"/>
+          <a:ln xmlns:a="http://schemas.openxmlformats.org/drawingml/2006/main" w="0">
+            <a:noFill/>
+            <a:prstDash val="solid"/>
+          </a:ln>
+        </p:spPr>
+        <p:txBody>
+          <a:bodyPr xmlns:a="http://schemas.openxmlformats.org/drawingml/2006/main" lIns="0" tIns="0" rIns="0" bIns="0" anchor="ctr">
+            <a:normAutofit fontScale="100000"/>
+          </a:bodyPr>
+          <a:lstStyle xmlns:a="http://schemas.openxmlformats.org/drawingml/2006/main"/>
+          <a:p xmlns:a="http://schemas.openxmlformats.org/drawingml/2006/main">
+            <a:pPr algn="l">
+              <a:defRPr sz="1200" b="0">
+                <a:solidFill>
+                  <a:srgbClr val="7C8A9A"/>
+                </a:solidFill>
+                <a:latin typeface="Microsoft YaHei"/>
+                <a:ea typeface="Microsoft YaHei"/>
+                <a:cs typeface="Microsoft YaHei"/>
+              </a:defRPr>
+            </a:pPr>
+            <a:r>
+              <a:rPr sz="1200" b="0">
+                <a:solidFill>
+                  <a:srgbClr val="7C8A9A"/>
+                </a:solidFill>
+                <a:latin typeface="Microsoft YaHei"/>
+                <a:ea typeface="Microsoft YaHei"/>
+                <a:cs typeface="Microsoft YaHei"/>
+              </a:rPr>
+              <a:t>递减转化 · 阶段拆解</a:t>
+            </a:r>
+          </a:p>
+        </p:txBody>
+      </p:sp>
+      <p:sp>
+        <p:nvSpPr>
+          <p:cNvPr id="3" name="PPAGENT_QA|parent=funnel-stage-0|domains=funnel-shape,funnel-content">
+            <a:extLst xmlns:a="http://schemas.openxmlformats.org/drawingml/2006/main">
+              <a:ext uri="{FF2B5EF4-FFF2-40B4-BE49-F238E27FC236}">
+                <a16:creationId xmlns:a16="http://schemas.microsoft.com/office/drawing/2014/main" id="{8F54D5EB-DD02-4626-9EF7-F452B506E9FA}"/>
+              </a:ext>
+            </a:extLst>
+          </p:cNvPr>
+          <p:cNvSpPr>
+            <a:spLocks xmlns:a="http://schemas.openxmlformats.org/drawingml/2006/main" noGrp="1"/>
+          </p:cNvSpPr>
+          <p:nvPr/>
+        </p:nvSpPr>
+        <p:spPr>
+          <a:xfrm xmlns:a="http://schemas.openxmlformats.org/drawingml/2006/main" flipV="1">
+            <a:off x="685800" y="1524000"/>
+            <a:ext cx="5334000" cy="641350"/>
+          </a:xfrm>
+          <a:prstGeom xmlns:a="http://schemas.openxmlformats.org/drawingml/2006/main" prst="trapezoid">
+            <a:avLst/>
+          </a:prstGeom>
+          <a:solidFill xmlns:a="http://schemas.openxmlformats.org/drawingml/2006/main">
+            <a:srgbClr val="174B82"/>
+          </a:solidFill>
+          <a:ln xmlns:a="http://schemas.openxmlformats.org/drawingml/2006/main" w="19050">
+            <a:solidFill>
+              <a:srgbClr val="FFFFFF"/>
+            </a:solidFill>
+            <a:prstDash val="solid"/>
+          </a:ln>
+        </p:spPr>
+        <p:style>
+          <a:lnRef xmlns:a="http://schemas.openxmlformats.org/drawingml/2006/main" idx="0"/>
+          <a:fillRef xmlns:a="http://schemas.openxmlformats.org/drawingml/2006/main" idx="0"/>
+          <a:effectRef xmlns:a="http://schemas.openxmlformats.org/drawingml/2006/main" idx="4"/>
+          <a:fontRef xmlns:a="http://schemas.openxmlformats.org/drawingml/2006/main" idx="major"/>
+        </p:style>
+      </p:sp>
+      <p:sp>
+        <p:nvSpPr>
+          <p:cNvPr id="4" name="PPAGENT_QA|parent=funnel-face-0|domains=funnel-face">
+            <a:extLst xmlns:a="http://schemas.openxmlformats.org/drawingml/2006/main">
+              <a:ext uri="{FF2B5EF4-FFF2-40B4-BE49-F238E27FC236}">
+                <a16:creationId xmlns:a16="http://schemas.microsoft.com/office/drawing/2014/main" id="{FAB29ECA-E567-4871-9047-7B2A9C548BF2}"/>
+              </a:ext>
+            </a:extLst>
+          </p:cNvPr>
+          <p:cNvSpPr>
+            <a:spLocks xmlns:a="http://schemas.openxmlformats.org/drawingml/2006/main" noGrp="1"/>
+          </p:cNvSpPr>
+          <p:nvPr/>
+        </p:nvSpPr>
+        <p:spPr>
+          <a:xfrm xmlns:a="http://schemas.openxmlformats.org/drawingml/2006/main">
+            <a:off x="685800" y="1457325"/>
+            <a:ext cx="5334000" cy="228600"/>
+          </a:xfrm>
+          <a:prstGeom xmlns:a="http://schemas.openxmlformats.org/drawingml/2006/main" prst="ellipse">
+            <a:avLst/>
+          </a:prstGeom>
+          <a:solidFill xmlns:a="http://schemas.openxmlformats.org/drawingml/2006/main">
+            <a:srgbClr val="174B82"/>
+          </a:solidFill>
+          <a:ln xmlns:a="http://schemas.openxmlformats.org/drawingml/2006/main" w="11430">
+            <a:solidFill>
+              <a:srgbClr val="D9F1FA"/>
+            </a:solidFill>
+            <a:prstDash val="solid"/>
+          </a:ln>
+        </p:spPr>
+      </p:sp>
+      <p:sp>
+        <p:nvSpPr>
+          <p:cNvPr id="5" name="PPAGENT_QA|within=funnel-stage-0|role=rate">
+            <a:extLst xmlns:a="http://schemas.openxmlformats.org/drawingml/2006/main">
+              <a:ext uri="{FF2B5EF4-FFF2-40B4-BE49-F238E27FC236}">
+                <a16:creationId xmlns:a16="http://schemas.microsoft.com/office/drawing/2014/main" id="{B372851F-47C7-413F-9466-E9354FE887D4}"/>
+              </a:ext>
+            </a:extLst>
+          </p:cNvPr>
+          <p:cNvSpPr>
+            <a:spLocks xmlns:a="http://schemas.openxmlformats.org/drawingml/2006/main" noGrp="1"/>
+          </p:cNvSpPr>
+          <p:nvPr/>
+        </p:nvSpPr>
+        <p:spPr>
+          <a:xfrm xmlns:a="http://schemas.openxmlformats.org/drawingml/2006/main">
+            <a:off x="838200" y="1619250"/>
+            <a:ext cx="5029200" cy="276225"/>
+          </a:xfrm>
+          <a:prstGeom xmlns:a="http://schemas.openxmlformats.org/drawingml/2006/main" prst="rect">
+            <a:avLst/>
+          </a:prstGeom>
+          <a:noFill xmlns:a="http://schemas.openxmlformats.org/drawingml/2006/main"/>
+          <a:ln xmlns:a="http://schemas.openxmlformats.org/drawingml/2006/main" w="0">
+            <a:noFill/>
+            <a:prstDash val="solid"/>
+          </a:ln>
+        </p:spPr>
+        <p:txBody>
+          <a:bodyPr xmlns:a="http://schemas.openxmlformats.org/drawingml/2006/main" lIns="0" tIns="0" rIns="0" bIns="0" anchor="ctr">
+            <a:normAutofit fontScale="100000"/>
+          </a:bodyPr>
+          <a:lstStyle xmlns:a="http://schemas.openxmlformats.org/drawingml/2006/main"/>
+          <a:p xmlns:a="http://schemas.openxmlformats.org/drawingml/2006/main">
+            <a:pPr algn="ctr">
+              <a:defRPr sz="1500" b="1">
+                <a:solidFill>
+                  <a:srgbClr val="F6C96A"/>
+                </a:solidFill>
+                <a:latin typeface="Microsoft YaHei"/>
+                <a:ea typeface="Microsoft YaHei"/>
+                <a:cs typeface="Microsoft YaHei"/>
+              </a:defRPr>
+            </a:pPr>
+            <a:r>
+              <a:rPr sz="1500" b="1">
+                <a:solidFill>
+                  <a:srgbClr val="F6C96A"/>
+                </a:solidFill>
+                <a:latin typeface="Microsoft YaHei"/>
+                <a:ea typeface="Microsoft YaHei"/>
+                <a:cs typeface="Microsoft YaHei"/>
+              </a:rPr>
+              <a:t>100%</a:t>
+            </a:r>
+          </a:p>
+        </p:txBody>
+      </p:sp>
+      <p:sp>
+        <p:nvSpPr>
+          <p:cNvPr id="6" name="PPAGENT_QA|parent=funnel-label-0|domains=funnel-label">
+            <a:extLst xmlns:a="http://schemas.openxmlformats.org/drawingml/2006/main">
+              <a:ext uri="{FF2B5EF4-FFF2-40B4-BE49-F238E27FC236}">
+                <a16:creationId xmlns:a16="http://schemas.microsoft.com/office/drawing/2014/main" id="{5B54CB3F-700D-4A12-B39A-7FA37512B4D5}"/>
+              </a:ext>
+            </a:extLst>
+          </p:cNvPr>
+          <p:cNvSpPr>
+            <a:spLocks xmlns:a="http://schemas.openxmlformats.org/drawingml/2006/main" noGrp="1"/>
+          </p:cNvSpPr>
+          <p:nvPr/>
+        </p:nvSpPr>
+        <p:spPr>
+          <a:xfrm xmlns:a="http://schemas.openxmlformats.org/drawingml/2006/main">
+            <a:off x="838200" y="1885950"/>
+            <a:ext cx="5029200" cy="295275"/>
+          </a:xfrm>
+          <a:prstGeom xmlns:a="http://schemas.openxmlformats.org/drawingml/2006/main" prst="rect">
+            <a:avLst/>
+          </a:prstGeom>
+          <a:noFill xmlns:a="http://schemas.openxmlformats.org/drawingml/2006/main"/>
+          <a:ln xmlns:a="http://schemas.openxmlformats.org/drawingml/2006/main" w="0">
+            <a:noFill/>
+            <a:prstDash val="solid"/>
+          </a:ln>
+        </p:spPr>
+        <p:txBody>
+          <a:bodyPr xmlns:a="http://schemas.openxmlformats.org/drawingml/2006/main" lIns="0" tIns="0" rIns="0" bIns="0" anchor="ctr">
+            <a:normAutofit fontScale="100000"/>
+          </a:bodyPr>
+          <a:lstStyle xmlns:a="http://schemas.openxmlformats.org/drawingml/2006/main"/>
+          <a:p xmlns:a="http://schemas.openxmlformats.org/drawingml/2006/main">
+            <a:pPr algn="ctr">
+              <a:defRPr sz="1275" b="1">
+                <a:solidFill>
+                  <a:srgbClr val="FFFFFF"/>
+                </a:solidFill>
+                <a:latin typeface="Microsoft YaHei"/>
+                <a:ea typeface="Microsoft YaHei"/>
+                <a:cs typeface="Microsoft YaHei"/>
+              </a:defRPr>
+            </a:pPr>
+            <a:r>
+              <a:rPr sz="1275" b="1">
+                <a:solidFill>
+                  <a:srgbClr val="FFFFFF"/>
+                </a:solidFill>
+                <a:latin typeface="Microsoft YaHei"/>
+                <a:ea typeface="Microsoft YaHei"/>
+                <a:cs typeface="Microsoft YaHei"/>
+              </a:rPr>
+              <a:t>收到稿件</a:t>
+            </a:r>
+          </a:p>
+        </p:txBody>
+      </p:sp>
+      <p:sp>
+        <p:nvSpPr>
+          <p:cNvPr id="7" name="PPAGENT_QA|parent=funnel-note-0|domains=funnel-note,funnel-content">
+            <a:extLst xmlns:a="http://schemas.openxmlformats.org/drawingml/2006/main">
+              <a:ext uri="{FF2B5EF4-FFF2-40B4-BE49-F238E27FC236}">
+                <a16:creationId xmlns:a16="http://schemas.microsoft.com/office/drawing/2014/main" id="{4BE1DBA9-E154-46B4-AA05-1835E513E173}"/>
+              </a:ext>
+            </a:extLst>
+          </p:cNvPr>
+          <p:cNvSpPr>
+            <a:spLocks xmlns:a="http://schemas.openxmlformats.org/drawingml/2006/main" noGrp="1"/>
+          </p:cNvSpPr>
+          <p:nvPr/>
+        </p:nvSpPr>
+        <p:spPr>
+          <a:xfrm xmlns:a="http://schemas.openxmlformats.org/drawingml/2006/main">
+            <a:off x="6915150" y="1533525"/>
+            <a:ext cx="4552950" cy="622300"/>
+          </a:xfrm>
+          <a:prstGeom xmlns:a="http://schemas.openxmlformats.org/drawingml/2006/main" prst="roundRect">
+            <a:avLst>
+              <a:gd name="adj" fmla="val 18367"/>
+            </a:avLst>
+          </a:prstGeom>
+          <a:solidFill xmlns:a="http://schemas.openxmlformats.org/drawingml/2006/main">
+            <a:srgbClr val="FFFFFF"/>
+          </a:solidFill>
+          <a:ln xmlns:a="http://schemas.openxmlformats.org/drawingml/2006/main" w="9525">
+            <a:solidFill>
+              <a:srgbClr val="D8E5EF"/>
+            </a:solidFill>
+            <a:prstDash val="solid"/>
+          </a:ln>
+        </p:spPr>
+      </p:sp>
+      <p:sp>
+        <p:nvSpPr>
+          <p:cNvPr id="8" name="">
+            <a:extLst xmlns:a="http://schemas.openxmlformats.org/drawingml/2006/main">
+              <a:ext uri="{FF2B5EF4-FFF2-40B4-BE49-F238E27FC236}">
+                <a16:creationId xmlns:a16="http://schemas.microsoft.com/office/drawing/2014/main" id="{427727D8-90AA-40F8-9CF1-4125AAA4D8EE}"/>
+              </a:ext>
+            </a:extLst>
+          </p:cNvPr>
+          <p:cNvSpPr>
+            <a:spLocks xmlns:a="http://schemas.openxmlformats.org/drawingml/2006/main" noGrp="1"/>
+          </p:cNvSpPr>
+          <p:nvPr/>
+        </p:nvSpPr>
+        <p:spPr>
+          <a:xfrm xmlns:a="http://schemas.openxmlformats.org/drawingml/2006/main">
+            <a:off x="6915150" y="1533525"/>
+            <a:ext cx="57150" cy="622300"/>
+          </a:xfrm>
+          <a:prstGeom xmlns:a="http://schemas.openxmlformats.org/drawingml/2006/main" prst="roundRect">
+            <a:avLst>
+              <a:gd name="adj" fmla="val 33333"/>
+            </a:avLst>
+          </a:prstGeom>
+          <a:solidFill xmlns:a="http://schemas.openxmlformats.org/drawingml/2006/main">
+            <a:srgbClr val="174B82"/>
+          </a:solidFill>
+          <a:ln xmlns:a="http://schemas.openxmlformats.org/drawingml/2006/main" w="0">
+            <a:noFill/>
+            <a:prstDash val="solid"/>
+          </a:ln>
+        </p:spPr>
+      </p:sp>
+      <p:sp>
+        <p:nvSpPr>
+          <p:cNvPr id="9" name="PPAGENT_QA|within=funnel-note-0|role=title">
+            <a:extLst xmlns:a="http://schemas.openxmlformats.org/drawingml/2006/main">
+              <a:ext uri="{FF2B5EF4-FFF2-40B4-BE49-F238E27FC236}">
+                <a16:creationId xmlns:a16="http://schemas.microsoft.com/office/drawing/2014/main" id="{47C09EE9-D3EC-4D5B-BB48-D09E24189AFE}"/>
+              </a:ext>
+            </a:extLst>
+          </p:cNvPr>
+          <p:cNvSpPr>
+            <a:spLocks xmlns:a="http://schemas.openxmlformats.org/drawingml/2006/main" noGrp="1"/>
+          </p:cNvSpPr>
+          <p:nvPr/>
+        </p:nvSpPr>
+        <p:spPr>
+          <a:xfrm xmlns:a="http://schemas.openxmlformats.org/drawingml/2006/main">
+            <a:off x="7162800" y="1590675"/>
+            <a:ext cx="4000500" cy="219075"/>
+          </a:xfrm>
+          <a:prstGeom xmlns:a="http://schemas.openxmlformats.org/drawingml/2006/main" prst="rect">
+            <a:avLst/>
+          </a:prstGeom>
+          <a:noFill xmlns:a="http://schemas.openxmlformats.org/drawingml/2006/main"/>
+          <a:ln xmlns:a="http://schemas.openxmlformats.org/drawingml/2006/main" w="0">
+            <a:noFill/>
+            <a:prstDash val="solid"/>
+          </a:ln>
+        </p:spPr>
+        <p:txBody>
+          <a:bodyPr xmlns:a="http://schemas.openxmlformats.org/drawingml/2006/main" lIns="0" tIns="0" rIns="0" bIns="0" anchor="ctr">
+            <a:normAutofit fontScale="100000"/>
+          </a:bodyPr>
+          <a:lstStyle xmlns:a="http://schemas.openxmlformats.org/drawingml/2006/main"/>
+          <a:p xmlns:a="http://schemas.openxmlformats.org/drawingml/2006/main">
+            <a:pPr algn="l">
+              <a:defRPr sz="1350" b="1">
+                <a:solidFill>
+                  <a:srgbClr val="1677C8"/>
+                </a:solidFill>
+                <a:latin typeface="Microsoft YaHei"/>
+                <a:ea typeface="Microsoft YaHei"/>
+                <a:cs typeface="Microsoft YaHei"/>
+              </a:defRPr>
+            </a:pPr>
+            <a:r>
+              <a:rPr sz="1350" b="1">
+                <a:solidFill>
+                  <a:srgbClr val="1677C8"/>
+                </a:solidFill>
+                <a:latin typeface="Microsoft YaHei"/>
+                <a:ea typeface="Microsoft YaHei"/>
+                <a:cs typeface="Microsoft YaHei"/>
+              </a:rPr>
+              <a:t>01  收到稿件</a:t>
+            </a:r>
+          </a:p>
+        </p:txBody>
+      </p:sp>
+      <p:sp>
+        <p:nvSpPr>
+          <p:cNvPr id="10" name="PPAGENT_QA|within=funnel-note-0|role=body">
+            <a:extLst xmlns:a="http://schemas.openxmlformats.org/drawingml/2006/main">
+              <a:ext uri="{FF2B5EF4-FFF2-40B4-BE49-F238E27FC236}">
+                <a16:creationId xmlns:a16="http://schemas.microsoft.com/office/drawing/2014/main" id="{EEBDB973-FE31-41D7-821C-44771FB14790}"/>
+              </a:ext>
+            </a:extLst>
+          </p:cNvPr>
+          <p:cNvSpPr>
+            <a:spLocks xmlns:a="http://schemas.openxmlformats.org/drawingml/2006/main" noGrp="1"/>
+          </p:cNvSpPr>
+          <p:nvPr/>
+        </p:nvSpPr>
+        <p:spPr>
+          <a:xfrm xmlns:a="http://schemas.openxmlformats.org/drawingml/2006/main">
+            <a:off x="7162800" y="1743075"/>
+            <a:ext cx="4000500" cy="412750"/>
+          </a:xfrm>
+          <a:prstGeom xmlns:a="http://schemas.openxmlformats.org/drawingml/2006/main" prst="rect">
+            <a:avLst/>
+          </a:prstGeom>
+          <a:noFill xmlns:a="http://schemas.openxmlformats.org/drawingml/2006/main"/>
+          <a:ln xmlns:a="http://schemas.openxmlformats.org/drawingml/2006/main" w="0">
+            <a:noFill/>
+            <a:prstDash val="solid"/>
+          </a:ln>
+        </p:spPr>
+        <p:txBody>
+          <a:bodyPr xmlns:a="http://schemas.openxmlformats.org/drawingml/2006/main" lIns="0" tIns="0" rIns="0" bIns="0" anchor="t">
+            <a:normAutofit fontScale="100000"/>
+          </a:bodyPr>
+          <a:lstStyle xmlns:a="http://schemas.openxmlformats.org/drawingml/2006/main"/>
+          <a:p xmlns:a="http://schemas.openxmlformats.org/drawingml/2006/main">
+            <a:pPr algn="l">
+              <a:defRPr sz="1500" b="0">
+                <a:solidFill>
+                  <a:srgbClr val="475569"/>
+                </a:solidFill>
+                <a:latin typeface="Microsoft YaHei"/>
+                <a:ea typeface="Microsoft YaHei"/>
+                <a:cs typeface="Microsoft YaHei"/>
+              </a:defRPr>
+            </a:pPr>
+            <a:r>
+              <a:rPr sz="1500" b="0">
+                <a:solidFill>
+                  <a:srgbClr val="475569"/>
+                </a:solidFill>
+                <a:latin typeface="Microsoft YaHei"/>
+                <a:ea typeface="Microsoft YaHei"/>
+                <a:cs typeface="Microsoft YaHei"/>
+              </a:rPr>
+              <a:t>原始信息完整进入流程</a:t>
+            </a:r>
+          </a:p>
+        </p:txBody>
+      </p:sp>
+      <p:sp>
+        <p:nvSpPr>
+          <p:cNvPr id="11" name="PPAGENT_CONNECTOR|from=funnel-stage-0|fromSide=right|to=funnel-note-0|toSide=left">
+            <a:extLst xmlns:a="http://schemas.openxmlformats.org/drawingml/2006/main">
+              <a:ext uri="{FF2B5EF4-FFF2-40B4-BE49-F238E27FC236}">
+                <a16:creationId xmlns:a16="http://schemas.microsoft.com/office/drawing/2014/main" id="{0A21B75F-B412-45E4-AE15-2E6B833A85C0}"/>
+              </a:ext>
+            </a:extLst>
+          </p:cNvPr>
+          <p:cNvSpPr>
+            <a:spLocks xmlns:a="http://schemas.openxmlformats.org/drawingml/2006/main" noGrp="1"/>
+          </p:cNvSpPr>
+          <p:nvPr/>
+        </p:nvSpPr>
+        <p:spPr>
+          <a:xfrm xmlns:a="http://schemas.openxmlformats.org/drawingml/2006/main" flipH="0" flipV="0">
+            <a:off x="6019800" y="1844675"/>
+            <a:ext cx="895350" cy="0"/>
+          </a:xfrm>
+          <a:prstGeom xmlns:a="http://schemas.openxmlformats.org/drawingml/2006/main" prst="line">
+            <a:avLst/>
+          </a:prstGeom>
+          <a:noFill xmlns:a="http://schemas.openxmlformats.org/drawingml/2006/main"/>
+          <a:ln xmlns:a="http://schemas.openxmlformats.org/drawingml/2006/main" w="12383">
+            <a:solidFill>
+              <a:srgbClr val="91B8D7"/>
+            </a:solidFill>
+            <a:prstDash val="solid"/>
+          </a:ln>
+        </p:spPr>
+      </p:sp>
+      <p:sp>
+        <p:nvSpPr>
+          <p:cNvPr id="12" name="PPAGENT_QA|parent=funnel-stage-1|domains=funnel-shape,funnel-content">
+            <a:extLst xmlns:a="http://schemas.openxmlformats.org/drawingml/2006/main">
+              <a:ext uri="{FF2B5EF4-FFF2-40B4-BE49-F238E27FC236}">
+                <a16:creationId xmlns:a16="http://schemas.microsoft.com/office/drawing/2014/main" id="{549E9FFA-3B9D-47DF-93E7-EDDD6FB8EC9A}"/>
+              </a:ext>
+            </a:extLst>
+          </p:cNvPr>
+          <p:cNvSpPr>
+            <a:spLocks xmlns:a="http://schemas.openxmlformats.org/drawingml/2006/main" noGrp="1"/>
+          </p:cNvSpPr>
+          <p:nvPr/>
+        </p:nvSpPr>
+        <p:spPr>
+          <a:xfrm xmlns:a="http://schemas.openxmlformats.org/drawingml/2006/main" flipV="1">
+            <a:off x="1023938" y="2241550"/>
+            <a:ext cx="4657725" cy="641350"/>
+          </a:xfrm>
+          <a:prstGeom xmlns:a="http://schemas.openxmlformats.org/drawingml/2006/main" prst="trapezoid">
+            <a:avLst/>
+          </a:prstGeom>
+          <a:solidFill xmlns:a="http://schemas.openxmlformats.org/drawingml/2006/main">
+            <a:srgbClr val="1767A5"/>
+          </a:solidFill>
+          <a:ln xmlns:a="http://schemas.openxmlformats.org/drawingml/2006/main" w="19050">
+            <a:solidFill>
+              <a:srgbClr val="FFFFFF"/>
+            </a:solidFill>
+            <a:prstDash val="solid"/>
+          </a:ln>
+        </p:spPr>
+        <p:style>
+          <a:lnRef xmlns:a="http://schemas.openxmlformats.org/drawingml/2006/main" idx="0"/>
+          <a:fillRef xmlns:a="http://schemas.openxmlformats.org/drawingml/2006/main" idx="0"/>
+          <a:effectRef xmlns:a="http://schemas.openxmlformats.org/drawingml/2006/main" idx="4"/>
+          <a:fontRef xmlns:a="http://schemas.openxmlformats.org/drawingml/2006/main" idx="major"/>
+        </p:style>
+      </p:sp>
+      <p:sp>
+        <p:nvSpPr>
+          <p:cNvPr id="13" name="PPAGENT_QA|parent=funnel-face-1|domains=funnel-face">
+            <a:extLst xmlns:a="http://schemas.openxmlformats.org/drawingml/2006/main">
+              <a:ext uri="{FF2B5EF4-FFF2-40B4-BE49-F238E27FC236}">
+                <a16:creationId xmlns:a16="http://schemas.microsoft.com/office/drawing/2014/main" id="{A93AF3A5-D895-4F13-821F-8C54D003EEF1}"/>
+              </a:ext>
+            </a:extLst>
+          </p:cNvPr>
+          <p:cNvSpPr>
+            <a:spLocks xmlns:a="http://schemas.openxmlformats.org/drawingml/2006/main" noGrp="1"/>
+          </p:cNvSpPr>
+          <p:nvPr/>
+        </p:nvSpPr>
+        <p:spPr>
+          <a:xfrm xmlns:a="http://schemas.openxmlformats.org/drawingml/2006/main">
+            <a:off x="1023938" y="2174875"/>
+            <a:ext cx="4657725" cy="228600"/>
+          </a:xfrm>
+          <a:prstGeom xmlns:a="http://schemas.openxmlformats.org/drawingml/2006/main" prst="ellipse">
+            <a:avLst/>
+          </a:prstGeom>
+          <a:solidFill xmlns:a="http://schemas.openxmlformats.org/drawingml/2006/main">
+            <a:srgbClr val="1767A5"/>
+          </a:solidFill>
+          <a:ln xmlns:a="http://schemas.openxmlformats.org/drawingml/2006/main" w="11430">
+            <a:solidFill>
+              <a:srgbClr val="D9F1FA"/>
+            </a:solidFill>
+            <a:prstDash val="solid"/>
+          </a:ln>
+        </p:spPr>
+      </p:sp>
+      <p:sp>
+        <p:nvSpPr>
+          <p:cNvPr id="14" name="PPAGENT_QA|within=funnel-stage-1|role=rate">
+            <a:extLst xmlns:a="http://schemas.openxmlformats.org/drawingml/2006/main">
+              <a:ext uri="{FF2B5EF4-FFF2-40B4-BE49-F238E27FC236}">
+                <a16:creationId xmlns:a16="http://schemas.microsoft.com/office/drawing/2014/main" id="{20D5A3C0-E164-4D62-9C83-2808BBD32A03}"/>
+              </a:ext>
+            </a:extLst>
+          </p:cNvPr>
+          <p:cNvSpPr>
+            <a:spLocks xmlns:a="http://schemas.openxmlformats.org/drawingml/2006/main" noGrp="1"/>
+          </p:cNvSpPr>
+          <p:nvPr/>
+        </p:nvSpPr>
+        <p:spPr>
+          <a:xfrm xmlns:a="http://schemas.openxmlformats.org/drawingml/2006/main">
+            <a:off x="1176338" y="2336800"/>
+            <a:ext cx="4352925" cy="276225"/>
+          </a:xfrm>
+          <a:prstGeom xmlns:a="http://schemas.openxmlformats.org/drawingml/2006/main" prst="rect">
+            <a:avLst/>
+          </a:prstGeom>
+          <a:noFill xmlns:a="http://schemas.openxmlformats.org/drawingml/2006/main"/>
+          <a:ln xmlns:a="http://schemas.openxmlformats.org/drawingml/2006/main" w="0">
+            <a:noFill/>
+            <a:prstDash val="solid"/>
+          </a:ln>
+        </p:spPr>
+        <p:txBody>
+          <a:bodyPr xmlns:a="http://schemas.openxmlformats.org/drawingml/2006/main" lIns="0" tIns="0" rIns="0" bIns="0" anchor="ctr">
+            <a:normAutofit fontScale="100000"/>
+          </a:bodyPr>
+          <a:lstStyle xmlns:a="http://schemas.openxmlformats.org/drawingml/2006/main"/>
+          <a:p xmlns:a="http://schemas.openxmlformats.org/drawingml/2006/main">
+            <a:pPr algn="ctr">
+              <a:defRPr sz="1500" b="1">
+                <a:solidFill>
+                  <a:srgbClr val="F6C96A"/>
+                </a:solidFill>
+                <a:latin typeface="Microsoft YaHei"/>
+                <a:ea typeface="Microsoft YaHei"/>
+                <a:cs typeface="Microsoft YaHei"/>
+              </a:defRPr>
+            </a:pPr>
+            <a:r>
+              <a:rPr sz="1500" b="1">
+                <a:solidFill>
+                  <a:srgbClr val="F6C96A"/>
+                </a:solidFill>
+                <a:latin typeface="Microsoft YaHei"/>
+                <a:ea typeface="Microsoft YaHei"/>
+                <a:cs typeface="Microsoft YaHei"/>
+              </a:rPr>
+              <a:t>82%</a:t>
+            </a:r>
+          </a:p>
+        </p:txBody>
+      </p:sp>
+      <p:sp>
+        <p:nvSpPr>
+          <p:cNvPr id="15" name="PPAGENT_QA|parent=funnel-label-1|domains=funnel-label">
+            <a:extLst xmlns:a="http://schemas.openxmlformats.org/drawingml/2006/main">
+              <a:ext uri="{FF2B5EF4-FFF2-40B4-BE49-F238E27FC236}">
+                <a16:creationId xmlns:a16="http://schemas.microsoft.com/office/drawing/2014/main" id="{A8C97519-6014-4D39-AB98-0D285AFBEE10}"/>
+              </a:ext>
+            </a:extLst>
+          </p:cNvPr>
+          <p:cNvSpPr>
+            <a:spLocks xmlns:a="http://schemas.openxmlformats.org/drawingml/2006/main" noGrp="1"/>
+          </p:cNvSpPr>
+          <p:nvPr/>
+        </p:nvSpPr>
+        <p:spPr>
+          <a:xfrm xmlns:a="http://schemas.openxmlformats.org/drawingml/2006/main">
+            <a:off x="1176338" y="2603500"/>
+            <a:ext cx="4352925" cy="295275"/>
+          </a:xfrm>
+          <a:prstGeom xmlns:a="http://schemas.openxmlformats.org/drawingml/2006/main" prst="rect">
+            <a:avLst/>
+          </a:prstGeom>
+          <a:noFill xmlns:a="http://schemas.openxmlformats.org/drawingml/2006/main"/>
+          <a:ln xmlns:a="http://schemas.openxmlformats.org/drawingml/2006/main" w="0">
+            <a:noFill/>
+            <a:prstDash val="solid"/>
+          </a:ln>
+        </p:spPr>
+        <p:txBody>
+          <a:bodyPr xmlns:a="http://schemas.openxmlformats.org/drawingml/2006/main" lIns="0" tIns="0" rIns="0" bIns="0" anchor="ctr">
+            <a:normAutofit fontScale="100000"/>
+          </a:bodyPr>
+          <a:lstStyle xmlns:a="http://schemas.openxmlformats.org/drawingml/2006/main"/>
+          <a:p xmlns:a="http://schemas.openxmlformats.org/drawingml/2006/main">
+            <a:pPr algn="ctr">
+              <a:defRPr sz="1275" b="1">
+                <a:solidFill>
+                  <a:srgbClr val="FFFFFF"/>
+                </a:solidFill>
+                <a:latin typeface="Microsoft YaHei"/>
+                <a:ea typeface="Microsoft YaHei"/>
+                <a:cs typeface="Microsoft YaHei"/>
+              </a:defRPr>
+            </a:pPr>
+            <a:r>
+              <a:rPr sz="1275" b="1">
+                <a:solidFill>
+                  <a:srgbClr val="FFFFFF"/>
+                </a:solidFill>
+                <a:latin typeface="Microsoft YaHei"/>
+                <a:ea typeface="Microsoft YaHei"/>
+                <a:cs typeface="Microsoft YaHei"/>
+              </a:rPr>
+              <a:t>形成页面</a:t>
+            </a:r>
+          </a:p>
+        </p:txBody>
+      </p:sp>
+      <p:sp>
+        <p:nvSpPr>
+          <p:cNvPr id="16" name="PPAGENT_QA|parent=funnel-note-1|domains=funnel-note,funnel-content">
+            <a:extLst xmlns:a="http://schemas.openxmlformats.org/drawingml/2006/main">
+              <a:ext uri="{FF2B5EF4-FFF2-40B4-BE49-F238E27FC236}">
+                <a16:creationId xmlns:a16="http://schemas.microsoft.com/office/drawing/2014/main" id="{8E268480-0F9E-4A2A-ABA6-9D1D198E6EA2}"/>
+              </a:ext>
+            </a:extLst>
+          </p:cNvPr>
+          <p:cNvSpPr>
+            <a:spLocks xmlns:a="http://schemas.openxmlformats.org/drawingml/2006/main" noGrp="1"/>
+          </p:cNvSpPr>
+          <p:nvPr/>
+        </p:nvSpPr>
+        <p:spPr>
+          <a:xfrm xmlns:a="http://schemas.openxmlformats.org/drawingml/2006/main">
+            <a:off x="6915150" y="2251075"/>
+            <a:ext cx="4552950" cy="622300"/>
+          </a:xfrm>
+          <a:prstGeom xmlns:a="http://schemas.openxmlformats.org/drawingml/2006/main" prst="roundRect">
+            <a:avLst>
+              <a:gd name="adj" fmla="val 18367"/>
+            </a:avLst>
+          </a:prstGeom>
+          <a:solidFill xmlns:a="http://schemas.openxmlformats.org/drawingml/2006/main">
+            <a:srgbClr val="F7FAFC"/>
+          </a:solidFill>
+          <a:ln xmlns:a="http://schemas.openxmlformats.org/drawingml/2006/main" w="9525">
+            <a:solidFill>
+              <a:srgbClr val="D8E5EF"/>
+            </a:solidFill>
+            <a:prstDash val="solid"/>
+          </a:ln>
+        </p:spPr>
+      </p:sp>
+      <p:sp>
+        <p:nvSpPr>
+          <p:cNvPr id="17" name="">
+            <a:extLst xmlns:a="http://schemas.openxmlformats.org/drawingml/2006/main">
+              <a:ext uri="{FF2B5EF4-FFF2-40B4-BE49-F238E27FC236}">
+                <a16:creationId xmlns:a16="http://schemas.microsoft.com/office/drawing/2014/main" id="{FA7DB7CE-B603-444E-B749-0F7D497839EE}"/>
+              </a:ext>
+            </a:extLst>
+          </p:cNvPr>
+          <p:cNvSpPr>
+            <a:spLocks xmlns:a="http://schemas.openxmlformats.org/drawingml/2006/main" noGrp="1"/>
+          </p:cNvSpPr>
+          <p:nvPr/>
+        </p:nvSpPr>
+        <p:spPr>
+          <a:xfrm xmlns:a="http://schemas.openxmlformats.org/drawingml/2006/main">
+            <a:off x="6915150" y="2251075"/>
+            <a:ext cx="57150" cy="622300"/>
+          </a:xfrm>
+          <a:prstGeom xmlns:a="http://schemas.openxmlformats.org/drawingml/2006/main" prst="roundRect">
+            <a:avLst>
+              <a:gd name="adj" fmla="val 33333"/>
+            </a:avLst>
+          </a:prstGeom>
+          <a:solidFill xmlns:a="http://schemas.openxmlformats.org/drawingml/2006/main">
+            <a:srgbClr val="1767A5"/>
+          </a:solidFill>
+          <a:ln xmlns:a="http://schemas.openxmlformats.org/drawingml/2006/main" w="0">
+            <a:noFill/>
+            <a:prstDash val="solid"/>
+          </a:ln>
+        </p:spPr>
+      </p:sp>
+      <p:sp>
+        <p:nvSpPr>
+          <p:cNvPr id="18" name="PPAGENT_QA|within=funnel-note-1|role=title">
+            <a:extLst xmlns:a="http://schemas.openxmlformats.org/drawingml/2006/main">
+              <a:ext uri="{FF2B5EF4-FFF2-40B4-BE49-F238E27FC236}">
+                <a16:creationId xmlns:a16="http://schemas.microsoft.com/office/drawing/2014/main" id="{B5D82767-6867-4D58-8E9A-93E6FC2C57BE}"/>
+              </a:ext>
+            </a:extLst>
+          </p:cNvPr>
+          <p:cNvSpPr>
+            <a:spLocks xmlns:a="http://schemas.openxmlformats.org/drawingml/2006/main" noGrp="1"/>
+          </p:cNvSpPr>
+          <p:nvPr/>
+        </p:nvSpPr>
+        <p:spPr>
+          <a:xfrm xmlns:a="http://schemas.openxmlformats.org/drawingml/2006/main">
+            <a:off x="7162800" y="2308225"/>
+            <a:ext cx="4000500" cy="219075"/>
+          </a:xfrm>
+          <a:prstGeom xmlns:a="http://schemas.openxmlformats.org/drawingml/2006/main" prst="rect">
+            <a:avLst/>
+          </a:prstGeom>
+          <a:noFill xmlns:a="http://schemas.openxmlformats.org/drawingml/2006/main"/>
+          <a:ln xmlns:a="http://schemas.openxmlformats.org/drawingml/2006/main" w="0">
+            <a:noFill/>
+            <a:prstDash val="solid"/>
+          </a:ln>
+        </p:spPr>
+        <p:txBody>
+          <a:bodyPr xmlns:a="http://schemas.openxmlformats.org/drawingml/2006/main" lIns="0" tIns="0" rIns="0" bIns="0" anchor="ctr">
+            <a:normAutofit fontScale="100000"/>
+          </a:bodyPr>
+          <a:lstStyle xmlns:a="http://schemas.openxmlformats.org/drawingml/2006/main"/>
+          <a:p xmlns:a="http://schemas.openxmlformats.org/drawingml/2006/main">
+            <a:pPr algn="l">
+              <a:defRPr sz="1350" b="1">
+                <a:solidFill>
+                  <a:srgbClr val="1677C8"/>
+                </a:solidFill>
+                <a:latin typeface="Microsoft YaHei"/>
+                <a:ea typeface="Microsoft YaHei"/>
+                <a:cs typeface="Microsoft YaHei"/>
+              </a:defRPr>
+            </a:pPr>
+            <a:r>
+              <a:rPr sz="1350" b="1">
+                <a:solidFill>
+                  <a:srgbClr val="1677C8"/>
+                </a:solidFill>
+                <a:latin typeface="Microsoft YaHei"/>
+                <a:ea typeface="Microsoft YaHei"/>
+                <a:cs typeface="Microsoft YaHei"/>
+              </a:rPr>
+              <a:t>02  形成页面</a:t>
+            </a:r>
+          </a:p>
+        </p:txBody>
+      </p:sp>
+      <p:sp>
+        <p:nvSpPr>
+          <p:cNvPr id="19" name="PPAGENT_QA|within=funnel-note-1|role=body">
+            <a:extLst xmlns:a="http://schemas.openxmlformats.org/drawingml/2006/main">
+              <a:ext uri="{FF2B5EF4-FFF2-40B4-BE49-F238E27FC236}">
+                <a16:creationId xmlns:a16="http://schemas.microsoft.com/office/drawing/2014/main" id="{CD1A4FDB-D34D-4C7E-998B-B4EEAA8712CD}"/>
+              </a:ext>
+            </a:extLst>
+          </p:cNvPr>
+          <p:cNvSpPr>
+            <a:spLocks xmlns:a="http://schemas.openxmlformats.org/drawingml/2006/main" noGrp="1"/>
+          </p:cNvSpPr>
+          <p:nvPr/>
+        </p:nvSpPr>
+        <p:spPr>
+          <a:xfrm xmlns:a="http://schemas.openxmlformats.org/drawingml/2006/main">
+            <a:off x="7162800" y="2460625"/>
+            <a:ext cx="4000500" cy="412750"/>
+          </a:xfrm>
+          <a:prstGeom xmlns:a="http://schemas.openxmlformats.org/drawingml/2006/main" prst="rect">
+            <a:avLst/>
+          </a:prstGeom>
+          <a:noFill xmlns:a="http://schemas.openxmlformats.org/drawingml/2006/main"/>
+          <a:ln xmlns:a="http://schemas.openxmlformats.org/drawingml/2006/main" w="0">
+            <a:noFill/>
+            <a:prstDash val="solid"/>
+          </a:ln>
+        </p:spPr>
+        <p:txBody>
+          <a:bodyPr xmlns:a="http://schemas.openxmlformats.org/drawingml/2006/main" lIns="0" tIns="0" rIns="0" bIns="0" anchor="t">
+            <a:normAutofit fontScale="100000"/>
+          </a:bodyPr>
+          <a:lstStyle xmlns:a="http://schemas.openxmlformats.org/drawingml/2006/main"/>
+          <a:p xmlns:a="http://schemas.openxmlformats.org/drawingml/2006/main">
+            <a:pPr algn="l">
+              <a:defRPr sz="1500" b="0">
+                <a:solidFill>
+                  <a:srgbClr val="475569"/>
+                </a:solidFill>
+                <a:latin typeface="Microsoft YaHei"/>
+                <a:ea typeface="Microsoft YaHei"/>
+                <a:cs typeface="Microsoft YaHei"/>
+              </a:defRPr>
+            </a:pPr>
+            <a:r>
+              <a:rPr sz="1500" b="0">
+                <a:solidFill>
+                  <a:srgbClr val="475569"/>
+                </a:solidFill>
+                <a:latin typeface="Microsoft YaHei"/>
+                <a:ea typeface="Microsoft YaHei"/>
+                <a:cs typeface="Microsoft YaHei"/>
+              </a:rPr>
+              <a:t>完成叙事拆页与职责判断</a:t>
+            </a:r>
+          </a:p>
+        </p:txBody>
+      </p:sp>
+      <p:sp>
+        <p:nvSpPr>
+          <p:cNvPr id="20" name="PPAGENT_CONNECTOR|from=funnel-stage-1|fromSide=right|to=funnel-note-1|toSide=left">
+            <a:extLst xmlns:a="http://schemas.openxmlformats.org/drawingml/2006/main">
+              <a:ext uri="{FF2B5EF4-FFF2-40B4-BE49-F238E27FC236}">
+                <a16:creationId xmlns:a16="http://schemas.microsoft.com/office/drawing/2014/main" id="{6B786685-2880-4FC8-93D2-9786CCFAB5C9}"/>
+              </a:ext>
+            </a:extLst>
+          </p:cNvPr>
+          <p:cNvSpPr>
+            <a:spLocks xmlns:a="http://schemas.openxmlformats.org/drawingml/2006/main" noGrp="1"/>
+          </p:cNvSpPr>
+          <p:nvPr/>
+        </p:nvSpPr>
+        <p:spPr>
+          <a:xfrm xmlns:a="http://schemas.openxmlformats.org/drawingml/2006/main" flipH="0" flipV="0">
+            <a:off x="5681663" y="2562225"/>
+            <a:ext cx="1233488" cy="0"/>
+          </a:xfrm>
+          <a:prstGeom xmlns:a="http://schemas.openxmlformats.org/drawingml/2006/main" prst="line">
+            <a:avLst/>
+          </a:prstGeom>
+          <a:noFill xmlns:a="http://schemas.openxmlformats.org/drawingml/2006/main"/>
+          <a:ln xmlns:a="http://schemas.openxmlformats.org/drawingml/2006/main" w="12383">
+            <a:solidFill>
+              <a:srgbClr val="91B8D7"/>
+            </a:solidFill>
+            <a:prstDash val="solid"/>
+          </a:ln>
+        </p:spPr>
+      </p:sp>
+      <p:sp>
+        <p:nvSpPr>
+          <p:cNvPr id="21" name="PPAGENT_QA|parent=funnel-stage-2|domains=funnel-shape,funnel-content">
+            <a:extLst xmlns:a="http://schemas.openxmlformats.org/drawingml/2006/main">
+              <a:ext uri="{FF2B5EF4-FFF2-40B4-BE49-F238E27FC236}">
+                <a16:creationId xmlns:a16="http://schemas.microsoft.com/office/drawing/2014/main" id="{CBF1CC4C-FB7A-43AD-9E10-723950FA969B}"/>
+              </a:ext>
+            </a:extLst>
+          </p:cNvPr>
+          <p:cNvSpPr>
+            <a:spLocks xmlns:a="http://schemas.openxmlformats.org/drawingml/2006/main" noGrp="1"/>
+          </p:cNvSpPr>
+          <p:nvPr/>
+        </p:nvSpPr>
+        <p:spPr>
+          <a:xfrm xmlns:a="http://schemas.openxmlformats.org/drawingml/2006/main" flipV="1">
+            <a:off x="1362075" y="2959100"/>
+            <a:ext cx="3981450" cy="641350"/>
+          </a:xfrm>
+          <a:prstGeom xmlns:a="http://schemas.openxmlformats.org/drawingml/2006/main" prst="trapezoid">
+            <a:avLst/>
+          </a:prstGeom>
+          <a:solidFill xmlns:a="http://schemas.openxmlformats.org/drawingml/2006/main">
+            <a:srgbClr val="167FC1"/>
+          </a:solidFill>
+          <a:ln xmlns:a="http://schemas.openxmlformats.org/drawingml/2006/main" w="19050">
+            <a:solidFill>
+              <a:srgbClr val="FFFFFF"/>
+            </a:solidFill>
+            <a:prstDash val="solid"/>
+          </a:ln>
+        </p:spPr>
+        <p:style>
+          <a:lnRef xmlns:a="http://schemas.openxmlformats.org/drawingml/2006/main" idx="0"/>
+          <a:fillRef xmlns:a="http://schemas.openxmlformats.org/drawingml/2006/main" idx="0"/>
+          <a:effectRef xmlns:a="http://schemas.openxmlformats.org/drawingml/2006/main" idx="4"/>
+          <a:fontRef xmlns:a="http://schemas.openxmlformats.org/drawingml/2006/main" idx="major"/>
+        </p:style>
+      </p:sp>
+      <p:sp>
+        <p:nvSpPr>
+          <p:cNvPr id="22" name="PPAGENT_QA|parent=funnel-face-2|domains=funnel-face">
+            <a:extLst xmlns:a="http://schemas.openxmlformats.org/drawingml/2006/main">
+              <a:ext uri="{FF2B5EF4-FFF2-40B4-BE49-F238E27FC236}">
+                <a16:creationId xmlns:a16="http://schemas.microsoft.com/office/drawing/2014/main" id="{DD4523AB-3FA4-4533-934D-D2E4EDEF278D}"/>
+              </a:ext>
+            </a:extLst>
+          </p:cNvPr>
+          <p:cNvSpPr>
+            <a:spLocks xmlns:a="http://schemas.openxmlformats.org/drawingml/2006/main" noGrp="1"/>
+          </p:cNvSpPr>
+          <p:nvPr/>
+        </p:nvSpPr>
+        <p:spPr>
+          <a:xfrm xmlns:a="http://schemas.openxmlformats.org/drawingml/2006/main">
+            <a:off x="1362075" y="2892425"/>
+            <a:ext cx="3981450" cy="228600"/>
+          </a:xfrm>
+          <a:prstGeom xmlns:a="http://schemas.openxmlformats.org/drawingml/2006/main" prst="ellipse">
+            <a:avLst/>
+          </a:prstGeom>
+          <a:solidFill xmlns:a="http://schemas.openxmlformats.org/drawingml/2006/main">
+            <a:srgbClr val="167FC1"/>
+          </a:solidFill>
+          <a:ln xmlns:a="http://schemas.openxmlformats.org/drawingml/2006/main" w="11430">
+            <a:solidFill>
+              <a:srgbClr val="D9F1FA"/>
+            </a:solidFill>
+            <a:prstDash val="solid"/>
+          </a:ln>
+        </p:spPr>
+      </p:sp>
+      <p:sp>
+        <p:nvSpPr>
+          <p:cNvPr id="23" name="PPAGENT_QA|within=funnel-stage-2|role=rate">
+            <a:extLst xmlns:a="http://schemas.openxmlformats.org/drawingml/2006/main">
+              <a:ext uri="{FF2B5EF4-FFF2-40B4-BE49-F238E27FC236}">
+                <a16:creationId xmlns:a16="http://schemas.microsoft.com/office/drawing/2014/main" id="{001B0BC7-91E9-4FFC-A328-6413CB276929}"/>
+              </a:ext>
+            </a:extLst>
+          </p:cNvPr>
+          <p:cNvSpPr>
+            <a:spLocks xmlns:a="http://schemas.openxmlformats.org/drawingml/2006/main" noGrp="1"/>
+          </p:cNvSpPr>
+          <p:nvPr/>
+        </p:nvSpPr>
+        <p:spPr>
+          <a:xfrm xmlns:a="http://schemas.openxmlformats.org/drawingml/2006/main">
+            <a:off x="1514475" y="3054350"/>
+            <a:ext cx="3676650" cy="276225"/>
+          </a:xfrm>
+          <a:prstGeom xmlns:a="http://schemas.openxmlformats.org/drawingml/2006/main" prst="rect">
+            <a:avLst/>
+          </a:prstGeom>
+          <a:noFill xmlns:a="http://schemas.openxmlformats.org/drawingml/2006/main"/>
+          <a:ln xmlns:a="http://schemas.openxmlformats.org/drawingml/2006/main" w="0">
+            <a:noFill/>
+            <a:prstDash val="solid"/>
+          </a:ln>
+        </p:spPr>
+        <p:txBody>
+          <a:bodyPr xmlns:a="http://schemas.openxmlformats.org/drawingml/2006/main" lIns="0" tIns="0" rIns="0" bIns="0" anchor="ctr">
+            <a:normAutofit fontScale="100000"/>
+          </a:bodyPr>
+          <a:lstStyle xmlns:a="http://schemas.openxmlformats.org/drawingml/2006/main"/>
+          <a:p xmlns:a="http://schemas.openxmlformats.org/drawingml/2006/main">
+            <a:pPr algn="ctr">
+              <a:defRPr sz="1500" b="1">
+                <a:solidFill>
+                  <a:srgbClr val="F6C96A"/>
+                </a:solidFill>
+                <a:latin typeface="Microsoft YaHei"/>
+                <a:ea typeface="Microsoft YaHei"/>
+                <a:cs typeface="Microsoft YaHei"/>
+              </a:defRPr>
+            </a:pPr>
+            <a:r>
+              <a:rPr sz="1500" b="1">
+                <a:solidFill>
+                  <a:srgbClr val="F6C96A"/>
+                </a:solidFill>
+                <a:latin typeface="Microsoft YaHei"/>
+                <a:ea typeface="Microsoft YaHei"/>
+                <a:cs typeface="Microsoft YaHei"/>
+              </a:rPr>
+              <a:t>68%</a:t>
+            </a:r>
+          </a:p>
+        </p:txBody>
+      </p:sp>
+      <p:sp>
+        <p:nvSpPr>
+          <p:cNvPr id="24" name="PPAGENT_QA|parent=funnel-label-2|domains=funnel-label">
+            <a:extLst xmlns:a="http://schemas.openxmlformats.org/drawingml/2006/main">
+              <a:ext uri="{FF2B5EF4-FFF2-40B4-BE49-F238E27FC236}">
+                <a16:creationId xmlns:a16="http://schemas.microsoft.com/office/drawing/2014/main" id="{38511C47-D384-4C35-AD7D-DC584247C5C4}"/>
+              </a:ext>
+            </a:extLst>
+          </p:cNvPr>
+          <p:cNvSpPr>
+            <a:spLocks xmlns:a="http://schemas.openxmlformats.org/drawingml/2006/main" noGrp="1"/>
+          </p:cNvSpPr>
+          <p:nvPr/>
+        </p:nvSpPr>
+        <p:spPr>
+          <a:xfrm xmlns:a="http://schemas.openxmlformats.org/drawingml/2006/main">
+            <a:off x="1514475" y="3321050"/>
+            <a:ext cx="3676650" cy="295275"/>
+          </a:xfrm>
+          <a:prstGeom xmlns:a="http://schemas.openxmlformats.org/drawingml/2006/main" prst="rect">
+            <a:avLst/>
+          </a:prstGeom>
+          <a:noFill xmlns:a="http://schemas.openxmlformats.org/drawingml/2006/main"/>
+          <a:ln xmlns:a="http://schemas.openxmlformats.org/drawingml/2006/main" w="0">
+            <a:noFill/>
+            <a:prstDash val="solid"/>
+          </a:ln>
+        </p:spPr>
+        <p:txBody>
+          <a:bodyPr xmlns:a="http://schemas.openxmlformats.org/drawingml/2006/main" lIns="0" tIns="0" rIns="0" bIns="0" anchor="ctr">
+            <a:normAutofit fontScale="100000"/>
+          </a:bodyPr>
+          <a:lstStyle xmlns:a="http://schemas.openxmlformats.org/drawingml/2006/main"/>
+          <a:p xmlns:a="http://schemas.openxmlformats.org/drawingml/2006/main">
+            <a:pPr algn="ctr">
+              <a:defRPr sz="1275" b="1">
+                <a:solidFill>
+                  <a:srgbClr val="FFFFFF"/>
+                </a:solidFill>
+                <a:latin typeface="Microsoft YaHei"/>
+                <a:ea typeface="Microsoft YaHei"/>
+                <a:cs typeface="Microsoft YaHei"/>
+              </a:defRPr>
+            </a:pPr>
+            <a:r>
+              <a:rPr sz="1275" b="1">
+                <a:solidFill>
+                  <a:srgbClr val="FFFFFF"/>
+                </a:solidFill>
+                <a:latin typeface="Microsoft YaHei"/>
+                <a:ea typeface="Microsoft YaHei"/>
+                <a:cs typeface="Microsoft YaHei"/>
+              </a:rPr>
+              <a:t>匹配资产</a:t>
+            </a:r>
+          </a:p>
+        </p:txBody>
+      </p:sp>
+      <p:sp>
+        <p:nvSpPr>
+          <p:cNvPr id="25" name="PPAGENT_QA|parent=funnel-note-2|domains=funnel-note,funnel-content">
+            <a:extLst xmlns:a="http://schemas.openxmlformats.org/drawingml/2006/main">
+              <a:ext uri="{FF2B5EF4-FFF2-40B4-BE49-F238E27FC236}">
+                <a16:creationId xmlns:a16="http://schemas.microsoft.com/office/drawing/2014/main" id="{04C5D2D8-62D0-45FA-8531-5D385A4E0404}"/>
+              </a:ext>
+            </a:extLst>
+          </p:cNvPr>
+          <p:cNvSpPr>
+            <a:spLocks xmlns:a="http://schemas.openxmlformats.org/drawingml/2006/main" noGrp="1"/>
+          </p:cNvSpPr>
+          <p:nvPr/>
+        </p:nvSpPr>
+        <p:spPr>
+          <a:xfrm xmlns:a="http://schemas.openxmlformats.org/drawingml/2006/main">
+            <a:off x="6915150" y="2968625"/>
+            <a:ext cx="4552950" cy="622300"/>
+          </a:xfrm>
+          <a:prstGeom xmlns:a="http://schemas.openxmlformats.org/drawingml/2006/main" prst="roundRect">
+            <a:avLst>
+              <a:gd name="adj" fmla="val 18367"/>
+            </a:avLst>
+          </a:prstGeom>
+          <a:solidFill xmlns:a="http://schemas.openxmlformats.org/drawingml/2006/main">
+            <a:srgbClr val="FFFFFF"/>
+          </a:solidFill>
+          <a:ln xmlns:a="http://schemas.openxmlformats.org/drawingml/2006/main" w="9525">
+            <a:solidFill>
+              <a:srgbClr val="D8E5EF"/>
+            </a:solidFill>
+            <a:prstDash val="solid"/>
+          </a:ln>
+        </p:spPr>
+      </p:sp>
+      <p:sp>
+        <p:nvSpPr>
+          <p:cNvPr id="26" name="">
+            <a:extLst xmlns:a="http://schemas.openxmlformats.org/drawingml/2006/main">
+              <a:ext uri="{FF2B5EF4-FFF2-40B4-BE49-F238E27FC236}">
+                <a16:creationId xmlns:a16="http://schemas.microsoft.com/office/drawing/2014/main" id="{214B8B34-56A3-40D4-9BC8-296D48E7F027}"/>
+              </a:ext>
+            </a:extLst>
+          </p:cNvPr>
+          <p:cNvSpPr>
+            <a:spLocks xmlns:a="http://schemas.openxmlformats.org/drawingml/2006/main" noGrp="1"/>
+          </p:cNvSpPr>
+          <p:nvPr/>
+        </p:nvSpPr>
+        <p:spPr>
+          <a:xfrm xmlns:a="http://schemas.openxmlformats.org/drawingml/2006/main">
+            <a:off x="6915150" y="2968625"/>
+            <a:ext cx="57150" cy="622300"/>
+          </a:xfrm>
+          <a:prstGeom xmlns:a="http://schemas.openxmlformats.org/drawingml/2006/main" prst="roundRect">
+            <a:avLst>
+              <a:gd name="adj" fmla="val 33333"/>
+            </a:avLst>
+          </a:prstGeom>
+          <a:solidFill xmlns:a="http://schemas.openxmlformats.org/drawingml/2006/main">
+            <a:srgbClr val="167FC1"/>
+          </a:solidFill>
+          <a:ln xmlns:a="http://schemas.openxmlformats.org/drawingml/2006/main" w="0">
+            <a:noFill/>
+            <a:prstDash val="solid"/>
+          </a:ln>
+        </p:spPr>
+      </p:sp>
+      <p:sp>
+        <p:nvSpPr>
+          <p:cNvPr id="27" name="PPAGENT_QA|within=funnel-note-2|role=title">
+            <a:extLst xmlns:a="http://schemas.openxmlformats.org/drawingml/2006/main">
+              <a:ext uri="{FF2B5EF4-FFF2-40B4-BE49-F238E27FC236}">
+                <a16:creationId xmlns:a16="http://schemas.microsoft.com/office/drawing/2014/main" id="{E4A71300-87A6-40BE-8452-42E4C27F10BF}"/>
+              </a:ext>
+            </a:extLst>
+          </p:cNvPr>
+          <p:cNvSpPr>
+            <a:spLocks xmlns:a="http://schemas.openxmlformats.org/drawingml/2006/main" noGrp="1"/>
+          </p:cNvSpPr>
+          <p:nvPr/>
+        </p:nvSpPr>
+        <p:spPr>
+          <a:xfrm xmlns:a="http://schemas.openxmlformats.org/drawingml/2006/main">
+            <a:off x="7162800" y="3025775"/>
+            <a:ext cx="4000500" cy="219075"/>
+          </a:xfrm>
+          <a:prstGeom xmlns:a="http://schemas.openxmlformats.org/drawingml/2006/main" prst="rect">
+            <a:avLst/>
+          </a:prstGeom>
+          <a:noFill xmlns:a="http://schemas.openxmlformats.org/drawingml/2006/main"/>
+          <a:ln xmlns:a="http://schemas.openxmlformats.org/drawingml/2006/main" w="0">
+            <a:noFill/>
+            <a:prstDash val="solid"/>
+          </a:ln>
+        </p:spPr>
+        <p:txBody>
+          <a:bodyPr xmlns:a="http://schemas.openxmlformats.org/drawingml/2006/main" lIns="0" tIns="0" rIns="0" bIns="0" anchor="ctr">
+            <a:normAutofit fontScale="100000"/>
+          </a:bodyPr>
+          <a:lstStyle xmlns:a="http://schemas.openxmlformats.org/drawingml/2006/main"/>
+          <a:p xmlns:a="http://schemas.openxmlformats.org/drawingml/2006/main">
+            <a:pPr algn="l">
+              <a:defRPr sz="1350" b="1">
+                <a:solidFill>
+                  <a:srgbClr val="1677C8"/>
+                </a:solidFill>
+                <a:latin typeface="Microsoft YaHei"/>
+                <a:ea typeface="Microsoft YaHei"/>
+                <a:cs typeface="Microsoft YaHei"/>
+              </a:defRPr>
+            </a:pPr>
+            <a:r>
+              <a:rPr sz="1350" b="1">
+                <a:solidFill>
+                  <a:srgbClr val="1677C8"/>
+                </a:solidFill>
+                <a:latin typeface="Microsoft YaHei"/>
+                <a:ea typeface="Microsoft YaHei"/>
+                <a:cs typeface="Microsoft YaHei"/>
+              </a:rPr>
+              <a:t>03  匹配资产</a:t>
+            </a:r>
+          </a:p>
+        </p:txBody>
+      </p:sp>
+      <p:sp>
+        <p:nvSpPr>
+          <p:cNvPr id="28" name="PPAGENT_QA|within=funnel-note-2|role=body">
+            <a:extLst xmlns:a="http://schemas.openxmlformats.org/drawingml/2006/main">
+              <a:ext uri="{FF2B5EF4-FFF2-40B4-BE49-F238E27FC236}">
+                <a16:creationId xmlns:a16="http://schemas.microsoft.com/office/drawing/2014/main" id="{99480A6D-78C7-4CF7-80F2-25DC99E3962B}"/>
+              </a:ext>
+            </a:extLst>
+          </p:cNvPr>
+          <p:cNvSpPr>
+            <a:spLocks xmlns:a="http://schemas.openxmlformats.org/drawingml/2006/main" noGrp="1"/>
+          </p:cNvSpPr>
+          <p:nvPr/>
+        </p:nvSpPr>
+        <p:spPr>
+          <a:xfrm xmlns:a="http://schemas.openxmlformats.org/drawingml/2006/main">
+            <a:off x="7162800" y="3178175"/>
+            <a:ext cx="4000500" cy="412750"/>
+          </a:xfrm>
+          <a:prstGeom xmlns:a="http://schemas.openxmlformats.org/drawingml/2006/main" prst="rect">
+            <a:avLst/>
+          </a:prstGeom>
+          <a:noFill xmlns:a="http://schemas.openxmlformats.org/drawingml/2006/main"/>
+          <a:ln xmlns:a="http://schemas.openxmlformats.org/drawingml/2006/main" w="0">
+            <a:noFill/>
+            <a:prstDash val="solid"/>
+          </a:ln>
+        </p:spPr>
+        <p:txBody>
+          <a:bodyPr xmlns:a="http://schemas.openxmlformats.org/drawingml/2006/main" lIns="0" tIns="0" rIns="0" bIns="0" anchor="t">
+            <a:normAutofit fontScale="100000"/>
+          </a:bodyPr>
+          <a:lstStyle xmlns:a="http://schemas.openxmlformats.org/drawingml/2006/main"/>
+          <a:p xmlns:a="http://schemas.openxmlformats.org/drawingml/2006/main">
+            <a:pPr algn="l">
+              <a:defRPr sz="1500" b="0">
+                <a:solidFill>
+                  <a:srgbClr val="475569"/>
+                </a:solidFill>
+                <a:latin typeface="Microsoft YaHei"/>
+                <a:ea typeface="Microsoft YaHei"/>
+                <a:cs typeface="Microsoft YaHei"/>
+              </a:defRPr>
+            </a:pPr>
+            <a:r>
+              <a:rPr sz="1500" b="0">
+                <a:solidFill>
+                  <a:srgbClr val="475569"/>
+                </a:solidFill>
+                <a:latin typeface="Microsoft YaHei"/>
+                <a:ea typeface="Microsoft YaHei"/>
+                <a:cs typeface="Microsoft YaHei"/>
+              </a:rPr>
+              <a:t>选择合法结构与样式组</a:t>
+            </a:r>
+          </a:p>
+        </p:txBody>
+      </p:sp>
+      <p:sp>
+        <p:nvSpPr>
+          <p:cNvPr id="29" name="PPAGENT_CONNECTOR|from=funnel-stage-2|fromSide=right|to=funnel-note-2|toSide=left">
+            <a:extLst xmlns:a="http://schemas.openxmlformats.org/drawingml/2006/main">
+              <a:ext uri="{FF2B5EF4-FFF2-40B4-BE49-F238E27FC236}">
+                <a16:creationId xmlns:a16="http://schemas.microsoft.com/office/drawing/2014/main" id="{6D561224-07DE-401F-AAAA-41D8D5D6D713}"/>
+              </a:ext>
+            </a:extLst>
+          </p:cNvPr>
+          <p:cNvSpPr>
+            <a:spLocks xmlns:a="http://schemas.openxmlformats.org/drawingml/2006/main" noGrp="1"/>
+          </p:cNvSpPr>
+          <p:nvPr/>
+        </p:nvSpPr>
+        <p:spPr>
+          <a:xfrm xmlns:a="http://schemas.openxmlformats.org/drawingml/2006/main" flipH="0" flipV="0">
+            <a:off x="5343525" y="3279775"/>
+            <a:ext cx="1571625" cy="0"/>
+          </a:xfrm>
+          <a:prstGeom xmlns:a="http://schemas.openxmlformats.org/drawingml/2006/main" prst="line">
+            <a:avLst/>
+          </a:prstGeom>
+          <a:noFill xmlns:a="http://schemas.openxmlformats.org/drawingml/2006/main"/>
+          <a:ln xmlns:a="http://schemas.openxmlformats.org/drawingml/2006/main" w="12383">
+            <a:solidFill>
+              <a:srgbClr val="91B8D7"/>
+            </a:solidFill>
+            <a:prstDash val="solid"/>
+          </a:ln>
+        </p:spPr>
+      </p:sp>
+      <p:sp>
+        <p:nvSpPr>
+          <p:cNvPr id="30" name="PPAGENT_QA|parent=funnel-stage-3|domains=funnel-shape,funnel-content">
+            <a:extLst xmlns:a="http://schemas.openxmlformats.org/drawingml/2006/main">
+              <a:ext uri="{FF2B5EF4-FFF2-40B4-BE49-F238E27FC236}">
+                <a16:creationId xmlns:a16="http://schemas.microsoft.com/office/drawing/2014/main" id="{AE6A02B3-AACD-493A-8300-4411417DDADA}"/>
+              </a:ext>
+            </a:extLst>
+          </p:cNvPr>
+          <p:cNvSpPr>
+            <a:spLocks xmlns:a="http://schemas.openxmlformats.org/drawingml/2006/main" noGrp="1"/>
+          </p:cNvSpPr>
+          <p:nvPr/>
+        </p:nvSpPr>
+        <p:spPr>
+          <a:xfrm xmlns:a="http://schemas.openxmlformats.org/drawingml/2006/main" flipV="1">
+            <a:off x="1700213" y="3676650"/>
+            <a:ext cx="3305175" cy="641350"/>
+          </a:xfrm>
+          <a:prstGeom xmlns:a="http://schemas.openxmlformats.org/drawingml/2006/main" prst="trapezoid">
+            <a:avLst/>
+          </a:prstGeom>
+          <a:solidFill xmlns:a="http://schemas.openxmlformats.org/drawingml/2006/main">
+            <a:srgbClr val="16A0C4"/>
+          </a:solidFill>
+          <a:ln xmlns:a="http://schemas.openxmlformats.org/drawingml/2006/main" w="19050">
+            <a:solidFill>
+              <a:srgbClr val="FFFFFF"/>
+            </a:solidFill>
+            <a:prstDash val="solid"/>
+          </a:ln>
+        </p:spPr>
+        <p:style>
+          <a:lnRef xmlns:a="http://schemas.openxmlformats.org/drawingml/2006/main" idx="0"/>
+          <a:fillRef xmlns:a="http://schemas.openxmlformats.org/drawingml/2006/main" idx="0"/>
+          <a:effectRef xmlns:a="http://schemas.openxmlformats.org/drawingml/2006/main" idx="4"/>
+          <a:fontRef xmlns:a="http://schemas.openxmlformats.org/drawingml/2006/main" idx="major"/>
+        </p:style>
+      </p:sp>
+      <p:sp>
+        <p:nvSpPr>
+          <p:cNvPr id="31" name="PPAGENT_QA|parent=funnel-face-3|domains=funnel-face">
+            <a:extLst xmlns:a="http://schemas.openxmlformats.org/drawingml/2006/main">
+              <a:ext uri="{FF2B5EF4-FFF2-40B4-BE49-F238E27FC236}">
+                <a16:creationId xmlns:a16="http://schemas.microsoft.com/office/drawing/2014/main" id="{750FCE00-AAFE-4D8D-AD54-B28449C117E0}"/>
+              </a:ext>
+            </a:extLst>
+          </p:cNvPr>
+          <p:cNvSpPr>
+            <a:spLocks xmlns:a="http://schemas.openxmlformats.org/drawingml/2006/main" noGrp="1"/>
+          </p:cNvSpPr>
+          <p:nvPr/>
+        </p:nvSpPr>
+        <p:spPr>
+          <a:xfrm xmlns:a="http://schemas.openxmlformats.org/drawingml/2006/main">
+            <a:off x="1700213" y="3609975"/>
+            <a:ext cx="3305175" cy="228600"/>
+          </a:xfrm>
+          <a:prstGeom xmlns:a="http://schemas.openxmlformats.org/drawingml/2006/main" prst="ellipse">
+            <a:avLst/>
+          </a:prstGeom>
+          <a:solidFill xmlns:a="http://schemas.openxmlformats.org/drawingml/2006/main">
+            <a:srgbClr val="16A0C4"/>
+          </a:solidFill>
+          <a:ln xmlns:a="http://schemas.openxmlformats.org/drawingml/2006/main" w="11430">
+            <a:solidFill>
+              <a:srgbClr val="D9F1FA"/>
+            </a:solidFill>
+            <a:prstDash val="solid"/>
+          </a:ln>
+        </p:spPr>
+      </p:sp>
+      <p:sp>
+        <p:nvSpPr>
+          <p:cNvPr id="32" name="PPAGENT_QA|within=funnel-stage-3|role=rate">
+            <a:extLst xmlns:a="http://schemas.openxmlformats.org/drawingml/2006/main">
+              <a:ext uri="{FF2B5EF4-FFF2-40B4-BE49-F238E27FC236}">
+                <a16:creationId xmlns:a16="http://schemas.microsoft.com/office/drawing/2014/main" id="{ED4D53A4-8D2F-4F36-ACF9-EB5F2329F972}"/>
+              </a:ext>
+            </a:extLst>
+          </p:cNvPr>
+          <p:cNvSpPr>
+            <a:spLocks xmlns:a="http://schemas.openxmlformats.org/drawingml/2006/main" noGrp="1"/>
+          </p:cNvSpPr>
+          <p:nvPr/>
+        </p:nvSpPr>
+        <p:spPr>
+          <a:xfrm xmlns:a="http://schemas.openxmlformats.org/drawingml/2006/main">
+            <a:off x="1852613" y="3771900"/>
+            <a:ext cx="3000375" cy="276225"/>
+          </a:xfrm>
+          <a:prstGeom xmlns:a="http://schemas.openxmlformats.org/drawingml/2006/main" prst="rect">
+            <a:avLst/>
+          </a:prstGeom>
+          <a:noFill xmlns:a="http://schemas.openxmlformats.org/drawingml/2006/main"/>
+          <a:ln xmlns:a="http://schemas.openxmlformats.org/drawingml/2006/main" w="0">
+            <a:noFill/>
+            <a:prstDash val="solid"/>
+          </a:ln>
+        </p:spPr>
+        <p:txBody>
+          <a:bodyPr xmlns:a="http://schemas.openxmlformats.org/drawingml/2006/main" lIns="0" tIns="0" rIns="0" bIns="0" anchor="ctr">
+            <a:normAutofit fontScale="100000"/>
+          </a:bodyPr>
+          <a:lstStyle xmlns:a="http://schemas.openxmlformats.org/drawingml/2006/main"/>
+          <a:p xmlns:a="http://schemas.openxmlformats.org/drawingml/2006/main">
+            <a:pPr algn="ctr">
+              <a:defRPr sz="1500" b="1">
+                <a:solidFill>
+                  <a:srgbClr val="F6C96A"/>
+                </a:solidFill>
+                <a:latin typeface="Microsoft YaHei"/>
+                <a:ea typeface="Microsoft YaHei"/>
+                <a:cs typeface="Microsoft YaHei"/>
+              </a:defRPr>
+            </a:pPr>
+            <a:r>
+              <a:rPr sz="1500" b="1">
+                <a:solidFill>
+                  <a:srgbClr val="F6C96A"/>
+                </a:solidFill>
+                <a:latin typeface="Microsoft YaHei"/>
+                <a:ea typeface="Microsoft YaHei"/>
+                <a:cs typeface="Microsoft YaHei"/>
+              </a:rPr>
+              <a:t>54%</a:t>
+            </a:r>
+          </a:p>
+        </p:txBody>
+      </p:sp>
+      <p:sp>
+        <p:nvSpPr>
+          <p:cNvPr id="33" name="PPAGENT_QA|parent=funnel-label-3|domains=funnel-label">
+            <a:extLst xmlns:a="http://schemas.openxmlformats.org/drawingml/2006/main">
+              <a:ext uri="{FF2B5EF4-FFF2-40B4-BE49-F238E27FC236}">
+                <a16:creationId xmlns:a16="http://schemas.microsoft.com/office/drawing/2014/main" id="{6C601C45-0C82-49E0-8BB4-5B05D96D94BA}"/>
+              </a:ext>
+            </a:extLst>
+          </p:cNvPr>
+          <p:cNvSpPr>
+            <a:spLocks xmlns:a="http://schemas.openxmlformats.org/drawingml/2006/main" noGrp="1"/>
+          </p:cNvSpPr>
+          <p:nvPr/>
+        </p:nvSpPr>
+        <p:spPr>
+          <a:xfrm xmlns:a="http://schemas.openxmlformats.org/drawingml/2006/main">
+            <a:off x="1852613" y="4038600"/>
+            <a:ext cx="3000375" cy="295275"/>
+          </a:xfrm>
+          <a:prstGeom xmlns:a="http://schemas.openxmlformats.org/drawingml/2006/main" prst="rect">
+            <a:avLst/>
+          </a:prstGeom>
+          <a:noFill xmlns:a="http://schemas.openxmlformats.org/drawingml/2006/main"/>
+          <a:ln xmlns:a="http://schemas.openxmlformats.org/drawingml/2006/main" w="0">
+            <a:noFill/>
+            <a:prstDash val="solid"/>
+          </a:ln>
+        </p:spPr>
+        <p:txBody>
+          <a:bodyPr xmlns:a="http://schemas.openxmlformats.org/drawingml/2006/main" lIns="0" tIns="0" rIns="0" bIns="0" anchor="ctr">
+            <a:normAutofit fontScale="100000"/>
+          </a:bodyPr>
+          <a:lstStyle xmlns:a="http://schemas.openxmlformats.org/drawingml/2006/main"/>
+          <a:p xmlns:a="http://schemas.openxmlformats.org/drawingml/2006/main">
+            <a:pPr algn="ctr">
+              <a:defRPr sz="1275" b="1">
+                <a:solidFill>
+                  <a:srgbClr val="FFFFFF"/>
+                </a:solidFill>
+                <a:latin typeface="Microsoft YaHei"/>
+                <a:ea typeface="Microsoft YaHei"/>
+                <a:cs typeface="Microsoft YaHei"/>
+              </a:defRPr>
+            </a:pPr>
+            <a:r>
+              <a:rPr sz="1275" b="1">
+                <a:solidFill>
+                  <a:srgbClr val="FFFFFF"/>
+                </a:solidFill>
+                <a:latin typeface="Microsoft YaHei"/>
+                <a:ea typeface="Microsoft YaHei"/>
+                <a:cs typeface="Microsoft YaHei"/>
+              </a:rPr>
+              <a:t>完成生成</a:t>
+            </a:r>
+          </a:p>
+        </p:txBody>
+      </p:sp>
+      <p:sp>
+        <p:nvSpPr>
+          <p:cNvPr id="34" name="PPAGENT_QA|parent=funnel-note-3|domains=funnel-note,funnel-content">
+            <a:extLst xmlns:a="http://schemas.openxmlformats.org/drawingml/2006/main">
+              <a:ext uri="{FF2B5EF4-FFF2-40B4-BE49-F238E27FC236}">
+                <a16:creationId xmlns:a16="http://schemas.microsoft.com/office/drawing/2014/main" id="{BDDEB640-A4F8-47F3-A1F2-09EC9B64F004}"/>
+              </a:ext>
+            </a:extLst>
+          </p:cNvPr>
+          <p:cNvSpPr>
+            <a:spLocks xmlns:a="http://schemas.openxmlformats.org/drawingml/2006/main" noGrp="1"/>
+          </p:cNvSpPr>
+          <p:nvPr/>
+        </p:nvSpPr>
+        <p:spPr>
+          <a:xfrm xmlns:a="http://schemas.openxmlformats.org/drawingml/2006/main">
+            <a:off x="6915150" y="3686175"/>
+            <a:ext cx="4552950" cy="622300"/>
+          </a:xfrm>
+          <a:prstGeom xmlns:a="http://schemas.openxmlformats.org/drawingml/2006/main" prst="roundRect">
+            <a:avLst>
+              <a:gd name="adj" fmla="val 18367"/>
+            </a:avLst>
+          </a:prstGeom>
+          <a:solidFill xmlns:a="http://schemas.openxmlformats.org/drawingml/2006/main">
+            <a:srgbClr val="F7FAFC"/>
+          </a:solidFill>
+          <a:ln xmlns:a="http://schemas.openxmlformats.org/drawingml/2006/main" w="9525">
+            <a:solidFill>
+              <a:srgbClr val="D8E5EF"/>
+            </a:solidFill>
+            <a:prstDash val="solid"/>
+          </a:ln>
+        </p:spPr>
+      </p:sp>
+      <p:sp>
+        <p:nvSpPr>
+          <p:cNvPr id="35" name="">
+            <a:extLst xmlns:a="http://schemas.openxmlformats.org/drawingml/2006/main">
+              <a:ext uri="{FF2B5EF4-FFF2-40B4-BE49-F238E27FC236}">
+                <a16:creationId xmlns:a16="http://schemas.microsoft.com/office/drawing/2014/main" id="{ABD15DAB-9298-47F2-8588-5D5C6E459ACC}"/>
+              </a:ext>
+            </a:extLst>
+          </p:cNvPr>
+          <p:cNvSpPr>
+            <a:spLocks xmlns:a="http://schemas.openxmlformats.org/drawingml/2006/main" noGrp="1"/>
+          </p:cNvSpPr>
+          <p:nvPr/>
+        </p:nvSpPr>
+        <p:spPr>
+          <a:xfrm xmlns:a="http://schemas.openxmlformats.org/drawingml/2006/main">
+            <a:off x="6915150" y="3686175"/>
+            <a:ext cx="57150" cy="622300"/>
+          </a:xfrm>
+          <a:prstGeom xmlns:a="http://schemas.openxmlformats.org/drawingml/2006/main" prst="roundRect">
+            <a:avLst>
+              <a:gd name="adj" fmla="val 33333"/>
+            </a:avLst>
+          </a:prstGeom>
+          <a:solidFill xmlns:a="http://schemas.openxmlformats.org/drawingml/2006/main">
+            <a:srgbClr val="16A0C4"/>
+          </a:solidFill>
+          <a:ln xmlns:a="http://schemas.openxmlformats.org/drawingml/2006/main" w="0">
+            <a:noFill/>
+            <a:prstDash val="solid"/>
+          </a:ln>
+        </p:spPr>
+      </p:sp>
+      <p:sp>
+        <p:nvSpPr>
+          <p:cNvPr id="36" name="PPAGENT_QA|within=funnel-note-3|role=title">
+            <a:extLst xmlns:a="http://schemas.openxmlformats.org/drawingml/2006/main">
+              <a:ext uri="{FF2B5EF4-FFF2-40B4-BE49-F238E27FC236}">
+                <a16:creationId xmlns:a16="http://schemas.microsoft.com/office/drawing/2014/main" id="{95D5EEEA-2BDA-4B2C-BE7B-CC410EC4D186}"/>
+              </a:ext>
+            </a:extLst>
+          </p:cNvPr>
+          <p:cNvSpPr>
+            <a:spLocks xmlns:a="http://schemas.openxmlformats.org/drawingml/2006/main" noGrp="1"/>
+          </p:cNvSpPr>
+          <p:nvPr/>
+        </p:nvSpPr>
+        <p:spPr>
+          <a:xfrm xmlns:a="http://schemas.openxmlformats.org/drawingml/2006/main">
+            <a:off x="7162800" y="3743325"/>
+            <a:ext cx="4000500" cy="219075"/>
+          </a:xfrm>
+          <a:prstGeom xmlns:a="http://schemas.openxmlformats.org/drawingml/2006/main" prst="rect">
+            <a:avLst/>
+          </a:prstGeom>
+          <a:noFill xmlns:a="http://schemas.openxmlformats.org/drawingml/2006/main"/>
+          <a:ln xmlns:a="http://schemas.openxmlformats.org/drawingml/2006/main" w="0">
+            <a:noFill/>
+            <a:prstDash val="solid"/>
+          </a:ln>
+        </p:spPr>
+        <p:txBody>
+          <a:bodyPr xmlns:a="http://schemas.openxmlformats.org/drawingml/2006/main" lIns="0" tIns="0" rIns="0" bIns="0" anchor="ctr">
+            <a:normAutofit fontScale="100000"/>
+          </a:bodyPr>
+          <a:lstStyle xmlns:a="http://schemas.openxmlformats.org/drawingml/2006/main"/>
+          <a:p xmlns:a="http://schemas.openxmlformats.org/drawingml/2006/main">
+            <a:pPr algn="l">
+              <a:defRPr sz="1350" b="1">
+                <a:solidFill>
+                  <a:srgbClr val="1677C8"/>
+                </a:solidFill>
+                <a:latin typeface="Microsoft YaHei"/>
+                <a:ea typeface="Microsoft YaHei"/>
+                <a:cs typeface="Microsoft YaHei"/>
+              </a:defRPr>
+            </a:pPr>
+            <a:r>
+              <a:rPr sz="1350" b="1">
+                <a:solidFill>
+                  <a:srgbClr val="1677C8"/>
+                </a:solidFill>
+                <a:latin typeface="Microsoft YaHei"/>
+                <a:ea typeface="Microsoft YaHei"/>
+                <a:cs typeface="Microsoft YaHei"/>
+              </a:rPr>
+              <a:t>04  完成生成</a:t>
+            </a:r>
+          </a:p>
+        </p:txBody>
+      </p:sp>
+      <p:sp>
+        <p:nvSpPr>
+          <p:cNvPr id="37" name="PPAGENT_QA|within=funnel-note-3|role=body">
+            <a:extLst xmlns:a="http://schemas.openxmlformats.org/drawingml/2006/main">
+              <a:ext uri="{FF2B5EF4-FFF2-40B4-BE49-F238E27FC236}">
+                <a16:creationId xmlns:a16="http://schemas.microsoft.com/office/drawing/2014/main" id="{3105831B-2C98-4CB8-B5D7-13C379CF1AC8}"/>
+              </a:ext>
+            </a:extLst>
+          </p:cNvPr>
+          <p:cNvSpPr>
+            <a:spLocks xmlns:a="http://schemas.openxmlformats.org/drawingml/2006/main" noGrp="1"/>
+          </p:cNvSpPr>
+          <p:nvPr/>
+        </p:nvSpPr>
+        <p:spPr>
+          <a:xfrm xmlns:a="http://schemas.openxmlformats.org/drawingml/2006/main">
+            <a:off x="7162800" y="3895725"/>
+            <a:ext cx="4000500" cy="412750"/>
+          </a:xfrm>
+          <a:prstGeom xmlns:a="http://schemas.openxmlformats.org/drawingml/2006/main" prst="rect">
+            <a:avLst/>
+          </a:prstGeom>
+          <a:noFill xmlns:a="http://schemas.openxmlformats.org/drawingml/2006/main"/>
+          <a:ln xmlns:a="http://schemas.openxmlformats.org/drawingml/2006/main" w="0">
+            <a:noFill/>
+            <a:prstDash val="solid"/>
+          </a:ln>
+        </p:spPr>
+        <p:txBody>
+          <a:bodyPr xmlns:a="http://schemas.openxmlformats.org/drawingml/2006/main" lIns="0" tIns="0" rIns="0" bIns="0" anchor="t">
+            <a:normAutofit fontScale="100000"/>
+          </a:bodyPr>
+          <a:lstStyle xmlns:a="http://schemas.openxmlformats.org/drawingml/2006/main"/>
+          <a:p xmlns:a="http://schemas.openxmlformats.org/drawingml/2006/main">
+            <a:pPr algn="l">
+              <a:defRPr sz="1500" b="0">
+                <a:solidFill>
+                  <a:srgbClr val="475569"/>
+                </a:solidFill>
+                <a:latin typeface="Microsoft YaHei"/>
+                <a:ea typeface="Microsoft YaHei"/>
+                <a:cs typeface="Microsoft YaHei"/>
+              </a:defRPr>
+            </a:pPr>
+            <a:r>
+              <a:rPr sz="1500" b="0">
+                <a:solidFill>
+                  <a:srgbClr val="475569"/>
+                </a:solidFill>
+                <a:latin typeface="Microsoft YaHei"/>
+                <a:ea typeface="Microsoft YaHei"/>
+                <a:cs typeface="Microsoft YaHei"/>
+              </a:rPr>
+              <a:t>输出原生可编辑页面</a:t>
+            </a:r>
+          </a:p>
+        </p:txBody>
+      </p:sp>
+      <p:sp>
+        <p:nvSpPr>
+          <p:cNvPr id="38" name="PPAGENT_CONNECTOR|from=funnel-stage-3|fromSide=right|to=funnel-note-3|toSide=left">
+            <a:extLst xmlns:a="http://schemas.openxmlformats.org/drawingml/2006/main">
+              <a:ext uri="{FF2B5EF4-FFF2-40B4-BE49-F238E27FC236}">
+                <a16:creationId xmlns:a16="http://schemas.microsoft.com/office/drawing/2014/main" id="{E870C76C-1FFF-40D3-9AC2-EC241C1621BA}"/>
+              </a:ext>
+            </a:extLst>
+          </p:cNvPr>
+          <p:cNvSpPr>
+            <a:spLocks xmlns:a="http://schemas.openxmlformats.org/drawingml/2006/main" noGrp="1"/>
+          </p:cNvSpPr>
+          <p:nvPr/>
+        </p:nvSpPr>
+        <p:spPr>
+          <a:xfrm xmlns:a="http://schemas.openxmlformats.org/drawingml/2006/main" flipH="0" flipV="0">
+            <a:off x="5005388" y="3997325"/>
+            <a:ext cx="1909763" cy="0"/>
+          </a:xfrm>
+          <a:prstGeom xmlns:a="http://schemas.openxmlformats.org/drawingml/2006/main" prst="line">
+            <a:avLst/>
+          </a:prstGeom>
+          <a:noFill xmlns:a="http://schemas.openxmlformats.org/drawingml/2006/main"/>
+          <a:ln xmlns:a="http://schemas.openxmlformats.org/drawingml/2006/main" w="12383">
+            <a:solidFill>
+              <a:srgbClr val="91B8D7"/>
+            </a:solidFill>
+            <a:prstDash val="solid"/>
+          </a:ln>
+        </p:spPr>
+      </p:sp>
+      <p:sp>
+        <p:nvSpPr>
+          <p:cNvPr id="39" name="PPAGENT_QA|parent=funnel-stage-4|domains=funnel-shape,funnel-content">
+            <a:extLst xmlns:a="http://schemas.openxmlformats.org/drawingml/2006/main">
+              <a:ext uri="{FF2B5EF4-FFF2-40B4-BE49-F238E27FC236}">
+                <a16:creationId xmlns:a16="http://schemas.microsoft.com/office/drawing/2014/main" id="{545EDC1B-7B6D-4CA7-B870-B717B5E777E2}"/>
+              </a:ext>
+            </a:extLst>
+          </p:cNvPr>
+          <p:cNvSpPr>
+            <a:spLocks xmlns:a="http://schemas.openxmlformats.org/drawingml/2006/main" noGrp="1"/>
+          </p:cNvSpPr>
+          <p:nvPr/>
+        </p:nvSpPr>
+        <p:spPr>
+          <a:xfrm xmlns:a="http://schemas.openxmlformats.org/drawingml/2006/main" flipV="1">
+            <a:off x="2038350" y="4394200"/>
+            <a:ext cx="2628900" cy="641350"/>
+          </a:xfrm>
+          <a:prstGeom xmlns:a="http://schemas.openxmlformats.org/drawingml/2006/main" prst="trapezoid">
+            <a:avLst/>
+          </a:prstGeom>
+          <a:solidFill xmlns:a="http://schemas.openxmlformats.org/drawingml/2006/main">
+            <a:srgbClr val="19B7C4"/>
+          </a:solidFill>
+          <a:ln xmlns:a="http://schemas.openxmlformats.org/drawingml/2006/main" w="19050">
+            <a:solidFill>
+              <a:srgbClr val="FFFFFF"/>
+            </a:solidFill>
+            <a:prstDash val="solid"/>
+          </a:ln>
+        </p:spPr>
+        <p:style>
+          <a:lnRef xmlns:a="http://schemas.openxmlformats.org/drawingml/2006/main" idx="0"/>
+          <a:fillRef xmlns:a="http://schemas.openxmlformats.org/drawingml/2006/main" idx="0"/>
+          <a:effectRef xmlns:a="http://schemas.openxmlformats.org/drawingml/2006/main" idx="4"/>
+          <a:fontRef xmlns:a="http://schemas.openxmlformats.org/drawingml/2006/main" idx="major"/>
+        </p:style>
+      </p:sp>
+      <p:sp>
+        <p:nvSpPr>
+          <p:cNvPr id="40" name="PPAGENT_QA|parent=funnel-face-4|domains=funnel-face">
+            <a:extLst xmlns:a="http://schemas.openxmlformats.org/drawingml/2006/main">
+              <a:ext uri="{FF2B5EF4-FFF2-40B4-BE49-F238E27FC236}">
+                <a16:creationId xmlns:a16="http://schemas.microsoft.com/office/drawing/2014/main" id="{80DCAF94-86E2-440B-8BE6-686C199F863E}"/>
+              </a:ext>
+            </a:extLst>
+          </p:cNvPr>
+          <p:cNvSpPr>
+            <a:spLocks xmlns:a="http://schemas.openxmlformats.org/drawingml/2006/main" noGrp="1"/>
+          </p:cNvSpPr>
+          <p:nvPr/>
+        </p:nvSpPr>
+        <p:spPr>
+          <a:xfrm xmlns:a="http://schemas.openxmlformats.org/drawingml/2006/main">
+            <a:off x="2038350" y="4327525"/>
+            <a:ext cx="2628900" cy="228600"/>
+          </a:xfrm>
+          <a:prstGeom xmlns:a="http://schemas.openxmlformats.org/drawingml/2006/main" prst="ellipse">
+            <a:avLst/>
+          </a:prstGeom>
+          <a:solidFill xmlns:a="http://schemas.openxmlformats.org/drawingml/2006/main">
+            <a:srgbClr val="19B7C4"/>
+          </a:solidFill>
+          <a:ln xmlns:a="http://schemas.openxmlformats.org/drawingml/2006/main" w="11430">
+            <a:solidFill>
+              <a:srgbClr val="D9F1FA"/>
+            </a:solidFill>
+            <a:prstDash val="solid"/>
+          </a:ln>
+        </p:spPr>
+      </p:sp>
+      <p:sp>
+        <p:nvSpPr>
+          <p:cNvPr id="41" name="PPAGENT_QA|within=funnel-stage-4|role=rate">
+            <a:extLst xmlns:a="http://schemas.openxmlformats.org/drawingml/2006/main">
+              <a:ext uri="{FF2B5EF4-FFF2-40B4-BE49-F238E27FC236}">
+                <a16:creationId xmlns:a16="http://schemas.microsoft.com/office/drawing/2014/main" id="{ACA359B4-3032-4537-9111-77C467C735E1}"/>
+              </a:ext>
+            </a:extLst>
+          </p:cNvPr>
+          <p:cNvSpPr>
+            <a:spLocks xmlns:a="http://schemas.openxmlformats.org/drawingml/2006/main" noGrp="1"/>
+          </p:cNvSpPr>
+          <p:nvPr/>
+        </p:nvSpPr>
+        <p:spPr>
+          <a:xfrm xmlns:a="http://schemas.openxmlformats.org/drawingml/2006/main">
+            <a:off x="2190750" y="4489450"/>
+            <a:ext cx="2324100" cy="276225"/>
+          </a:xfrm>
+          <a:prstGeom xmlns:a="http://schemas.openxmlformats.org/drawingml/2006/main" prst="rect">
+            <a:avLst/>
+          </a:prstGeom>
+          <a:noFill xmlns:a="http://schemas.openxmlformats.org/drawingml/2006/main"/>
+          <a:ln xmlns:a="http://schemas.openxmlformats.org/drawingml/2006/main" w="0">
+            <a:noFill/>
+            <a:prstDash val="solid"/>
+          </a:ln>
+        </p:spPr>
+        <p:txBody>
+          <a:bodyPr xmlns:a="http://schemas.openxmlformats.org/drawingml/2006/main" lIns="0" tIns="0" rIns="0" bIns="0" anchor="ctr">
+            <a:normAutofit fontScale="100000"/>
+          </a:bodyPr>
+          <a:lstStyle xmlns:a="http://schemas.openxmlformats.org/drawingml/2006/main"/>
+          <a:p xmlns:a="http://schemas.openxmlformats.org/drawingml/2006/main">
+            <a:pPr algn="ctr">
+              <a:defRPr sz="1500" b="1">
+                <a:solidFill>
+                  <a:srgbClr val="F6C96A"/>
+                </a:solidFill>
+                <a:latin typeface="Microsoft YaHei"/>
+                <a:ea typeface="Microsoft YaHei"/>
+                <a:cs typeface="Microsoft YaHei"/>
+              </a:defRPr>
+            </a:pPr>
+            <a:r>
+              <a:rPr sz="1500" b="1">
+                <a:solidFill>
+                  <a:srgbClr val="F6C96A"/>
+                </a:solidFill>
+                <a:latin typeface="Microsoft YaHei"/>
+                <a:ea typeface="Microsoft YaHei"/>
+                <a:cs typeface="Microsoft YaHei"/>
+              </a:rPr>
+              <a:t>43%</a:t>
+            </a:r>
+          </a:p>
+        </p:txBody>
+      </p:sp>
+      <p:sp>
+        <p:nvSpPr>
+          <p:cNvPr id="42" name="PPAGENT_QA|parent=funnel-label-4|domains=funnel-label">
+            <a:extLst xmlns:a="http://schemas.openxmlformats.org/drawingml/2006/main">
+              <a:ext uri="{FF2B5EF4-FFF2-40B4-BE49-F238E27FC236}">
+                <a16:creationId xmlns:a16="http://schemas.microsoft.com/office/drawing/2014/main" id="{117C1FA8-C8A7-448C-A882-B5F039079D72}"/>
+              </a:ext>
+            </a:extLst>
+          </p:cNvPr>
+          <p:cNvSpPr>
+            <a:spLocks xmlns:a="http://schemas.openxmlformats.org/drawingml/2006/main" noGrp="1"/>
+          </p:cNvSpPr>
+          <p:nvPr/>
+        </p:nvSpPr>
+        <p:spPr>
+          <a:xfrm xmlns:a="http://schemas.openxmlformats.org/drawingml/2006/main">
+            <a:off x="2190750" y="4756150"/>
+            <a:ext cx="2324100" cy="295275"/>
+          </a:xfrm>
+          <a:prstGeom xmlns:a="http://schemas.openxmlformats.org/drawingml/2006/main" prst="rect">
+            <a:avLst/>
+          </a:prstGeom>
+          <a:noFill xmlns:a="http://schemas.openxmlformats.org/drawingml/2006/main"/>
+          <a:ln xmlns:a="http://schemas.openxmlformats.org/drawingml/2006/main" w="0">
+            <a:noFill/>
+            <a:prstDash val="solid"/>
+          </a:ln>
+        </p:spPr>
+        <p:txBody>
+          <a:bodyPr xmlns:a="http://schemas.openxmlformats.org/drawingml/2006/main" lIns="0" tIns="0" rIns="0" bIns="0" anchor="ctr">
+            <a:normAutofit fontScale="100000"/>
+          </a:bodyPr>
+          <a:lstStyle xmlns:a="http://schemas.openxmlformats.org/drawingml/2006/main"/>
+          <a:p xmlns:a="http://schemas.openxmlformats.org/drawingml/2006/main">
+            <a:pPr algn="ctr">
+              <a:defRPr sz="1275" b="1">
+                <a:solidFill>
+                  <a:srgbClr val="FFFFFF"/>
+                </a:solidFill>
+                <a:latin typeface="Microsoft YaHei"/>
+                <a:ea typeface="Microsoft YaHei"/>
+                <a:cs typeface="Microsoft YaHei"/>
+              </a:defRPr>
+            </a:pPr>
+            <a:r>
+              <a:rPr sz="1275" b="1">
+                <a:solidFill>
+                  <a:srgbClr val="FFFFFF"/>
+                </a:solidFill>
+                <a:latin typeface="Microsoft YaHei"/>
+                <a:ea typeface="Microsoft YaHei"/>
+                <a:cs typeface="Microsoft YaHei"/>
+              </a:rPr>
+              <a:t>质量通过</a:t>
+            </a:r>
+          </a:p>
+        </p:txBody>
+      </p:sp>
+      <p:sp>
+        <p:nvSpPr>
+          <p:cNvPr id="43" name="PPAGENT_QA|parent=funnel-note-4|domains=funnel-note,funnel-content">
+            <a:extLst xmlns:a="http://schemas.openxmlformats.org/drawingml/2006/main">
+              <a:ext uri="{FF2B5EF4-FFF2-40B4-BE49-F238E27FC236}">
+                <a16:creationId xmlns:a16="http://schemas.microsoft.com/office/drawing/2014/main" id="{23DABA96-381E-4282-876E-C9452368B42D}"/>
+              </a:ext>
+            </a:extLst>
+          </p:cNvPr>
+          <p:cNvSpPr>
+            <a:spLocks xmlns:a="http://schemas.openxmlformats.org/drawingml/2006/main" noGrp="1"/>
+          </p:cNvSpPr>
+          <p:nvPr/>
+        </p:nvSpPr>
+        <p:spPr>
+          <a:xfrm xmlns:a="http://schemas.openxmlformats.org/drawingml/2006/main">
+            <a:off x="6915150" y="4403725"/>
+            <a:ext cx="4552950" cy="622300"/>
+          </a:xfrm>
+          <a:prstGeom xmlns:a="http://schemas.openxmlformats.org/drawingml/2006/main" prst="roundRect">
+            <a:avLst>
+              <a:gd name="adj" fmla="val 18367"/>
+            </a:avLst>
+          </a:prstGeom>
+          <a:solidFill xmlns:a="http://schemas.openxmlformats.org/drawingml/2006/main">
+            <a:srgbClr val="FFFFFF"/>
+          </a:solidFill>
+          <a:ln xmlns:a="http://schemas.openxmlformats.org/drawingml/2006/main" w="9525">
+            <a:solidFill>
+              <a:srgbClr val="D8E5EF"/>
+            </a:solidFill>
+            <a:prstDash val="solid"/>
+          </a:ln>
+        </p:spPr>
+      </p:sp>
+      <p:sp>
+        <p:nvSpPr>
+          <p:cNvPr id="44" name="">
+            <a:extLst xmlns:a="http://schemas.openxmlformats.org/drawingml/2006/main">
+              <a:ext uri="{FF2B5EF4-FFF2-40B4-BE49-F238E27FC236}">
+                <a16:creationId xmlns:a16="http://schemas.microsoft.com/office/drawing/2014/main" id="{5E050D3E-1C17-45E3-BB96-442C81CAF077}"/>
+              </a:ext>
+            </a:extLst>
+          </p:cNvPr>
+          <p:cNvSpPr>
+            <a:spLocks xmlns:a="http://schemas.openxmlformats.org/drawingml/2006/main" noGrp="1"/>
+          </p:cNvSpPr>
+          <p:nvPr/>
+        </p:nvSpPr>
+        <p:spPr>
+          <a:xfrm xmlns:a="http://schemas.openxmlformats.org/drawingml/2006/main">
+            <a:off x="6915150" y="4403725"/>
+            <a:ext cx="57150" cy="622300"/>
+          </a:xfrm>
+          <a:prstGeom xmlns:a="http://schemas.openxmlformats.org/drawingml/2006/main" prst="roundRect">
+            <a:avLst>
+              <a:gd name="adj" fmla="val 33333"/>
+            </a:avLst>
+          </a:prstGeom>
+          <a:solidFill xmlns:a="http://schemas.openxmlformats.org/drawingml/2006/main">
+            <a:srgbClr val="19B7C4"/>
+          </a:solidFill>
+          <a:ln xmlns:a="http://schemas.openxmlformats.org/drawingml/2006/main" w="0">
+            <a:noFill/>
+            <a:prstDash val="solid"/>
+          </a:ln>
+        </p:spPr>
+      </p:sp>
+      <p:sp>
+        <p:nvSpPr>
+          <p:cNvPr id="45" name="PPAGENT_QA|within=funnel-note-4|role=title">
+            <a:extLst xmlns:a="http://schemas.openxmlformats.org/drawingml/2006/main">
+              <a:ext uri="{FF2B5EF4-FFF2-40B4-BE49-F238E27FC236}">
+                <a16:creationId xmlns:a16="http://schemas.microsoft.com/office/drawing/2014/main" id="{6241CB9D-8923-4D13-92AB-EBD026BD1A23}"/>
+              </a:ext>
+            </a:extLst>
+          </p:cNvPr>
+          <p:cNvSpPr>
+            <a:spLocks xmlns:a="http://schemas.openxmlformats.org/drawingml/2006/main" noGrp="1"/>
+          </p:cNvSpPr>
+          <p:nvPr/>
+        </p:nvSpPr>
+        <p:spPr>
+          <a:xfrm xmlns:a="http://schemas.openxmlformats.org/drawingml/2006/main">
+            <a:off x="7162800" y="4460875"/>
+            <a:ext cx="4000500" cy="219075"/>
+          </a:xfrm>
+          <a:prstGeom xmlns:a="http://schemas.openxmlformats.org/drawingml/2006/main" prst="rect">
+            <a:avLst/>
+          </a:prstGeom>
+          <a:noFill xmlns:a="http://schemas.openxmlformats.org/drawingml/2006/main"/>
+          <a:ln xmlns:a="http://schemas.openxmlformats.org/drawingml/2006/main" w="0">
+            <a:noFill/>
+            <a:prstDash val="solid"/>
+          </a:ln>
+        </p:spPr>
+        <p:txBody>
+          <a:bodyPr xmlns:a="http://schemas.openxmlformats.org/drawingml/2006/main" lIns="0" tIns="0" rIns="0" bIns="0" anchor="ctr">
+            <a:normAutofit fontScale="100000"/>
+          </a:bodyPr>
+          <a:lstStyle xmlns:a="http://schemas.openxmlformats.org/drawingml/2006/main"/>
+          <a:p xmlns:a="http://schemas.openxmlformats.org/drawingml/2006/main">
+            <a:pPr algn="l">
+              <a:defRPr sz="1350" b="1">
+                <a:solidFill>
+                  <a:srgbClr val="1677C8"/>
+                </a:solidFill>
+                <a:latin typeface="Microsoft YaHei"/>
+                <a:ea typeface="Microsoft YaHei"/>
+                <a:cs typeface="Microsoft YaHei"/>
+              </a:defRPr>
+            </a:pPr>
+            <a:r>
+              <a:rPr sz="1350" b="1">
+                <a:solidFill>
+                  <a:srgbClr val="1677C8"/>
+                </a:solidFill>
+                <a:latin typeface="Microsoft YaHei"/>
+                <a:ea typeface="Microsoft YaHei"/>
+                <a:cs typeface="Microsoft YaHei"/>
+              </a:rPr>
+              <a:t>05  质量通过</a:t>
+            </a:r>
+          </a:p>
+        </p:txBody>
+      </p:sp>
+      <p:sp>
+        <p:nvSpPr>
+          <p:cNvPr id="46" name="PPAGENT_QA|within=funnel-note-4|role=body">
+            <a:extLst xmlns:a="http://schemas.openxmlformats.org/drawingml/2006/main">
+              <a:ext uri="{FF2B5EF4-FFF2-40B4-BE49-F238E27FC236}">
+                <a16:creationId xmlns:a16="http://schemas.microsoft.com/office/drawing/2014/main" id="{47563DA5-7D62-4D4C-B28B-D9180D5BB571}"/>
+              </a:ext>
+            </a:extLst>
+          </p:cNvPr>
+          <p:cNvSpPr>
+            <a:spLocks xmlns:a="http://schemas.openxmlformats.org/drawingml/2006/main" noGrp="1"/>
+          </p:cNvSpPr>
+          <p:nvPr/>
+        </p:nvSpPr>
+        <p:spPr>
+          <a:xfrm xmlns:a="http://schemas.openxmlformats.org/drawingml/2006/main">
+            <a:off x="7162800" y="4613275"/>
+            <a:ext cx="4000500" cy="412750"/>
+          </a:xfrm>
+          <a:prstGeom xmlns:a="http://schemas.openxmlformats.org/drawingml/2006/main" prst="rect">
+            <a:avLst/>
+          </a:prstGeom>
+          <a:noFill xmlns:a="http://schemas.openxmlformats.org/drawingml/2006/main"/>
+          <a:ln xmlns:a="http://schemas.openxmlformats.org/drawingml/2006/main" w="0">
+            <a:noFill/>
+            <a:prstDash val="solid"/>
+          </a:ln>
+        </p:spPr>
+        <p:txBody>
+          <a:bodyPr xmlns:a="http://schemas.openxmlformats.org/drawingml/2006/main" lIns="0" tIns="0" rIns="0" bIns="0" anchor="t">
+            <a:normAutofit fontScale="100000"/>
+          </a:bodyPr>
+          <a:lstStyle xmlns:a="http://schemas.openxmlformats.org/drawingml/2006/main"/>
+          <a:p xmlns:a="http://schemas.openxmlformats.org/drawingml/2006/main">
+            <a:pPr algn="l">
+              <a:defRPr sz="1500" b="0">
+                <a:solidFill>
+                  <a:srgbClr val="475569"/>
+                </a:solidFill>
+                <a:latin typeface="Microsoft YaHei"/>
+                <a:ea typeface="Microsoft YaHei"/>
+                <a:cs typeface="Microsoft YaHei"/>
+              </a:defRPr>
+            </a:pPr>
+            <a:r>
+              <a:rPr sz="1500" b="0">
+                <a:solidFill>
+                  <a:srgbClr val="475569"/>
+                </a:solidFill>
+                <a:latin typeface="Microsoft YaHei"/>
+                <a:ea typeface="Microsoft YaHei"/>
+                <a:cs typeface="Microsoft YaHei"/>
+              </a:rPr>
+              <a:t>容量与几何检查通过</a:t>
+            </a:r>
+          </a:p>
+        </p:txBody>
+      </p:sp>
+      <p:sp>
+        <p:nvSpPr>
+          <p:cNvPr id="47" name="PPAGENT_CONNECTOR|from=funnel-stage-4|fromSide=right|to=funnel-note-4|toSide=left">
+            <a:extLst xmlns:a="http://schemas.openxmlformats.org/drawingml/2006/main">
+              <a:ext uri="{FF2B5EF4-FFF2-40B4-BE49-F238E27FC236}">
+                <a16:creationId xmlns:a16="http://schemas.microsoft.com/office/drawing/2014/main" id="{AA9A65FB-96B9-4C92-9D68-FF47BC165053}"/>
+              </a:ext>
+            </a:extLst>
+          </p:cNvPr>
+          <p:cNvSpPr>
+            <a:spLocks xmlns:a="http://schemas.openxmlformats.org/drawingml/2006/main" noGrp="1"/>
+          </p:cNvSpPr>
+          <p:nvPr/>
+        </p:nvSpPr>
+        <p:spPr>
+          <a:xfrm xmlns:a="http://schemas.openxmlformats.org/drawingml/2006/main" flipH="0" flipV="0">
+            <a:off x="4667250" y="4714875"/>
+            <a:ext cx="2247900" cy="0"/>
+          </a:xfrm>
+          <a:prstGeom xmlns:a="http://schemas.openxmlformats.org/drawingml/2006/main" prst="line">
+            <a:avLst/>
+          </a:prstGeom>
+          <a:noFill xmlns:a="http://schemas.openxmlformats.org/drawingml/2006/main"/>
+          <a:ln xmlns:a="http://schemas.openxmlformats.org/drawingml/2006/main" w="12383">
+            <a:solidFill>
+              <a:srgbClr val="91B8D7"/>
+            </a:solidFill>
+            <a:prstDash val="solid"/>
+          </a:ln>
+        </p:spPr>
+      </p:sp>
+      <p:sp>
+        <p:nvSpPr>
+          <p:cNvPr id="48" name="PPAGENT_QA|parent=funnel-stage-5|domains=funnel-shape,funnel-content">
+            <a:extLst xmlns:a="http://schemas.openxmlformats.org/drawingml/2006/main">
+              <a:ext uri="{FF2B5EF4-FFF2-40B4-BE49-F238E27FC236}">
+                <a16:creationId xmlns:a16="http://schemas.microsoft.com/office/drawing/2014/main" id="{BA8948FF-9C14-4726-AE30-524EBEFC0815}"/>
+              </a:ext>
+            </a:extLst>
+          </p:cNvPr>
+          <p:cNvSpPr>
+            <a:spLocks xmlns:a="http://schemas.openxmlformats.org/drawingml/2006/main" noGrp="1"/>
+          </p:cNvSpPr>
+          <p:nvPr/>
+        </p:nvSpPr>
+        <p:spPr>
+          <a:xfrm xmlns:a="http://schemas.openxmlformats.org/drawingml/2006/main" flipV="1">
+            <a:off x="2376488" y="5111750"/>
+            <a:ext cx="1952625" cy="641350"/>
+          </a:xfrm>
+          <a:prstGeom xmlns:a="http://schemas.openxmlformats.org/drawingml/2006/main" prst="trapezoid">
+            <a:avLst/>
+          </a:prstGeom>
+          <a:solidFill xmlns:a="http://schemas.openxmlformats.org/drawingml/2006/main">
+            <a:srgbClr val="32C7C7"/>
+          </a:solidFill>
+          <a:ln xmlns:a="http://schemas.openxmlformats.org/drawingml/2006/main" w="19050">
+            <a:solidFill>
+              <a:srgbClr val="FFFFFF"/>
+            </a:solidFill>
+            <a:prstDash val="solid"/>
+          </a:ln>
+        </p:spPr>
+        <p:style>
+          <a:lnRef xmlns:a="http://schemas.openxmlformats.org/drawingml/2006/main" idx="0"/>
+          <a:fillRef xmlns:a="http://schemas.openxmlformats.org/drawingml/2006/main" idx="0"/>
+          <a:effectRef xmlns:a="http://schemas.openxmlformats.org/drawingml/2006/main" idx="4"/>
+          <a:fontRef xmlns:a="http://schemas.openxmlformats.org/drawingml/2006/main" idx="major"/>
+        </p:style>
+      </p:sp>
+      <p:sp>
+        <p:nvSpPr>
+          <p:cNvPr id="49" name="PPAGENT_QA|parent=funnel-face-5|domains=funnel-face">
+            <a:extLst xmlns:a="http://schemas.openxmlformats.org/drawingml/2006/main">
+              <a:ext uri="{FF2B5EF4-FFF2-40B4-BE49-F238E27FC236}">
+                <a16:creationId xmlns:a16="http://schemas.microsoft.com/office/drawing/2014/main" id="{6D75145D-8A5C-424C-8654-1AF3B2828451}"/>
+              </a:ext>
+            </a:extLst>
+          </p:cNvPr>
+          <p:cNvSpPr>
+            <a:spLocks xmlns:a="http://schemas.openxmlformats.org/drawingml/2006/main" noGrp="1"/>
+          </p:cNvSpPr>
+          <p:nvPr/>
+        </p:nvSpPr>
+        <p:spPr>
+          <a:xfrm xmlns:a="http://schemas.openxmlformats.org/drawingml/2006/main">
+            <a:off x="2376488" y="5045075"/>
+            <a:ext cx="1952625" cy="228600"/>
+          </a:xfrm>
+          <a:prstGeom xmlns:a="http://schemas.openxmlformats.org/drawingml/2006/main" prst="ellipse">
+            <a:avLst/>
+          </a:prstGeom>
+          <a:solidFill xmlns:a="http://schemas.openxmlformats.org/drawingml/2006/main">
+            <a:srgbClr val="32C7C7"/>
+          </a:solidFill>
+          <a:ln xmlns:a="http://schemas.openxmlformats.org/drawingml/2006/main" w="11430">
+            <a:solidFill>
+              <a:srgbClr val="D9F1FA"/>
+            </a:solidFill>
+            <a:prstDash val="solid"/>
+          </a:ln>
+        </p:spPr>
+      </p:sp>
+      <p:sp>
+        <p:nvSpPr>
+          <p:cNvPr id="50" name="PPAGENT_QA|within=funnel-stage-5|role=rate">
+            <a:extLst xmlns:a="http://schemas.openxmlformats.org/drawingml/2006/main">
+              <a:ext uri="{FF2B5EF4-FFF2-40B4-BE49-F238E27FC236}">
+                <a16:creationId xmlns:a16="http://schemas.microsoft.com/office/drawing/2014/main" id="{A8B2C232-0193-4EB3-A6FB-841E7EB74D9A}"/>
+              </a:ext>
+            </a:extLst>
+          </p:cNvPr>
+          <p:cNvSpPr>
+            <a:spLocks xmlns:a="http://schemas.openxmlformats.org/drawingml/2006/main" noGrp="1"/>
+          </p:cNvSpPr>
+          <p:nvPr/>
+        </p:nvSpPr>
+        <p:spPr>
+          <a:xfrm xmlns:a="http://schemas.openxmlformats.org/drawingml/2006/main">
+            <a:off x="2528888" y="5207000"/>
+            <a:ext cx="1647825" cy="276225"/>
+          </a:xfrm>
+          <a:prstGeom xmlns:a="http://schemas.openxmlformats.org/drawingml/2006/main" prst="rect">
+            <a:avLst/>
+          </a:prstGeom>
+          <a:noFill xmlns:a="http://schemas.openxmlformats.org/drawingml/2006/main"/>
+          <a:ln xmlns:a="http://schemas.openxmlformats.org/drawingml/2006/main" w="0">
+            <a:noFill/>
+            <a:prstDash val="solid"/>
+          </a:ln>
+        </p:spPr>
+        <p:txBody>
+          <a:bodyPr xmlns:a="http://schemas.openxmlformats.org/drawingml/2006/main" lIns="0" tIns="0" rIns="0" bIns="0" anchor="ctr">
+            <a:normAutofit fontScale="100000"/>
+          </a:bodyPr>
+          <a:lstStyle xmlns:a="http://schemas.openxmlformats.org/drawingml/2006/main"/>
+          <a:p xmlns:a="http://schemas.openxmlformats.org/drawingml/2006/main">
+            <a:pPr algn="ctr">
+              <a:defRPr sz="1500" b="1">
+                <a:solidFill>
+                  <a:srgbClr val="F6C96A"/>
+                </a:solidFill>
+                <a:latin typeface="Microsoft YaHei"/>
+                <a:ea typeface="Microsoft YaHei"/>
+                <a:cs typeface="Microsoft YaHei"/>
+              </a:defRPr>
+            </a:pPr>
+            <a:r>
+              <a:rPr sz="1500" b="1">
+                <a:solidFill>
+                  <a:srgbClr val="F6C96A"/>
+                </a:solidFill>
+                <a:latin typeface="Microsoft YaHei"/>
+                <a:ea typeface="Microsoft YaHei"/>
+                <a:cs typeface="Microsoft YaHei"/>
+              </a:rPr>
+              <a:t>36%</a:t>
+            </a:r>
+          </a:p>
+        </p:txBody>
+      </p:sp>
+      <p:sp>
+        <p:nvSpPr>
+          <p:cNvPr id="51" name="PPAGENT_QA|parent=funnel-label-5|domains=funnel-label">
+            <a:extLst xmlns:a="http://schemas.openxmlformats.org/drawingml/2006/main">
+              <a:ext uri="{FF2B5EF4-FFF2-40B4-BE49-F238E27FC236}">
+                <a16:creationId xmlns:a16="http://schemas.microsoft.com/office/drawing/2014/main" id="{8AF0DF0F-45D6-48E7-8B92-9312BA4F49C6}"/>
+              </a:ext>
+            </a:extLst>
+          </p:cNvPr>
+          <p:cNvSpPr>
+            <a:spLocks xmlns:a="http://schemas.openxmlformats.org/drawingml/2006/main" noGrp="1"/>
+          </p:cNvSpPr>
+          <p:nvPr/>
+        </p:nvSpPr>
+        <p:spPr>
+          <a:xfrm xmlns:a="http://schemas.openxmlformats.org/drawingml/2006/main">
+            <a:off x="2528888" y="5473700"/>
+            <a:ext cx="1647825" cy="295275"/>
+          </a:xfrm>
+          <a:prstGeom xmlns:a="http://schemas.openxmlformats.org/drawingml/2006/main" prst="rect">
+            <a:avLst/>
+          </a:prstGeom>
+          <a:noFill xmlns:a="http://schemas.openxmlformats.org/drawingml/2006/main"/>
+          <a:ln xmlns:a="http://schemas.openxmlformats.org/drawingml/2006/main" w="0">
+            <a:noFill/>
+            <a:prstDash val="solid"/>
+          </a:ln>
+        </p:spPr>
+        <p:txBody>
+          <a:bodyPr xmlns:a="http://schemas.openxmlformats.org/drawingml/2006/main" lIns="0" tIns="0" rIns="0" bIns="0" anchor="ctr">
+            <a:normAutofit fontScale="100000"/>
+          </a:bodyPr>
+          <a:lstStyle xmlns:a="http://schemas.openxmlformats.org/drawingml/2006/main"/>
+          <a:p xmlns:a="http://schemas.openxmlformats.org/drawingml/2006/main">
+            <a:pPr algn="ctr">
+              <a:defRPr sz="1275" b="1">
+                <a:solidFill>
+                  <a:srgbClr val="FFFFFF"/>
+                </a:solidFill>
+                <a:latin typeface="Microsoft YaHei"/>
+                <a:ea typeface="Microsoft YaHei"/>
+                <a:cs typeface="Microsoft YaHei"/>
+              </a:defRPr>
+            </a:pPr>
+            <a:r>
+              <a:rPr sz="1275" b="1">
+                <a:solidFill>
+                  <a:srgbClr val="FFFFFF"/>
+                </a:solidFill>
+                <a:latin typeface="Microsoft YaHei"/>
+                <a:ea typeface="Microsoft YaHei"/>
+                <a:cs typeface="Microsoft YaHei"/>
+              </a:rPr>
+              <a:t>可靠交付</a:t>
+            </a:r>
+          </a:p>
+        </p:txBody>
+      </p:sp>
+      <p:sp>
+        <p:nvSpPr>
+          <p:cNvPr id="52" name="PPAGENT_QA|parent=funnel-note-5|domains=funnel-note,funnel-content">
+            <a:extLst xmlns:a="http://schemas.openxmlformats.org/drawingml/2006/main">
+              <a:ext uri="{FF2B5EF4-FFF2-40B4-BE49-F238E27FC236}">
+                <a16:creationId xmlns:a16="http://schemas.microsoft.com/office/drawing/2014/main" id="{6AB25E4C-5A97-4A14-B0C0-91154D037C1D}"/>
+              </a:ext>
+            </a:extLst>
+          </p:cNvPr>
+          <p:cNvSpPr>
+            <a:spLocks xmlns:a="http://schemas.openxmlformats.org/drawingml/2006/main" noGrp="1"/>
+          </p:cNvSpPr>
+          <p:nvPr/>
+        </p:nvSpPr>
+        <p:spPr>
+          <a:xfrm xmlns:a="http://schemas.openxmlformats.org/drawingml/2006/main">
+            <a:off x="6915150" y="5121275"/>
+            <a:ext cx="4552950" cy="622300"/>
+          </a:xfrm>
+          <a:prstGeom xmlns:a="http://schemas.openxmlformats.org/drawingml/2006/main" prst="roundRect">
+            <a:avLst>
+              <a:gd name="adj" fmla="val 18367"/>
+            </a:avLst>
+          </a:prstGeom>
+          <a:solidFill xmlns:a="http://schemas.openxmlformats.org/drawingml/2006/main">
+            <a:srgbClr val="F7FAFC"/>
+          </a:solidFill>
+          <a:ln xmlns:a="http://schemas.openxmlformats.org/drawingml/2006/main" w="9525">
+            <a:solidFill>
+              <a:srgbClr val="D8E5EF"/>
+            </a:solidFill>
+            <a:prstDash val="solid"/>
+          </a:ln>
+        </p:spPr>
+      </p:sp>
+      <p:sp>
+        <p:nvSpPr>
+          <p:cNvPr id="53" name="">
+            <a:extLst xmlns:a="http://schemas.openxmlformats.org/drawingml/2006/main">
+              <a:ext uri="{FF2B5EF4-FFF2-40B4-BE49-F238E27FC236}">
+                <a16:creationId xmlns:a16="http://schemas.microsoft.com/office/drawing/2014/main" id="{A7ADCD2F-36D7-4D6D-B5F9-2BBE200C5465}"/>
+              </a:ext>
+            </a:extLst>
+          </p:cNvPr>
+          <p:cNvSpPr>
+            <a:spLocks xmlns:a="http://schemas.openxmlformats.org/drawingml/2006/main" noGrp="1"/>
+          </p:cNvSpPr>
+          <p:nvPr/>
+        </p:nvSpPr>
+        <p:spPr>
+          <a:xfrm xmlns:a="http://schemas.openxmlformats.org/drawingml/2006/main">
+            <a:off x="6915150" y="5121275"/>
+            <a:ext cx="57150" cy="622300"/>
+          </a:xfrm>
+          <a:prstGeom xmlns:a="http://schemas.openxmlformats.org/drawingml/2006/main" prst="roundRect">
+            <a:avLst>
+              <a:gd name="adj" fmla="val 33333"/>
+            </a:avLst>
+          </a:prstGeom>
+          <a:solidFill xmlns:a="http://schemas.openxmlformats.org/drawingml/2006/main">
+            <a:srgbClr val="32C7C7"/>
+          </a:solidFill>
+          <a:ln xmlns:a="http://schemas.openxmlformats.org/drawingml/2006/main" w="0">
+            <a:noFill/>
+            <a:prstDash val="solid"/>
+          </a:ln>
+        </p:spPr>
+      </p:sp>
+      <p:sp>
+        <p:nvSpPr>
+          <p:cNvPr id="54" name="PPAGENT_QA|within=funnel-note-5|role=title">
+            <a:extLst xmlns:a="http://schemas.openxmlformats.org/drawingml/2006/main">
+              <a:ext uri="{FF2B5EF4-FFF2-40B4-BE49-F238E27FC236}">
+                <a16:creationId xmlns:a16="http://schemas.microsoft.com/office/drawing/2014/main" id="{F1AD501B-BFDC-47C7-B29B-6817A5728067}"/>
+              </a:ext>
+            </a:extLst>
+          </p:cNvPr>
+          <p:cNvSpPr>
+            <a:spLocks xmlns:a="http://schemas.openxmlformats.org/drawingml/2006/main" noGrp="1"/>
+          </p:cNvSpPr>
+          <p:nvPr/>
+        </p:nvSpPr>
+        <p:spPr>
+          <a:xfrm xmlns:a="http://schemas.openxmlformats.org/drawingml/2006/main">
+            <a:off x="7162800" y="5178425"/>
+            <a:ext cx="4000500" cy="219075"/>
+          </a:xfrm>
+          <a:prstGeom xmlns:a="http://schemas.openxmlformats.org/drawingml/2006/main" prst="rect">
+            <a:avLst/>
+          </a:prstGeom>
+          <a:noFill xmlns:a="http://schemas.openxmlformats.org/drawingml/2006/main"/>
+          <a:ln xmlns:a="http://schemas.openxmlformats.org/drawingml/2006/main" w="0">
+            <a:noFill/>
+            <a:prstDash val="solid"/>
+          </a:ln>
+        </p:spPr>
+        <p:txBody>
+          <a:bodyPr xmlns:a="http://schemas.openxmlformats.org/drawingml/2006/main" lIns="0" tIns="0" rIns="0" bIns="0" anchor="ctr">
+            <a:normAutofit fontScale="100000"/>
+          </a:bodyPr>
+          <a:lstStyle xmlns:a="http://schemas.openxmlformats.org/drawingml/2006/main"/>
+          <a:p xmlns:a="http://schemas.openxmlformats.org/drawingml/2006/main">
+            <a:pPr algn="l">
+              <a:defRPr sz="1350" b="1">
+                <a:solidFill>
+                  <a:srgbClr val="1677C8"/>
+                </a:solidFill>
+                <a:latin typeface="Microsoft YaHei"/>
+                <a:ea typeface="Microsoft YaHei"/>
+                <a:cs typeface="Microsoft YaHei"/>
+              </a:defRPr>
+            </a:pPr>
+            <a:r>
+              <a:rPr sz="1350" b="1">
+                <a:solidFill>
+                  <a:srgbClr val="1677C8"/>
+                </a:solidFill>
+                <a:latin typeface="Microsoft YaHei"/>
+                <a:ea typeface="Microsoft YaHei"/>
+                <a:cs typeface="Microsoft YaHei"/>
+              </a:rPr>
+              <a:t>06  可靠交付</a:t>
+            </a:r>
+          </a:p>
+        </p:txBody>
+      </p:sp>
+      <p:sp>
+        <p:nvSpPr>
+          <p:cNvPr id="55" name="PPAGENT_QA|within=funnel-note-5|role=body">
+            <a:extLst xmlns:a="http://schemas.openxmlformats.org/drawingml/2006/main">
+              <a:ext uri="{FF2B5EF4-FFF2-40B4-BE49-F238E27FC236}">
+                <a16:creationId xmlns:a16="http://schemas.microsoft.com/office/drawing/2014/main" id="{192D672D-4AFB-408C-969B-A0BAF9B328E3}"/>
+              </a:ext>
+            </a:extLst>
+          </p:cNvPr>
+          <p:cNvSpPr>
+            <a:spLocks xmlns:a="http://schemas.openxmlformats.org/drawingml/2006/main" noGrp="1"/>
+          </p:cNvSpPr>
+          <p:nvPr/>
+        </p:nvSpPr>
+        <p:spPr>
+          <a:xfrm xmlns:a="http://schemas.openxmlformats.org/drawingml/2006/main">
+            <a:off x="7162800" y="5330825"/>
+            <a:ext cx="4000500" cy="412750"/>
+          </a:xfrm>
+          <a:prstGeom xmlns:a="http://schemas.openxmlformats.org/drawingml/2006/main" prst="rect">
+            <a:avLst/>
+          </a:prstGeom>
+          <a:noFill xmlns:a="http://schemas.openxmlformats.org/drawingml/2006/main"/>
+          <a:ln xmlns:a="http://schemas.openxmlformats.org/drawingml/2006/main" w="0">
+            <a:noFill/>
+            <a:prstDash val="solid"/>
+          </a:ln>
+        </p:spPr>
+        <p:txBody>
+          <a:bodyPr xmlns:a="http://schemas.openxmlformats.org/drawingml/2006/main" lIns="0" tIns="0" rIns="0" bIns="0" anchor="t">
+            <a:normAutofit fontScale="100000"/>
+          </a:bodyPr>
+          <a:lstStyle xmlns:a="http://schemas.openxmlformats.org/drawingml/2006/main"/>
+          <a:p xmlns:a="http://schemas.openxmlformats.org/drawingml/2006/main">
+            <a:pPr algn="l">
+              <a:defRPr sz="1500" b="0">
+                <a:solidFill>
+                  <a:srgbClr val="475569"/>
+                </a:solidFill>
+                <a:latin typeface="Microsoft YaHei"/>
+                <a:ea typeface="Microsoft YaHei"/>
+                <a:cs typeface="Microsoft YaHei"/>
+              </a:defRPr>
+            </a:pPr>
+            <a:r>
+              <a:rPr sz="1500" b="0">
+                <a:solidFill>
+                  <a:srgbClr val="475569"/>
+                </a:solidFill>
+                <a:latin typeface="Microsoft YaHei"/>
+                <a:ea typeface="Microsoft YaHei"/>
+                <a:cs typeface="Microsoft YaHei"/>
+              </a:rPr>
+              <a:t>形成可复用交付结果</a:t>
+            </a:r>
+          </a:p>
+        </p:txBody>
+      </p:sp>
+      <p:sp>
+        <p:nvSpPr>
+          <p:cNvPr id="56" name="PPAGENT_CONNECTOR|from=funnel-stage-5|fromSide=right|to=funnel-note-5|toSide=left">
+            <a:extLst xmlns:a="http://schemas.openxmlformats.org/drawingml/2006/main">
+              <a:ext uri="{FF2B5EF4-FFF2-40B4-BE49-F238E27FC236}">
+                <a16:creationId xmlns:a16="http://schemas.microsoft.com/office/drawing/2014/main" id="{16D98577-8CDF-47ED-8019-228C5C06FE64}"/>
+              </a:ext>
+            </a:extLst>
+          </p:cNvPr>
+          <p:cNvSpPr>
+            <a:spLocks xmlns:a="http://schemas.openxmlformats.org/drawingml/2006/main" noGrp="1"/>
+          </p:cNvSpPr>
+          <p:nvPr/>
+        </p:nvSpPr>
+        <p:spPr>
+          <a:xfrm xmlns:a="http://schemas.openxmlformats.org/drawingml/2006/main" flipH="0" flipV="0">
+            <a:off x="4329113" y="5432425"/>
+            <a:ext cx="2586038" cy="0"/>
+          </a:xfrm>
+          <a:prstGeom xmlns:a="http://schemas.openxmlformats.org/drawingml/2006/main" prst="line">
+            <a:avLst/>
+          </a:prstGeom>
+          <a:noFill xmlns:a="http://schemas.openxmlformats.org/drawingml/2006/main"/>
+          <a:ln xmlns:a="http://schemas.openxmlformats.org/drawingml/2006/main" w="12383">
+            <a:solidFill>
+              <a:srgbClr val="91B8D7"/>
+            </a:solidFill>
+            <a:prstDash val="solid"/>
+          </a:ln>
+        </p:spPr>
+      </p:sp>
+    </p:spTree>
+    <p:extLst>
+      <p:ext uri="{BB962C8B-B14F-4D97-AF65-F5344CB8AC3E}">
+        <p14:creationId xmlns:p14="http://schemas.microsoft.com/office/powerpoint/2010/main" val="1852210782"/>
       </p:ext>
     </p:extLst>
   </p:cSld>
